--- a/docs/pptx/auc3/jx-auc3-linsubhr-ratio-sideeffect.pptx
+++ b/docs/pptx/auc3/jx-auc3-linsubhr-ratio-sideeffect.pptx
@@ -2271,7 +2271,7 @@
           </p:nvSpPr>
           <p:spPr>
             <a:xfrm>
-              <a:off x="817517" y="5114368"/>
+              <a:off x="817517" y="5142518"/>
               <a:ext cx="7799693" cy="0"/>
             </a:xfrm>
             <a:custGeom>
@@ -2314,7 +2314,7 @@
           </p:nvSpPr>
           <p:spPr>
             <a:xfrm>
-              <a:off x="817517" y="4244691"/>
+              <a:off x="817517" y="4313054"/>
               <a:ext cx="7799693" cy="0"/>
             </a:xfrm>
             <a:custGeom>
@@ -2357,7 +2357,7 @@
           </p:nvSpPr>
           <p:spPr>
             <a:xfrm>
-              <a:off x="817517" y="3375014"/>
+              <a:off x="817517" y="3483591"/>
               <a:ext cx="7799693" cy="0"/>
             </a:xfrm>
             <a:custGeom>
@@ -2400,7 +2400,7 @@
           </p:nvSpPr>
           <p:spPr>
             <a:xfrm>
-              <a:off x="817517" y="2505337"/>
+              <a:off x="817517" y="2654127"/>
               <a:ext cx="7799693" cy="0"/>
             </a:xfrm>
             <a:custGeom>
@@ -2443,15 +2443,15 @@
           </p:nvSpPr>
           <p:spPr>
             <a:xfrm>
-              <a:off x="1615213" y="1896563"/>
-              <a:ext cx="0" cy="3826579"/>
+              <a:off x="1615213" y="2073503"/>
+              <a:ext cx="0" cy="3649639"/>
             </a:xfrm>
             <a:custGeom>
               <a:avLst/>
               <a:pathLst>
-                <a:path w="0" h="3826579">
+                <a:path w="0" h="3649639">
                   <a:moveTo>
-                    <a:pt x="0" y="3826579"/>
+                    <a:pt x="0" y="3649639"/>
                   </a:moveTo>
                   <a:lnTo>
                     <a:pt x="0" y="0"/>
@@ -2486,15 +2486,15 @@
           </p:nvSpPr>
           <p:spPr>
             <a:xfrm>
-              <a:off x="3387871" y="1896563"/>
-              <a:ext cx="0" cy="3826579"/>
+              <a:off x="3387871" y="2073503"/>
+              <a:ext cx="0" cy="3649639"/>
             </a:xfrm>
             <a:custGeom>
               <a:avLst/>
               <a:pathLst>
-                <a:path w="0" h="3826579">
+                <a:path w="0" h="3649639">
                   <a:moveTo>
-                    <a:pt x="0" y="3826579"/>
+                    <a:pt x="0" y="3649639"/>
                   </a:moveTo>
                   <a:lnTo>
                     <a:pt x="0" y="0"/>
@@ -2529,15 +2529,15 @@
           </p:nvSpPr>
           <p:spPr>
             <a:xfrm>
-              <a:off x="5160528" y="1896563"/>
-              <a:ext cx="0" cy="3826579"/>
+              <a:off x="5160528" y="2073503"/>
+              <a:ext cx="0" cy="3649639"/>
             </a:xfrm>
             <a:custGeom>
               <a:avLst/>
               <a:pathLst>
-                <a:path w="0" h="3826579">
+                <a:path w="0" h="3649639">
                   <a:moveTo>
-                    <a:pt x="0" y="3826579"/>
+                    <a:pt x="0" y="3649639"/>
                   </a:moveTo>
                   <a:lnTo>
                     <a:pt x="0" y="0"/>
@@ -2572,15 +2572,15 @@
           </p:nvSpPr>
           <p:spPr>
             <a:xfrm>
-              <a:off x="6933186" y="1896563"/>
-              <a:ext cx="0" cy="3826579"/>
+              <a:off x="6933186" y="2073503"/>
+              <a:ext cx="0" cy="3649639"/>
             </a:xfrm>
             <a:custGeom>
               <a:avLst/>
               <a:pathLst>
-                <a:path w="0" h="3826579">
+                <a:path w="0" h="3649639">
                   <a:moveTo>
-                    <a:pt x="0" y="3826579"/>
+                    <a:pt x="0" y="3649639"/>
                   </a:moveTo>
                   <a:lnTo>
                     <a:pt x="0" y="0"/>
@@ -2615,7 +2615,7 @@
           </p:nvSpPr>
           <p:spPr>
             <a:xfrm>
-              <a:off x="817517" y="5549207"/>
+              <a:off x="817517" y="5557249"/>
               <a:ext cx="7799693" cy="0"/>
             </a:xfrm>
             <a:custGeom>
@@ -2658,7 +2658,7 @@
           </p:nvSpPr>
           <p:spPr>
             <a:xfrm>
-              <a:off x="817517" y="4679530"/>
+              <a:off x="817517" y="4727786"/>
               <a:ext cx="7799693" cy="0"/>
             </a:xfrm>
             <a:custGeom>
@@ -2701,7 +2701,7 @@
           </p:nvSpPr>
           <p:spPr>
             <a:xfrm>
-              <a:off x="817517" y="3809853"/>
+              <a:off x="817517" y="3898322"/>
               <a:ext cx="7799693" cy="0"/>
             </a:xfrm>
             <a:custGeom>
@@ -2744,7 +2744,7 @@
           </p:nvSpPr>
           <p:spPr>
             <a:xfrm>
-              <a:off x="817517" y="2940175"/>
+              <a:off x="817517" y="3068859"/>
               <a:ext cx="7799693" cy="0"/>
             </a:xfrm>
             <a:custGeom>
@@ -2787,7 +2787,7 @@
           </p:nvSpPr>
           <p:spPr>
             <a:xfrm>
-              <a:off x="817517" y="2070498"/>
+              <a:off x="817517" y="2239395"/>
               <a:ext cx="7799693" cy="0"/>
             </a:xfrm>
             <a:custGeom>
@@ -2830,15 +2830,15 @@
           </p:nvSpPr>
           <p:spPr>
             <a:xfrm>
-              <a:off x="2501542" y="1896563"/>
-              <a:ext cx="0" cy="3826579"/>
+              <a:off x="2501542" y="2073503"/>
+              <a:ext cx="0" cy="3649639"/>
             </a:xfrm>
             <a:custGeom>
               <a:avLst/>
               <a:pathLst>
-                <a:path w="0" h="3826579">
+                <a:path w="0" h="3649639">
                   <a:moveTo>
-                    <a:pt x="0" y="3826579"/>
+                    <a:pt x="0" y="3649639"/>
                   </a:moveTo>
                   <a:lnTo>
                     <a:pt x="0" y="0"/>
@@ -2873,15 +2873,15 @@
           </p:nvSpPr>
           <p:spPr>
             <a:xfrm>
-              <a:off x="4274200" y="1896563"/>
-              <a:ext cx="0" cy="3826579"/>
+              <a:off x="4274200" y="2073503"/>
+              <a:ext cx="0" cy="3649639"/>
             </a:xfrm>
             <a:custGeom>
               <a:avLst/>
               <a:pathLst>
-                <a:path w="0" h="3826579">
+                <a:path w="0" h="3649639">
                   <a:moveTo>
-                    <a:pt x="0" y="3826579"/>
+                    <a:pt x="0" y="3649639"/>
                   </a:moveTo>
                   <a:lnTo>
                     <a:pt x="0" y="0"/>
@@ -2916,15 +2916,15 @@
           </p:nvSpPr>
           <p:spPr>
             <a:xfrm>
-              <a:off x="6046857" y="1896563"/>
-              <a:ext cx="0" cy="3826579"/>
+              <a:off x="6046857" y="2073503"/>
+              <a:ext cx="0" cy="3649639"/>
             </a:xfrm>
             <a:custGeom>
               <a:avLst/>
               <a:pathLst>
-                <a:path w="0" h="3826579">
+                <a:path w="0" h="3649639">
                   <a:moveTo>
-                    <a:pt x="0" y="3826579"/>
+                    <a:pt x="0" y="3649639"/>
                   </a:moveTo>
                   <a:lnTo>
                     <a:pt x="0" y="0"/>
@@ -2959,15 +2959,15 @@
           </p:nvSpPr>
           <p:spPr>
             <a:xfrm>
-              <a:off x="7819515" y="1896563"/>
-              <a:ext cx="0" cy="3826579"/>
+              <a:off x="7819515" y="2073503"/>
+              <a:ext cx="0" cy="3649639"/>
             </a:xfrm>
             <a:custGeom>
               <a:avLst/>
               <a:pathLst>
-                <a:path w="0" h="3826579">
+                <a:path w="0" h="3649639">
                   <a:moveTo>
-                    <a:pt x="0" y="3826579"/>
+                    <a:pt x="0" y="3649639"/>
                   </a:moveTo>
                   <a:lnTo>
                     <a:pt x="0" y="0"/>
@@ -3002,552 +3002,552 @@
           </p:nvSpPr>
           <p:spPr>
             <a:xfrm>
-              <a:off x="817517" y="1896563"/>
-              <a:ext cx="7392041" cy="3589827"/>
+              <a:off x="817517" y="2073503"/>
+              <a:ext cx="7392041" cy="3423835"/>
             </a:xfrm>
             <a:custGeom>
               <a:avLst/>
               <a:pathLst>
-                <a:path w="7392041" h="3589827">
+                <a:path w="7392041" h="3423835">
                   <a:moveTo>
                     <a:pt x="1065471" y="0"/>
                   </a:moveTo>
                   <a:lnTo>
-                    <a:pt x="1135311" y="160571"/>
-                  </a:lnTo>
-                  <a:lnTo>
-                    <a:pt x="1212555" y="329571"/>
-                  </a:lnTo>
-                  <a:lnTo>
-                    <a:pt x="1289799" y="490391"/>
-                  </a:lnTo>
-                  <a:lnTo>
-                    <a:pt x="1367042" y="643429"/>
-                  </a:lnTo>
-                  <a:lnTo>
-                    <a:pt x="1444286" y="789060"/>
-                  </a:lnTo>
-                  <a:lnTo>
-                    <a:pt x="1521529" y="927643"/>
-                  </a:lnTo>
-                  <a:lnTo>
-                    <a:pt x="1598773" y="1059520"/>
-                  </a:lnTo>
-                  <a:lnTo>
-                    <a:pt x="1676016" y="1185015"/>
-                  </a:lnTo>
-                  <a:lnTo>
-                    <a:pt x="1753260" y="1304436"/>
-                  </a:lnTo>
-                  <a:lnTo>
-                    <a:pt x="1830504" y="1418078"/>
-                  </a:lnTo>
-                  <a:lnTo>
-                    <a:pt x="1907747" y="1526220"/>
-                  </a:lnTo>
-                  <a:lnTo>
-                    <a:pt x="1984991" y="1629128"/>
-                  </a:lnTo>
-                  <a:lnTo>
-                    <a:pt x="2062234" y="1727056"/>
-                  </a:lnTo>
-                  <a:lnTo>
-                    <a:pt x="2139478" y="1820245"/>
-                  </a:lnTo>
-                  <a:lnTo>
-                    <a:pt x="2216721" y="1908924"/>
-                  </a:lnTo>
-                  <a:lnTo>
-                    <a:pt x="2293965" y="1993312"/>
-                  </a:lnTo>
-                  <a:lnTo>
-                    <a:pt x="2371209" y="2073615"/>
-                  </a:lnTo>
-                  <a:lnTo>
-                    <a:pt x="2448452" y="2150033"/>
-                  </a:lnTo>
-                  <a:lnTo>
-                    <a:pt x="2525696" y="2222752"/>
-                  </a:lnTo>
-                  <a:lnTo>
-                    <a:pt x="2602939" y="2291952"/>
-                  </a:lnTo>
-                  <a:lnTo>
-                    <a:pt x="2680183" y="2357802"/>
-                  </a:lnTo>
-                  <a:lnTo>
-                    <a:pt x="2757426" y="2420466"/>
-                  </a:lnTo>
-                  <a:lnTo>
-                    <a:pt x="2834670" y="2480098"/>
-                  </a:lnTo>
-                  <a:lnTo>
-                    <a:pt x="2911914" y="2536843"/>
-                  </a:lnTo>
-                  <a:lnTo>
-                    <a:pt x="2989157" y="2590842"/>
-                  </a:lnTo>
-                  <a:lnTo>
-                    <a:pt x="3066401" y="2642228"/>
-                  </a:lnTo>
-                  <a:lnTo>
-                    <a:pt x="3143644" y="2691128"/>
-                  </a:lnTo>
-                  <a:lnTo>
-                    <a:pt x="3220888" y="2737660"/>
-                  </a:lnTo>
-                  <a:lnTo>
-                    <a:pt x="3298131" y="2781941"/>
-                  </a:lnTo>
-                  <a:lnTo>
-                    <a:pt x="3375375" y="2796625"/>
-                  </a:lnTo>
-                  <a:lnTo>
-                    <a:pt x="3452619" y="2810394"/>
-                  </a:lnTo>
-                  <a:lnTo>
-                    <a:pt x="3529862" y="2823941"/>
-                  </a:lnTo>
-                  <a:lnTo>
-                    <a:pt x="3607106" y="2837270"/>
-                  </a:lnTo>
-                  <a:lnTo>
-                    <a:pt x="3684349" y="2850385"/>
-                  </a:lnTo>
-                  <a:lnTo>
-                    <a:pt x="3761593" y="2863289"/>
-                  </a:lnTo>
-                  <a:lnTo>
-                    <a:pt x="3838836" y="2875986"/>
-                  </a:lnTo>
-                  <a:lnTo>
-                    <a:pt x="3916080" y="2888478"/>
-                  </a:lnTo>
-                  <a:lnTo>
-                    <a:pt x="3993324" y="2900769"/>
-                  </a:lnTo>
-                  <a:lnTo>
-                    <a:pt x="4070567" y="2912863"/>
-                  </a:lnTo>
-                  <a:lnTo>
-                    <a:pt x="4147811" y="2924762"/>
-                  </a:lnTo>
-                  <a:lnTo>
-                    <a:pt x="4225054" y="2936470"/>
-                  </a:lnTo>
-                  <a:lnTo>
-                    <a:pt x="4302298" y="2947989"/>
-                  </a:lnTo>
-                  <a:lnTo>
-                    <a:pt x="4379541" y="2959323"/>
-                  </a:lnTo>
-                  <a:lnTo>
-                    <a:pt x="4456785" y="2970475"/>
-                  </a:lnTo>
-                  <a:lnTo>
-                    <a:pt x="4534029" y="2981448"/>
-                  </a:lnTo>
-                  <a:lnTo>
-                    <a:pt x="4611272" y="2992244"/>
-                  </a:lnTo>
-                  <a:lnTo>
-                    <a:pt x="4688516" y="3002866"/>
-                  </a:lnTo>
-                  <a:lnTo>
-                    <a:pt x="4765759" y="3013317"/>
-                  </a:lnTo>
-                  <a:lnTo>
-                    <a:pt x="4843003" y="3023601"/>
-                  </a:lnTo>
-                  <a:lnTo>
-                    <a:pt x="4920246" y="3033719"/>
-                  </a:lnTo>
-                  <a:lnTo>
-                    <a:pt x="4997490" y="3043674"/>
-                  </a:lnTo>
-                  <a:lnTo>
-                    <a:pt x="5074734" y="3053469"/>
-                  </a:lnTo>
-                  <a:lnTo>
-                    <a:pt x="5151977" y="3063106"/>
-                  </a:lnTo>
-                  <a:lnTo>
-                    <a:pt x="5229221" y="3072589"/>
-                  </a:lnTo>
-                  <a:lnTo>
-                    <a:pt x="5306464" y="3081919"/>
-                  </a:lnTo>
-                  <a:lnTo>
-                    <a:pt x="5383708" y="3091099"/>
-                  </a:lnTo>
-                  <a:lnTo>
-                    <a:pt x="5460951" y="3100131"/>
-                  </a:lnTo>
-                  <a:lnTo>
-                    <a:pt x="5538195" y="3109018"/>
-                  </a:lnTo>
-                  <a:lnTo>
-                    <a:pt x="5615439" y="3117762"/>
-                  </a:lnTo>
-                  <a:lnTo>
-                    <a:pt x="5692682" y="3126365"/>
-                  </a:lnTo>
-                  <a:lnTo>
-                    <a:pt x="5769926" y="3134830"/>
-                  </a:lnTo>
-                  <a:lnTo>
-                    <a:pt x="5847169" y="3143159"/>
-                  </a:lnTo>
-                  <a:lnTo>
-                    <a:pt x="5924413" y="3151354"/>
-                  </a:lnTo>
-                  <a:lnTo>
-                    <a:pt x="6001656" y="3159417"/>
-                  </a:lnTo>
-                  <a:lnTo>
-                    <a:pt x="6078900" y="3167350"/>
-                  </a:lnTo>
-                  <a:lnTo>
-                    <a:pt x="6156144" y="3175156"/>
-                  </a:lnTo>
-                  <a:lnTo>
-                    <a:pt x="6233387" y="3182836"/>
-                  </a:lnTo>
-                  <a:lnTo>
-                    <a:pt x="6310631" y="3190393"/>
-                  </a:lnTo>
-                  <a:lnTo>
-                    <a:pt x="6387874" y="3197828"/>
-                  </a:lnTo>
-                  <a:lnTo>
-                    <a:pt x="6465118" y="3205144"/>
-                  </a:lnTo>
-                  <a:lnTo>
-                    <a:pt x="6542361" y="3212342"/>
-                  </a:lnTo>
-                  <a:lnTo>
-                    <a:pt x="6619605" y="3219424"/>
-                  </a:lnTo>
-                  <a:lnTo>
-                    <a:pt x="6696849" y="3226392"/>
-                  </a:lnTo>
-                  <a:lnTo>
-                    <a:pt x="6774092" y="3233248"/>
-                  </a:lnTo>
-                  <a:lnTo>
-                    <a:pt x="6851336" y="3239994"/>
-                  </a:lnTo>
-                  <a:lnTo>
-                    <a:pt x="6928579" y="3246631"/>
-                  </a:lnTo>
-                  <a:lnTo>
-                    <a:pt x="7005823" y="3253162"/>
-                  </a:lnTo>
-                  <a:lnTo>
-                    <a:pt x="7083066" y="3259587"/>
-                  </a:lnTo>
-                  <a:lnTo>
-                    <a:pt x="7160310" y="3265909"/>
-                  </a:lnTo>
-                  <a:lnTo>
-                    <a:pt x="7237554" y="3272130"/>
-                  </a:lnTo>
-                  <a:lnTo>
-                    <a:pt x="7314797" y="3278250"/>
-                  </a:lnTo>
-                  <a:lnTo>
-                    <a:pt x="7392041" y="3284272"/>
-                  </a:lnTo>
-                  <a:lnTo>
-                    <a:pt x="7392041" y="3589827"/>
-                  </a:lnTo>
-                  <a:lnTo>
-                    <a:pt x="7314797" y="3586632"/>
-                  </a:lnTo>
-                  <a:lnTo>
-                    <a:pt x="7237554" y="3583275"/>
-                  </a:lnTo>
-                  <a:lnTo>
-                    <a:pt x="7160310" y="3579747"/>
-                  </a:lnTo>
-                  <a:lnTo>
-                    <a:pt x="7083066" y="3576040"/>
-                  </a:lnTo>
-                  <a:lnTo>
-                    <a:pt x="7005823" y="3572144"/>
-                  </a:lnTo>
-                  <a:lnTo>
-                    <a:pt x="6928579" y="3568051"/>
-                  </a:lnTo>
-                  <a:lnTo>
-                    <a:pt x="6851336" y="3563749"/>
-                  </a:lnTo>
-                  <a:lnTo>
-                    <a:pt x="6774092" y="3559228"/>
-                  </a:lnTo>
-                  <a:lnTo>
-                    <a:pt x="6696849" y="3554477"/>
-                  </a:lnTo>
-                  <a:lnTo>
-                    <a:pt x="6619605" y="3549485"/>
-                  </a:lnTo>
-                  <a:lnTo>
-                    <a:pt x="6542361" y="3544238"/>
-                  </a:lnTo>
-                  <a:lnTo>
-                    <a:pt x="6465118" y="3538725"/>
-                  </a:lnTo>
-                  <a:lnTo>
-                    <a:pt x="6387874" y="3532932"/>
-                  </a:lnTo>
-                  <a:lnTo>
-                    <a:pt x="6310631" y="3526844"/>
-                  </a:lnTo>
-                  <a:lnTo>
-                    <a:pt x="6233387" y="3520446"/>
-                  </a:lnTo>
-                  <a:lnTo>
-                    <a:pt x="6156144" y="3513723"/>
-                  </a:lnTo>
-                  <a:lnTo>
-                    <a:pt x="6078900" y="3506658"/>
-                  </a:lnTo>
-                  <a:lnTo>
-                    <a:pt x="6001656" y="3499234"/>
-                  </a:lnTo>
-                  <a:lnTo>
-                    <a:pt x="5924413" y="3491432"/>
-                  </a:lnTo>
-                  <a:lnTo>
-                    <a:pt x="5847169" y="3483233"/>
-                  </a:lnTo>
-                  <a:lnTo>
-                    <a:pt x="5769926" y="3474617"/>
-                  </a:lnTo>
-                  <a:lnTo>
-                    <a:pt x="5692682" y="3465564"/>
-                  </a:lnTo>
-                  <a:lnTo>
-                    <a:pt x="5615439" y="3456050"/>
-                  </a:lnTo>
-                  <a:lnTo>
-                    <a:pt x="5538195" y="3446052"/>
-                  </a:lnTo>
-                  <a:lnTo>
-                    <a:pt x="5460951" y="3435545"/>
-                  </a:lnTo>
-                  <a:lnTo>
-                    <a:pt x="5383708" y="3424504"/>
-                  </a:lnTo>
-                  <a:lnTo>
-                    <a:pt x="5306464" y="3412902"/>
-                  </a:lnTo>
-                  <a:lnTo>
-                    <a:pt x="5229221" y="3400710"/>
-                  </a:lnTo>
-                  <a:lnTo>
-                    <a:pt x="5151977" y="3387897"/>
-                  </a:lnTo>
-                  <a:lnTo>
-                    <a:pt x="5074734" y="3374433"/>
-                  </a:lnTo>
-                  <a:lnTo>
-                    <a:pt x="4997490" y="3360284"/>
-                  </a:lnTo>
-                  <a:lnTo>
-                    <a:pt x="4920246" y="3345416"/>
-                  </a:lnTo>
-                  <a:lnTo>
-                    <a:pt x="4843003" y="3329792"/>
-                  </a:lnTo>
-                  <a:lnTo>
-                    <a:pt x="4765759" y="3313373"/>
-                  </a:lnTo>
-                  <a:lnTo>
-                    <a:pt x="4688516" y="3296119"/>
-                  </a:lnTo>
-                  <a:lnTo>
-                    <a:pt x="4611272" y="3277987"/>
-                  </a:lnTo>
-                  <a:lnTo>
-                    <a:pt x="4534029" y="3258933"/>
-                  </a:lnTo>
-                  <a:lnTo>
-                    <a:pt x="4456785" y="3238911"/>
-                  </a:lnTo>
-                  <a:lnTo>
-                    <a:pt x="4379541" y="3217870"/>
-                  </a:lnTo>
-                  <a:lnTo>
-                    <a:pt x="4302298" y="3195759"/>
-                  </a:lnTo>
-                  <a:lnTo>
-                    <a:pt x="4225054" y="3172523"/>
-                  </a:lnTo>
-                  <a:lnTo>
-                    <a:pt x="4147811" y="3148106"/>
-                  </a:lnTo>
-                  <a:lnTo>
-                    <a:pt x="4070567" y="3122447"/>
-                  </a:lnTo>
-                  <a:lnTo>
-                    <a:pt x="3993324" y="3095484"/>
-                  </a:lnTo>
-                  <a:lnTo>
-                    <a:pt x="3916080" y="3067149"/>
-                  </a:lnTo>
-                  <a:lnTo>
-                    <a:pt x="3838836" y="3037372"/>
-                  </a:lnTo>
-                  <a:lnTo>
-                    <a:pt x="3761593" y="3006082"/>
-                  </a:lnTo>
-                  <a:lnTo>
-                    <a:pt x="3684349" y="2973200"/>
-                  </a:lnTo>
-                  <a:lnTo>
-                    <a:pt x="3607106" y="2938646"/>
-                  </a:lnTo>
-                  <a:lnTo>
-                    <a:pt x="3529862" y="2902335"/>
-                  </a:lnTo>
-                  <a:lnTo>
-                    <a:pt x="3452619" y="2864177"/>
-                  </a:lnTo>
-                  <a:lnTo>
-                    <a:pt x="3375375" y="2824079"/>
-                  </a:lnTo>
-                  <a:lnTo>
-                    <a:pt x="3298131" y="2782631"/>
-                  </a:lnTo>
-                  <a:lnTo>
-                    <a:pt x="3220888" y="2768409"/>
-                  </a:lnTo>
-                  <a:lnTo>
-                    <a:pt x="3143644" y="2753953"/>
-                  </a:lnTo>
-                  <a:lnTo>
-                    <a:pt x="3066401" y="2739262"/>
-                  </a:lnTo>
-                  <a:lnTo>
-                    <a:pt x="2989157" y="2724330"/>
-                  </a:lnTo>
-                  <a:lnTo>
-                    <a:pt x="2911914" y="2709155"/>
-                  </a:lnTo>
-                  <a:lnTo>
-                    <a:pt x="2834670" y="2693731"/>
-                  </a:lnTo>
-                  <a:lnTo>
-                    <a:pt x="2757426" y="2678055"/>
-                  </a:lnTo>
-                  <a:lnTo>
-                    <a:pt x="2680183" y="2662123"/>
-                  </a:lnTo>
-                  <a:lnTo>
-                    <a:pt x="2602939" y="2645930"/>
-                  </a:lnTo>
-                  <a:lnTo>
-                    <a:pt x="2525696" y="2629473"/>
-                  </a:lnTo>
-                  <a:lnTo>
-                    <a:pt x="2448452" y="2612747"/>
-                  </a:lnTo>
-                  <a:lnTo>
-                    <a:pt x="2371209" y="2595747"/>
-                  </a:lnTo>
-                  <a:lnTo>
-                    <a:pt x="2293965" y="2578469"/>
-                  </a:lnTo>
-                  <a:lnTo>
-                    <a:pt x="2216721" y="2560909"/>
-                  </a:lnTo>
-                  <a:lnTo>
-                    <a:pt x="2139478" y="2543062"/>
-                  </a:lnTo>
-                  <a:lnTo>
-                    <a:pt x="2062234" y="2524923"/>
-                  </a:lnTo>
-                  <a:lnTo>
-                    <a:pt x="1984991" y="2506487"/>
-                  </a:lnTo>
-                  <a:lnTo>
-                    <a:pt x="1907747" y="2487750"/>
-                  </a:lnTo>
-                  <a:lnTo>
-                    <a:pt x="1830504" y="2468707"/>
-                  </a:lnTo>
-                  <a:lnTo>
-                    <a:pt x="1753260" y="2449353"/>
-                  </a:lnTo>
-                  <a:lnTo>
-                    <a:pt x="1676016" y="2429682"/>
-                  </a:lnTo>
-                  <a:lnTo>
-                    <a:pt x="1598773" y="2409689"/>
-                  </a:lnTo>
-                  <a:lnTo>
-                    <a:pt x="1521529" y="2389370"/>
-                  </a:lnTo>
-                  <a:lnTo>
-                    <a:pt x="1444286" y="2368719"/>
-                  </a:lnTo>
-                  <a:lnTo>
-                    <a:pt x="1367042" y="2347730"/>
-                  </a:lnTo>
-                  <a:lnTo>
-                    <a:pt x="1289799" y="2326397"/>
-                  </a:lnTo>
-                  <a:lnTo>
-                    <a:pt x="1212555" y="2304716"/>
-                  </a:lnTo>
-                  <a:lnTo>
-                    <a:pt x="1135311" y="2282681"/>
-                  </a:lnTo>
-                  <a:lnTo>
-                    <a:pt x="1058068" y="2260286"/>
-                  </a:lnTo>
-                  <a:lnTo>
-                    <a:pt x="980824" y="2237524"/>
-                  </a:lnTo>
-                  <a:lnTo>
-                    <a:pt x="903581" y="2214390"/>
-                  </a:lnTo>
-                  <a:lnTo>
-                    <a:pt x="826337" y="2190878"/>
-                  </a:lnTo>
-                  <a:lnTo>
-                    <a:pt x="749094" y="2166982"/>
-                  </a:lnTo>
-                  <a:lnTo>
-                    <a:pt x="671850" y="2142695"/>
-                  </a:lnTo>
-                  <a:lnTo>
-                    <a:pt x="594606" y="2118011"/>
-                  </a:lnTo>
-                  <a:lnTo>
-                    <a:pt x="517363" y="2092923"/>
-                  </a:lnTo>
-                  <a:lnTo>
-                    <a:pt x="440119" y="2067426"/>
-                  </a:lnTo>
-                  <a:lnTo>
-                    <a:pt x="362876" y="2041511"/>
-                  </a:lnTo>
-                  <a:lnTo>
-                    <a:pt x="285632" y="2015173"/>
-                  </a:lnTo>
-                  <a:lnTo>
-                    <a:pt x="208389" y="1988404"/>
-                  </a:lnTo>
-                  <a:lnTo>
-                    <a:pt x="131145" y="1961198"/>
-                  </a:lnTo>
-                  <a:lnTo>
-                    <a:pt x="53901" y="1933547"/>
-                  </a:lnTo>
-                  <a:lnTo>
-                    <a:pt x="0" y="1913936"/>
+                    <a:pt x="1135311" y="153147"/>
+                  </a:lnTo>
+                  <a:lnTo>
+                    <a:pt x="1212555" y="314331"/>
+                  </a:lnTo>
+                  <a:lnTo>
+                    <a:pt x="1289799" y="467716"/>
+                  </a:lnTo>
+                  <a:lnTo>
+                    <a:pt x="1367042" y="613677"/>
+                  </a:lnTo>
+                  <a:lnTo>
+                    <a:pt x="1444286" y="752574"/>
+                  </a:lnTo>
+                  <a:lnTo>
+                    <a:pt x="1521529" y="884750"/>
+                  </a:lnTo>
+                  <a:lnTo>
+                    <a:pt x="1598773" y="1010528"/>
+                  </a:lnTo>
+                  <a:lnTo>
+                    <a:pt x="1676016" y="1130220"/>
+                  </a:lnTo>
+                  <a:lnTo>
+                    <a:pt x="1753260" y="1244119"/>
+                  </a:lnTo>
+                  <a:lnTo>
+                    <a:pt x="1830504" y="1352506"/>
+                  </a:lnTo>
+                  <a:lnTo>
+                    <a:pt x="1907747" y="1455648"/>
+                  </a:lnTo>
+                  <a:lnTo>
+                    <a:pt x="1984991" y="1553798"/>
+                  </a:lnTo>
+                  <a:lnTo>
+                    <a:pt x="2062234" y="1647198"/>
+                  </a:lnTo>
+                  <a:lnTo>
+                    <a:pt x="2139478" y="1736078"/>
+                  </a:lnTo>
+                  <a:lnTo>
+                    <a:pt x="2216721" y="1820657"/>
+                  </a:lnTo>
+                  <a:lnTo>
+                    <a:pt x="2293965" y="1901142"/>
+                  </a:lnTo>
+                  <a:lnTo>
+                    <a:pt x="2371209" y="1977732"/>
+                  </a:lnTo>
+                  <a:lnTo>
+                    <a:pt x="2448452" y="2050616"/>
+                  </a:lnTo>
+                  <a:lnTo>
+                    <a:pt x="2525696" y="2119973"/>
+                  </a:lnTo>
+                  <a:lnTo>
+                    <a:pt x="2602939" y="2185972"/>
+                  </a:lnTo>
+                  <a:lnTo>
+                    <a:pt x="2680183" y="2248778"/>
+                  </a:lnTo>
+                  <a:lnTo>
+                    <a:pt x="2757426" y="2308545"/>
+                  </a:lnTo>
+                  <a:lnTo>
+                    <a:pt x="2834670" y="2365419"/>
+                  </a:lnTo>
+                  <a:lnTo>
+                    <a:pt x="2911914" y="2419540"/>
+                  </a:lnTo>
+                  <a:lnTo>
+                    <a:pt x="2989157" y="2471043"/>
+                  </a:lnTo>
+                  <a:lnTo>
+                    <a:pt x="3066401" y="2520053"/>
+                  </a:lnTo>
+                  <a:lnTo>
+                    <a:pt x="3143644" y="2566691"/>
+                  </a:lnTo>
+                  <a:lnTo>
+                    <a:pt x="3220888" y="2611072"/>
+                  </a:lnTo>
+                  <a:lnTo>
+                    <a:pt x="3298131" y="2653305"/>
+                  </a:lnTo>
+                  <a:lnTo>
+                    <a:pt x="3375375" y="2667310"/>
+                  </a:lnTo>
+                  <a:lnTo>
+                    <a:pt x="3452619" y="2680442"/>
+                  </a:lnTo>
+                  <a:lnTo>
+                    <a:pt x="3529862" y="2693363"/>
+                  </a:lnTo>
+                  <a:lnTo>
+                    <a:pt x="3607106" y="2706076"/>
+                  </a:lnTo>
+                  <a:lnTo>
+                    <a:pt x="3684349" y="2718585"/>
+                  </a:lnTo>
+                  <a:lnTo>
+                    <a:pt x="3761593" y="2730892"/>
+                  </a:lnTo>
+                  <a:lnTo>
+                    <a:pt x="3838836" y="2743001"/>
+                  </a:lnTo>
+                  <a:lnTo>
+                    <a:pt x="3916080" y="2754916"/>
+                  </a:lnTo>
+                  <a:lnTo>
+                    <a:pt x="3993324" y="2766639"/>
+                  </a:lnTo>
+                  <a:lnTo>
+                    <a:pt x="4070567" y="2778173"/>
+                  </a:lnTo>
+                  <a:lnTo>
+                    <a:pt x="4147811" y="2789522"/>
+                  </a:lnTo>
+                  <a:lnTo>
+                    <a:pt x="4225054" y="2800689"/>
+                  </a:lnTo>
+                  <a:lnTo>
+                    <a:pt x="4302298" y="2811675"/>
+                  </a:lnTo>
+                  <a:lnTo>
+                    <a:pt x="4379541" y="2822485"/>
+                  </a:lnTo>
+                  <a:lnTo>
+                    <a:pt x="4456785" y="2833122"/>
+                  </a:lnTo>
+                  <a:lnTo>
+                    <a:pt x="4534029" y="2843587"/>
+                  </a:lnTo>
+                  <a:lnTo>
+                    <a:pt x="4611272" y="2853883"/>
+                  </a:lnTo>
+                  <a:lnTo>
+                    <a:pt x="4688516" y="2864014"/>
+                  </a:lnTo>
+                  <a:lnTo>
+                    <a:pt x="4765759" y="2873983"/>
+                  </a:lnTo>
+                  <a:lnTo>
+                    <a:pt x="4843003" y="2883790"/>
+                  </a:lnTo>
+                  <a:lnTo>
+                    <a:pt x="4920246" y="2893441"/>
+                  </a:lnTo>
+                  <a:lnTo>
+                    <a:pt x="4997490" y="2902935"/>
+                  </a:lnTo>
+                  <a:lnTo>
+                    <a:pt x="5074734" y="2912278"/>
+                  </a:lnTo>
+                  <a:lnTo>
+                    <a:pt x="5151977" y="2921469"/>
+                  </a:lnTo>
+                  <a:lnTo>
+                    <a:pt x="5229221" y="2930513"/>
+                  </a:lnTo>
+                  <a:lnTo>
+                    <a:pt x="5306464" y="2939412"/>
+                  </a:lnTo>
+                  <a:lnTo>
+                    <a:pt x="5383708" y="2948167"/>
+                  </a:lnTo>
+                  <a:lnTo>
+                    <a:pt x="5460951" y="2956782"/>
+                  </a:lnTo>
+                  <a:lnTo>
+                    <a:pt x="5538195" y="2965258"/>
+                  </a:lnTo>
+                  <a:lnTo>
+                    <a:pt x="5615439" y="2973598"/>
+                  </a:lnTo>
+                  <a:lnTo>
+                    <a:pt x="5692682" y="2981803"/>
+                  </a:lnTo>
+                  <a:lnTo>
+                    <a:pt x="5769926" y="2989877"/>
+                  </a:lnTo>
+                  <a:lnTo>
+                    <a:pt x="5847169" y="2997821"/>
+                  </a:lnTo>
+                  <a:lnTo>
+                    <a:pt x="5924413" y="3005637"/>
+                  </a:lnTo>
+                  <a:lnTo>
+                    <a:pt x="6001656" y="3013327"/>
+                  </a:lnTo>
+                  <a:lnTo>
+                    <a:pt x="6078900" y="3020893"/>
+                  </a:lnTo>
+                  <a:lnTo>
+                    <a:pt x="6156144" y="3028338"/>
+                  </a:lnTo>
+                  <a:lnTo>
+                    <a:pt x="6233387" y="3035663"/>
+                  </a:lnTo>
+                  <a:lnTo>
+                    <a:pt x="6310631" y="3042870"/>
+                  </a:lnTo>
+                  <a:lnTo>
+                    <a:pt x="6387874" y="3049962"/>
+                  </a:lnTo>
+                  <a:lnTo>
+                    <a:pt x="6465118" y="3056939"/>
+                  </a:lnTo>
+                  <a:lnTo>
+                    <a:pt x="6542361" y="3063804"/>
+                  </a:lnTo>
+                  <a:lnTo>
+                    <a:pt x="6619605" y="3070559"/>
+                  </a:lnTo>
+                  <a:lnTo>
+                    <a:pt x="6696849" y="3077205"/>
+                  </a:lnTo>
+                  <a:lnTo>
+                    <a:pt x="6774092" y="3083744"/>
+                  </a:lnTo>
+                  <a:lnTo>
+                    <a:pt x="6851336" y="3090178"/>
+                  </a:lnTo>
+                  <a:lnTo>
+                    <a:pt x="6928579" y="3096508"/>
+                  </a:lnTo>
+                  <a:lnTo>
+                    <a:pt x="7005823" y="3102737"/>
+                  </a:lnTo>
+                  <a:lnTo>
+                    <a:pt x="7083066" y="3108865"/>
+                  </a:lnTo>
+                  <a:lnTo>
+                    <a:pt x="7160310" y="3114895"/>
+                  </a:lnTo>
+                  <a:lnTo>
+                    <a:pt x="7237554" y="3120828"/>
+                  </a:lnTo>
+                  <a:lnTo>
+                    <a:pt x="7314797" y="3126665"/>
+                  </a:lnTo>
+                  <a:lnTo>
+                    <a:pt x="7392041" y="3132409"/>
+                  </a:lnTo>
+                  <a:lnTo>
+                    <a:pt x="7392041" y="3423835"/>
+                  </a:lnTo>
+                  <a:lnTo>
+                    <a:pt x="7314797" y="3420788"/>
+                  </a:lnTo>
+                  <a:lnTo>
+                    <a:pt x="7237554" y="3417586"/>
+                  </a:lnTo>
+                  <a:lnTo>
+                    <a:pt x="7160310" y="3414221"/>
+                  </a:lnTo>
+                  <a:lnTo>
+                    <a:pt x="7083066" y="3410685"/>
+                  </a:lnTo>
+                  <a:lnTo>
+                    <a:pt x="7005823" y="3406970"/>
+                  </a:lnTo>
+                  <a:lnTo>
+                    <a:pt x="6928579" y="3403065"/>
+                  </a:lnTo>
+                  <a:lnTo>
+                    <a:pt x="6851336" y="3398962"/>
+                  </a:lnTo>
+                  <a:lnTo>
+                    <a:pt x="6774092" y="3394650"/>
+                  </a:lnTo>
+                  <a:lnTo>
+                    <a:pt x="6696849" y="3390119"/>
+                  </a:lnTo>
+                  <a:lnTo>
+                    <a:pt x="6619605" y="3385358"/>
+                  </a:lnTo>
+                  <a:lnTo>
+                    <a:pt x="6542361" y="3380354"/>
+                  </a:lnTo>
+                  <a:lnTo>
+                    <a:pt x="6465118" y="3375096"/>
+                  </a:lnTo>
+                  <a:lnTo>
+                    <a:pt x="6387874" y="3369570"/>
+                  </a:lnTo>
+                  <a:lnTo>
+                    <a:pt x="6310631" y="3363764"/>
+                  </a:lnTo>
+                  <a:lnTo>
+                    <a:pt x="6233387" y="3357662"/>
+                  </a:lnTo>
+                  <a:lnTo>
+                    <a:pt x="6156144" y="3351250"/>
+                  </a:lnTo>
+                  <a:lnTo>
+                    <a:pt x="6078900" y="3344511"/>
+                  </a:lnTo>
+                  <a:lnTo>
+                    <a:pt x="6001656" y="3337430"/>
+                  </a:lnTo>
+                  <a:lnTo>
+                    <a:pt x="5924413" y="3329989"/>
+                  </a:lnTo>
+                  <a:lnTo>
+                    <a:pt x="5847169" y="3322170"/>
+                  </a:lnTo>
+                  <a:lnTo>
+                    <a:pt x="5769926" y="3313952"/>
+                  </a:lnTo>
+                  <a:lnTo>
+                    <a:pt x="5692682" y="3305317"/>
+                  </a:lnTo>
+                  <a:lnTo>
+                    <a:pt x="5615439" y="3296243"/>
+                  </a:lnTo>
+                  <a:lnTo>
+                    <a:pt x="5538195" y="3286707"/>
+                  </a:lnTo>
+                  <a:lnTo>
+                    <a:pt x="5460951" y="3276687"/>
+                  </a:lnTo>
+                  <a:lnTo>
+                    <a:pt x="5383708" y="3266156"/>
+                  </a:lnTo>
+                  <a:lnTo>
+                    <a:pt x="5306464" y="3255091"/>
+                  </a:lnTo>
+                  <a:lnTo>
+                    <a:pt x="5229221" y="3243462"/>
+                  </a:lnTo>
+                  <a:lnTo>
+                    <a:pt x="5151977" y="3231242"/>
+                  </a:lnTo>
+                  <a:lnTo>
+                    <a:pt x="5074734" y="3218401"/>
+                  </a:lnTo>
+                  <a:lnTo>
+                    <a:pt x="4997490" y="3204906"/>
+                  </a:lnTo>
+                  <a:lnTo>
+                    <a:pt x="4920246" y="3190725"/>
+                  </a:lnTo>
+                  <a:lnTo>
+                    <a:pt x="4843003" y="3175823"/>
+                  </a:lnTo>
+                  <a:lnTo>
+                    <a:pt x="4765759" y="3160163"/>
+                  </a:lnTo>
+                  <a:lnTo>
+                    <a:pt x="4688516" y="3143707"/>
+                  </a:lnTo>
+                  <a:lnTo>
+                    <a:pt x="4611272" y="3126414"/>
+                  </a:lnTo>
+                  <a:lnTo>
+                    <a:pt x="4534029" y="3108242"/>
+                  </a:lnTo>
+                  <a:lnTo>
+                    <a:pt x="4456785" y="3089145"/>
+                  </a:lnTo>
+                  <a:lnTo>
+                    <a:pt x="4379541" y="3069077"/>
+                  </a:lnTo>
+                  <a:lnTo>
+                    <a:pt x="4302298" y="3047988"/>
+                  </a:lnTo>
+                  <a:lnTo>
+                    <a:pt x="4225054" y="3025827"/>
+                  </a:lnTo>
+                  <a:lnTo>
+                    <a:pt x="4147811" y="3002539"/>
+                  </a:lnTo>
+                  <a:lnTo>
+                    <a:pt x="4070567" y="2978067"/>
+                  </a:lnTo>
+                  <a:lnTo>
+                    <a:pt x="3993324" y="2952350"/>
+                  </a:lnTo>
+                  <a:lnTo>
+                    <a:pt x="3916080" y="2925325"/>
+                  </a:lnTo>
+                  <a:lnTo>
+                    <a:pt x="3838836" y="2896925"/>
+                  </a:lnTo>
+                  <a:lnTo>
+                    <a:pt x="3761593" y="2867082"/>
+                  </a:lnTo>
+                  <a:lnTo>
+                    <a:pt x="3684349" y="2835721"/>
+                  </a:lnTo>
+                  <a:lnTo>
+                    <a:pt x="3607106" y="2802764"/>
+                  </a:lnTo>
+                  <a:lnTo>
+                    <a:pt x="3529862" y="2768132"/>
+                  </a:lnTo>
+                  <a:lnTo>
+                    <a:pt x="3452619" y="2731739"/>
+                  </a:lnTo>
+                  <a:lnTo>
+                    <a:pt x="3375375" y="2693494"/>
+                  </a:lnTo>
+                  <a:lnTo>
+                    <a:pt x="3298131" y="2653963"/>
+                  </a:lnTo>
+                  <a:lnTo>
+                    <a:pt x="3220888" y="2640398"/>
+                  </a:lnTo>
+                  <a:lnTo>
+                    <a:pt x="3143644" y="2626612"/>
+                  </a:lnTo>
+                  <a:lnTo>
+                    <a:pt x="3066401" y="2612600"/>
+                  </a:lnTo>
+                  <a:lnTo>
+                    <a:pt x="2989157" y="2598358"/>
+                  </a:lnTo>
+                  <a:lnTo>
+                    <a:pt x="2911914" y="2583884"/>
+                  </a:lnTo>
+                  <a:lnTo>
+                    <a:pt x="2834670" y="2569174"/>
+                  </a:lnTo>
+                  <a:lnTo>
+                    <a:pt x="2757426" y="2554223"/>
+                  </a:lnTo>
+                  <a:lnTo>
+                    <a:pt x="2680183" y="2539027"/>
+                  </a:lnTo>
+                  <a:lnTo>
+                    <a:pt x="2602939" y="2523584"/>
+                  </a:lnTo>
+                  <a:lnTo>
+                    <a:pt x="2525696" y="2507887"/>
+                  </a:lnTo>
+                  <a:lnTo>
+                    <a:pt x="2448452" y="2491934"/>
+                  </a:lnTo>
+                  <a:lnTo>
+                    <a:pt x="2371209" y="2475720"/>
+                  </a:lnTo>
+                  <a:lnTo>
+                    <a:pt x="2293965" y="2459242"/>
+                  </a:lnTo>
+                  <a:lnTo>
+                    <a:pt x="2216721" y="2442494"/>
+                  </a:lnTo>
+                  <a:lnTo>
+                    <a:pt x="2139478" y="2425472"/>
+                  </a:lnTo>
+                  <a:lnTo>
+                    <a:pt x="2062234" y="2408171"/>
+                  </a:lnTo>
+                  <a:lnTo>
+                    <a:pt x="1984991" y="2390588"/>
+                  </a:lnTo>
+                  <a:lnTo>
+                    <a:pt x="1907747" y="2372718"/>
+                  </a:lnTo>
+                  <a:lnTo>
+                    <a:pt x="1830504" y="2354555"/>
+                  </a:lnTo>
+                  <a:lnTo>
+                    <a:pt x="1753260" y="2336096"/>
+                  </a:lnTo>
+                  <a:lnTo>
+                    <a:pt x="1676016" y="2317334"/>
+                  </a:lnTo>
+                  <a:lnTo>
+                    <a:pt x="1598773" y="2298266"/>
+                  </a:lnTo>
+                  <a:lnTo>
+                    <a:pt x="1521529" y="2278886"/>
+                  </a:lnTo>
+                  <a:lnTo>
+                    <a:pt x="1444286" y="2259190"/>
+                  </a:lnTo>
+                  <a:lnTo>
+                    <a:pt x="1367042" y="2239171"/>
+                  </a:lnTo>
+                  <a:lnTo>
+                    <a:pt x="1289799" y="2218826"/>
+                  </a:lnTo>
+                  <a:lnTo>
+                    <a:pt x="1212555" y="2198147"/>
+                  </a:lnTo>
+                  <a:lnTo>
+                    <a:pt x="1135311" y="2177131"/>
+                  </a:lnTo>
+                  <a:lnTo>
+                    <a:pt x="1058068" y="2155771"/>
+                  </a:lnTo>
+                  <a:lnTo>
+                    <a:pt x="980824" y="2134062"/>
+                  </a:lnTo>
+                  <a:lnTo>
+                    <a:pt x="903581" y="2111997"/>
+                  </a:lnTo>
+                  <a:lnTo>
+                    <a:pt x="826337" y="2089573"/>
+                  </a:lnTo>
+                  <a:lnTo>
+                    <a:pt x="749094" y="2066781"/>
+                  </a:lnTo>
+                  <a:lnTo>
+                    <a:pt x="671850" y="2043617"/>
+                  </a:lnTo>
+                  <a:lnTo>
+                    <a:pt x="594606" y="2020075"/>
+                  </a:lnTo>
+                  <a:lnTo>
+                    <a:pt x="517363" y="1996147"/>
+                  </a:lnTo>
+                  <a:lnTo>
+                    <a:pt x="440119" y="1971829"/>
+                  </a:lnTo>
+                  <a:lnTo>
+                    <a:pt x="362876" y="1947112"/>
+                  </a:lnTo>
+                  <a:lnTo>
+                    <a:pt x="285632" y="1921992"/>
+                  </a:lnTo>
+                  <a:lnTo>
+                    <a:pt x="208389" y="1896461"/>
+                  </a:lnTo>
+                  <a:lnTo>
+                    <a:pt x="131145" y="1870513"/>
+                  </a:lnTo>
+                  <a:lnTo>
+                    <a:pt x="53901" y="1844140"/>
+                  </a:lnTo>
+                  <a:lnTo>
+                    <a:pt x="0" y="1825436"/>
                   </a:lnTo>
                   <a:close/>
                 </a:path>
@@ -3573,261 +3573,261 @@
           </p:nvSpPr>
           <p:spPr>
             <a:xfrm>
-              <a:off x="1882989" y="1896563"/>
-              <a:ext cx="6326569" cy="3284272"/>
+              <a:off x="1882989" y="2073503"/>
+              <a:ext cx="6326569" cy="3132409"/>
             </a:xfrm>
             <a:custGeom>
               <a:avLst/>
               <a:pathLst>
-                <a:path w="6326569" h="3284272">
+                <a:path w="6326569" h="3132409">
                   <a:moveTo>
                     <a:pt x="0" y="0"/>
                   </a:moveTo>
                   <a:lnTo>
-                    <a:pt x="69839" y="160571"/>
-                  </a:lnTo>
-                  <a:lnTo>
-                    <a:pt x="147083" y="329571"/>
-                  </a:lnTo>
-                  <a:lnTo>
-                    <a:pt x="224327" y="490391"/>
-                  </a:lnTo>
-                  <a:lnTo>
-                    <a:pt x="301570" y="643429"/>
-                  </a:lnTo>
-                  <a:lnTo>
-                    <a:pt x="378814" y="789060"/>
-                  </a:lnTo>
-                  <a:lnTo>
-                    <a:pt x="456057" y="927643"/>
-                  </a:lnTo>
-                  <a:lnTo>
-                    <a:pt x="533301" y="1059520"/>
-                  </a:lnTo>
-                  <a:lnTo>
-                    <a:pt x="610544" y="1185015"/>
-                  </a:lnTo>
-                  <a:lnTo>
-                    <a:pt x="687788" y="1304436"/>
-                  </a:lnTo>
-                  <a:lnTo>
-                    <a:pt x="765032" y="1418078"/>
-                  </a:lnTo>
-                  <a:lnTo>
-                    <a:pt x="842275" y="1526220"/>
-                  </a:lnTo>
-                  <a:lnTo>
-                    <a:pt x="919519" y="1629128"/>
-                  </a:lnTo>
-                  <a:lnTo>
-                    <a:pt x="996762" y="1727056"/>
-                  </a:lnTo>
-                  <a:lnTo>
-                    <a:pt x="1074006" y="1820245"/>
-                  </a:lnTo>
-                  <a:lnTo>
-                    <a:pt x="1151249" y="1908924"/>
-                  </a:lnTo>
-                  <a:lnTo>
-                    <a:pt x="1228493" y="1993312"/>
-                  </a:lnTo>
-                  <a:lnTo>
-                    <a:pt x="1305737" y="2073615"/>
-                  </a:lnTo>
-                  <a:lnTo>
-                    <a:pt x="1382980" y="2150033"/>
-                  </a:lnTo>
-                  <a:lnTo>
-                    <a:pt x="1460224" y="2222752"/>
-                  </a:lnTo>
-                  <a:lnTo>
-                    <a:pt x="1537467" y="2291952"/>
-                  </a:lnTo>
-                  <a:lnTo>
-                    <a:pt x="1614711" y="2357802"/>
-                  </a:lnTo>
-                  <a:lnTo>
-                    <a:pt x="1691954" y="2420466"/>
-                  </a:lnTo>
-                  <a:lnTo>
-                    <a:pt x="1769198" y="2480098"/>
-                  </a:lnTo>
-                  <a:lnTo>
-                    <a:pt x="1846442" y="2536843"/>
-                  </a:lnTo>
-                  <a:lnTo>
-                    <a:pt x="1923685" y="2590842"/>
-                  </a:lnTo>
-                  <a:lnTo>
-                    <a:pt x="2000929" y="2642228"/>
-                  </a:lnTo>
-                  <a:lnTo>
-                    <a:pt x="2078172" y="2691128"/>
-                  </a:lnTo>
-                  <a:lnTo>
-                    <a:pt x="2155416" y="2737660"/>
-                  </a:lnTo>
-                  <a:lnTo>
-                    <a:pt x="2232659" y="2781941"/>
-                  </a:lnTo>
-                  <a:lnTo>
-                    <a:pt x="2309903" y="2796625"/>
-                  </a:lnTo>
-                  <a:lnTo>
-                    <a:pt x="2387147" y="2810394"/>
-                  </a:lnTo>
-                  <a:lnTo>
-                    <a:pt x="2464390" y="2823941"/>
-                  </a:lnTo>
-                  <a:lnTo>
-                    <a:pt x="2541634" y="2837270"/>
-                  </a:lnTo>
-                  <a:lnTo>
-                    <a:pt x="2618877" y="2850385"/>
-                  </a:lnTo>
-                  <a:lnTo>
-                    <a:pt x="2696121" y="2863289"/>
-                  </a:lnTo>
-                  <a:lnTo>
-                    <a:pt x="2773364" y="2875986"/>
-                  </a:lnTo>
-                  <a:lnTo>
-                    <a:pt x="2850608" y="2888478"/>
-                  </a:lnTo>
-                  <a:lnTo>
-                    <a:pt x="2927852" y="2900769"/>
-                  </a:lnTo>
-                  <a:lnTo>
-                    <a:pt x="3005095" y="2912863"/>
-                  </a:lnTo>
-                  <a:lnTo>
-                    <a:pt x="3082339" y="2924762"/>
-                  </a:lnTo>
-                  <a:lnTo>
-                    <a:pt x="3159582" y="2936470"/>
-                  </a:lnTo>
-                  <a:lnTo>
-                    <a:pt x="3236826" y="2947989"/>
-                  </a:lnTo>
-                  <a:lnTo>
-                    <a:pt x="3314069" y="2959323"/>
-                  </a:lnTo>
-                  <a:lnTo>
-                    <a:pt x="3391313" y="2970475"/>
-                  </a:lnTo>
-                  <a:lnTo>
-                    <a:pt x="3468557" y="2981448"/>
-                  </a:lnTo>
-                  <a:lnTo>
-                    <a:pt x="3545800" y="2992244"/>
-                  </a:lnTo>
-                  <a:lnTo>
-                    <a:pt x="3623044" y="3002866"/>
-                  </a:lnTo>
-                  <a:lnTo>
-                    <a:pt x="3700287" y="3013317"/>
-                  </a:lnTo>
-                  <a:lnTo>
-                    <a:pt x="3777531" y="3023601"/>
-                  </a:lnTo>
-                  <a:lnTo>
-                    <a:pt x="3854774" y="3033719"/>
-                  </a:lnTo>
-                  <a:lnTo>
-                    <a:pt x="3932018" y="3043674"/>
-                  </a:lnTo>
-                  <a:lnTo>
-                    <a:pt x="4009262" y="3053469"/>
-                  </a:lnTo>
-                  <a:lnTo>
-                    <a:pt x="4086505" y="3063106"/>
-                  </a:lnTo>
-                  <a:lnTo>
-                    <a:pt x="4163749" y="3072589"/>
-                  </a:lnTo>
-                  <a:lnTo>
-                    <a:pt x="4240992" y="3081919"/>
-                  </a:lnTo>
-                  <a:lnTo>
-                    <a:pt x="4318236" y="3091099"/>
-                  </a:lnTo>
-                  <a:lnTo>
-                    <a:pt x="4395479" y="3100131"/>
-                  </a:lnTo>
-                  <a:lnTo>
-                    <a:pt x="4472723" y="3109018"/>
-                  </a:lnTo>
-                  <a:lnTo>
-                    <a:pt x="4549967" y="3117762"/>
-                  </a:lnTo>
-                  <a:lnTo>
-                    <a:pt x="4627210" y="3126365"/>
-                  </a:lnTo>
-                  <a:lnTo>
-                    <a:pt x="4704454" y="3134830"/>
-                  </a:lnTo>
-                  <a:lnTo>
-                    <a:pt x="4781697" y="3143159"/>
-                  </a:lnTo>
-                  <a:lnTo>
-                    <a:pt x="4858941" y="3151354"/>
-                  </a:lnTo>
-                  <a:lnTo>
-                    <a:pt x="4936185" y="3159417"/>
-                  </a:lnTo>
-                  <a:lnTo>
-                    <a:pt x="5013428" y="3167350"/>
-                  </a:lnTo>
-                  <a:lnTo>
-                    <a:pt x="5090672" y="3175156"/>
-                  </a:lnTo>
-                  <a:lnTo>
-                    <a:pt x="5167915" y="3182836"/>
-                  </a:lnTo>
-                  <a:lnTo>
-                    <a:pt x="5245159" y="3190393"/>
-                  </a:lnTo>
-                  <a:lnTo>
-                    <a:pt x="5322402" y="3197828"/>
-                  </a:lnTo>
-                  <a:lnTo>
-                    <a:pt x="5399646" y="3205144"/>
-                  </a:lnTo>
-                  <a:lnTo>
-                    <a:pt x="5476890" y="3212342"/>
-                  </a:lnTo>
-                  <a:lnTo>
-                    <a:pt x="5554133" y="3219424"/>
-                  </a:lnTo>
-                  <a:lnTo>
-                    <a:pt x="5631377" y="3226392"/>
-                  </a:lnTo>
-                  <a:lnTo>
-                    <a:pt x="5708620" y="3233248"/>
-                  </a:lnTo>
-                  <a:lnTo>
-                    <a:pt x="5785864" y="3239994"/>
-                  </a:lnTo>
-                  <a:lnTo>
-                    <a:pt x="5863107" y="3246631"/>
-                  </a:lnTo>
-                  <a:lnTo>
-                    <a:pt x="5940351" y="3253162"/>
-                  </a:lnTo>
-                  <a:lnTo>
-                    <a:pt x="6017595" y="3259587"/>
-                  </a:lnTo>
-                  <a:lnTo>
-                    <a:pt x="6094838" y="3265909"/>
-                  </a:lnTo>
-                  <a:lnTo>
-                    <a:pt x="6172082" y="3272130"/>
-                  </a:lnTo>
-                  <a:lnTo>
-                    <a:pt x="6249325" y="3278250"/>
-                  </a:lnTo>
-                  <a:lnTo>
-                    <a:pt x="6326569" y="3284272"/>
+                    <a:pt x="69839" y="153147"/>
+                  </a:lnTo>
+                  <a:lnTo>
+                    <a:pt x="147083" y="314331"/>
+                  </a:lnTo>
+                  <a:lnTo>
+                    <a:pt x="224327" y="467716"/>
+                  </a:lnTo>
+                  <a:lnTo>
+                    <a:pt x="301570" y="613677"/>
+                  </a:lnTo>
+                  <a:lnTo>
+                    <a:pt x="378814" y="752574"/>
+                  </a:lnTo>
+                  <a:lnTo>
+                    <a:pt x="456057" y="884750"/>
+                  </a:lnTo>
+                  <a:lnTo>
+                    <a:pt x="533301" y="1010528"/>
+                  </a:lnTo>
+                  <a:lnTo>
+                    <a:pt x="610544" y="1130220"/>
+                  </a:lnTo>
+                  <a:lnTo>
+                    <a:pt x="687788" y="1244119"/>
+                  </a:lnTo>
+                  <a:lnTo>
+                    <a:pt x="765032" y="1352506"/>
+                  </a:lnTo>
+                  <a:lnTo>
+                    <a:pt x="842275" y="1455648"/>
+                  </a:lnTo>
+                  <a:lnTo>
+                    <a:pt x="919519" y="1553798"/>
+                  </a:lnTo>
+                  <a:lnTo>
+                    <a:pt x="996762" y="1647198"/>
+                  </a:lnTo>
+                  <a:lnTo>
+                    <a:pt x="1074006" y="1736078"/>
+                  </a:lnTo>
+                  <a:lnTo>
+                    <a:pt x="1151249" y="1820657"/>
+                  </a:lnTo>
+                  <a:lnTo>
+                    <a:pt x="1228493" y="1901142"/>
+                  </a:lnTo>
+                  <a:lnTo>
+                    <a:pt x="1305737" y="1977732"/>
+                  </a:lnTo>
+                  <a:lnTo>
+                    <a:pt x="1382980" y="2050616"/>
+                  </a:lnTo>
+                  <a:lnTo>
+                    <a:pt x="1460224" y="2119973"/>
+                  </a:lnTo>
+                  <a:lnTo>
+                    <a:pt x="1537467" y="2185972"/>
+                  </a:lnTo>
+                  <a:lnTo>
+                    <a:pt x="1614711" y="2248778"/>
+                  </a:lnTo>
+                  <a:lnTo>
+                    <a:pt x="1691954" y="2308545"/>
+                  </a:lnTo>
+                  <a:lnTo>
+                    <a:pt x="1769198" y="2365419"/>
+                  </a:lnTo>
+                  <a:lnTo>
+                    <a:pt x="1846442" y="2419540"/>
+                  </a:lnTo>
+                  <a:lnTo>
+                    <a:pt x="1923685" y="2471043"/>
+                  </a:lnTo>
+                  <a:lnTo>
+                    <a:pt x="2000929" y="2520053"/>
+                  </a:lnTo>
+                  <a:lnTo>
+                    <a:pt x="2078172" y="2566691"/>
+                  </a:lnTo>
+                  <a:lnTo>
+                    <a:pt x="2155416" y="2611072"/>
+                  </a:lnTo>
+                  <a:lnTo>
+                    <a:pt x="2232659" y="2653305"/>
+                  </a:lnTo>
+                  <a:lnTo>
+                    <a:pt x="2309903" y="2667310"/>
+                  </a:lnTo>
+                  <a:lnTo>
+                    <a:pt x="2387147" y="2680442"/>
+                  </a:lnTo>
+                  <a:lnTo>
+                    <a:pt x="2464390" y="2693363"/>
+                  </a:lnTo>
+                  <a:lnTo>
+                    <a:pt x="2541634" y="2706076"/>
+                  </a:lnTo>
+                  <a:lnTo>
+                    <a:pt x="2618877" y="2718585"/>
+                  </a:lnTo>
+                  <a:lnTo>
+                    <a:pt x="2696121" y="2730892"/>
+                  </a:lnTo>
+                  <a:lnTo>
+                    <a:pt x="2773364" y="2743001"/>
+                  </a:lnTo>
+                  <a:lnTo>
+                    <a:pt x="2850608" y="2754916"/>
+                  </a:lnTo>
+                  <a:lnTo>
+                    <a:pt x="2927852" y="2766639"/>
+                  </a:lnTo>
+                  <a:lnTo>
+                    <a:pt x="3005095" y="2778173"/>
+                  </a:lnTo>
+                  <a:lnTo>
+                    <a:pt x="3082339" y="2789522"/>
+                  </a:lnTo>
+                  <a:lnTo>
+                    <a:pt x="3159582" y="2800689"/>
+                  </a:lnTo>
+                  <a:lnTo>
+                    <a:pt x="3236826" y="2811675"/>
+                  </a:lnTo>
+                  <a:lnTo>
+                    <a:pt x="3314069" y="2822485"/>
+                  </a:lnTo>
+                  <a:lnTo>
+                    <a:pt x="3391313" y="2833122"/>
+                  </a:lnTo>
+                  <a:lnTo>
+                    <a:pt x="3468557" y="2843587"/>
+                  </a:lnTo>
+                  <a:lnTo>
+                    <a:pt x="3545800" y="2853883"/>
+                  </a:lnTo>
+                  <a:lnTo>
+                    <a:pt x="3623044" y="2864014"/>
+                  </a:lnTo>
+                  <a:lnTo>
+                    <a:pt x="3700287" y="2873983"/>
+                  </a:lnTo>
+                  <a:lnTo>
+                    <a:pt x="3777531" y="2883790"/>
+                  </a:lnTo>
+                  <a:lnTo>
+                    <a:pt x="3854774" y="2893441"/>
+                  </a:lnTo>
+                  <a:lnTo>
+                    <a:pt x="3932018" y="2902935"/>
+                  </a:lnTo>
+                  <a:lnTo>
+                    <a:pt x="4009262" y="2912278"/>
+                  </a:lnTo>
+                  <a:lnTo>
+                    <a:pt x="4086505" y="2921469"/>
+                  </a:lnTo>
+                  <a:lnTo>
+                    <a:pt x="4163749" y="2930513"/>
+                  </a:lnTo>
+                  <a:lnTo>
+                    <a:pt x="4240992" y="2939412"/>
+                  </a:lnTo>
+                  <a:lnTo>
+                    <a:pt x="4318236" y="2948167"/>
+                  </a:lnTo>
+                  <a:lnTo>
+                    <a:pt x="4395479" y="2956782"/>
+                  </a:lnTo>
+                  <a:lnTo>
+                    <a:pt x="4472723" y="2965258"/>
+                  </a:lnTo>
+                  <a:lnTo>
+                    <a:pt x="4549967" y="2973598"/>
+                  </a:lnTo>
+                  <a:lnTo>
+                    <a:pt x="4627210" y="2981803"/>
+                  </a:lnTo>
+                  <a:lnTo>
+                    <a:pt x="4704454" y="2989877"/>
+                  </a:lnTo>
+                  <a:lnTo>
+                    <a:pt x="4781697" y="2997821"/>
+                  </a:lnTo>
+                  <a:lnTo>
+                    <a:pt x="4858941" y="3005637"/>
+                  </a:lnTo>
+                  <a:lnTo>
+                    <a:pt x="4936185" y="3013327"/>
+                  </a:lnTo>
+                  <a:lnTo>
+                    <a:pt x="5013428" y="3020893"/>
+                  </a:lnTo>
+                  <a:lnTo>
+                    <a:pt x="5090672" y="3028338"/>
+                  </a:lnTo>
+                  <a:lnTo>
+                    <a:pt x="5167915" y="3035663"/>
+                  </a:lnTo>
+                  <a:lnTo>
+                    <a:pt x="5245159" y="3042870"/>
+                  </a:lnTo>
+                  <a:lnTo>
+                    <a:pt x="5322402" y="3049962"/>
+                  </a:lnTo>
+                  <a:lnTo>
+                    <a:pt x="5399646" y="3056939"/>
+                  </a:lnTo>
+                  <a:lnTo>
+                    <a:pt x="5476890" y="3063804"/>
+                  </a:lnTo>
+                  <a:lnTo>
+                    <a:pt x="5554133" y="3070559"/>
+                  </a:lnTo>
+                  <a:lnTo>
+                    <a:pt x="5631377" y="3077205"/>
+                  </a:lnTo>
+                  <a:lnTo>
+                    <a:pt x="5708620" y="3083744"/>
+                  </a:lnTo>
+                  <a:lnTo>
+                    <a:pt x="5785864" y="3090178"/>
+                  </a:lnTo>
+                  <a:lnTo>
+                    <a:pt x="5863107" y="3096508"/>
+                  </a:lnTo>
+                  <a:lnTo>
+                    <a:pt x="5940351" y="3102737"/>
+                  </a:lnTo>
+                  <a:lnTo>
+                    <a:pt x="6017595" y="3108865"/>
+                  </a:lnTo>
+                  <a:lnTo>
+                    <a:pt x="6094838" y="3114895"/>
+                  </a:lnTo>
+                  <a:lnTo>
+                    <a:pt x="6172082" y="3120828"/>
+                  </a:lnTo>
+                  <a:lnTo>
+                    <a:pt x="6249325" y="3126665"/>
+                  </a:lnTo>
+                  <a:lnTo>
+                    <a:pt x="6326569" y="3132409"/>
                   </a:lnTo>
                 </a:path>
               </a:pathLst>
@@ -3847,300 +3847,300 @@
           </p:nvSpPr>
           <p:spPr>
             <a:xfrm>
-              <a:off x="817517" y="3810499"/>
-              <a:ext cx="7392041" cy="1675890"/>
+              <a:off x="817517" y="3898939"/>
+              <a:ext cx="7392041" cy="1598398"/>
             </a:xfrm>
             <a:custGeom>
               <a:avLst/>
               <a:pathLst>
-                <a:path w="7392041" h="1675890">
+                <a:path w="7392041" h="1598398">
                   <a:moveTo>
-                    <a:pt x="7392041" y="1675890"/>
+                    <a:pt x="7392041" y="1598398"/>
                   </a:moveTo>
                   <a:lnTo>
-                    <a:pt x="7314797" y="1672696"/>
-                  </a:lnTo>
-                  <a:lnTo>
-                    <a:pt x="7237554" y="1669339"/>
-                  </a:lnTo>
-                  <a:lnTo>
-                    <a:pt x="7160310" y="1665811"/>
-                  </a:lnTo>
-                  <a:lnTo>
-                    <a:pt x="7083066" y="1662104"/>
-                  </a:lnTo>
-                  <a:lnTo>
-                    <a:pt x="7005823" y="1658208"/>
-                  </a:lnTo>
-                  <a:lnTo>
-                    <a:pt x="6928579" y="1654114"/>
-                  </a:lnTo>
-                  <a:lnTo>
-                    <a:pt x="6851336" y="1649812"/>
-                  </a:lnTo>
-                  <a:lnTo>
-                    <a:pt x="6774092" y="1645291"/>
-                  </a:lnTo>
-                  <a:lnTo>
-                    <a:pt x="6696849" y="1640540"/>
-                  </a:lnTo>
-                  <a:lnTo>
-                    <a:pt x="6619605" y="1635548"/>
-                  </a:lnTo>
-                  <a:lnTo>
-                    <a:pt x="6542361" y="1630302"/>
-                  </a:lnTo>
-                  <a:lnTo>
-                    <a:pt x="6465118" y="1624789"/>
-                  </a:lnTo>
-                  <a:lnTo>
-                    <a:pt x="6387874" y="1618995"/>
-                  </a:lnTo>
-                  <a:lnTo>
-                    <a:pt x="6310631" y="1612907"/>
-                  </a:lnTo>
-                  <a:lnTo>
-                    <a:pt x="6233387" y="1606509"/>
-                  </a:lnTo>
-                  <a:lnTo>
-                    <a:pt x="6156144" y="1599786"/>
-                  </a:lnTo>
-                  <a:lnTo>
-                    <a:pt x="6078900" y="1592721"/>
-                  </a:lnTo>
-                  <a:lnTo>
-                    <a:pt x="6001656" y="1585297"/>
-                  </a:lnTo>
-                  <a:lnTo>
-                    <a:pt x="5924413" y="1577495"/>
-                  </a:lnTo>
-                  <a:lnTo>
-                    <a:pt x="5847169" y="1569297"/>
-                  </a:lnTo>
-                  <a:lnTo>
-                    <a:pt x="5769926" y="1560681"/>
-                  </a:lnTo>
-                  <a:lnTo>
-                    <a:pt x="5692682" y="1551627"/>
-                  </a:lnTo>
-                  <a:lnTo>
-                    <a:pt x="5615439" y="1542113"/>
-                  </a:lnTo>
-                  <a:lnTo>
-                    <a:pt x="5538195" y="1532115"/>
-                  </a:lnTo>
-                  <a:lnTo>
-                    <a:pt x="5460951" y="1521609"/>
-                  </a:lnTo>
-                  <a:lnTo>
-                    <a:pt x="5383708" y="1510568"/>
-                  </a:lnTo>
-                  <a:lnTo>
-                    <a:pt x="5306464" y="1498965"/>
-                  </a:lnTo>
-                  <a:lnTo>
-                    <a:pt x="5229221" y="1486773"/>
-                  </a:lnTo>
-                  <a:lnTo>
-                    <a:pt x="5151977" y="1473961"/>
-                  </a:lnTo>
-                  <a:lnTo>
-                    <a:pt x="5074734" y="1460497"/>
-                  </a:lnTo>
-                  <a:lnTo>
-                    <a:pt x="4997490" y="1446348"/>
-                  </a:lnTo>
-                  <a:lnTo>
-                    <a:pt x="4920246" y="1431480"/>
-                  </a:lnTo>
-                  <a:lnTo>
-                    <a:pt x="4843003" y="1415855"/>
-                  </a:lnTo>
-                  <a:lnTo>
-                    <a:pt x="4765759" y="1399436"/>
-                  </a:lnTo>
-                  <a:lnTo>
-                    <a:pt x="4688516" y="1382182"/>
-                  </a:lnTo>
-                  <a:lnTo>
-                    <a:pt x="4611272" y="1364050"/>
-                  </a:lnTo>
-                  <a:lnTo>
-                    <a:pt x="4534029" y="1344997"/>
-                  </a:lnTo>
-                  <a:lnTo>
-                    <a:pt x="4456785" y="1324974"/>
-                  </a:lnTo>
-                  <a:lnTo>
-                    <a:pt x="4379541" y="1303933"/>
-                  </a:lnTo>
-                  <a:lnTo>
-                    <a:pt x="4302298" y="1281822"/>
-                  </a:lnTo>
-                  <a:lnTo>
-                    <a:pt x="4225054" y="1258587"/>
-                  </a:lnTo>
-                  <a:lnTo>
-                    <a:pt x="4147811" y="1234170"/>
-                  </a:lnTo>
-                  <a:lnTo>
-                    <a:pt x="4070567" y="1208511"/>
-                  </a:lnTo>
-                  <a:lnTo>
-                    <a:pt x="3993324" y="1181547"/>
-                  </a:lnTo>
-                  <a:lnTo>
-                    <a:pt x="3916080" y="1153212"/>
-                  </a:lnTo>
-                  <a:lnTo>
-                    <a:pt x="3838836" y="1123436"/>
-                  </a:lnTo>
-                  <a:lnTo>
-                    <a:pt x="3761593" y="1092145"/>
-                  </a:lnTo>
-                  <a:lnTo>
-                    <a:pt x="3684349" y="1059264"/>
-                  </a:lnTo>
-                  <a:lnTo>
-                    <a:pt x="3607106" y="1024710"/>
-                  </a:lnTo>
-                  <a:lnTo>
-                    <a:pt x="3529862" y="988398"/>
-                  </a:lnTo>
-                  <a:lnTo>
-                    <a:pt x="3452619" y="950241"/>
-                  </a:lnTo>
-                  <a:lnTo>
-                    <a:pt x="3375375" y="910142"/>
-                  </a:lnTo>
-                  <a:lnTo>
-                    <a:pt x="3298131" y="868695"/>
-                  </a:lnTo>
-                  <a:lnTo>
-                    <a:pt x="3220888" y="854472"/>
-                  </a:lnTo>
-                  <a:lnTo>
-                    <a:pt x="3143644" y="840017"/>
-                  </a:lnTo>
-                  <a:lnTo>
-                    <a:pt x="3066401" y="825326"/>
-                  </a:lnTo>
-                  <a:lnTo>
-                    <a:pt x="2989157" y="810394"/>
-                  </a:lnTo>
-                  <a:lnTo>
-                    <a:pt x="2911914" y="795218"/>
-                  </a:lnTo>
-                  <a:lnTo>
-                    <a:pt x="2834670" y="779795"/>
-                  </a:lnTo>
-                  <a:lnTo>
-                    <a:pt x="2757426" y="764119"/>
-                  </a:lnTo>
-                  <a:lnTo>
-                    <a:pt x="2680183" y="748186"/>
-                  </a:lnTo>
-                  <a:lnTo>
-                    <a:pt x="2602939" y="731994"/>
-                  </a:lnTo>
-                  <a:lnTo>
-                    <a:pt x="2525696" y="715536"/>
-                  </a:lnTo>
-                  <a:lnTo>
-                    <a:pt x="2448452" y="698810"/>
-                  </a:lnTo>
-                  <a:lnTo>
-                    <a:pt x="2371209" y="681810"/>
-                  </a:lnTo>
-                  <a:lnTo>
-                    <a:pt x="2293965" y="664533"/>
-                  </a:lnTo>
-                  <a:lnTo>
-                    <a:pt x="2216721" y="646972"/>
-                  </a:lnTo>
-                  <a:lnTo>
-                    <a:pt x="2139478" y="629125"/>
-                  </a:lnTo>
-                  <a:lnTo>
-                    <a:pt x="2062234" y="610986"/>
-                  </a:lnTo>
-                  <a:lnTo>
-                    <a:pt x="1984991" y="592551"/>
-                  </a:lnTo>
-                  <a:lnTo>
-                    <a:pt x="1907747" y="573814"/>
-                  </a:lnTo>
-                  <a:lnTo>
-                    <a:pt x="1830504" y="554771"/>
-                  </a:lnTo>
-                  <a:lnTo>
-                    <a:pt x="1753260" y="535416"/>
-                  </a:lnTo>
-                  <a:lnTo>
-                    <a:pt x="1676016" y="515745"/>
-                  </a:lnTo>
-                  <a:lnTo>
-                    <a:pt x="1598773" y="495753"/>
-                  </a:lnTo>
-                  <a:lnTo>
-                    <a:pt x="1521529" y="475434"/>
-                  </a:lnTo>
-                  <a:lnTo>
-                    <a:pt x="1444286" y="454782"/>
-                  </a:lnTo>
-                  <a:lnTo>
-                    <a:pt x="1367042" y="433793"/>
-                  </a:lnTo>
-                  <a:lnTo>
-                    <a:pt x="1289799" y="412461"/>
-                  </a:lnTo>
-                  <a:lnTo>
-                    <a:pt x="1212555" y="390780"/>
-                  </a:lnTo>
-                  <a:lnTo>
-                    <a:pt x="1135311" y="368745"/>
-                  </a:lnTo>
-                  <a:lnTo>
-                    <a:pt x="1058068" y="346349"/>
-                  </a:lnTo>
-                  <a:lnTo>
-                    <a:pt x="980824" y="323587"/>
-                  </a:lnTo>
-                  <a:lnTo>
-                    <a:pt x="903581" y="300453"/>
-                  </a:lnTo>
-                  <a:lnTo>
-                    <a:pt x="826337" y="276942"/>
-                  </a:lnTo>
-                  <a:lnTo>
-                    <a:pt x="749094" y="253045"/>
-                  </a:lnTo>
-                  <a:lnTo>
-                    <a:pt x="671850" y="228758"/>
-                  </a:lnTo>
-                  <a:lnTo>
-                    <a:pt x="594606" y="204074"/>
-                  </a:lnTo>
-                  <a:lnTo>
-                    <a:pt x="517363" y="178987"/>
-                  </a:lnTo>
-                  <a:lnTo>
-                    <a:pt x="440119" y="153489"/>
-                  </a:lnTo>
-                  <a:lnTo>
-                    <a:pt x="362876" y="127574"/>
-                  </a:lnTo>
-                  <a:lnTo>
-                    <a:pt x="285632" y="101236"/>
-                  </a:lnTo>
-                  <a:lnTo>
-                    <a:pt x="208389" y="74468"/>
-                  </a:lnTo>
-                  <a:lnTo>
-                    <a:pt x="131145" y="47261"/>
-                  </a:lnTo>
-                  <a:lnTo>
-                    <a:pt x="53901" y="19610"/>
+                    <a:pt x="7314797" y="1595351"/>
+                  </a:lnTo>
+                  <a:lnTo>
+                    <a:pt x="7237554" y="1592149"/>
+                  </a:lnTo>
+                  <a:lnTo>
+                    <a:pt x="7160310" y="1588784"/>
+                  </a:lnTo>
+                  <a:lnTo>
+                    <a:pt x="7083066" y="1585249"/>
+                  </a:lnTo>
+                  <a:lnTo>
+                    <a:pt x="7005823" y="1581533"/>
+                  </a:lnTo>
+                  <a:lnTo>
+                    <a:pt x="6928579" y="1577628"/>
+                  </a:lnTo>
+                  <a:lnTo>
+                    <a:pt x="6851336" y="1573525"/>
+                  </a:lnTo>
+                  <a:lnTo>
+                    <a:pt x="6774092" y="1569213"/>
+                  </a:lnTo>
+                  <a:lnTo>
+                    <a:pt x="6696849" y="1564682"/>
+                  </a:lnTo>
+                  <a:lnTo>
+                    <a:pt x="6619605" y="1559921"/>
+                  </a:lnTo>
+                  <a:lnTo>
+                    <a:pt x="6542361" y="1554917"/>
+                  </a:lnTo>
+                  <a:lnTo>
+                    <a:pt x="6465118" y="1549659"/>
+                  </a:lnTo>
+                  <a:lnTo>
+                    <a:pt x="6387874" y="1544133"/>
+                  </a:lnTo>
+                  <a:lnTo>
+                    <a:pt x="6310631" y="1538327"/>
+                  </a:lnTo>
+                  <a:lnTo>
+                    <a:pt x="6233387" y="1532225"/>
+                  </a:lnTo>
+                  <a:lnTo>
+                    <a:pt x="6156144" y="1525813"/>
+                  </a:lnTo>
+                  <a:lnTo>
+                    <a:pt x="6078900" y="1519074"/>
+                  </a:lnTo>
+                  <a:lnTo>
+                    <a:pt x="6001656" y="1511993"/>
+                  </a:lnTo>
+                  <a:lnTo>
+                    <a:pt x="5924413" y="1504552"/>
+                  </a:lnTo>
+                  <a:lnTo>
+                    <a:pt x="5847169" y="1496733"/>
+                  </a:lnTo>
+                  <a:lnTo>
+                    <a:pt x="5769926" y="1488516"/>
+                  </a:lnTo>
+                  <a:lnTo>
+                    <a:pt x="5692682" y="1479881"/>
+                  </a:lnTo>
+                  <a:lnTo>
+                    <a:pt x="5615439" y="1470806"/>
+                  </a:lnTo>
+                  <a:lnTo>
+                    <a:pt x="5538195" y="1461271"/>
+                  </a:lnTo>
+                  <a:lnTo>
+                    <a:pt x="5460951" y="1451250"/>
+                  </a:lnTo>
+                  <a:lnTo>
+                    <a:pt x="5383708" y="1440720"/>
+                  </a:lnTo>
+                  <a:lnTo>
+                    <a:pt x="5306464" y="1429654"/>
+                  </a:lnTo>
+                  <a:lnTo>
+                    <a:pt x="5229221" y="1418025"/>
+                  </a:lnTo>
+                  <a:lnTo>
+                    <a:pt x="5151977" y="1405805"/>
+                  </a:lnTo>
+                  <a:lnTo>
+                    <a:pt x="5074734" y="1392964"/>
+                  </a:lnTo>
+                  <a:lnTo>
+                    <a:pt x="4997490" y="1379469"/>
+                  </a:lnTo>
+                  <a:lnTo>
+                    <a:pt x="4920246" y="1365288"/>
+                  </a:lnTo>
+                  <a:lnTo>
+                    <a:pt x="4843003" y="1350386"/>
+                  </a:lnTo>
+                  <a:lnTo>
+                    <a:pt x="4765759" y="1334727"/>
+                  </a:lnTo>
+                  <a:lnTo>
+                    <a:pt x="4688516" y="1318270"/>
+                  </a:lnTo>
+                  <a:lnTo>
+                    <a:pt x="4611272" y="1300977"/>
+                  </a:lnTo>
+                  <a:lnTo>
+                    <a:pt x="4534029" y="1282805"/>
+                  </a:lnTo>
+                  <a:lnTo>
+                    <a:pt x="4456785" y="1263708"/>
+                  </a:lnTo>
+                  <a:lnTo>
+                    <a:pt x="4379541" y="1243640"/>
+                  </a:lnTo>
+                  <a:lnTo>
+                    <a:pt x="4302298" y="1222551"/>
+                  </a:lnTo>
+                  <a:lnTo>
+                    <a:pt x="4225054" y="1200390"/>
+                  </a:lnTo>
+                  <a:lnTo>
+                    <a:pt x="4147811" y="1177102"/>
+                  </a:lnTo>
+                  <a:lnTo>
+                    <a:pt x="4070567" y="1152630"/>
+                  </a:lnTo>
+                  <a:lnTo>
+                    <a:pt x="3993324" y="1126913"/>
+                  </a:lnTo>
+                  <a:lnTo>
+                    <a:pt x="3916080" y="1099888"/>
+                  </a:lnTo>
+                  <a:lnTo>
+                    <a:pt x="3838836" y="1071489"/>
+                  </a:lnTo>
+                  <a:lnTo>
+                    <a:pt x="3761593" y="1041645"/>
+                  </a:lnTo>
+                  <a:lnTo>
+                    <a:pt x="3684349" y="1010284"/>
+                  </a:lnTo>
+                  <a:lnTo>
+                    <a:pt x="3607106" y="977328"/>
+                  </a:lnTo>
+                  <a:lnTo>
+                    <a:pt x="3529862" y="942695"/>
+                  </a:lnTo>
+                  <a:lnTo>
+                    <a:pt x="3452619" y="906302"/>
+                  </a:lnTo>
+                  <a:lnTo>
+                    <a:pt x="3375375" y="868057"/>
+                  </a:lnTo>
+                  <a:lnTo>
+                    <a:pt x="3298131" y="828526"/>
+                  </a:lnTo>
+                  <a:lnTo>
+                    <a:pt x="3220888" y="814962"/>
+                  </a:lnTo>
+                  <a:lnTo>
+                    <a:pt x="3143644" y="801175"/>
+                  </a:lnTo>
+                  <a:lnTo>
+                    <a:pt x="3066401" y="787163"/>
+                  </a:lnTo>
+                  <a:lnTo>
+                    <a:pt x="2989157" y="772922"/>
+                  </a:lnTo>
+                  <a:lnTo>
+                    <a:pt x="2911914" y="758448"/>
+                  </a:lnTo>
+                  <a:lnTo>
+                    <a:pt x="2834670" y="743737"/>
+                  </a:lnTo>
+                  <a:lnTo>
+                    <a:pt x="2757426" y="728786"/>
+                  </a:lnTo>
+                  <a:lnTo>
+                    <a:pt x="2680183" y="713591"/>
+                  </a:lnTo>
+                  <a:lnTo>
+                    <a:pt x="2602939" y="698147"/>
+                  </a:lnTo>
+                  <a:lnTo>
+                    <a:pt x="2525696" y="682450"/>
+                  </a:lnTo>
+                  <a:lnTo>
+                    <a:pt x="2448452" y="666497"/>
+                  </a:lnTo>
+                  <a:lnTo>
+                    <a:pt x="2371209" y="650284"/>
+                  </a:lnTo>
+                  <a:lnTo>
+                    <a:pt x="2293965" y="633805"/>
+                  </a:lnTo>
+                  <a:lnTo>
+                    <a:pt x="2216721" y="617057"/>
+                  </a:lnTo>
+                  <a:lnTo>
+                    <a:pt x="2139478" y="600035"/>
+                  </a:lnTo>
+                  <a:lnTo>
+                    <a:pt x="2062234" y="582734"/>
+                  </a:lnTo>
+                  <a:lnTo>
+                    <a:pt x="1984991" y="565151"/>
+                  </a:lnTo>
+                  <a:lnTo>
+                    <a:pt x="1907747" y="547281"/>
+                  </a:lnTo>
+                  <a:lnTo>
+                    <a:pt x="1830504" y="529118"/>
+                  </a:lnTo>
+                  <a:lnTo>
+                    <a:pt x="1753260" y="510659"/>
+                  </a:lnTo>
+                  <a:lnTo>
+                    <a:pt x="1676016" y="491897"/>
+                  </a:lnTo>
+                  <a:lnTo>
+                    <a:pt x="1598773" y="472829"/>
+                  </a:lnTo>
+                  <a:lnTo>
+                    <a:pt x="1521529" y="453450"/>
+                  </a:lnTo>
+                  <a:lnTo>
+                    <a:pt x="1444286" y="433753"/>
+                  </a:lnTo>
+                  <a:lnTo>
+                    <a:pt x="1367042" y="413735"/>
+                  </a:lnTo>
+                  <a:lnTo>
+                    <a:pt x="1289799" y="393389"/>
+                  </a:lnTo>
+                  <a:lnTo>
+                    <a:pt x="1212555" y="372710"/>
+                  </a:lnTo>
+                  <a:lnTo>
+                    <a:pt x="1135311" y="351694"/>
+                  </a:lnTo>
+                  <a:lnTo>
+                    <a:pt x="1058068" y="330334"/>
+                  </a:lnTo>
+                  <a:lnTo>
+                    <a:pt x="980824" y="308625"/>
+                  </a:lnTo>
+                  <a:lnTo>
+                    <a:pt x="903581" y="286561"/>
+                  </a:lnTo>
+                  <a:lnTo>
+                    <a:pt x="826337" y="264136"/>
+                  </a:lnTo>
+                  <a:lnTo>
+                    <a:pt x="749094" y="241344"/>
+                  </a:lnTo>
+                  <a:lnTo>
+                    <a:pt x="671850" y="218180"/>
+                  </a:lnTo>
+                  <a:lnTo>
+                    <a:pt x="594606" y="194638"/>
+                  </a:lnTo>
+                  <a:lnTo>
+                    <a:pt x="517363" y="170710"/>
+                  </a:lnTo>
+                  <a:lnTo>
+                    <a:pt x="440119" y="146392"/>
+                  </a:lnTo>
+                  <a:lnTo>
+                    <a:pt x="362876" y="121675"/>
+                  </a:lnTo>
+                  <a:lnTo>
+                    <a:pt x="285632" y="96555"/>
+                  </a:lnTo>
+                  <a:lnTo>
+                    <a:pt x="208389" y="71024"/>
+                  </a:lnTo>
+                  <a:lnTo>
+                    <a:pt x="131145" y="45076"/>
+                  </a:lnTo>
+                  <a:lnTo>
+                    <a:pt x="53901" y="18704"/>
                   </a:lnTo>
                   <a:lnTo>
                     <a:pt x="0" y="0"/>
@@ -4163,303 +4163,303 @@
           </p:nvSpPr>
           <p:spPr>
             <a:xfrm>
-              <a:off x="817517" y="2000924"/>
-              <a:ext cx="7392041" cy="3396165"/>
+              <a:off x="817517" y="2173038"/>
+              <a:ext cx="7392041" cy="3239127"/>
             </a:xfrm>
             <a:custGeom>
               <a:avLst/>
               <a:pathLst>
-                <a:path w="7392041" h="3396165">
+                <a:path w="7392041" h="3239127">
                   <a:moveTo>
                     <a:pt x="0" y="0"/>
                   </a:moveTo>
                   <a:lnTo>
-                    <a:pt x="53901" y="80953"/>
-                  </a:lnTo>
-                  <a:lnTo>
-                    <a:pt x="131145" y="193207"/>
-                  </a:lnTo>
-                  <a:lnTo>
-                    <a:pt x="208389" y="301827"/>
-                  </a:lnTo>
-                  <a:lnTo>
-                    <a:pt x="285632" y="406930"/>
-                  </a:lnTo>
-                  <a:lnTo>
-                    <a:pt x="362876" y="508630"/>
-                  </a:lnTo>
-                  <a:lnTo>
-                    <a:pt x="440119" y="607038"/>
-                  </a:lnTo>
-                  <a:lnTo>
-                    <a:pt x="517363" y="702260"/>
-                  </a:lnTo>
-                  <a:lnTo>
-                    <a:pt x="594606" y="794399"/>
-                  </a:lnTo>
-                  <a:lnTo>
-                    <a:pt x="671850" y="883555"/>
-                  </a:lnTo>
-                  <a:lnTo>
-                    <a:pt x="749094" y="969825"/>
-                  </a:lnTo>
-                  <a:lnTo>
-                    <a:pt x="826337" y="1053302"/>
-                  </a:lnTo>
-                  <a:lnTo>
-                    <a:pt x="903581" y="1134076"/>
-                  </a:lnTo>
-                  <a:lnTo>
-                    <a:pt x="980824" y="1212236"/>
-                  </a:lnTo>
-                  <a:lnTo>
-                    <a:pt x="1058068" y="1287865"/>
-                  </a:lnTo>
-                  <a:lnTo>
-                    <a:pt x="1135311" y="1361045"/>
-                  </a:lnTo>
-                  <a:lnTo>
-                    <a:pt x="1212555" y="1431856"/>
-                  </a:lnTo>
-                  <a:lnTo>
-                    <a:pt x="1289799" y="1500375"/>
-                  </a:lnTo>
-                  <a:lnTo>
-                    <a:pt x="1367042" y="1566675"/>
-                  </a:lnTo>
-                  <a:lnTo>
-                    <a:pt x="1444286" y="1630829"/>
-                  </a:lnTo>
-                  <a:lnTo>
-                    <a:pt x="1521529" y="1692906"/>
-                  </a:lnTo>
-                  <a:lnTo>
-                    <a:pt x="1598773" y="1752974"/>
-                  </a:lnTo>
-                  <a:lnTo>
-                    <a:pt x="1676016" y="1811096"/>
-                  </a:lnTo>
-                  <a:lnTo>
-                    <a:pt x="1753260" y="1867337"/>
-                  </a:lnTo>
-                  <a:lnTo>
-                    <a:pt x="1830504" y="1921757"/>
-                  </a:lnTo>
-                  <a:lnTo>
-                    <a:pt x="1907747" y="1974416"/>
-                  </a:lnTo>
-                  <a:lnTo>
-                    <a:pt x="1984991" y="2025369"/>
-                  </a:lnTo>
-                  <a:lnTo>
-                    <a:pt x="2062234" y="2074673"/>
-                  </a:lnTo>
-                  <a:lnTo>
-                    <a:pt x="2139478" y="2122381"/>
-                  </a:lnTo>
-                  <a:lnTo>
-                    <a:pt x="2216721" y="2168544"/>
-                  </a:lnTo>
-                  <a:lnTo>
-                    <a:pt x="2293965" y="2213213"/>
-                  </a:lnTo>
-                  <a:lnTo>
-                    <a:pt x="2371209" y="2256435"/>
-                  </a:lnTo>
-                  <a:lnTo>
-                    <a:pt x="2448452" y="2298258"/>
-                  </a:lnTo>
-                  <a:lnTo>
-                    <a:pt x="2525696" y="2338727"/>
-                  </a:lnTo>
-                  <a:lnTo>
-                    <a:pt x="2602939" y="2377886"/>
-                  </a:lnTo>
-                  <a:lnTo>
-                    <a:pt x="2680183" y="2415778"/>
-                  </a:lnTo>
-                  <a:lnTo>
-                    <a:pt x="2757426" y="2452442"/>
-                  </a:lnTo>
-                  <a:lnTo>
-                    <a:pt x="2834670" y="2487920"/>
-                  </a:lnTo>
-                  <a:lnTo>
-                    <a:pt x="2911914" y="2522249"/>
-                  </a:lnTo>
-                  <a:lnTo>
-                    <a:pt x="2989157" y="2555466"/>
-                  </a:lnTo>
-                  <a:lnTo>
-                    <a:pt x="3066401" y="2587608"/>
-                  </a:lnTo>
-                  <a:lnTo>
-                    <a:pt x="3143644" y="2618710"/>
-                  </a:lnTo>
-                  <a:lnTo>
-                    <a:pt x="3220888" y="2648805"/>
-                  </a:lnTo>
-                  <a:lnTo>
-                    <a:pt x="3298131" y="2677925"/>
-                  </a:lnTo>
-                  <a:lnTo>
-                    <a:pt x="3375375" y="2706103"/>
-                  </a:lnTo>
-                  <a:lnTo>
-                    <a:pt x="3452619" y="2733368"/>
-                  </a:lnTo>
-                  <a:lnTo>
-                    <a:pt x="3529862" y="2759751"/>
-                  </a:lnTo>
-                  <a:lnTo>
-                    <a:pt x="3607106" y="2785279"/>
-                  </a:lnTo>
-                  <a:lnTo>
-                    <a:pt x="3684349" y="2809981"/>
-                  </a:lnTo>
-                  <a:lnTo>
-                    <a:pt x="3761593" y="2833883"/>
-                  </a:lnTo>
-                  <a:lnTo>
-                    <a:pt x="3838836" y="2857012"/>
-                  </a:lnTo>
-                  <a:lnTo>
-                    <a:pt x="3916080" y="2879391"/>
-                  </a:lnTo>
-                  <a:lnTo>
-                    <a:pt x="3993324" y="2901047"/>
-                  </a:lnTo>
-                  <a:lnTo>
-                    <a:pt x="4070567" y="2922001"/>
-                  </a:lnTo>
-                  <a:lnTo>
-                    <a:pt x="4147811" y="2942276"/>
-                  </a:lnTo>
-                  <a:lnTo>
-                    <a:pt x="4225054" y="2961896"/>
-                  </a:lnTo>
-                  <a:lnTo>
-                    <a:pt x="4302298" y="2980880"/>
-                  </a:lnTo>
-                  <a:lnTo>
-                    <a:pt x="4379541" y="2999249"/>
-                  </a:lnTo>
-                  <a:lnTo>
-                    <a:pt x="4456785" y="3017024"/>
-                  </a:lnTo>
-                  <a:lnTo>
-                    <a:pt x="4534029" y="3034223"/>
-                  </a:lnTo>
-                  <a:lnTo>
-                    <a:pt x="4611272" y="3050866"/>
-                  </a:lnTo>
-                  <a:lnTo>
-                    <a:pt x="4688516" y="3066970"/>
-                  </a:lnTo>
-                  <a:lnTo>
-                    <a:pt x="4765759" y="3082552"/>
-                  </a:lnTo>
-                  <a:lnTo>
-                    <a:pt x="4843003" y="3097630"/>
-                  </a:lnTo>
-                  <a:lnTo>
-                    <a:pt x="4920246" y="3112220"/>
-                  </a:lnTo>
-                  <a:lnTo>
-                    <a:pt x="4997490" y="3126337"/>
-                  </a:lnTo>
-                  <a:lnTo>
-                    <a:pt x="5074734" y="3139997"/>
-                  </a:lnTo>
-                  <a:lnTo>
-                    <a:pt x="5151977" y="3153216"/>
-                  </a:lnTo>
-                  <a:lnTo>
-                    <a:pt x="5229221" y="3166006"/>
-                  </a:lnTo>
-                  <a:lnTo>
-                    <a:pt x="5306464" y="3178382"/>
-                  </a:lnTo>
-                  <a:lnTo>
-                    <a:pt x="5383708" y="3190357"/>
-                  </a:lnTo>
-                  <a:lnTo>
-                    <a:pt x="5460951" y="3201945"/>
-                  </a:lnTo>
-                  <a:lnTo>
-                    <a:pt x="5538195" y="3213158"/>
-                  </a:lnTo>
-                  <a:lnTo>
-                    <a:pt x="5615439" y="3224007"/>
-                  </a:lnTo>
-                  <a:lnTo>
-                    <a:pt x="5692682" y="3234505"/>
-                  </a:lnTo>
-                  <a:lnTo>
-                    <a:pt x="5769926" y="3244664"/>
-                  </a:lnTo>
-                  <a:lnTo>
-                    <a:pt x="5847169" y="3254493"/>
-                  </a:lnTo>
-                  <a:lnTo>
-                    <a:pt x="5924413" y="3264005"/>
-                  </a:lnTo>
-                  <a:lnTo>
-                    <a:pt x="6001656" y="3273208"/>
-                  </a:lnTo>
-                  <a:lnTo>
-                    <a:pt x="6078900" y="3282114"/>
-                  </a:lnTo>
-                  <a:lnTo>
-                    <a:pt x="6156144" y="3290731"/>
-                  </a:lnTo>
-                  <a:lnTo>
-                    <a:pt x="6233387" y="3299069"/>
-                  </a:lnTo>
-                  <a:lnTo>
-                    <a:pt x="6310631" y="3307137"/>
-                  </a:lnTo>
-                  <a:lnTo>
-                    <a:pt x="6387874" y="3314944"/>
-                  </a:lnTo>
-                  <a:lnTo>
-                    <a:pt x="6465118" y="3322498"/>
-                  </a:lnTo>
-                  <a:lnTo>
-                    <a:pt x="6542361" y="3329808"/>
-                  </a:lnTo>
-                  <a:lnTo>
-                    <a:pt x="6619605" y="3336881"/>
-                  </a:lnTo>
-                  <a:lnTo>
-                    <a:pt x="6696849" y="3343725"/>
-                  </a:lnTo>
-                  <a:lnTo>
-                    <a:pt x="6774092" y="3350348"/>
-                  </a:lnTo>
-                  <a:lnTo>
-                    <a:pt x="6851336" y="3356756"/>
-                  </a:lnTo>
-                  <a:lnTo>
-                    <a:pt x="6928579" y="3362956"/>
-                  </a:lnTo>
-                  <a:lnTo>
-                    <a:pt x="7005823" y="3368956"/>
-                  </a:lnTo>
-                  <a:lnTo>
-                    <a:pt x="7083066" y="3374762"/>
-                  </a:lnTo>
-                  <a:lnTo>
-                    <a:pt x="7160310" y="3380379"/>
-                  </a:lnTo>
-                  <a:lnTo>
-                    <a:pt x="7237554" y="3385815"/>
-                  </a:lnTo>
-                  <a:lnTo>
-                    <a:pt x="7314797" y="3391075"/>
-                  </a:lnTo>
-                  <a:lnTo>
-                    <a:pt x="7392041" y="3396165"/>
+                    <a:pt x="53901" y="77210"/>
+                  </a:lnTo>
+                  <a:lnTo>
+                    <a:pt x="131145" y="184273"/>
+                  </a:lnTo>
+                  <a:lnTo>
+                    <a:pt x="208389" y="287870"/>
+                  </a:lnTo>
+                  <a:lnTo>
+                    <a:pt x="285632" y="388113"/>
+                  </a:lnTo>
+                  <a:lnTo>
+                    <a:pt x="362876" y="485111"/>
+                  </a:lnTo>
+                  <a:lnTo>
+                    <a:pt x="440119" y="578969"/>
+                  </a:lnTo>
+                  <a:lnTo>
+                    <a:pt x="517363" y="669788"/>
+                  </a:lnTo>
+                  <a:lnTo>
+                    <a:pt x="594606" y="757666"/>
+                  </a:lnTo>
+                  <a:lnTo>
+                    <a:pt x="671850" y="842700"/>
+                  </a:lnTo>
+                  <a:lnTo>
+                    <a:pt x="749094" y="924981"/>
+                  </a:lnTo>
+                  <a:lnTo>
+                    <a:pt x="826337" y="1004598"/>
+                  </a:lnTo>
+                  <a:lnTo>
+                    <a:pt x="903581" y="1081637"/>
+                  </a:lnTo>
+                  <a:lnTo>
+                    <a:pt x="980824" y="1156182"/>
+                  </a:lnTo>
+                  <a:lnTo>
+                    <a:pt x="1058068" y="1228314"/>
+                  </a:lnTo>
+                  <a:lnTo>
+                    <a:pt x="1135311" y="1298111"/>
+                  </a:lnTo>
+                  <a:lnTo>
+                    <a:pt x="1212555" y="1365648"/>
+                  </a:lnTo>
+                  <a:lnTo>
+                    <a:pt x="1289799" y="1430998"/>
+                  </a:lnTo>
+                  <a:lnTo>
+                    <a:pt x="1367042" y="1494233"/>
+                  </a:lnTo>
+                  <a:lnTo>
+                    <a:pt x="1444286" y="1555420"/>
+                  </a:lnTo>
+                  <a:lnTo>
+                    <a:pt x="1521529" y="1614627"/>
+                  </a:lnTo>
+                  <a:lnTo>
+                    <a:pt x="1598773" y="1671917"/>
+                  </a:lnTo>
+                  <a:lnTo>
+                    <a:pt x="1676016" y="1727352"/>
+                  </a:lnTo>
+                  <a:lnTo>
+                    <a:pt x="1753260" y="1780992"/>
+                  </a:lnTo>
+                  <a:lnTo>
+                    <a:pt x="1830504" y="1832896"/>
+                  </a:lnTo>
+                  <a:lnTo>
+                    <a:pt x="1907747" y="1883119"/>
+                  </a:lnTo>
+                  <a:lnTo>
+                    <a:pt x="1984991" y="1931717"/>
+                  </a:lnTo>
+                  <a:lnTo>
+                    <a:pt x="2062234" y="1978741"/>
+                  </a:lnTo>
+                  <a:lnTo>
+                    <a:pt x="2139478" y="2024243"/>
+                  </a:lnTo>
+                  <a:lnTo>
+                    <a:pt x="2216721" y="2068271"/>
+                  </a:lnTo>
+                  <a:lnTo>
+                    <a:pt x="2293965" y="2110874"/>
+                  </a:lnTo>
+                  <a:lnTo>
+                    <a:pt x="2371209" y="2152098"/>
+                  </a:lnTo>
+                  <a:lnTo>
+                    <a:pt x="2448452" y="2191988"/>
+                  </a:lnTo>
+                  <a:lnTo>
+                    <a:pt x="2525696" y="2230586"/>
+                  </a:lnTo>
+                  <a:lnTo>
+                    <a:pt x="2602939" y="2267934"/>
+                  </a:lnTo>
+                  <a:lnTo>
+                    <a:pt x="2680183" y="2304073"/>
+                  </a:lnTo>
+                  <a:lnTo>
+                    <a:pt x="2757426" y="2339042"/>
+                  </a:lnTo>
+                  <a:lnTo>
+                    <a:pt x="2834670" y="2372879"/>
+                  </a:lnTo>
+                  <a:lnTo>
+                    <a:pt x="2911914" y="2405621"/>
+                  </a:lnTo>
+                  <a:lnTo>
+                    <a:pt x="2989157" y="2437302"/>
+                  </a:lnTo>
+                  <a:lnTo>
+                    <a:pt x="3066401" y="2467958"/>
+                  </a:lnTo>
+                  <a:lnTo>
+                    <a:pt x="3143644" y="2497622"/>
+                  </a:lnTo>
+                  <a:lnTo>
+                    <a:pt x="3220888" y="2526325"/>
+                  </a:lnTo>
+                  <a:lnTo>
+                    <a:pt x="3298131" y="2554099"/>
+                  </a:lnTo>
+                  <a:lnTo>
+                    <a:pt x="3375375" y="2580973"/>
+                  </a:lnTo>
+                  <a:lnTo>
+                    <a:pt x="3452619" y="2606978"/>
+                  </a:lnTo>
+                  <a:lnTo>
+                    <a:pt x="3529862" y="2632141"/>
+                  </a:lnTo>
+                  <a:lnTo>
+                    <a:pt x="3607106" y="2656489"/>
+                  </a:lnTo>
+                  <a:lnTo>
+                    <a:pt x="3684349" y="2680049"/>
+                  </a:lnTo>
+                  <a:lnTo>
+                    <a:pt x="3761593" y="2702846"/>
+                  </a:lnTo>
+                  <a:lnTo>
+                    <a:pt x="3838836" y="2724905"/>
+                  </a:lnTo>
+                  <a:lnTo>
+                    <a:pt x="3916080" y="2746249"/>
+                  </a:lnTo>
+                  <a:lnTo>
+                    <a:pt x="3993324" y="2766903"/>
+                  </a:lnTo>
+                  <a:lnTo>
+                    <a:pt x="4070567" y="2786888"/>
+                  </a:lnTo>
+                  <a:lnTo>
+                    <a:pt x="4147811" y="2806227"/>
+                  </a:lnTo>
+                  <a:lnTo>
+                    <a:pt x="4225054" y="2824939"/>
+                  </a:lnTo>
+                  <a:lnTo>
+                    <a:pt x="4302298" y="2843045"/>
+                  </a:lnTo>
+                  <a:lnTo>
+                    <a:pt x="4379541" y="2860565"/>
+                  </a:lnTo>
+                  <a:lnTo>
+                    <a:pt x="4456785" y="2877518"/>
+                  </a:lnTo>
+                  <a:lnTo>
+                    <a:pt x="4534029" y="2893922"/>
+                  </a:lnTo>
+                  <a:lnTo>
+                    <a:pt x="4611272" y="2909795"/>
+                  </a:lnTo>
+                  <a:lnTo>
+                    <a:pt x="4688516" y="2925154"/>
+                  </a:lnTo>
+                  <a:lnTo>
+                    <a:pt x="4765759" y="2940016"/>
+                  </a:lnTo>
+                  <a:lnTo>
+                    <a:pt x="4843003" y="2954397"/>
+                  </a:lnTo>
+                  <a:lnTo>
+                    <a:pt x="4920246" y="2968312"/>
+                  </a:lnTo>
+                  <a:lnTo>
+                    <a:pt x="4997490" y="2981776"/>
+                  </a:lnTo>
+                  <a:lnTo>
+                    <a:pt x="5074734" y="2994805"/>
+                  </a:lnTo>
+                  <a:lnTo>
+                    <a:pt x="5151977" y="3007412"/>
+                  </a:lnTo>
+                  <a:lnTo>
+                    <a:pt x="5229221" y="3019611"/>
+                  </a:lnTo>
+                  <a:lnTo>
+                    <a:pt x="5306464" y="3031415"/>
+                  </a:lnTo>
+                  <a:lnTo>
+                    <a:pt x="5383708" y="3042836"/>
+                  </a:lnTo>
+                  <a:lnTo>
+                    <a:pt x="5460951" y="3053888"/>
+                  </a:lnTo>
+                  <a:lnTo>
+                    <a:pt x="5538195" y="3064582"/>
+                  </a:lnTo>
+                  <a:lnTo>
+                    <a:pt x="5615439" y="3074930"/>
+                  </a:lnTo>
+                  <a:lnTo>
+                    <a:pt x="5692682" y="3084943"/>
+                  </a:lnTo>
+                  <a:lnTo>
+                    <a:pt x="5769926" y="3094632"/>
+                  </a:lnTo>
+                  <a:lnTo>
+                    <a:pt x="5847169" y="3104007"/>
+                  </a:lnTo>
+                  <a:lnTo>
+                    <a:pt x="5924413" y="3113078"/>
+                  </a:lnTo>
+                  <a:lnTo>
+                    <a:pt x="6001656" y="3121856"/>
+                  </a:lnTo>
+                  <a:lnTo>
+                    <a:pt x="6078900" y="3130350"/>
+                  </a:lnTo>
+                  <a:lnTo>
+                    <a:pt x="6156144" y="3138569"/>
+                  </a:lnTo>
+                  <a:lnTo>
+                    <a:pt x="6233387" y="3146521"/>
+                  </a:lnTo>
+                  <a:lnTo>
+                    <a:pt x="6310631" y="3154216"/>
+                  </a:lnTo>
+                  <a:lnTo>
+                    <a:pt x="6387874" y="3161662"/>
+                  </a:lnTo>
+                  <a:lnTo>
+                    <a:pt x="6465118" y="3168867"/>
+                  </a:lnTo>
+                  <a:lnTo>
+                    <a:pt x="6542361" y="3175839"/>
+                  </a:lnTo>
+                  <a:lnTo>
+                    <a:pt x="6619605" y="3182585"/>
+                  </a:lnTo>
+                  <a:lnTo>
+                    <a:pt x="6696849" y="3189113"/>
+                  </a:lnTo>
+                  <a:lnTo>
+                    <a:pt x="6774092" y="3195429"/>
+                  </a:lnTo>
+                  <a:lnTo>
+                    <a:pt x="6851336" y="3201541"/>
+                  </a:lnTo>
+                  <a:lnTo>
+                    <a:pt x="6928579" y="3207454"/>
+                  </a:lnTo>
+                  <a:lnTo>
+                    <a:pt x="7005823" y="3213177"/>
+                  </a:lnTo>
+                  <a:lnTo>
+                    <a:pt x="7083066" y="3218714"/>
+                  </a:lnTo>
+                  <a:lnTo>
+                    <a:pt x="7160310" y="3224072"/>
+                  </a:lnTo>
+                  <a:lnTo>
+                    <a:pt x="7237554" y="3229256"/>
+                  </a:lnTo>
+                  <a:lnTo>
+                    <a:pt x="7314797" y="3234273"/>
+                  </a:lnTo>
+                  <a:lnTo>
+                    <a:pt x="7392041" y="3239127"/>
                   </a:lnTo>
                 </a:path>
               </a:pathLst>
@@ -4488,7 +4488,7 @@
           </p:nvSpPr>
           <p:spPr>
             <a:xfrm>
-              <a:off x="817517" y="4679530"/>
+              <a:off x="817517" y="4727786"/>
               <a:ext cx="7799693" cy="0"/>
             </a:xfrm>
             <a:custGeom>
@@ -4531,15 +4531,15 @@
           </p:nvSpPr>
           <p:spPr>
             <a:xfrm>
-              <a:off x="4117484" y="1896563"/>
-              <a:ext cx="0" cy="3826579"/>
+              <a:off x="4117484" y="2073503"/>
+              <a:ext cx="0" cy="3649639"/>
             </a:xfrm>
             <a:custGeom>
               <a:avLst/>
               <a:pathLst>
-                <a:path w="0" h="3826579">
+                <a:path w="0" h="3649639">
                   <a:moveTo>
-                    <a:pt x="0" y="3826579"/>
+                    <a:pt x="0" y="3649639"/>
                   </a:moveTo>
                   <a:lnTo>
                     <a:pt x="0" y="0"/>
@@ -4574,7 +4574,7 @@
           </p:nvSpPr>
           <p:spPr>
             <a:xfrm>
-              <a:off x="692708" y="5509156"/>
+              <a:off x="692708" y="5517199"/>
               <a:ext cx="62179" cy="80101"/>
             </a:xfrm>
             <a:prstGeom prst="rect">
@@ -4620,7 +4620,7 @@
           </p:nvSpPr>
           <p:spPr>
             <a:xfrm>
-              <a:off x="692708" y="4639479"/>
+              <a:off x="692708" y="4687735"/>
               <a:ext cx="62179" cy="80101"/>
             </a:xfrm>
             <a:prstGeom prst="rect">
@@ -4666,7 +4666,7 @@
           </p:nvSpPr>
           <p:spPr>
             <a:xfrm>
-              <a:off x="692708" y="3769802"/>
+              <a:off x="692708" y="3858272"/>
               <a:ext cx="62179" cy="80101"/>
             </a:xfrm>
             <a:prstGeom prst="rect">
@@ -4712,7 +4712,7 @@
           </p:nvSpPr>
           <p:spPr>
             <a:xfrm>
-              <a:off x="692708" y="2900125"/>
+              <a:off x="692708" y="3028808"/>
               <a:ext cx="62179" cy="80101"/>
             </a:xfrm>
             <a:prstGeom prst="rect">
@@ -4758,7 +4758,7 @@
           </p:nvSpPr>
           <p:spPr>
             <a:xfrm>
-              <a:off x="692708" y="2030448"/>
+              <a:off x="692708" y="2199345"/>
               <a:ext cx="62179" cy="80101"/>
             </a:xfrm>
             <a:prstGeom prst="rect">
@@ -5034,7 +5034,7 @@
           </p:nvSpPr>
           <p:spPr>
             <a:xfrm rot="-5400000">
-              <a:off x="68446" y="3759743"/>
+              <a:off x="68446" y="3848213"/>
               <a:ext cx="1016904" cy="100218"/>
             </a:xfrm>
             <a:prstGeom prst="rect">
@@ -5075,6 +5075,52 @@
         <p:sp>
           <p:nvSpPr>
             <p:cNvPr id="38" name="tx38"/>
+            <p:cNvSpPr/>
+            <p:nvPr/>
+          </p:nvSpPr>
+          <p:spPr>
+            <a:xfrm>
+              <a:off x="817517" y="1896563"/>
+              <a:ext cx="5626211" cy="82021"/>
+            </a:xfrm>
+            <a:prstGeom prst="rect">
+              <a:avLst/>
+            </a:prstGeom>
+            <a:noFill/>
+          </p:spPr>
+          <p:txBody>
+            <a:bodyPr lIns="0" rIns="0" tIns="0" bIns="0" anchorCtr="1" anchor="ctr" wrap="none"/>
+            <a:lstStyle/>
+            <a:p>
+              <a:pPr algn="l" marL="0" marR="0" indent="0">
+                <a:lnSpc>
+                  <a:spcPts val="900"/>
+                </a:lnSpc>
+                <a:spcBef>
+                  <a:spcPts val="0"/>
+                </a:spcBef>
+                <a:spcAft>
+                  <a:spcPts val="0"/>
+                </a:spcAft>
+              </a:pPr>
+              <a:r>
+                <a:rPr sz="900">
+                  <a:solidFill>
+                    <a:srgbClr val="404040">
+                      <a:alpha val="100000"/>
+                    </a:srgbClr>
+                  </a:solidFill>
+                  <a:latin typeface="Helvetica"/>
+                  <a:cs typeface="Helvetica"/>
+                </a:rPr>
+                <a:t>subHR per 0.1 ratio decline: 1.46 (1.20-1.77)  |  per IQR decline (Δ = 0.30): 3.05 (1.73-5.37)  |  IQR: [0.84, 1.14]</a:t>
+              </a:r>
+            </a:p>
+          </p:txBody>
+        </p:sp>
+        <p:sp>
+          <p:nvSpPr>
+            <p:cNvPr id="39" name="tx39"/>
             <p:cNvSpPr/>
             <p:nvPr/>
           </p:nvSpPr>

--- a/docs/pptx/auc3/jx-auc3-linsubhr-ratio-sideeffect.pptx
+++ b/docs/pptx/auc3/jx-auc3-linsubhr-ratio-sideeffect.pptx
@@ -5081,7 +5081,7 @@
           <p:spPr>
             <a:xfrm>
               <a:off x="817517" y="1896563"/>
-              <a:ext cx="5626211" cy="82021"/>
+              <a:ext cx="6236116" cy="82021"/>
             </a:xfrm>
             <a:prstGeom prst="rect">
               <a:avLst/>
@@ -5113,7 +5113,7 @@
                   <a:latin typeface="Helvetica"/>
                   <a:cs typeface="Helvetica"/>
                 </a:rPr>
-                <a:t>subHR per 0.1 ratio decline: 1.46 (1.20-1.77)  |  per IQR decline (Δ = 0.30): 3.05 (1.73-5.37)  |  IQR: [0.84, 1.14]</a:t>
+                <a:t>subHR per 0.1 ratio decline: 1.46 (1.20-1.77), p = &lt;0.001  |  per IQR decline (Δ = 0.30): 3.05 (1.73-5.37)  |  IQR: [0.84, 1.14]</a:t>
               </a:r>
             </a:p>
           </p:txBody>

--- a/docs/pptx/auc3/jx-auc3-linsubhr-ratio-sideeffect.pptx
+++ b/docs/pptx/auc3/jx-auc3-linsubhr-ratio-sideeffect.pptx
@@ -5081,7 +5081,7 @@
           <p:spPr>
             <a:xfrm>
               <a:off x="817517" y="1896563"/>
-              <a:ext cx="6236116" cy="82021"/>
+              <a:ext cx="6899879" cy="82021"/>
             </a:xfrm>
             <a:prstGeom prst="rect">
               <a:avLst/>
@@ -5113,7 +5113,7 @@
                   <a:latin typeface="Helvetica"/>
                   <a:cs typeface="Helvetica"/>
                 </a:rPr>
-                <a:t>subHR per 0.1 ratio decline: 1.46 (1.20-1.77), p = &lt;0.001  |  per IQR decline (Δ = 0.30): 3.05 (1.73-5.37)  |  IQR: [0.84, 1.14]</a:t>
+                <a:t>subHR per 0.1 ratio decline: 1.46 (1.20-1.77), p_Bonf = &lt;0.001 (n = 6)  |  per IQR decline (Δ = 0.30): 3.05 (1.73-5.37)  |  IQR: [0.84, 1.14]</a:t>
               </a:r>
             </a:p>
           </p:txBody>

--- a/docs/pptx/auc3/jx-auc3-linsubhr-ratio-sideeffect.pptx
+++ b/docs/pptx/auc3/jx-auc3-linsubhr-ratio-sideeffect.pptx
@@ -2443,7 +2443,7 @@
           </p:nvSpPr>
           <p:spPr>
             <a:xfrm>
-              <a:off x="1615213" y="2073503"/>
+              <a:off x="1531834" y="2073503"/>
               <a:ext cx="0" cy="3649639"/>
             </a:xfrm>
             <a:custGeom>
@@ -2486,7 +2486,7 @@
           </p:nvSpPr>
           <p:spPr>
             <a:xfrm>
-              <a:off x="3387871" y="2073503"/>
+              <a:off x="3586410" y="2073503"/>
               <a:ext cx="0" cy="3649639"/>
             </a:xfrm>
             <a:custGeom>
@@ -2529,7 +2529,7 @@
           </p:nvSpPr>
           <p:spPr>
             <a:xfrm>
-              <a:off x="5160528" y="2073503"/>
+              <a:off x="5640985" y="2073503"/>
               <a:ext cx="0" cy="3649639"/>
             </a:xfrm>
             <a:custGeom>
@@ -2572,7 +2572,7 @@
           </p:nvSpPr>
           <p:spPr>
             <a:xfrm>
-              <a:off x="6933186" y="2073503"/>
+              <a:off x="7695561" y="2073503"/>
               <a:ext cx="0" cy="3649639"/>
             </a:xfrm>
             <a:custGeom>
@@ -2830,7 +2830,7 @@
           </p:nvSpPr>
           <p:spPr>
             <a:xfrm>
-              <a:off x="2501542" y="2073503"/>
+              <a:off x="2559122" y="2073503"/>
               <a:ext cx="0" cy="3649639"/>
             </a:xfrm>
             <a:custGeom>
@@ -2873,7 +2873,7 @@
           </p:nvSpPr>
           <p:spPr>
             <a:xfrm>
-              <a:off x="4274200" y="2073503"/>
+              <a:off x="4613698" y="2073503"/>
               <a:ext cx="0" cy="3649639"/>
             </a:xfrm>
             <a:custGeom>
@@ -2916,7 +2916,7 @@
           </p:nvSpPr>
           <p:spPr>
             <a:xfrm>
-              <a:off x="6046857" y="2073503"/>
+              <a:off x="6668273" y="2073503"/>
               <a:ext cx="0" cy="3649639"/>
             </a:xfrm>
             <a:custGeom>
@@ -2953,601 +2953,567 @@
         </p:sp>
         <p:sp>
           <p:nvSpPr>
-            <p:cNvPr id="20" name="pl20"/>
+            <p:cNvPr id="20" name="pg20"/>
             <p:cNvSpPr/>
             <p:nvPr/>
           </p:nvSpPr>
           <p:spPr>
             <a:xfrm>
-              <a:off x="7819515" y="2073503"/>
-              <a:ext cx="0" cy="3649639"/>
+              <a:off x="1172049" y="2073503"/>
+              <a:ext cx="7090630" cy="3423835"/>
             </a:xfrm>
             <a:custGeom>
               <a:avLst/>
               <a:pathLst>
-                <a:path w="0" h="3649639">
+                <a:path w="7090630" h="3423835">
                   <a:moveTo>
-                    <a:pt x="0" y="3649639"/>
+                    <a:pt x="1224447" y="0"/>
                   </a:moveTo>
                   <a:lnTo>
-                    <a:pt x="0" y="0"/>
-                  </a:lnTo>
-                  <a:lnTo>
-                    <a:pt x="0" y="0"/>
-                  </a:lnTo>
-                </a:path>
-              </a:pathLst>
-            </a:custGeom>
-            <a:ln w="13550" cap="flat">
-              <a:solidFill>
-                <a:srgbClr val="EBEBEB">
-                  <a:alpha val="100000"/>
-                </a:srgbClr>
-              </a:solidFill>
-              <a:prstDash val="solid"/>
-              <a:round/>
-            </a:ln>
-          </p:spPr>
-          <p:txBody>
-            <a:bodyPr/>
-            <a:lstStyle/>
-            <a:p/>
-          </p:txBody>
-        </p:sp>
-        <p:sp>
-          <p:nvSpPr>
-            <p:cNvPr id="21" name="pg21"/>
-            <p:cNvSpPr/>
-            <p:nvPr/>
-          </p:nvSpPr>
-          <p:spPr>
-            <a:xfrm>
-              <a:off x="817517" y="2073503"/>
-              <a:ext cx="7392041" cy="3423835"/>
-            </a:xfrm>
-            <a:custGeom>
-              <a:avLst/>
-              <a:pathLst>
-                <a:path w="7392041" h="3423835">
-                  <a:moveTo>
-                    <a:pt x="1065471" y="0"/>
-                  </a:moveTo>
-                  <a:lnTo>
-                    <a:pt x="1135311" y="153147"/>
-                  </a:lnTo>
-                  <a:lnTo>
-                    <a:pt x="1212555" y="314331"/>
-                  </a:lnTo>
-                  <a:lnTo>
-                    <a:pt x="1289799" y="467716"/>
-                  </a:lnTo>
-                  <a:lnTo>
-                    <a:pt x="1367042" y="613677"/>
-                  </a:lnTo>
-                  <a:lnTo>
-                    <a:pt x="1444286" y="752574"/>
-                  </a:lnTo>
-                  <a:lnTo>
-                    <a:pt x="1521529" y="884750"/>
-                  </a:lnTo>
-                  <a:lnTo>
-                    <a:pt x="1598773" y="1010528"/>
-                  </a:lnTo>
-                  <a:lnTo>
-                    <a:pt x="1676016" y="1130220"/>
-                  </a:lnTo>
-                  <a:lnTo>
-                    <a:pt x="1753260" y="1244119"/>
-                  </a:lnTo>
-                  <a:lnTo>
-                    <a:pt x="1830504" y="1352506"/>
-                  </a:lnTo>
-                  <a:lnTo>
-                    <a:pt x="1907747" y="1455648"/>
-                  </a:lnTo>
-                  <a:lnTo>
-                    <a:pt x="1984991" y="1553798"/>
-                  </a:lnTo>
-                  <a:lnTo>
-                    <a:pt x="2062234" y="1647198"/>
-                  </a:lnTo>
-                  <a:lnTo>
-                    <a:pt x="2139478" y="1736078"/>
-                  </a:lnTo>
-                  <a:lnTo>
-                    <a:pt x="2216721" y="1820657"/>
-                  </a:lnTo>
-                  <a:lnTo>
-                    <a:pt x="2293965" y="1901142"/>
-                  </a:lnTo>
-                  <a:lnTo>
-                    <a:pt x="2371209" y="1977732"/>
-                  </a:lnTo>
-                  <a:lnTo>
-                    <a:pt x="2448452" y="2050616"/>
-                  </a:lnTo>
-                  <a:lnTo>
-                    <a:pt x="2525696" y="2119973"/>
-                  </a:lnTo>
-                  <a:lnTo>
-                    <a:pt x="2602939" y="2185972"/>
-                  </a:lnTo>
-                  <a:lnTo>
-                    <a:pt x="2680183" y="2248778"/>
-                  </a:lnTo>
-                  <a:lnTo>
-                    <a:pt x="2757426" y="2308545"/>
-                  </a:lnTo>
-                  <a:lnTo>
-                    <a:pt x="2834670" y="2365419"/>
-                  </a:lnTo>
-                  <a:lnTo>
-                    <a:pt x="2911914" y="2419540"/>
-                  </a:lnTo>
-                  <a:lnTo>
-                    <a:pt x="2989157" y="2471043"/>
-                  </a:lnTo>
-                  <a:lnTo>
-                    <a:pt x="3066401" y="2520053"/>
-                  </a:lnTo>
-                  <a:lnTo>
-                    <a:pt x="3143644" y="2566691"/>
-                  </a:lnTo>
-                  <a:lnTo>
-                    <a:pt x="3220888" y="2611072"/>
-                  </a:lnTo>
-                  <a:lnTo>
-                    <a:pt x="3298131" y="2653305"/>
-                  </a:lnTo>
-                  <a:lnTo>
-                    <a:pt x="3375375" y="2667310"/>
-                  </a:lnTo>
-                  <a:lnTo>
-                    <a:pt x="3452619" y="2680442"/>
-                  </a:lnTo>
-                  <a:lnTo>
-                    <a:pt x="3529862" y="2693363"/>
-                  </a:lnTo>
-                  <a:lnTo>
-                    <a:pt x="3607106" y="2706076"/>
-                  </a:lnTo>
-                  <a:lnTo>
-                    <a:pt x="3684349" y="2718585"/>
-                  </a:lnTo>
-                  <a:lnTo>
-                    <a:pt x="3761593" y="2730892"/>
-                  </a:lnTo>
-                  <a:lnTo>
-                    <a:pt x="3838836" y="2743001"/>
-                  </a:lnTo>
-                  <a:lnTo>
-                    <a:pt x="3916080" y="2754916"/>
-                  </a:lnTo>
-                  <a:lnTo>
-                    <a:pt x="3993324" y="2766639"/>
-                  </a:lnTo>
-                  <a:lnTo>
-                    <a:pt x="4070567" y="2778173"/>
-                  </a:lnTo>
-                  <a:lnTo>
-                    <a:pt x="4147811" y="2789522"/>
-                  </a:lnTo>
-                  <a:lnTo>
-                    <a:pt x="4225054" y="2800689"/>
-                  </a:lnTo>
-                  <a:lnTo>
-                    <a:pt x="4302298" y="2811675"/>
-                  </a:lnTo>
-                  <a:lnTo>
-                    <a:pt x="4379541" y="2822485"/>
-                  </a:lnTo>
-                  <a:lnTo>
-                    <a:pt x="4456785" y="2833122"/>
-                  </a:lnTo>
-                  <a:lnTo>
-                    <a:pt x="4534029" y="2843587"/>
-                  </a:lnTo>
-                  <a:lnTo>
-                    <a:pt x="4611272" y="2853883"/>
-                  </a:lnTo>
-                  <a:lnTo>
-                    <a:pt x="4688516" y="2864014"/>
-                  </a:lnTo>
-                  <a:lnTo>
-                    <a:pt x="4765759" y="2873983"/>
-                  </a:lnTo>
-                  <a:lnTo>
-                    <a:pt x="4843003" y="2883790"/>
-                  </a:lnTo>
-                  <a:lnTo>
-                    <a:pt x="4920246" y="2893441"/>
-                  </a:lnTo>
-                  <a:lnTo>
-                    <a:pt x="4997490" y="2902935"/>
-                  </a:lnTo>
-                  <a:lnTo>
-                    <a:pt x="5074734" y="2912278"/>
-                  </a:lnTo>
-                  <a:lnTo>
-                    <a:pt x="5151977" y="2921469"/>
-                  </a:lnTo>
-                  <a:lnTo>
-                    <a:pt x="5229221" y="2930513"/>
-                  </a:lnTo>
-                  <a:lnTo>
-                    <a:pt x="5306464" y="2939412"/>
-                  </a:lnTo>
-                  <a:lnTo>
-                    <a:pt x="5383708" y="2948167"/>
-                  </a:lnTo>
-                  <a:lnTo>
-                    <a:pt x="5460951" y="2956782"/>
-                  </a:lnTo>
-                  <a:lnTo>
-                    <a:pt x="5538195" y="2965258"/>
-                  </a:lnTo>
-                  <a:lnTo>
-                    <a:pt x="5615439" y="2973598"/>
-                  </a:lnTo>
-                  <a:lnTo>
-                    <a:pt x="5692682" y="2981803"/>
-                  </a:lnTo>
-                  <a:lnTo>
-                    <a:pt x="5769926" y="2989877"/>
-                  </a:lnTo>
-                  <a:lnTo>
-                    <a:pt x="5847169" y="2997821"/>
-                  </a:lnTo>
-                  <a:lnTo>
-                    <a:pt x="5924413" y="3005637"/>
-                  </a:lnTo>
-                  <a:lnTo>
-                    <a:pt x="6001656" y="3013327"/>
-                  </a:lnTo>
-                  <a:lnTo>
-                    <a:pt x="6078900" y="3020893"/>
-                  </a:lnTo>
-                  <a:lnTo>
-                    <a:pt x="6156144" y="3028338"/>
-                  </a:lnTo>
-                  <a:lnTo>
-                    <a:pt x="6233387" y="3035663"/>
-                  </a:lnTo>
-                  <a:lnTo>
-                    <a:pt x="6310631" y="3042870"/>
-                  </a:lnTo>
-                  <a:lnTo>
-                    <a:pt x="6387874" y="3049962"/>
-                  </a:lnTo>
-                  <a:lnTo>
-                    <a:pt x="6465118" y="3056939"/>
-                  </a:lnTo>
-                  <a:lnTo>
-                    <a:pt x="6542361" y="3063804"/>
-                  </a:lnTo>
-                  <a:lnTo>
-                    <a:pt x="6619605" y="3070559"/>
-                  </a:lnTo>
-                  <a:lnTo>
-                    <a:pt x="6696849" y="3077205"/>
-                  </a:lnTo>
-                  <a:lnTo>
-                    <a:pt x="6774092" y="3083744"/>
-                  </a:lnTo>
-                  <a:lnTo>
-                    <a:pt x="6851336" y="3090178"/>
-                  </a:lnTo>
-                  <a:lnTo>
-                    <a:pt x="6928579" y="3096508"/>
-                  </a:lnTo>
-                  <a:lnTo>
-                    <a:pt x="7005823" y="3102737"/>
-                  </a:lnTo>
-                  <a:lnTo>
-                    <a:pt x="7083066" y="3108865"/>
-                  </a:lnTo>
-                  <a:lnTo>
-                    <a:pt x="7160310" y="3114895"/>
-                  </a:lnTo>
-                  <a:lnTo>
-                    <a:pt x="7237554" y="3120828"/>
-                  </a:lnTo>
-                  <a:lnTo>
-                    <a:pt x="7314797" y="3126665"/>
-                  </a:lnTo>
-                  <a:lnTo>
-                    <a:pt x="7392041" y="3132409"/>
-                  </a:lnTo>
-                  <a:lnTo>
-                    <a:pt x="7392041" y="3423835"/>
-                  </a:lnTo>
-                  <a:lnTo>
-                    <a:pt x="7314797" y="3420788"/>
-                  </a:lnTo>
-                  <a:lnTo>
-                    <a:pt x="7237554" y="3417586"/>
-                  </a:lnTo>
-                  <a:lnTo>
-                    <a:pt x="7160310" y="3414221"/>
-                  </a:lnTo>
-                  <a:lnTo>
-                    <a:pt x="7083066" y="3410685"/>
-                  </a:lnTo>
-                  <a:lnTo>
-                    <a:pt x="7005823" y="3406970"/>
-                  </a:lnTo>
-                  <a:lnTo>
-                    <a:pt x="6928579" y="3403065"/>
-                  </a:lnTo>
-                  <a:lnTo>
-                    <a:pt x="6851336" y="3398962"/>
-                  </a:lnTo>
-                  <a:lnTo>
-                    <a:pt x="6774092" y="3394650"/>
-                  </a:lnTo>
-                  <a:lnTo>
-                    <a:pt x="6696849" y="3390119"/>
-                  </a:lnTo>
-                  <a:lnTo>
-                    <a:pt x="6619605" y="3385358"/>
-                  </a:lnTo>
-                  <a:lnTo>
-                    <a:pt x="6542361" y="3380354"/>
-                  </a:lnTo>
-                  <a:lnTo>
-                    <a:pt x="6465118" y="3375096"/>
-                  </a:lnTo>
-                  <a:lnTo>
-                    <a:pt x="6387874" y="3369570"/>
-                  </a:lnTo>
-                  <a:lnTo>
-                    <a:pt x="6310631" y="3363764"/>
-                  </a:lnTo>
-                  <a:lnTo>
-                    <a:pt x="6233387" y="3357662"/>
-                  </a:lnTo>
-                  <a:lnTo>
-                    <a:pt x="6156144" y="3351250"/>
-                  </a:lnTo>
-                  <a:lnTo>
-                    <a:pt x="6078900" y="3344511"/>
-                  </a:lnTo>
-                  <a:lnTo>
-                    <a:pt x="6001656" y="3337430"/>
-                  </a:lnTo>
-                  <a:lnTo>
-                    <a:pt x="5924413" y="3329989"/>
-                  </a:lnTo>
-                  <a:lnTo>
-                    <a:pt x="5847169" y="3322170"/>
-                  </a:lnTo>
-                  <a:lnTo>
-                    <a:pt x="5769926" y="3313952"/>
-                  </a:lnTo>
-                  <a:lnTo>
-                    <a:pt x="5692682" y="3305317"/>
-                  </a:lnTo>
-                  <a:lnTo>
-                    <a:pt x="5615439" y="3296243"/>
-                  </a:lnTo>
-                  <a:lnTo>
-                    <a:pt x="5538195" y="3286707"/>
-                  </a:lnTo>
-                  <a:lnTo>
-                    <a:pt x="5460951" y="3276687"/>
-                  </a:lnTo>
-                  <a:lnTo>
-                    <a:pt x="5383708" y="3266156"/>
-                  </a:lnTo>
-                  <a:lnTo>
-                    <a:pt x="5306464" y="3255091"/>
-                  </a:lnTo>
-                  <a:lnTo>
-                    <a:pt x="5229221" y="3243462"/>
-                  </a:lnTo>
-                  <a:lnTo>
-                    <a:pt x="5151977" y="3231242"/>
-                  </a:lnTo>
-                  <a:lnTo>
-                    <a:pt x="5074734" y="3218401"/>
-                  </a:lnTo>
-                  <a:lnTo>
-                    <a:pt x="4997490" y="3204906"/>
-                  </a:lnTo>
-                  <a:lnTo>
-                    <a:pt x="4920246" y="3190725"/>
-                  </a:lnTo>
-                  <a:lnTo>
-                    <a:pt x="4843003" y="3175823"/>
-                  </a:lnTo>
-                  <a:lnTo>
-                    <a:pt x="4765759" y="3160163"/>
-                  </a:lnTo>
-                  <a:lnTo>
-                    <a:pt x="4688516" y="3143707"/>
-                  </a:lnTo>
-                  <a:lnTo>
-                    <a:pt x="4611272" y="3126414"/>
-                  </a:lnTo>
-                  <a:lnTo>
-                    <a:pt x="4534029" y="3108242"/>
-                  </a:lnTo>
-                  <a:lnTo>
-                    <a:pt x="4456785" y="3089145"/>
-                  </a:lnTo>
-                  <a:lnTo>
-                    <a:pt x="4379541" y="3069077"/>
-                  </a:lnTo>
-                  <a:lnTo>
-                    <a:pt x="4302298" y="3047988"/>
-                  </a:lnTo>
-                  <a:lnTo>
-                    <a:pt x="4225054" y="3025827"/>
-                  </a:lnTo>
-                  <a:lnTo>
-                    <a:pt x="4147811" y="3002539"/>
-                  </a:lnTo>
-                  <a:lnTo>
-                    <a:pt x="4070567" y="2978067"/>
-                  </a:lnTo>
-                  <a:lnTo>
-                    <a:pt x="3993324" y="2952350"/>
-                  </a:lnTo>
-                  <a:lnTo>
-                    <a:pt x="3916080" y="2925325"/>
-                  </a:lnTo>
-                  <a:lnTo>
-                    <a:pt x="3838836" y="2896925"/>
-                  </a:lnTo>
-                  <a:lnTo>
-                    <a:pt x="3761593" y="2867082"/>
-                  </a:lnTo>
-                  <a:lnTo>
-                    <a:pt x="3684349" y="2835721"/>
-                  </a:lnTo>
-                  <a:lnTo>
-                    <a:pt x="3607106" y="2802764"/>
-                  </a:lnTo>
-                  <a:lnTo>
-                    <a:pt x="3529862" y="2768132"/>
-                  </a:lnTo>
-                  <a:lnTo>
-                    <a:pt x="3452619" y="2731739"/>
-                  </a:lnTo>
-                  <a:lnTo>
-                    <a:pt x="3375375" y="2693494"/>
-                  </a:lnTo>
-                  <a:lnTo>
-                    <a:pt x="3298131" y="2653963"/>
-                  </a:lnTo>
-                  <a:lnTo>
-                    <a:pt x="3220888" y="2640398"/>
-                  </a:lnTo>
-                  <a:lnTo>
-                    <a:pt x="3143644" y="2626612"/>
-                  </a:lnTo>
-                  <a:lnTo>
-                    <a:pt x="3066401" y="2612600"/>
-                  </a:lnTo>
-                  <a:lnTo>
-                    <a:pt x="2989157" y="2598358"/>
-                  </a:lnTo>
-                  <a:lnTo>
-                    <a:pt x="2911914" y="2583884"/>
-                  </a:lnTo>
-                  <a:lnTo>
-                    <a:pt x="2834670" y="2569174"/>
-                  </a:lnTo>
-                  <a:lnTo>
-                    <a:pt x="2757426" y="2554223"/>
-                  </a:lnTo>
-                  <a:lnTo>
-                    <a:pt x="2680183" y="2539027"/>
-                  </a:lnTo>
-                  <a:lnTo>
-                    <a:pt x="2602939" y="2523584"/>
-                  </a:lnTo>
-                  <a:lnTo>
-                    <a:pt x="2525696" y="2507887"/>
-                  </a:lnTo>
-                  <a:lnTo>
-                    <a:pt x="2448452" y="2491934"/>
-                  </a:lnTo>
-                  <a:lnTo>
-                    <a:pt x="2371209" y="2475720"/>
-                  </a:lnTo>
-                  <a:lnTo>
-                    <a:pt x="2293965" y="2459242"/>
-                  </a:lnTo>
-                  <a:lnTo>
-                    <a:pt x="2216721" y="2442494"/>
-                  </a:lnTo>
-                  <a:lnTo>
-                    <a:pt x="2139478" y="2425472"/>
-                  </a:lnTo>
-                  <a:lnTo>
-                    <a:pt x="2062234" y="2408171"/>
-                  </a:lnTo>
-                  <a:lnTo>
-                    <a:pt x="1984991" y="2390588"/>
-                  </a:lnTo>
-                  <a:lnTo>
-                    <a:pt x="1907747" y="2372718"/>
-                  </a:lnTo>
-                  <a:lnTo>
-                    <a:pt x="1830504" y="2354555"/>
-                  </a:lnTo>
-                  <a:lnTo>
-                    <a:pt x="1753260" y="2336096"/>
-                  </a:lnTo>
-                  <a:lnTo>
-                    <a:pt x="1676016" y="2317334"/>
-                  </a:lnTo>
-                  <a:lnTo>
-                    <a:pt x="1598773" y="2298266"/>
-                  </a:lnTo>
-                  <a:lnTo>
-                    <a:pt x="1521529" y="2278886"/>
-                  </a:lnTo>
-                  <a:lnTo>
-                    <a:pt x="1444286" y="2259190"/>
-                  </a:lnTo>
-                  <a:lnTo>
-                    <a:pt x="1367042" y="2239171"/>
-                  </a:lnTo>
-                  <a:lnTo>
-                    <a:pt x="1289799" y="2218826"/>
-                  </a:lnTo>
-                  <a:lnTo>
-                    <a:pt x="1212555" y="2198147"/>
-                  </a:lnTo>
-                  <a:lnTo>
-                    <a:pt x="1135311" y="2177131"/>
-                  </a:lnTo>
-                  <a:lnTo>
-                    <a:pt x="1058068" y="2155771"/>
-                  </a:lnTo>
-                  <a:lnTo>
-                    <a:pt x="980824" y="2134062"/>
-                  </a:lnTo>
-                  <a:lnTo>
-                    <a:pt x="903581" y="2111997"/>
-                  </a:lnTo>
-                  <a:lnTo>
-                    <a:pt x="826337" y="2089573"/>
-                  </a:lnTo>
-                  <a:lnTo>
-                    <a:pt x="749094" y="2066781"/>
-                  </a:lnTo>
-                  <a:lnTo>
-                    <a:pt x="671850" y="2043617"/>
-                  </a:lnTo>
-                  <a:lnTo>
-                    <a:pt x="594606" y="2020075"/>
-                  </a:lnTo>
-                  <a:lnTo>
-                    <a:pt x="517363" y="1996147"/>
-                  </a:lnTo>
-                  <a:lnTo>
-                    <a:pt x="440119" y="1971829"/>
-                  </a:lnTo>
-                  <a:lnTo>
-                    <a:pt x="362876" y="1947112"/>
-                  </a:lnTo>
-                  <a:lnTo>
-                    <a:pt x="285632" y="1921992"/>
-                  </a:lnTo>
-                  <a:lnTo>
-                    <a:pt x="208389" y="1896461"/>
-                  </a:lnTo>
-                  <a:lnTo>
-                    <a:pt x="131145" y="1870513"/>
-                  </a:lnTo>
-                  <a:lnTo>
-                    <a:pt x="53901" y="1844140"/>
-                  </a:lnTo>
-                  <a:lnTo>
-                    <a:pt x="0" y="1825436"/>
+                    <a:pt x="1289205" y="153147"/>
+                  </a:lnTo>
+                  <a:lnTo>
+                    <a:pt x="1360827" y="314331"/>
+                  </a:lnTo>
+                  <a:lnTo>
+                    <a:pt x="1432450" y="467716"/>
+                  </a:lnTo>
+                  <a:lnTo>
+                    <a:pt x="1504073" y="613677"/>
+                  </a:lnTo>
+                  <a:lnTo>
+                    <a:pt x="1575695" y="752574"/>
+                  </a:lnTo>
+                  <a:lnTo>
+                    <a:pt x="1647318" y="884750"/>
+                  </a:lnTo>
+                  <a:lnTo>
+                    <a:pt x="1718940" y="1010528"/>
+                  </a:lnTo>
+                  <a:lnTo>
+                    <a:pt x="1790563" y="1130220"/>
+                  </a:lnTo>
+                  <a:lnTo>
+                    <a:pt x="1862185" y="1244119"/>
+                  </a:lnTo>
+                  <a:lnTo>
+                    <a:pt x="1933808" y="1352506"/>
+                  </a:lnTo>
+                  <a:lnTo>
+                    <a:pt x="2005430" y="1455648"/>
+                  </a:lnTo>
+                  <a:lnTo>
+                    <a:pt x="2077053" y="1553798"/>
+                  </a:lnTo>
+                  <a:lnTo>
+                    <a:pt x="2148675" y="1647198"/>
+                  </a:lnTo>
+                  <a:lnTo>
+                    <a:pt x="2220298" y="1736078"/>
+                  </a:lnTo>
+                  <a:lnTo>
+                    <a:pt x="2291920" y="1820657"/>
+                  </a:lnTo>
+                  <a:lnTo>
+                    <a:pt x="2363543" y="1901142"/>
+                  </a:lnTo>
+                  <a:lnTo>
+                    <a:pt x="2435165" y="1977732"/>
+                  </a:lnTo>
+                  <a:lnTo>
+                    <a:pt x="2506788" y="2050616"/>
+                  </a:lnTo>
+                  <a:lnTo>
+                    <a:pt x="2578410" y="2119973"/>
+                  </a:lnTo>
+                  <a:lnTo>
+                    <a:pt x="2650033" y="2185972"/>
+                  </a:lnTo>
+                  <a:lnTo>
+                    <a:pt x="2721655" y="2248778"/>
+                  </a:lnTo>
+                  <a:lnTo>
+                    <a:pt x="2793278" y="2308545"/>
+                  </a:lnTo>
+                  <a:lnTo>
+                    <a:pt x="2864901" y="2365419"/>
+                  </a:lnTo>
+                  <a:lnTo>
+                    <a:pt x="2936523" y="2419540"/>
+                  </a:lnTo>
+                  <a:lnTo>
+                    <a:pt x="3008146" y="2471043"/>
+                  </a:lnTo>
+                  <a:lnTo>
+                    <a:pt x="3079768" y="2520053"/>
+                  </a:lnTo>
+                  <a:lnTo>
+                    <a:pt x="3151391" y="2566691"/>
+                  </a:lnTo>
+                  <a:lnTo>
+                    <a:pt x="3223013" y="2611072"/>
+                  </a:lnTo>
+                  <a:lnTo>
+                    <a:pt x="3294636" y="2653305"/>
+                  </a:lnTo>
+                  <a:lnTo>
+                    <a:pt x="3366258" y="2667310"/>
+                  </a:lnTo>
+                  <a:lnTo>
+                    <a:pt x="3437881" y="2680442"/>
+                  </a:lnTo>
+                  <a:lnTo>
+                    <a:pt x="3509503" y="2693363"/>
+                  </a:lnTo>
+                  <a:lnTo>
+                    <a:pt x="3581126" y="2706076"/>
+                  </a:lnTo>
+                  <a:lnTo>
+                    <a:pt x="3652748" y="2718585"/>
+                  </a:lnTo>
+                  <a:lnTo>
+                    <a:pt x="3724371" y="2730892"/>
+                  </a:lnTo>
+                  <a:lnTo>
+                    <a:pt x="3795993" y="2743001"/>
+                  </a:lnTo>
+                  <a:lnTo>
+                    <a:pt x="3867616" y="2754916"/>
+                  </a:lnTo>
+                  <a:lnTo>
+                    <a:pt x="3939238" y="2766639"/>
+                  </a:lnTo>
+                  <a:lnTo>
+                    <a:pt x="4010861" y="2778173"/>
+                  </a:lnTo>
+                  <a:lnTo>
+                    <a:pt x="4082483" y="2789522"/>
+                  </a:lnTo>
+                  <a:lnTo>
+                    <a:pt x="4154106" y="2800689"/>
+                  </a:lnTo>
+                  <a:lnTo>
+                    <a:pt x="4225729" y="2811675"/>
+                  </a:lnTo>
+                  <a:lnTo>
+                    <a:pt x="4297351" y="2822485"/>
+                  </a:lnTo>
+                  <a:lnTo>
+                    <a:pt x="4368974" y="2833122"/>
+                  </a:lnTo>
+                  <a:lnTo>
+                    <a:pt x="4440596" y="2843587"/>
+                  </a:lnTo>
+                  <a:lnTo>
+                    <a:pt x="4512219" y="2853883"/>
+                  </a:lnTo>
+                  <a:lnTo>
+                    <a:pt x="4583841" y="2864014"/>
+                  </a:lnTo>
+                  <a:lnTo>
+                    <a:pt x="4655464" y="2873983"/>
+                  </a:lnTo>
+                  <a:lnTo>
+                    <a:pt x="4727086" y="2883790"/>
+                  </a:lnTo>
+                  <a:lnTo>
+                    <a:pt x="4798709" y="2893441"/>
+                  </a:lnTo>
+                  <a:lnTo>
+                    <a:pt x="4870331" y="2902935"/>
+                  </a:lnTo>
+                  <a:lnTo>
+                    <a:pt x="4941954" y="2912278"/>
+                  </a:lnTo>
+                  <a:lnTo>
+                    <a:pt x="5013576" y="2921469"/>
+                  </a:lnTo>
+                  <a:lnTo>
+                    <a:pt x="5085199" y="2930513"/>
+                  </a:lnTo>
+                  <a:lnTo>
+                    <a:pt x="5156821" y="2939412"/>
+                  </a:lnTo>
+                  <a:lnTo>
+                    <a:pt x="5228444" y="2948167"/>
+                  </a:lnTo>
+                  <a:lnTo>
+                    <a:pt x="5300066" y="2956782"/>
+                  </a:lnTo>
+                  <a:lnTo>
+                    <a:pt x="5371689" y="2965258"/>
+                  </a:lnTo>
+                  <a:lnTo>
+                    <a:pt x="5443311" y="2973598"/>
+                  </a:lnTo>
+                  <a:lnTo>
+                    <a:pt x="5514934" y="2981803"/>
+                  </a:lnTo>
+                  <a:lnTo>
+                    <a:pt x="5586557" y="2989877"/>
+                  </a:lnTo>
+                  <a:lnTo>
+                    <a:pt x="5658179" y="2997821"/>
+                  </a:lnTo>
+                  <a:lnTo>
+                    <a:pt x="5729802" y="3005637"/>
+                  </a:lnTo>
+                  <a:lnTo>
+                    <a:pt x="5801424" y="3013327"/>
+                  </a:lnTo>
+                  <a:lnTo>
+                    <a:pt x="5873047" y="3020893"/>
+                  </a:lnTo>
+                  <a:lnTo>
+                    <a:pt x="5944669" y="3028338"/>
+                  </a:lnTo>
+                  <a:lnTo>
+                    <a:pt x="6016292" y="3035663"/>
+                  </a:lnTo>
+                  <a:lnTo>
+                    <a:pt x="6087914" y="3042870"/>
+                  </a:lnTo>
+                  <a:lnTo>
+                    <a:pt x="6159537" y="3049962"/>
+                  </a:lnTo>
+                  <a:lnTo>
+                    <a:pt x="6231159" y="3056939"/>
+                  </a:lnTo>
+                  <a:lnTo>
+                    <a:pt x="6302782" y="3063804"/>
+                  </a:lnTo>
+                  <a:lnTo>
+                    <a:pt x="6374404" y="3070559"/>
+                  </a:lnTo>
+                  <a:lnTo>
+                    <a:pt x="6446027" y="3077205"/>
+                  </a:lnTo>
+                  <a:lnTo>
+                    <a:pt x="6517649" y="3083744"/>
+                  </a:lnTo>
+                  <a:lnTo>
+                    <a:pt x="6589272" y="3090178"/>
+                  </a:lnTo>
+                  <a:lnTo>
+                    <a:pt x="6660894" y="3096508"/>
+                  </a:lnTo>
+                  <a:lnTo>
+                    <a:pt x="6732517" y="3102737"/>
+                  </a:lnTo>
+                  <a:lnTo>
+                    <a:pt x="6804139" y="3108865"/>
+                  </a:lnTo>
+                  <a:lnTo>
+                    <a:pt x="6875762" y="3114895"/>
+                  </a:lnTo>
+                  <a:lnTo>
+                    <a:pt x="6947385" y="3120828"/>
+                  </a:lnTo>
+                  <a:lnTo>
+                    <a:pt x="7019007" y="3126665"/>
+                  </a:lnTo>
+                  <a:lnTo>
+                    <a:pt x="7090630" y="3132409"/>
+                  </a:lnTo>
+                  <a:lnTo>
+                    <a:pt x="7090630" y="3423835"/>
+                  </a:lnTo>
+                  <a:lnTo>
+                    <a:pt x="7019007" y="3420788"/>
+                  </a:lnTo>
+                  <a:lnTo>
+                    <a:pt x="6947385" y="3417586"/>
+                  </a:lnTo>
+                  <a:lnTo>
+                    <a:pt x="6875762" y="3414221"/>
+                  </a:lnTo>
+                  <a:lnTo>
+                    <a:pt x="6804139" y="3410685"/>
+                  </a:lnTo>
+                  <a:lnTo>
+                    <a:pt x="6732517" y="3406970"/>
+                  </a:lnTo>
+                  <a:lnTo>
+                    <a:pt x="6660894" y="3403065"/>
+                  </a:lnTo>
+                  <a:lnTo>
+                    <a:pt x="6589272" y="3398962"/>
+                  </a:lnTo>
+                  <a:lnTo>
+                    <a:pt x="6517649" y="3394650"/>
+                  </a:lnTo>
+                  <a:lnTo>
+                    <a:pt x="6446027" y="3390119"/>
+                  </a:lnTo>
+                  <a:lnTo>
+                    <a:pt x="6374404" y="3385358"/>
+                  </a:lnTo>
+                  <a:lnTo>
+                    <a:pt x="6302782" y="3380354"/>
+                  </a:lnTo>
+                  <a:lnTo>
+                    <a:pt x="6231159" y="3375096"/>
+                  </a:lnTo>
+                  <a:lnTo>
+                    <a:pt x="6159537" y="3369570"/>
+                  </a:lnTo>
+                  <a:lnTo>
+                    <a:pt x="6087914" y="3363764"/>
+                  </a:lnTo>
+                  <a:lnTo>
+                    <a:pt x="6016292" y="3357662"/>
+                  </a:lnTo>
+                  <a:lnTo>
+                    <a:pt x="5944669" y="3351250"/>
+                  </a:lnTo>
+                  <a:lnTo>
+                    <a:pt x="5873047" y="3344511"/>
+                  </a:lnTo>
+                  <a:lnTo>
+                    <a:pt x="5801424" y="3337430"/>
+                  </a:lnTo>
+                  <a:lnTo>
+                    <a:pt x="5729802" y="3329989"/>
+                  </a:lnTo>
+                  <a:lnTo>
+                    <a:pt x="5658179" y="3322170"/>
+                  </a:lnTo>
+                  <a:lnTo>
+                    <a:pt x="5586557" y="3313952"/>
+                  </a:lnTo>
+                  <a:lnTo>
+                    <a:pt x="5514934" y="3305317"/>
+                  </a:lnTo>
+                  <a:lnTo>
+                    <a:pt x="5443311" y="3296243"/>
+                  </a:lnTo>
+                  <a:lnTo>
+                    <a:pt x="5371689" y="3286707"/>
+                  </a:lnTo>
+                  <a:lnTo>
+                    <a:pt x="5300066" y="3276687"/>
+                  </a:lnTo>
+                  <a:lnTo>
+                    <a:pt x="5228444" y="3266156"/>
+                  </a:lnTo>
+                  <a:lnTo>
+                    <a:pt x="5156821" y="3255091"/>
+                  </a:lnTo>
+                  <a:lnTo>
+                    <a:pt x="5085199" y="3243462"/>
+                  </a:lnTo>
+                  <a:lnTo>
+                    <a:pt x="5013576" y="3231242"/>
+                  </a:lnTo>
+                  <a:lnTo>
+                    <a:pt x="4941954" y="3218401"/>
+                  </a:lnTo>
+                  <a:lnTo>
+                    <a:pt x="4870331" y="3204906"/>
+                  </a:lnTo>
+                  <a:lnTo>
+                    <a:pt x="4798709" y="3190725"/>
+                  </a:lnTo>
+                  <a:lnTo>
+                    <a:pt x="4727086" y="3175823"/>
+                  </a:lnTo>
+                  <a:lnTo>
+                    <a:pt x="4655464" y="3160163"/>
+                  </a:lnTo>
+                  <a:lnTo>
+                    <a:pt x="4583841" y="3143707"/>
+                  </a:lnTo>
+                  <a:lnTo>
+                    <a:pt x="4512219" y="3126414"/>
+                  </a:lnTo>
+                  <a:lnTo>
+                    <a:pt x="4440596" y="3108242"/>
+                  </a:lnTo>
+                  <a:lnTo>
+                    <a:pt x="4368974" y="3089145"/>
+                  </a:lnTo>
+                  <a:lnTo>
+                    <a:pt x="4297351" y="3069077"/>
+                  </a:lnTo>
+                  <a:lnTo>
+                    <a:pt x="4225729" y="3047988"/>
+                  </a:lnTo>
+                  <a:lnTo>
+                    <a:pt x="4154106" y="3025827"/>
+                  </a:lnTo>
+                  <a:lnTo>
+                    <a:pt x="4082483" y="3002539"/>
+                  </a:lnTo>
+                  <a:lnTo>
+                    <a:pt x="4010861" y="2978067"/>
+                  </a:lnTo>
+                  <a:lnTo>
+                    <a:pt x="3939238" y="2952350"/>
+                  </a:lnTo>
+                  <a:lnTo>
+                    <a:pt x="3867616" y="2925325"/>
+                  </a:lnTo>
+                  <a:lnTo>
+                    <a:pt x="3795993" y="2896925"/>
+                  </a:lnTo>
+                  <a:lnTo>
+                    <a:pt x="3724371" y="2867082"/>
+                  </a:lnTo>
+                  <a:lnTo>
+                    <a:pt x="3652748" y="2835721"/>
+                  </a:lnTo>
+                  <a:lnTo>
+                    <a:pt x="3581126" y="2802764"/>
+                  </a:lnTo>
+                  <a:lnTo>
+                    <a:pt x="3509503" y="2768132"/>
+                  </a:lnTo>
+                  <a:lnTo>
+                    <a:pt x="3437881" y="2731739"/>
+                  </a:lnTo>
+                  <a:lnTo>
+                    <a:pt x="3366258" y="2693494"/>
+                  </a:lnTo>
+                  <a:lnTo>
+                    <a:pt x="3294636" y="2653963"/>
+                  </a:lnTo>
+                  <a:lnTo>
+                    <a:pt x="3223013" y="2640398"/>
+                  </a:lnTo>
+                  <a:lnTo>
+                    <a:pt x="3151391" y="2626612"/>
+                  </a:lnTo>
+                  <a:lnTo>
+                    <a:pt x="3079768" y="2612600"/>
+                  </a:lnTo>
+                  <a:lnTo>
+                    <a:pt x="3008146" y="2598358"/>
+                  </a:lnTo>
+                  <a:lnTo>
+                    <a:pt x="2936523" y="2583884"/>
+                  </a:lnTo>
+                  <a:lnTo>
+                    <a:pt x="2864901" y="2569174"/>
+                  </a:lnTo>
+                  <a:lnTo>
+                    <a:pt x="2793278" y="2554223"/>
+                  </a:lnTo>
+                  <a:lnTo>
+                    <a:pt x="2721655" y="2539027"/>
+                  </a:lnTo>
+                  <a:lnTo>
+                    <a:pt x="2650033" y="2523584"/>
+                  </a:lnTo>
+                  <a:lnTo>
+                    <a:pt x="2578410" y="2507887"/>
+                  </a:lnTo>
+                  <a:lnTo>
+                    <a:pt x="2506788" y="2491934"/>
+                  </a:lnTo>
+                  <a:lnTo>
+                    <a:pt x="2435165" y="2475720"/>
+                  </a:lnTo>
+                  <a:lnTo>
+                    <a:pt x="2363543" y="2459242"/>
+                  </a:lnTo>
+                  <a:lnTo>
+                    <a:pt x="2291920" y="2442494"/>
+                  </a:lnTo>
+                  <a:lnTo>
+                    <a:pt x="2220298" y="2425472"/>
+                  </a:lnTo>
+                  <a:lnTo>
+                    <a:pt x="2148675" y="2408171"/>
+                  </a:lnTo>
+                  <a:lnTo>
+                    <a:pt x="2077053" y="2390588"/>
+                  </a:lnTo>
+                  <a:lnTo>
+                    <a:pt x="2005430" y="2372718"/>
+                  </a:lnTo>
+                  <a:lnTo>
+                    <a:pt x="1933808" y="2354555"/>
+                  </a:lnTo>
+                  <a:lnTo>
+                    <a:pt x="1862185" y="2336096"/>
+                  </a:lnTo>
+                  <a:lnTo>
+                    <a:pt x="1790563" y="2317334"/>
+                  </a:lnTo>
+                  <a:lnTo>
+                    <a:pt x="1718940" y="2298266"/>
+                  </a:lnTo>
+                  <a:lnTo>
+                    <a:pt x="1647318" y="2278886"/>
+                  </a:lnTo>
+                  <a:lnTo>
+                    <a:pt x="1575695" y="2259190"/>
+                  </a:lnTo>
+                  <a:lnTo>
+                    <a:pt x="1504073" y="2239171"/>
+                  </a:lnTo>
+                  <a:lnTo>
+                    <a:pt x="1432450" y="2218826"/>
+                  </a:lnTo>
+                  <a:lnTo>
+                    <a:pt x="1360827" y="2198147"/>
+                  </a:lnTo>
+                  <a:lnTo>
+                    <a:pt x="1289205" y="2177131"/>
+                  </a:lnTo>
+                  <a:lnTo>
+                    <a:pt x="1217582" y="2155771"/>
+                  </a:lnTo>
+                  <a:lnTo>
+                    <a:pt x="1145960" y="2134062"/>
+                  </a:lnTo>
+                  <a:lnTo>
+                    <a:pt x="1074337" y="2111997"/>
+                  </a:lnTo>
+                  <a:lnTo>
+                    <a:pt x="1002715" y="2089573"/>
+                  </a:lnTo>
+                  <a:lnTo>
+                    <a:pt x="931092" y="2066781"/>
+                  </a:lnTo>
+                  <a:lnTo>
+                    <a:pt x="859470" y="2043617"/>
+                  </a:lnTo>
+                  <a:lnTo>
+                    <a:pt x="787847" y="2020075"/>
+                  </a:lnTo>
+                  <a:lnTo>
+                    <a:pt x="716225" y="1996147"/>
+                  </a:lnTo>
+                  <a:lnTo>
+                    <a:pt x="644602" y="1971829"/>
+                  </a:lnTo>
+                  <a:lnTo>
+                    <a:pt x="572980" y="1947112"/>
+                  </a:lnTo>
+                  <a:lnTo>
+                    <a:pt x="501357" y="1921992"/>
+                  </a:lnTo>
+                  <a:lnTo>
+                    <a:pt x="429735" y="1896461"/>
+                  </a:lnTo>
+                  <a:lnTo>
+                    <a:pt x="358112" y="1870513"/>
+                  </a:lnTo>
+                  <a:lnTo>
+                    <a:pt x="286490" y="1844140"/>
+                  </a:lnTo>
+                  <a:lnTo>
+                    <a:pt x="214867" y="1817337"/>
+                  </a:lnTo>
+                  <a:lnTo>
+                    <a:pt x="143245" y="1790095"/>
+                  </a:lnTo>
+                  <a:lnTo>
+                    <a:pt x="71622" y="1762408"/>
+                  </a:lnTo>
+                  <a:lnTo>
+                    <a:pt x="0" y="1734268"/>
                   </a:lnTo>
                   <a:close/>
                 </a:path>
@@ -3567,267 +3533,592 @@
         </p:sp>
         <p:sp>
           <p:nvSpPr>
+            <p:cNvPr id="21" name="pl21"/>
+            <p:cNvSpPr/>
+            <p:nvPr/>
+          </p:nvSpPr>
+          <p:spPr>
+            <a:xfrm>
+              <a:off x="2396497" y="2073503"/>
+              <a:ext cx="5866182" cy="3132409"/>
+            </a:xfrm>
+            <a:custGeom>
+              <a:avLst/>
+              <a:pathLst>
+                <a:path w="5866182" h="3132409">
+                  <a:moveTo>
+                    <a:pt x="0" y="0"/>
+                  </a:moveTo>
+                  <a:lnTo>
+                    <a:pt x="64757" y="153147"/>
+                  </a:lnTo>
+                  <a:lnTo>
+                    <a:pt x="136380" y="314331"/>
+                  </a:lnTo>
+                  <a:lnTo>
+                    <a:pt x="208002" y="467716"/>
+                  </a:lnTo>
+                  <a:lnTo>
+                    <a:pt x="279625" y="613677"/>
+                  </a:lnTo>
+                  <a:lnTo>
+                    <a:pt x="351247" y="752574"/>
+                  </a:lnTo>
+                  <a:lnTo>
+                    <a:pt x="422870" y="884750"/>
+                  </a:lnTo>
+                  <a:lnTo>
+                    <a:pt x="494492" y="1010528"/>
+                  </a:lnTo>
+                  <a:lnTo>
+                    <a:pt x="566115" y="1130220"/>
+                  </a:lnTo>
+                  <a:lnTo>
+                    <a:pt x="637737" y="1244119"/>
+                  </a:lnTo>
+                  <a:lnTo>
+                    <a:pt x="709360" y="1352506"/>
+                  </a:lnTo>
+                  <a:lnTo>
+                    <a:pt x="780982" y="1455648"/>
+                  </a:lnTo>
+                  <a:lnTo>
+                    <a:pt x="852605" y="1553798"/>
+                  </a:lnTo>
+                  <a:lnTo>
+                    <a:pt x="924228" y="1647198"/>
+                  </a:lnTo>
+                  <a:lnTo>
+                    <a:pt x="995850" y="1736078"/>
+                  </a:lnTo>
+                  <a:lnTo>
+                    <a:pt x="1067473" y="1820657"/>
+                  </a:lnTo>
+                  <a:lnTo>
+                    <a:pt x="1139095" y="1901142"/>
+                  </a:lnTo>
+                  <a:lnTo>
+                    <a:pt x="1210718" y="1977732"/>
+                  </a:lnTo>
+                  <a:lnTo>
+                    <a:pt x="1282340" y="2050616"/>
+                  </a:lnTo>
+                  <a:lnTo>
+                    <a:pt x="1353963" y="2119973"/>
+                  </a:lnTo>
+                  <a:lnTo>
+                    <a:pt x="1425585" y="2185972"/>
+                  </a:lnTo>
+                  <a:lnTo>
+                    <a:pt x="1497208" y="2248778"/>
+                  </a:lnTo>
+                  <a:lnTo>
+                    <a:pt x="1568830" y="2308545"/>
+                  </a:lnTo>
+                  <a:lnTo>
+                    <a:pt x="1640453" y="2365419"/>
+                  </a:lnTo>
+                  <a:lnTo>
+                    <a:pt x="1712075" y="2419540"/>
+                  </a:lnTo>
+                  <a:lnTo>
+                    <a:pt x="1783698" y="2471043"/>
+                  </a:lnTo>
+                  <a:lnTo>
+                    <a:pt x="1855320" y="2520053"/>
+                  </a:lnTo>
+                  <a:lnTo>
+                    <a:pt x="1926943" y="2566691"/>
+                  </a:lnTo>
+                  <a:lnTo>
+                    <a:pt x="1998565" y="2611072"/>
+                  </a:lnTo>
+                  <a:lnTo>
+                    <a:pt x="2070188" y="2653305"/>
+                  </a:lnTo>
+                  <a:lnTo>
+                    <a:pt x="2141810" y="2667310"/>
+                  </a:lnTo>
+                  <a:lnTo>
+                    <a:pt x="2213433" y="2680442"/>
+                  </a:lnTo>
+                  <a:lnTo>
+                    <a:pt x="2285055" y="2693363"/>
+                  </a:lnTo>
+                  <a:lnTo>
+                    <a:pt x="2356678" y="2706076"/>
+                  </a:lnTo>
+                  <a:lnTo>
+                    <a:pt x="2428301" y="2718585"/>
+                  </a:lnTo>
+                  <a:lnTo>
+                    <a:pt x="2499923" y="2730892"/>
+                  </a:lnTo>
+                  <a:lnTo>
+                    <a:pt x="2571546" y="2743001"/>
+                  </a:lnTo>
+                  <a:lnTo>
+                    <a:pt x="2643168" y="2754916"/>
+                  </a:lnTo>
+                  <a:lnTo>
+                    <a:pt x="2714791" y="2766639"/>
+                  </a:lnTo>
+                  <a:lnTo>
+                    <a:pt x="2786413" y="2778173"/>
+                  </a:lnTo>
+                  <a:lnTo>
+                    <a:pt x="2858036" y="2789522"/>
+                  </a:lnTo>
+                  <a:lnTo>
+                    <a:pt x="2929658" y="2800689"/>
+                  </a:lnTo>
+                  <a:lnTo>
+                    <a:pt x="3001281" y="2811675"/>
+                  </a:lnTo>
+                  <a:lnTo>
+                    <a:pt x="3072903" y="2822485"/>
+                  </a:lnTo>
+                  <a:lnTo>
+                    <a:pt x="3144526" y="2833122"/>
+                  </a:lnTo>
+                  <a:lnTo>
+                    <a:pt x="3216148" y="2843587"/>
+                  </a:lnTo>
+                  <a:lnTo>
+                    <a:pt x="3287771" y="2853883"/>
+                  </a:lnTo>
+                  <a:lnTo>
+                    <a:pt x="3359393" y="2864014"/>
+                  </a:lnTo>
+                  <a:lnTo>
+                    <a:pt x="3431016" y="2873983"/>
+                  </a:lnTo>
+                  <a:lnTo>
+                    <a:pt x="3502638" y="2883790"/>
+                  </a:lnTo>
+                  <a:lnTo>
+                    <a:pt x="3574261" y="2893441"/>
+                  </a:lnTo>
+                  <a:lnTo>
+                    <a:pt x="3645883" y="2902935"/>
+                  </a:lnTo>
+                  <a:lnTo>
+                    <a:pt x="3717506" y="2912278"/>
+                  </a:lnTo>
+                  <a:lnTo>
+                    <a:pt x="3789129" y="2921469"/>
+                  </a:lnTo>
+                  <a:lnTo>
+                    <a:pt x="3860751" y="2930513"/>
+                  </a:lnTo>
+                  <a:lnTo>
+                    <a:pt x="3932374" y="2939412"/>
+                  </a:lnTo>
+                  <a:lnTo>
+                    <a:pt x="4003996" y="2948167"/>
+                  </a:lnTo>
+                  <a:lnTo>
+                    <a:pt x="4075619" y="2956782"/>
+                  </a:lnTo>
+                  <a:lnTo>
+                    <a:pt x="4147241" y="2965258"/>
+                  </a:lnTo>
+                  <a:lnTo>
+                    <a:pt x="4218864" y="2973598"/>
+                  </a:lnTo>
+                  <a:lnTo>
+                    <a:pt x="4290486" y="2981803"/>
+                  </a:lnTo>
+                  <a:lnTo>
+                    <a:pt x="4362109" y="2989877"/>
+                  </a:lnTo>
+                  <a:lnTo>
+                    <a:pt x="4433731" y="2997821"/>
+                  </a:lnTo>
+                  <a:lnTo>
+                    <a:pt x="4505354" y="3005637"/>
+                  </a:lnTo>
+                  <a:lnTo>
+                    <a:pt x="4576976" y="3013327"/>
+                  </a:lnTo>
+                  <a:lnTo>
+                    <a:pt x="4648599" y="3020893"/>
+                  </a:lnTo>
+                  <a:lnTo>
+                    <a:pt x="4720221" y="3028338"/>
+                  </a:lnTo>
+                  <a:lnTo>
+                    <a:pt x="4791844" y="3035663"/>
+                  </a:lnTo>
+                  <a:lnTo>
+                    <a:pt x="4863466" y="3042870"/>
+                  </a:lnTo>
+                  <a:lnTo>
+                    <a:pt x="4935089" y="3049962"/>
+                  </a:lnTo>
+                  <a:lnTo>
+                    <a:pt x="5006711" y="3056939"/>
+                  </a:lnTo>
+                  <a:lnTo>
+                    <a:pt x="5078334" y="3063804"/>
+                  </a:lnTo>
+                  <a:lnTo>
+                    <a:pt x="5149957" y="3070559"/>
+                  </a:lnTo>
+                  <a:lnTo>
+                    <a:pt x="5221579" y="3077205"/>
+                  </a:lnTo>
+                  <a:lnTo>
+                    <a:pt x="5293202" y="3083744"/>
+                  </a:lnTo>
+                  <a:lnTo>
+                    <a:pt x="5364824" y="3090178"/>
+                  </a:lnTo>
+                  <a:lnTo>
+                    <a:pt x="5436447" y="3096508"/>
+                  </a:lnTo>
+                  <a:lnTo>
+                    <a:pt x="5508069" y="3102737"/>
+                  </a:lnTo>
+                  <a:lnTo>
+                    <a:pt x="5579692" y="3108865"/>
+                  </a:lnTo>
+                  <a:lnTo>
+                    <a:pt x="5651314" y="3114895"/>
+                  </a:lnTo>
+                  <a:lnTo>
+                    <a:pt x="5722937" y="3120828"/>
+                  </a:lnTo>
+                  <a:lnTo>
+                    <a:pt x="5794559" y="3126665"/>
+                  </a:lnTo>
+                  <a:lnTo>
+                    <a:pt x="5866182" y="3132409"/>
+                  </a:lnTo>
+                </a:path>
+              </a:pathLst>
+            </a:custGeom>
+          </p:spPr>
+          <p:txBody>
+            <a:bodyPr/>
+            <a:lstStyle/>
+            <a:p/>
+          </p:txBody>
+        </p:sp>
+        <p:sp>
+          <p:nvSpPr>
             <p:cNvPr id="22" name="pl22"/>
             <p:cNvSpPr/>
             <p:nvPr/>
           </p:nvSpPr>
           <p:spPr>
             <a:xfrm>
-              <a:off x="1882989" y="2073503"/>
-              <a:ext cx="6326569" cy="3132409"/>
+              <a:off x="1172049" y="3807771"/>
+              <a:ext cx="7090630" cy="1689566"/>
             </a:xfrm>
             <a:custGeom>
               <a:avLst/>
               <a:pathLst>
-                <a:path w="6326569" h="3132409">
+                <a:path w="7090630" h="1689566">
                   <a:moveTo>
+                    <a:pt x="7090630" y="1689566"/>
+                  </a:moveTo>
+                  <a:lnTo>
+                    <a:pt x="7019007" y="1686519"/>
+                  </a:lnTo>
+                  <a:lnTo>
+                    <a:pt x="6947385" y="1683317"/>
+                  </a:lnTo>
+                  <a:lnTo>
+                    <a:pt x="6875762" y="1679953"/>
+                  </a:lnTo>
+                  <a:lnTo>
+                    <a:pt x="6804139" y="1676417"/>
+                  </a:lnTo>
+                  <a:lnTo>
+                    <a:pt x="6732517" y="1672701"/>
+                  </a:lnTo>
+                  <a:lnTo>
+                    <a:pt x="6660894" y="1668797"/>
+                  </a:lnTo>
+                  <a:lnTo>
+                    <a:pt x="6589272" y="1664693"/>
+                  </a:lnTo>
+                  <a:lnTo>
+                    <a:pt x="6517649" y="1660382"/>
+                  </a:lnTo>
+                  <a:lnTo>
+                    <a:pt x="6446027" y="1655851"/>
+                  </a:lnTo>
+                  <a:lnTo>
+                    <a:pt x="6374404" y="1651089"/>
+                  </a:lnTo>
+                  <a:lnTo>
+                    <a:pt x="6302782" y="1646085"/>
+                  </a:lnTo>
+                  <a:lnTo>
+                    <a:pt x="6231159" y="1640827"/>
+                  </a:lnTo>
+                  <a:lnTo>
+                    <a:pt x="6159537" y="1635302"/>
+                  </a:lnTo>
+                  <a:lnTo>
+                    <a:pt x="6087914" y="1629495"/>
+                  </a:lnTo>
+                  <a:lnTo>
+                    <a:pt x="6016292" y="1623393"/>
+                  </a:lnTo>
+                  <a:lnTo>
+                    <a:pt x="5944669" y="1616981"/>
+                  </a:lnTo>
+                  <a:lnTo>
+                    <a:pt x="5873047" y="1610243"/>
+                  </a:lnTo>
+                  <a:lnTo>
+                    <a:pt x="5801424" y="1603162"/>
+                  </a:lnTo>
+                  <a:lnTo>
+                    <a:pt x="5729802" y="1595721"/>
+                  </a:lnTo>
+                  <a:lnTo>
+                    <a:pt x="5658179" y="1587901"/>
+                  </a:lnTo>
+                  <a:lnTo>
+                    <a:pt x="5586557" y="1579684"/>
+                  </a:lnTo>
+                  <a:lnTo>
+                    <a:pt x="5514934" y="1571049"/>
+                  </a:lnTo>
+                  <a:lnTo>
+                    <a:pt x="5443311" y="1561974"/>
+                  </a:lnTo>
+                  <a:lnTo>
+                    <a:pt x="5371689" y="1552439"/>
+                  </a:lnTo>
+                  <a:lnTo>
+                    <a:pt x="5300066" y="1542418"/>
+                  </a:lnTo>
+                  <a:lnTo>
+                    <a:pt x="5228444" y="1531888"/>
+                  </a:lnTo>
+                  <a:lnTo>
+                    <a:pt x="5156821" y="1520822"/>
+                  </a:lnTo>
+                  <a:lnTo>
+                    <a:pt x="5085199" y="1509193"/>
+                  </a:lnTo>
+                  <a:lnTo>
+                    <a:pt x="5013576" y="1496973"/>
+                  </a:lnTo>
+                  <a:lnTo>
+                    <a:pt x="4941954" y="1484132"/>
+                  </a:lnTo>
+                  <a:lnTo>
+                    <a:pt x="4870331" y="1470637"/>
+                  </a:lnTo>
+                  <a:lnTo>
+                    <a:pt x="4798709" y="1456457"/>
+                  </a:lnTo>
+                  <a:lnTo>
+                    <a:pt x="4727086" y="1441555"/>
+                  </a:lnTo>
+                  <a:lnTo>
+                    <a:pt x="4655464" y="1425895"/>
+                  </a:lnTo>
+                  <a:lnTo>
+                    <a:pt x="4583841" y="1409439"/>
+                  </a:lnTo>
+                  <a:lnTo>
+                    <a:pt x="4512219" y="1392145"/>
+                  </a:lnTo>
+                  <a:lnTo>
+                    <a:pt x="4440596" y="1373973"/>
+                  </a:lnTo>
+                  <a:lnTo>
+                    <a:pt x="4368974" y="1354876"/>
+                  </a:lnTo>
+                  <a:lnTo>
+                    <a:pt x="4297351" y="1334808"/>
+                  </a:lnTo>
+                  <a:lnTo>
+                    <a:pt x="4225729" y="1313720"/>
+                  </a:lnTo>
+                  <a:lnTo>
+                    <a:pt x="4154106" y="1291558"/>
+                  </a:lnTo>
+                  <a:lnTo>
+                    <a:pt x="4082483" y="1268270"/>
+                  </a:lnTo>
+                  <a:lnTo>
+                    <a:pt x="4010861" y="1243798"/>
+                  </a:lnTo>
+                  <a:lnTo>
+                    <a:pt x="3939238" y="1218081"/>
+                  </a:lnTo>
+                  <a:lnTo>
+                    <a:pt x="3867616" y="1191056"/>
+                  </a:lnTo>
+                  <a:lnTo>
+                    <a:pt x="3795993" y="1162657"/>
+                  </a:lnTo>
+                  <a:lnTo>
+                    <a:pt x="3724371" y="1132813"/>
+                  </a:lnTo>
+                  <a:lnTo>
+                    <a:pt x="3652748" y="1101452"/>
+                  </a:lnTo>
+                  <a:lnTo>
+                    <a:pt x="3581126" y="1068496"/>
+                  </a:lnTo>
+                  <a:lnTo>
+                    <a:pt x="3509503" y="1033863"/>
+                  </a:lnTo>
+                  <a:lnTo>
+                    <a:pt x="3437881" y="997470"/>
+                  </a:lnTo>
+                  <a:lnTo>
+                    <a:pt x="3366258" y="959226"/>
+                  </a:lnTo>
+                  <a:lnTo>
+                    <a:pt x="3294636" y="919695"/>
+                  </a:lnTo>
+                  <a:lnTo>
+                    <a:pt x="3223013" y="906130"/>
+                  </a:lnTo>
+                  <a:lnTo>
+                    <a:pt x="3151391" y="892343"/>
+                  </a:lnTo>
+                  <a:lnTo>
+                    <a:pt x="3079768" y="878331"/>
+                  </a:lnTo>
+                  <a:lnTo>
+                    <a:pt x="3008146" y="864090"/>
+                  </a:lnTo>
+                  <a:lnTo>
+                    <a:pt x="2936523" y="849616"/>
+                  </a:lnTo>
+                  <a:lnTo>
+                    <a:pt x="2864901" y="834905"/>
+                  </a:lnTo>
+                  <a:lnTo>
+                    <a:pt x="2793278" y="819954"/>
+                  </a:lnTo>
+                  <a:lnTo>
+                    <a:pt x="2721655" y="804759"/>
+                  </a:lnTo>
+                  <a:lnTo>
+                    <a:pt x="2650033" y="789315"/>
+                  </a:lnTo>
+                  <a:lnTo>
+                    <a:pt x="2578410" y="773619"/>
+                  </a:lnTo>
+                  <a:lnTo>
+                    <a:pt x="2506788" y="757666"/>
+                  </a:lnTo>
+                  <a:lnTo>
+                    <a:pt x="2435165" y="741452"/>
+                  </a:lnTo>
+                  <a:lnTo>
+                    <a:pt x="2363543" y="724973"/>
+                  </a:lnTo>
+                  <a:lnTo>
+                    <a:pt x="2291920" y="708225"/>
+                  </a:lnTo>
+                  <a:lnTo>
+                    <a:pt x="2220298" y="691203"/>
+                  </a:lnTo>
+                  <a:lnTo>
+                    <a:pt x="2148675" y="673903"/>
+                  </a:lnTo>
+                  <a:lnTo>
+                    <a:pt x="2077053" y="656320"/>
+                  </a:lnTo>
+                  <a:lnTo>
+                    <a:pt x="2005430" y="638449"/>
+                  </a:lnTo>
+                  <a:lnTo>
+                    <a:pt x="1933808" y="620286"/>
+                  </a:lnTo>
+                  <a:lnTo>
+                    <a:pt x="1862185" y="601827"/>
+                  </a:lnTo>
+                  <a:lnTo>
+                    <a:pt x="1790563" y="583066"/>
+                  </a:lnTo>
+                  <a:lnTo>
+                    <a:pt x="1718940" y="563998"/>
+                  </a:lnTo>
+                  <a:lnTo>
+                    <a:pt x="1647318" y="544618"/>
+                  </a:lnTo>
+                  <a:lnTo>
+                    <a:pt x="1575695" y="524921"/>
+                  </a:lnTo>
+                  <a:lnTo>
+                    <a:pt x="1504073" y="504903"/>
+                  </a:lnTo>
+                  <a:lnTo>
+                    <a:pt x="1432450" y="484557"/>
+                  </a:lnTo>
+                  <a:lnTo>
+                    <a:pt x="1360827" y="463879"/>
+                  </a:lnTo>
+                  <a:lnTo>
+                    <a:pt x="1289205" y="442862"/>
+                  </a:lnTo>
+                  <a:lnTo>
+                    <a:pt x="1217582" y="421502"/>
+                  </a:lnTo>
+                  <a:lnTo>
+                    <a:pt x="1145960" y="399793"/>
+                  </a:lnTo>
+                  <a:lnTo>
+                    <a:pt x="1074337" y="377729"/>
+                  </a:lnTo>
+                  <a:lnTo>
+                    <a:pt x="1002715" y="355304"/>
+                  </a:lnTo>
+                  <a:lnTo>
+                    <a:pt x="931092" y="332513"/>
+                  </a:lnTo>
+                  <a:lnTo>
+                    <a:pt x="859470" y="309349"/>
+                  </a:lnTo>
+                  <a:lnTo>
+                    <a:pt x="787847" y="285806"/>
+                  </a:lnTo>
+                  <a:lnTo>
+                    <a:pt x="716225" y="261879"/>
+                  </a:lnTo>
+                  <a:lnTo>
+                    <a:pt x="644602" y="237560"/>
+                  </a:lnTo>
+                  <a:lnTo>
+                    <a:pt x="572980" y="212844"/>
+                  </a:lnTo>
+                  <a:lnTo>
+                    <a:pt x="501357" y="187723"/>
+                  </a:lnTo>
+                  <a:lnTo>
+                    <a:pt x="429735" y="162192"/>
+                  </a:lnTo>
+                  <a:lnTo>
+                    <a:pt x="358112" y="136244"/>
+                  </a:lnTo>
+                  <a:lnTo>
+                    <a:pt x="286490" y="109872"/>
+                  </a:lnTo>
+                  <a:lnTo>
+                    <a:pt x="214867" y="83068"/>
+                  </a:lnTo>
+                  <a:lnTo>
+                    <a:pt x="143245" y="55826"/>
+                  </a:lnTo>
+                  <a:lnTo>
+                    <a:pt x="71622" y="28139"/>
+                  </a:lnTo>
+                  <a:lnTo>
                     <a:pt x="0" y="0"/>
-                  </a:moveTo>
-                  <a:lnTo>
-                    <a:pt x="69839" y="153147"/>
-                  </a:lnTo>
-                  <a:lnTo>
-                    <a:pt x="147083" y="314331"/>
-                  </a:lnTo>
-                  <a:lnTo>
-                    <a:pt x="224327" y="467716"/>
-                  </a:lnTo>
-                  <a:lnTo>
-                    <a:pt x="301570" y="613677"/>
-                  </a:lnTo>
-                  <a:lnTo>
-                    <a:pt x="378814" y="752574"/>
-                  </a:lnTo>
-                  <a:lnTo>
-                    <a:pt x="456057" y="884750"/>
-                  </a:lnTo>
-                  <a:lnTo>
-                    <a:pt x="533301" y="1010528"/>
-                  </a:lnTo>
-                  <a:lnTo>
-                    <a:pt x="610544" y="1130220"/>
-                  </a:lnTo>
-                  <a:lnTo>
-                    <a:pt x="687788" y="1244119"/>
-                  </a:lnTo>
-                  <a:lnTo>
-                    <a:pt x="765032" y="1352506"/>
-                  </a:lnTo>
-                  <a:lnTo>
-                    <a:pt x="842275" y="1455648"/>
-                  </a:lnTo>
-                  <a:lnTo>
-                    <a:pt x="919519" y="1553798"/>
-                  </a:lnTo>
-                  <a:lnTo>
-                    <a:pt x="996762" y="1647198"/>
-                  </a:lnTo>
-                  <a:lnTo>
-                    <a:pt x="1074006" y="1736078"/>
-                  </a:lnTo>
-                  <a:lnTo>
-                    <a:pt x="1151249" y="1820657"/>
-                  </a:lnTo>
-                  <a:lnTo>
-                    <a:pt x="1228493" y="1901142"/>
-                  </a:lnTo>
-                  <a:lnTo>
-                    <a:pt x="1305737" y="1977732"/>
-                  </a:lnTo>
-                  <a:lnTo>
-                    <a:pt x="1382980" y="2050616"/>
-                  </a:lnTo>
-                  <a:lnTo>
-                    <a:pt x="1460224" y="2119973"/>
-                  </a:lnTo>
-                  <a:lnTo>
-                    <a:pt x="1537467" y="2185972"/>
-                  </a:lnTo>
-                  <a:lnTo>
-                    <a:pt x="1614711" y="2248778"/>
-                  </a:lnTo>
-                  <a:lnTo>
-                    <a:pt x="1691954" y="2308545"/>
-                  </a:lnTo>
-                  <a:lnTo>
-                    <a:pt x="1769198" y="2365419"/>
-                  </a:lnTo>
-                  <a:lnTo>
-                    <a:pt x="1846442" y="2419540"/>
-                  </a:lnTo>
-                  <a:lnTo>
-                    <a:pt x="1923685" y="2471043"/>
-                  </a:lnTo>
-                  <a:lnTo>
-                    <a:pt x="2000929" y="2520053"/>
-                  </a:lnTo>
-                  <a:lnTo>
-                    <a:pt x="2078172" y="2566691"/>
-                  </a:lnTo>
-                  <a:lnTo>
-                    <a:pt x="2155416" y="2611072"/>
-                  </a:lnTo>
-                  <a:lnTo>
-                    <a:pt x="2232659" y="2653305"/>
-                  </a:lnTo>
-                  <a:lnTo>
-                    <a:pt x="2309903" y="2667310"/>
-                  </a:lnTo>
-                  <a:lnTo>
-                    <a:pt x="2387147" y="2680442"/>
-                  </a:lnTo>
-                  <a:lnTo>
-                    <a:pt x="2464390" y="2693363"/>
-                  </a:lnTo>
-                  <a:lnTo>
-                    <a:pt x="2541634" y="2706076"/>
-                  </a:lnTo>
-                  <a:lnTo>
-                    <a:pt x="2618877" y="2718585"/>
-                  </a:lnTo>
-                  <a:lnTo>
-                    <a:pt x="2696121" y="2730892"/>
-                  </a:lnTo>
-                  <a:lnTo>
-                    <a:pt x="2773364" y="2743001"/>
-                  </a:lnTo>
-                  <a:lnTo>
-                    <a:pt x="2850608" y="2754916"/>
-                  </a:lnTo>
-                  <a:lnTo>
-                    <a:pt x="2927852" y="2766639"/>
-                  </a:lnTo>
-                  <a:lnTo>
-                    <a:pt x="3005095" y="2778173"/>
-                  </a:lnTo>
-                  <a:lnTo>
-                    <a:pt x="3082339" y="2789522"/>
-                  </a:lnTo>
-                  <a:lnTo>
-                    <a:pt x="3159582" y="2800689"/>
-                  </a:lnTo>
-                  <a:lnTo>
-                    <a:pt x="3236826" y="2811675"/>
-                  </a:lnTo>
-                  <a:lnTo>
-                    <a:pt x="3314069" y="2822485"/>
-                  </a:lnTo>
-                  <a:lnTo>
-                    <a:pt x="3391313" y="2833122"/>
-                  </a:lnTo>
-                  <a:lnTo>
-                    <a:pt x="3468557" y="2843587"/>
-                  </a:lnTo>
-                  <a:lnTo>
-                    <a:pt x="3545800" y="2853883"/>
-                  </a:lnTo>
-                  <a:lnTo>
-                    <a:pt x="3623044" y="2864014"/>
-                  </a:lnTo>
-                  <a:lnTo>
-                    <a:pt x="3700287" y="2873983"/>
-                  </a:lnTo>
-                  <a:lnTo>
-                    <a:pt x="3777531" y="2883790"/>
-                  </a:lnTo>
-                  <a:lnTo>
-                    <a:pt x="3854774" y="2893441"/>
-                  </a:lnTo>
-                  <a:lnTo>
-                    <a:pt x="3932018" y="2902935"/>
-                  </a:lnTo>
-                  <a:lnTo>
-                    <a:pt x="4009262" y="2912278"/>
-                  </a:lnTo>
-                  <a:lnTo>
-                    <a:pt x="4086505" y="2921469"/>
-                  </a:lnTo>
-                  <a:lnTo>
-                    <a:pt x="4163749" y="2930513"/>
-                  </a:lnTo>
-                  <a:lnTo>
-                    <a:pt x="4240992" y="2939412"/>
-                  </a:lnTo>
-                  <a:lnTo>
-                    <a:pt x="4318236" y="2948167"/>
-                  </a:lnTo>
-                  <a:lnTo>
-                    <a:pt x="4395479" y="2956782"/>
-                  </a:lnTo>
-                  <a:lnTo>
-                    <a:pt x="4472723" y="2965258"/>
-                  </a:lnTo>
-                  <a:lnTo>
-                    <a:pt x="4549967" y="2973598"/>
-                  </a:lnTo>
-                  <a:lnTo>
-                    <a:pt x="4627210" y="2981803"/>
-                  </a:lnTo>
-                  <a:lnTo>
-                    <a:pt x="4704454" y="2989877"/>
-                  </a:lnTo>
-                  <a:lnTo>
-                    <a:pt x="4781697" y="2997821"/>
-                  </a:lnTo>
-                  <a:lnTo>
-                    <a:pt x="4858941" y="3005637"/>
-                  </a:lnTo>
-                  <a:lnTo>
-                    <a:pt x="4936185" y="3013327"/>
-                  </a:lnTo>
-                  <a:lnTo>
-                    <a:pt x="5013428" y="3020893"/>
-                  </a:lnTo>
-                  <a:lnTo>
-                    <a:pt x="5090672" y="3028338"/>
-                  </a:lnTo>
-                  <a:lnTo>
-                    <a:pt x="5167915" y="3035663"/>
-                  </a:lnTo>
-                  <a:lnTo>
-                    <a:pt x="5245159" y="3042870"/>
-                  </a:lnTo>
-                  <a:lnTo>
-                    <a:pt x="5322402" y="3049962"/>
-                  </a:lnTo>
-                  <a:lnTo>
-                    <a:pt x="5399646" y="3056939"/>
-                  </a:lnTo>
-                  <a:lnTo>
-                    <a:pt x="5476890" y="3063804"/>
-                  </a:lnTo>
-                  <a:lnTo>
-                    <a:pt x="5554133" y="3070559"/>
-                  </a:lnTo>
-                  <a:lnTo>
-                    <a:pt x="5631377" y="3077205"/>
-                  </a:lnTo>
-                  <a:lnTo>
-                    <a:pt x="5708620" y="3083744"/>
-                  </a:lnTo>
-                  <a:lnTo>
-                    <a:pt x="5785864" y="3090178"/>
-                  </a:lnTo>
-                  <a:lnTo>
-                    <a:pt x="5863107" y="3096508"/>
-                  </a:lnTo>
-                  <a:lnTo>
-                    <a:pt x="5940351" y="3102737"/>
-                  </a:lnTo>
-                  <a:lnTo>
-                    <a:pt x="6017595" y="3108865"/>
-                  </a:lnTo>
-                  <a:lnTo>
-                    <a:pt x="6094838" y="3114895"/>
-                  </a:lnTo>
-                  <a:lnTo>
-                    <a:pt x="6172082" y="3120828"/>
-                  </a:lnTo>
-                  <a:lnTo>
-                    <a:pt x="6249325" y="3126665"/>
-                  </a:lnTo>
-                  <a:lnTo>
-                    <a:pt x="6326569" y="3132409"/>
                   </a:lnTo>
                 </a:path>
               </a:pathLst>
@@ -3847,619 +4138,306 @@
           </p:nvSpPr>
           <p:spPr>
             <a:xfrm>
-              <a:off x="817517" y="3898939"/>
-              <a:ext cx="7392041" cy="1598398"/>
+              <a:off x="1345514" y="2073503"/>
+              <a:ext cx="6917165" cy="3338663"/>
             </a:xfrm>
             <a:custGeom>
               <a:avLst/>
               <a:pathLst>
-                <a:path w="7392041" h="1598398">
-                  <a:moveTo>
-                    <a:pt x="7392041" y="1598398"/>
-                  </a:moveTo>
-                  <a:lnTo>
-                    <a:pt x="7314797" y="1595351"/>
-                  </a:lnTo>
-                  <a:lnTo>
-                    <a:pt x="7237554" y="1592149"/>
-                  </a:lnTo>
-                  <a:lnTo>
-                    <a:pt x="7160310" y="1588784"/>
-                  </a:lnTo>
-                  <a:lnTo>
-                    <a:pt x="7083066" y="1585249"/>
-                  </a:lnTo>
-                  <a:lnTo>
-                    <a:pt x="7005823" y="1581533"/>
-                  </a:lnTo>
-                  <a:lnTo>
-                    <a:pt x="6928579" y="1577628"/>
-                  </a:lnTo>
-                  <a:lnTo>
-                    <a:pt x="6851336" y="1573525"/>
-                  </a:lnTo>
-                  <a:lnTo>
-                    <a:pt x="6774092" y="1569213"/>
-                  </a:lnTo>
-                  <a:lnTo>
-                    <a:pt x="6696849" y="1564682"/>
-                  </a:lnTo>
-                  <a:lnTo>
-                    <a:pt x="6619605" y="1559921"/>
-                  </a:lnTo>
-                  <a:lnTo>
-                    <a:pt x="6542361" y="1554917"/>
-                  </a:lnTo>
-                  <a:lnTo>
-                    <a:pt x="6465118" y="1549659"/>
-                  </a:lnTo>
-                  <a:lnTo>
-                    <a:pt x="6387874" y="1544133"/>
-                  </a:lnTo>
-                  <a:lnTo>
-                    <a:pt x="6310631" y="1538327"/>
-                  </a:lnTo>
-                  <a:lnTo>
-                    <a:pt x="6233387" y="1532225"/>
-                  </a:lnTo>
-                  <a:lnTo>
-                    <a:pt x="6156144" y="1525813"/>
-                  </a:lnTo>
-                  <a:lnTo>
-                    <a:pt x="6078900" y="1519074"/>
-                  </a:lnTo>
-                  <a:lnTo>
-                    <a:pt x="6001656" y="1511993"/>
-                  </a:lnTo>
-                  <a:lnTo>
-                    <a:pt x="5924413" y="1504552"/>
-                  </a:lnTo>
-                  <a:lnTo>
-                    <a:pt x="5847169" y="1496733"/>
-                  </a:lnTo>
-                  <a:lnTo>
-                    <a:pt x="5769926" y="1488516"/>
-                  </a:lnTo>
-                  <a:lnTo>
-                    <a:pt x="5692682" y="1479881"/>
-                  </a:lnTo>
-                  <a:lnTo>
-                    <a:pt x="5615439" y="1470806"/>
-                  </a:lnTo>
-                  <a:lnTo>
-                    <a:pt x="5538195" y="1461271"/>
-                  </a:lnTo>
-                  <a:lnTo>
-                    <a:pt x="5460951" y="1451250"/>
-                  </a:lnTo>
-                  <a:lnTo>
-                    <a:pt x="5383708" y="1440720"/>
-                  </a:lnTo>
-                  <a:lnTo>
-                    <a:pt x="5306464" y="1429654"/>
-                  </a:lnTo>
-                  <a:lnTo>
-                    <a:pt x="5229221" y="1418025"/>
-                  </a:lnTo>
-                  <a:lnTo>
-                    <a:pt x="5151977" y="1405805"/>
-                  </a:lnTo>
-                  <a:lnTo>
-                    <a:pt x="5074734" y="1392964"/>
-                  </a:lnTo>
-                  <a:lnTo>
-                    <a:pt x="4997490" y="1379469"/>
-                  </a:lnTo>
-                  <a:lnTo>
-                    <a:pt x="4920246" y="1365288"/>
-                  </a:lnTo>
-                  <a:lnTo>
-                    <a:pt x="4843003" y="1350386"/>
-                  </a:lnTo>
-                  <a:lnTo>
-                    <a:pt x="4765759" y="1334727"/>
-                  </a:lnTo>
-                  <a:lnTo>
-                    <a:pt x="4688516" y="1318270"/>
-                  </a:lnTo>
-                  <a:lnTo>
-                    <a:pt x="4611272" y="1300977"/>
-                  </a:lnTo>
-                  <a:lnTo>
-                    <a:pt x="4534029" y="1282805"/>
-                  </a:lnTo>
-                  <a:lnTo>
-                    <a:pt x="4456785" y="1263708"/>
-                  </a:lnTo>
-                  <a:lnTo>
-                    <a:pt x="4379541" y="1243640"/>
-                  </a:lnTo>
-                  <a:lnTo>
-                    <a:pt x="4302298" y="1222551"/>
-                  </a:lnTo>
-                  <a:lnTo>
-                    <a:pt x="4225054" y="1200390"/>
-                  </a:lnTo>
-                  <a:lnTo>
-                    <a:pt x="4147811" y="1177102"/>
-                  </a:lnTo>
-                  <a:lnTo>
-                    <a:pt x="4070567" y="1152630"/>
-                  </a:lnTo>
-                  <a:lnTo>
-                    <a:pt x="3993324" y="1126913"/>
-                  </a:lnTo>
-                  <a:lnTo>
-                    <a:pt x="3916080" y="1099888"/>
-                  </a:lnTo>
-                  <a:lnTo>
-                    <a:pt x="3838836" y="1071489"/>
-                  </a:lnTo>
-                  <a:lnTo>
-                    <a:pt x="3761593" y="1041645"/>
-                  </a:lnTo>
-                  <a:lnTo>
-                    <a:pt x="3684349" y="1010284"/>
-                  </a:lnTo>
-                  <a:lnTo>
-                    <a:pt x="3607106" y="977328"/>
-                  </a:lnTo>
-                  <a:lnTo>
-                    <a:pt x="3529862" y="942695"/>
-                  </a:lnTo>
-                  <a:lnTo>
-                    <a:pt x="3452619" y="906302"/>
-                  </a:lnTo>
-                  <a:lnTo>
-                    <a:pt x="3375375" y="868057"/>
-                  </a:lnTo>
-                  <a:lnTo>
-                    <a:pt x="3298131" y="828526"/>
-                  </a:lnTo>
-                  <a:lnTo>
-                    <a:pt x="3220888" y="814962"/>
-                  </a:lnTo>
-                  <a:lnTo>
-                    <a:pt x="3143644" y="801175"/>
-                  </a:lnTo>
-                  <a:lnTo>
-                    <a:pt x="3066401" y="787163"/>
-                  </a:lnTo>
-                  <a:lnTo>
-                    <a:pt x="2989157" y="772922"/>
-                  </a:lnTo>
-                  <a:lnTo>
-                    <a:pt x="2911914" y="758448"/>
-                  </a:lnTo>
-                  <a:lnTo>
-                    <a:pt x="2834670" y="743737"/>
-                  </a:lnTo>
-                  <a:lnTo>
-                    <a:pt x="2757426" y="728786"/>
-                  </a:lnTo>
-                  <a:lnTo>
-                    <a:pt x="2680183" y="713591"/>
-                  </a:lnTo>
-                  <a:lnTo>
-                    <a:pt x="2602939" y="698147"/>
-                  </a:lnTo>
-                  <a:lnTo>
-                    <a:pt x="2525696" y="682450"/>
-                  </a:lnTo>
-                  <a:lnTo>
-                    <a:pt x="2448452" y="666497"/>
-                  </a:lnTo>
-                  <a:lnTo>
-                    <a:pt x="2371209" y="650284"/>
-                  </a:lnTo>
-                  <a:lnTo>
-                    <a:pt x="2293965" y="633805"/>
-                  </a:lnTo>
-                  <a:lnTo>
-                    <a:pt x="2216721" y="617057"/>
-                  </a:lnTo>
-                  <a:lnTo>
-                    <a:pt x="2139478" y="600035"/>
-                  </a:lnTo>
-                  <a:lnTo>
-                    <a:pt x="2062234" y="582734"/>
-                  </a:lnTo>
-                  <a:lnTo>
-                    <a:pt x="1984991" y="565151"/>
-                  </a:lnTo>
-                  <a:lnTo>
-                    <a:pt x="1907747" y="547281"/>
-                  </a:lnTo>
-                  <a:lnTo>
-                    <a:pt x="1830504" y="529118"/>
-                  </a:lnTo>
-                  <a:lnTo>
-                    <a:pt x="1753260" y="510659"/>
-                  </a:lnTo>
-                  <a:lnTo>
-                    <a:pt x="1676016" y="491897"/>
-                  </a:lnTo>
-                  <a:lnTo>
-                    <a:pt x="1598773" y="472829"/>
-                  </a:lnTo>
-                  <a:lnTo>
-                    <a:pt x="1521529" y="453450"/>
-                  </a:lnTo>
-                  <a:lnTo>
-                    <a:pt x="1444286" y="433753"/>
-                  </a:lnTo>
-                  <a:lnTo>
-                    <a:pt x="1367042" y="413735"/>
-                  </a:lnTo>
-                  <a:lnTo>
-                    <a:pt x="1289799" y="393389"/>
-                  </a:lnTo>
-                  <a:lnTo>
-                    <a:pt x="1212555" y="372710"/>
-                  </a:lnTo>
-                  <a:lnTo>
-                    <a:pt x="1135311" y="351694"/>
-                  </a:lnTo>
-                  <a:lnTo>
-                    <a:pt x="1058068" y="330334"/>
-                  </a:lnTo>
-                  <a:lnTo>
-                    <a:pt x="980824" y="308625"/>
-                  </a:lnTo>
-                  <a:lnTo>
-                    <a:pt x="903581" y="286561"/>
-                  </a:lnTo>
-                  <a:lnTo>
-                    <a:pt x="826337" y="264136"/>
-                  </a:lnTo>
-                  <a:lnTo>
-                    <a:pt x="749094" y="241344"/>
-                  </a:lnTo>
-                  <a:lnTo>
-                    <a:pt x="671850" y="218180"/>
-                  </a:lnTo>
-                  <a:lnTo>
-                    <a:pt x="594606" y="194638"/>
-                  </a:lnTo>
-                  <a:lnTo>
-                    <a:pt x="517363" y="170710"/>
-                  </a:lnTo>
-                  <a:lnTo>
-                    <a:pt x="440119" y="146392"/>
-                  </a:lnTo>
-                  <a:lnTo>
-                    <a:pt x="362876" y="121675"/>
-                  </a:lnTo>
-                  <a:lnTo>
-                    <a:pt x="285632" y="96555"/>
-                  </a:lnTo>
-                  <a:lnTo>
-                    <a:pt x="208389" y="71024"/>
-                  </a:lnTo>
-                  <a:lnTo>
-                    <a:pt x="131145" y="45076"/>
-                  </a:lnTo>
-                  <a:lnTo>
-                    <a:pt x="53901" y="18704"/>
-                  </a:lnTo>
-                  <a:lnTo>
-                    <a:pt x="0" y="0"/>
-                  </a:lnTo>
-                </a:path>
-              </a:pathLst>
-            </a:custGeom>
-          </p:spPr>
-          <p:txBody>
-            <a:bodyPr/>
-            <a:lstStyle/>
-            <a:p/>
-          </p:txBody>
-        </p:sp>
-        <p:sp>
-          <p:nvSpPr>
-            <p:cNvPr id="24" name="pl24"/>
-            <p:cNvSpPr/>
-            <p:nvPr/>
-          </p:nvSpPr>
-          <p:spPr>
-            <a:xfrm>
-              <a:off x="817517" y="2173038"/>
-              <a:ext cx="7392041" cy="3239127"/>
-            </a:xfrm>
-            <a:custGeom>
-              <a:avLst/>
-              <a:pathLst>
-                <a:path w="7392041" h="3239127">
+                <a:path w="6917165" h="3338663">
                   <a:moveTo>
                     <a:pt x="0" y="0"/>
                   </a:moveTo>
                   <a:lnTo>
-                    <a:pt x="53901" y="77210"/>
-                  </a:lnTo>
-                  <a:lnTo>
-                    <a:pt x="131145" y="184273"/>
-                  </a:lnTo>
-                  <a:lnTo>
-                    <a:pt x="208389" y="287870"/>
-                  </a:lnTo>
-                  <a:lnTo>
-                    <a:pt x="285632" y="388113"/>
-                  </a:lnTo>
-                  <a:lnTo>
-                    <a:pt x="362876" y="485111"/>
-                  </a:lnTo>
-                  <a:lnTo>
-                    <a:pt x="440119" y="578969"/>
-                  </a:lnTo>
-                  <a:lnTo>
-                    <a:pt x="517363" y="669788"/>
-                  </a:lnTo>
-                  <a:lnTo>
-                    <a:pt x="594606" y="757666"/>
-                  </a:lnTo>
-                  <a:lnTo>
-                    <a:pt x="671850" y="842700"/>
-                  </a:lnTo>
-                  <a:lnTo>
-                    <a:pt x="749094" y="924981"/>
-                  </a:lnTo>
-                  <a:lnTo>
-                    <a:pt x="826337" y="1004598"/>
-                  </a:lnTo>
-                  <a:lnTo>
-                    <a:pt x="903581" y="1081637"/>
-                  </a:lnTo>
-                  <a:lnTo>
-                    <a:pt x="980824" y="1156182"/>
-                  </a:lnTo>
-                  <a:lnTo>
-                    <a:pt x="1058068" y="1228314"/>
-                  </a:lnTo>
-                  <a:lnTo>
-                    <a:pt x="1135311" y="1298111"/>
-                  </a:lnTo>
-                  <a:lnTo>
-                    <a:pt x="1212555" y="1365648"/>
-                  </a:lnTo>
-                  <a:lnTo>
-                    <a:pt x="1289799" y="1430998"/>
-                  </a:lnTo>
-                  <a:lnTo>
-                    <a:pt x="1367042" y="1494233"/>
-                  </a:lnTo>
-                  <a:lnTo>
-                    <a:pt x="1444286" y="1555420"/>
-                  </a:lnTo>
-                  <a:lnTo>
-                    <a:pt x="1521529" y="1614627"/>
-                  </a:lnTo>
-                  <a:lnTo>
-                    <a:pt x="1598773" y="1671917"/>
-                  </a:lnTo>
-                  <a:lnTo>
-                    <a:pt x="1676016" y="1727352"/>
-                  </a:lnTo>
-                  <a:lnTo>
-                    <a:pt x="1753260" y="1780992"/>
-                  </a:lnTo>
-                  <a:lnTo>
-                    <a:pt x="1830504" y="1832896"/>
-                  </a:lnTo>
-                  <a:lnTo>
-                    <a:pt x="1907747" y="1883119"/>
-                  </a:lnTo>
-                  <a:lnTo>
-                    <a:pt x="1984991" y="1931717"/>
-                  </a:lnTo>
-                  <a:lnTo>
-                    <a:pt x="2062234" y="1978741"/>
-                  </a:lnTo>
-                  <a:lnTo>
-                    <a:pt x="2139478" y="2024243"/>
-                  </a:lnTo>
-                  <a:lnTo>
-                    <a:pt x="2216721" y="2068271"/>
-                  </a:lnTo>
-                  <a:lnTo>
-                    <a:pt x="2293965" y="2110874"/>
-                  </a:lnTo>
-                  <a:lnTo>
-                    <a:pt x="2371209" y="2152098"/>
-                  </a:lnTo>
-                  <a:lnTo>
-                    <a:pt x="2448452" y="2191988"/>
-                  </a:lnTo>
-                  <a:lnTo>
-                    <a:pt x="2525696" y="2230586"/>
-                  </a:lnTo>
-                  <a:lnTo>
-                    <a:pt x="2602939" y="2267934"/>
-                  </a:lnTo>
-                  <a:lnTo>
-                    <a:pt x="2680183" y="2304073"/>
-                  </a:lnTo>
-                  <a:lnTo>
-                    <a:pt x="2757426" y="2339042"/>
-                  </a:lnTo>
-                  <a:lnTo>
-                    <a:pt x="2834670" y="2372879"/>
-                  </a:lnTo>
-                  <a:lnTo>
-                    <a:pt x="2911914" y="2405621"/>
-                  </a:lnTo>
-                  <a:lnTo>
-                    <a:pt x="2989157" y="2437302"/>
-                  </a:lnTo>
-                  <a:lnTo>
-                    <a:pt x="3066401" y="2467958"/>
-                  </a:lnTo>
-                  <a:lnTo>
-                    <a:pt x="3143644" y="2497622"/>
-                  </a:lnTo>
-                  <a:lnTo>
-                    <a:pt x="3220888" y="2526325"/>
-                  </a:lnTo>
-                  <a:lnTo>
-                    <a:pt x="3298131" y="2554099"/>
-                  </a:lnTo>
-                  <a:lnTo>
-                    <a:pt x="3375375" y="2580973"/>
-                  </a:lnTo>
-                  <a:lnTo>
-                    <a:pt x="3452619" y="2606978"/>
-                  </a:lnTo>
-                  <a:lnTo>
-                    <a:pt x="3529862" y="2632141"/>
-                  </a:lnTo>
-                  <a:lnTo>
-                    <a:pt x="3607106" y="2656489"/>
-                  </a:lnTo>
-                  <a:lnTo>
-                    <a:pt x="3684349" y="2680049"/>
-                  </a:lnTo>
-                  <a:lnTo>
-                    <a:pt x="3761593" y="2702846"/>
-                  </a:lnTo>
-                  <a:lnTo>
-                    <a:pt x="3838836" y="2724905"/>
-                  </a:lnTo>
-                  <a:lnTo>
-                    <a:pt x="3916080" y="2746249"/>
-                  </a:lnTo>
-                  <a:lnTo>
-                    <a:pt x="3993324" y="2766903"/>
-                  </a:lnTo>
-                  <a:lnTo>
-                    <a:pt x="4070567" y="2786888"/>
-                  </a:lnTo>
-                  <a:lnTo>
-                    <a:pt x="4147811" y="2806227"/>
-                  </a:lnTo>
-                  <a:lnTo>
-                    <a:pt x="4225054" y="2824939"/>
-                  </a:lnTo>
-                  <a:lnTo>
-                    <a:pt x="4302298" y="2843045"/>
-                  </a:lnTo>
-                  <a:lnTo>
-                    <a:pt x="4379541" y="2860565"/>
-                  </a:lnTo>
-                  <a:lnTo>
-                    <a:pt x="4456785" y="2877518"/>
-                  </a:lnTo>
-                  <a:lnTo>
-                    <a:pt x="4534029" y="2893922"/>
-                  </a:lnTo>
-                  <a:lnTo>
-                    <a:pt x="4611272" y="2909795"/>
-                  </a:lnTo>
-                  <a:lnTo>
-                    <a:pt x="4688516" y="2925154"/>
-                  </a:lnTo>
-                  <a:lnTo>
-                    <a:pt x="4765759" y="2940016"/>
-                  </a:lnTo>
-                  <a:lnTo>
-                    <a:pt x="4843003" y="2954397"/>
-                  </a:lnTo>
-                  <a:lnTo>
-                    <a:pt x="4920246" y="2968312"/>
-                  </a:lnTo>
-                  <a:lnTo>
-                    <a:pt x="4997490" y="2981776"/>
-                  </a:lnTo>
-                  <a:lnTo>
-                    <a:pt x="5074734" y="2994805"/>
-                  </a:lnTo>
-                  <a:lnTo>
-                    <a:pt x="5151977" y="3007412"/>
-                  </a:lnTo>
-                  <a:lnTo>
-                    <a:pt x="5229221" y="3019611"/>
-                  </a:lnTo>
-                  <a:lnTo>
-                    <a:pt x="5306464" y="3031415"/>
-                  </a:lnTo>
-                  <a:lnTo>
-                    <a:pt x="5383708" y="3042836"/>
-                  </a:lnTo>
-                  <a:lnTo>
-                    <a:pt x="5460951" y="3053888"/>
-                  </a:lnTo>
-                  <a:lnTo>
-                    <a:pt x="5538195" y="3064582"/>
-                  </a:lnTo>
-                  <a:lnTo>
-                    <a:pt x="5615439" y="3074930"/>
-                  </a:lnTo>
-                  <a:lnTo>
-                    <a:pt x="5692682" y="3084943"/>
-                  </a:lnTo>
-                  <a:lnTo>
-                    <a:pt x="5769926" y="3094632"/>
-                  </a:lnTo>
-                  <a:lnTo>
-                    <a:pt x="5847169" y="3104007"/>
-                  </a:lnTo>
-                  <a:lnTo>
-                    <a:pt x="5924413" y="3113078"/>
-                  </a:lnTo>
-                  <a:lnTo>
-                    <a:pt x="6001656" y="3121856"/>
-                  </a:lnTo>
-                  <a:lnTo>
-                    <a:pt x="6078900" y="3130350"/>
-                  </a:lnTo>
-                  <a:lnTo>
-                    <a:pt x="6156144" y="3138569"/>
-                  </a:lnTo>
-                  <a:lnTo>
-                    <a:pt x="6233387" y="3146521"/>
-                  </a:lnTo>
-                  <a:lnTo>
-                    <a:pt x="6310631" y="3154216"/>
-                  </a:lnTo>
-                  <a:lnTo>
-                    <a:pt x="6387874" y="3161662"/>
-                  </a:lnTo>
-                  <a:lnTo>
-                    <a:pt x="6465118" y="3168867"/>
-                  </a:lnTo>
-                  <a:lnTo>
-                    <a:pt x="6542361" y="3175839"/>
-                  </a:lnTo>
-                  <a:lnTo>
-                    <a:pt x="6619605" y="3182585"/>
-                  </a:lnTo>
-                  <a:lnTo>
-                    <a:pt x="6696849" y="3189113"/>
-                  </a:lnTo>
-                  <a:lnTo>
-                    <a:pt x="6774092" y="3195429"/>
-                  </a:lnTo>
-                  <a:lnTo>
-                    <a:pt x="6851336" y="3201541"/>
-                  </a:lnTo>
-                  <a:lnTo>
-                    <a:pt x="6928579" y="3207454"/>
-                  </a:lnTo>
-                  <a:lnTo>
-                    <a:pt x="7005823" y="3213177"/>
-                  </a:lnTo>
-                  <a:lnTo>
-                    <a:pt x="7083066" y="3218714"/>
-                  </a:lnTo>
-                  <a:lnTo>
-                    <a:pt x="7160310" y="3224072"/>
-                  </a:lnTo>
-                  <a:lnTo>
-                    <a:pt x="7237554" y="3229256"/>
-                  </a:lnTo>
-                  <a:lnTo>
-                    <a:pt x="7314797" y="3234273"/>
-                  </a:lnTo>
-                  <a:lnTo>
-                    <a:pt x="7392041" y="3239127"/>
+                    <a:pt x="41402" y="66100"/>
+                  </a:lnTo>
+                  <a:lnTo>
+                    <a:pt x="113025" y="176745"/>
+                  </a:lnTo>
+                  <a:lnTo>
+                    <a:pt x="184647" y="283809"/>
+                  </a:lnTo>
+                  <a:lnTo>
+                    <a:pt x="256270" y="387406"/>
+                  </a:lnTo>
+                  <a:lnTo>
+                    <a:pt x="327892" y="487649"/>
+                  </a:lnTo>
+                  <a:lnTo>
+                    <a:pt x="399515" y="584647"/>
+                  </a:lnTo>
+                  <a:lnTo>
+                    <a:pt x="471137" y="678504"/>
+                  </a:lnTo>
+                  <a:lnTo>
+                    <a:pt x="542760" y="769323"/>
+                  </a:lnTo>
+                  <a:lnTo>
+                    <a:pt x="614382" y="857202"/>
+                  </a:lnTo>
+                  <a:lnTo>
+                    <a:pt x="686005" y="942236"/>
+                  </a:lnTo>
+                  <a:lnTo>
+                    <a:pt x="757627" y="1024516"/>
+                  </a:lnTo>
+                  <a:lnTo>
+                    <a:pt x="829250" y="1104133"/>
+                  </a:lnTo>
+                  <a:lnTo>
+                    <a:pt x="900872" y="1181173"/>
+                  </a:lnTo>
+                  <a:lnTo>
+                    <a:pt x="972495" y="1255718"/>
+                  </a:lnTo>
+                  <a:lnTo>
+                    <a:pt x="1044118" y="1327850"/>
+                  </a:lnTo>
+                  <a:lnTo>
+                    <a:pt x="1115740" y="1397646"/>
+                  </a:lnTo>
+                  <a:lnTo>
+                    <a:pt x="1187363" y="1465183"/>
+                  </a:lnTo>
+                  <a:lnTo>
+                    <a:pt x="1258985" y="1530534"/>
+                  </a:lnTo>
+                  <a:lnTo>
+                    <a:pt x="1330608" y="1593768"/>
+                  </a:lnTo>
+                  <a:lnTo>
+                    <a:pt x="1402230" y="1654956"/>
+                  </a:lnTo>
+                  <a:lnTo>
+                    <a:pt x="1473853" y="1714162"/>
+                  </a:lnTo>
+                  <a:lnTo>
+                    <a:pt x="1545475" y="1771452"/>
+                  </a:lnTo>
+                  <a:lnTo>
+                    <a:pt x="1617098" y="1826887"/>
+                  </a:lnTo>
+                  <a:lnTo>
+                    <a:pt x="1688720" y="1880528"/>
+                  </a:lnTo>
+                  <a:lnTo>
+                    <a:pt x="1760343" y="1932432"/>
+                  </a:lnTo>
+                  <a:lnTo>
+                    <a:pt x="1831965" y="1982655"/>
+                  </a:lnTo>
+                  <a:lnTo>
+                    <a:pt x="1903588" y="2031252"/>
+                  </a:lnTo>
+                  <a:lnTo>
+                    <a:pt x="1975210" y="2078276"/>
+                  </a:lnTo>
+                  <a:lnTo>
+                    <a:pt x="2046833" y="2123778"/>
+                  </a:lnTo>
+                  <a:lnTo>
+                    <a:pt x="2118455" y="2167807"/>
+                  </a:lnTo>
+                  <a:lnTo>
+                    <a:pt x="2190078" y="2210410"/>
+                  </a:lnTo>
+                  <a:lnTo>
+                    <a:pt x="2261700" y="2251634"/>
+                  </a:lnTo>
+                  <a:lnTo>
+                    <a:pt x="2333323" y="2291523"/>
+                  </a:lnTo>
+                  <a:lnTo>
+                    <a:pt x="2404946" y="2330121"/>
+                  </a:lnTo>
+                  <a:lnTo>
+                    <a:pt x="2476568" y="2367469"/>
+                  </a:lnTo>
+                  <a:lnTo>
+                    <a:pt x="2548191" y="2403609"/>
+                  </a:lnTo>
+                  <a:lnTo>
+                    <a:pt x="2619813" y="2438578"/>
+                  </a:lnTo>
+                  <a:lnTo>
+                    <a:pt x="2691436" y="2472415"/>
+                  </a:lnTo>
+                  <a:lnTo>
+                    <a:pt x="2763058" y="2505156"/>
+                  </a:lnTo>
+                  <a:lnTo>
+                    <a:pt x="2834681" y="2536838"/>
+                  </a:lnTo>
+                  <a:lnTo>
+                    <a:pt x="2906303" y="2567494"/>
+                  </a:lnTo>
+                  <a:lnTo>
+                    <a:pt x="2977926" y="2597157"/>
+                  </a:lnTo>
+                  <a:lnTo>
+                    <a:pt x="3049548" y="2625860"/>
+                  </a:lnTo>
+                  <a:lnTo>
+                    <a:pt x="3121171" y="2653634"/>
+                  </a:lnTo>
+                  <a:lnTo>
+                    <a:pt x="3192793" y="2680509"/>
+                  </a:lnTo>
+                  <a:lnTo>
+                    <a:pt x="3264416" y="2706513"/>
+                  </a:lnTo>
+                  <a:lnTo>
+                    <a:pt x="3336038" y="2731676"/>
+                  </a:lnTo>
+                  <a:lnTo>
+                    <a:pt x="3407661" y="2756024"/>
+                  </a:lnTo>
+                  <a:lnTo>
+                    <a:pt x="3479283" y="2779584"/>
+                  </a:lnTo>
+                  <a:lnTo>
+                    <a:pt x="3550906" y="2802381"/>
+                  </a:lnTo>
+                  <a:lnTo>
+                    <a:pt x="3622528" y="2824440"/>
+                  </a:lnTo>
+                  <a:lnTo>
+                    <a:pt x="3694151" y="2845785"/>
+                  </a:lnTo>
+                  <a:lnTo>
+                    <a:pt x="3765773" y="2866439"/>
+                  </a:lnTo>
+                  <a:lnTo>
+                    <a:pt x="3837396" y="2886424"/>
+                  </a:lnTo>
+                  <a:lnTo>
+                    <a:pt x="3909019" y="2905762"/>
+                  </a:lnTo>
+                  <a:lnTo>
+                    <a:pt x="3980641" y="2924474"/>
+                  </a:lnTo>
+                  <a:lnTo>
+                    <a:pt x="4052264" y="2942581"/>
+                  </a:lnTo>
+                  <a:lnTo>
+                    <a:pt x="4123886" y="2960101"/>
+                  </a:lnTo>
+                  <a:lnTo>
+                    <a:pt x="4195509" y="2977054"/>
+                  </a:lnTo>
+                  <a:lnTo>
+                    <a:pt x="4267131" y="2993458"/>
+                  </a:lnTo>
+                  <a:lnTo>
+                    <a:pt x="4338754" y="3009331"/>
+                  </a:lnTo>
+                  <a:lnTo>
+                    <a:pt x="4410376" y="3024690"/>
+                  </a:lnTo>
+                  <a:lnTo>
+                    <a:pt x="4481999" y="3039551"/>
+                  </a:lnTo>
+                  <a:lnTo>
+                    <a:pt x="4553621" y="3053932"/>
+                  </a:lnTo>
+                  <a:lnTo>
+                    <a:pt x="4625244" y="3067847"/>
+                  </a:lnTo>
+                  <a:lnTo>
+                    <a:pt x="4696866" y="3081312"/>
+                  </a:lnTo>
+                  <a:lnTo>
+                    <a:pt x="4768489" y="3094341"/>
+                  </a:lnTo>
+                  <a:lnTo>
+                    <a:pt x="4840111" y="3106948"/>
+                  </a:lnTo>
+                  <a:lnTo>
+                    <a:pt x="4911734" y="3119146"/>
+                  </a:lnTo>
+                  <a:lnTo>
+                    <a:pt x="4983356" y="3130950"/>
+                  </a:lnTo>
+                  <a:lnTo>
+                    <a:pt x="5054979" y="3142372"/>
+                  </a:lnTo>
+                  <a:lnTo>
+                    <a:pt x="5126601" y="3153424"/>
+                  </a:lnTo>
+                  <a:lnTo>
+                    <a:pt x="5198224" y="3164118"/>
+                  </a:lnTo>
+                  <a:lnTo>
+                    <a:pt x="5269847" y="3174466"/>
+                  </a:lnTo>
+                  <a:lnTo>
+                    <a:pt x="5341469" y="3184479"/>
+                  </a:lnTo>
+                  <a:lnTo>
+                    <a:pt x="5413092" y="3194167"/>
+                  </a:lnTo>
+                  <a:lnTo>
+                    <a:pt x="5484714" y="3203542"/>
+                  </a:lnTo>
+                  <a:lnTo>
+                    <a:pt x="5556337" y="3212614"/>
+                  </a:lnTo>
+                  <a:lnTo>
+                    <a:pt x="5627959" y="3221392"/>
+                  </a:lnTo>
+                  <a:lnTo>
+                    <a:pt x="5699582" y="3229885"/>
+                  </a:lnTo>
+                  <a:lnTo>
+                    <a:pt x="5771204" y="3238104"/>
+                  </a:lnTo>
+                  <a:lnTo>
+                    <a:pt x="5842827" y="3246057"/>
+                  </a:lnTo>
+                  <a:lnTo>
+                    <a:pt x="5914449" y="3253752"/>
+                  </a:lnTo>
+                  <a:lnTo>
+                    <a:pt x="5986072" y="3261198"/>
+                  </a:lnTo>
+                  <a:lnTo>
+                    <a:pt x="6057694" y="3268403"/>
+                  </a:lnTo>
+                  <a:lnTo>
+                    <a:pt x="6129317" y="3275374"/>
+                  </a:lnTo>
+                  <a:lnTo>
+                    <a:pt x="6200939" y="3282120"/>
+                  </a:lnTo>
+                  <a:lnTo>
+                    <a:pt x="6272562" y="3288648"/>
+                  </a:lnTo>
+                  <a:lnTo>
+                    <a:pt x="6344184" y="3294964"/>
+                  </a:lnTo>
+                  <a:lnTo>
+                    <a:pt x="6415807" y="3301076"/>
+                  </a:lnTo>
+                  <a:lnTo>
+                    <a:pt x="6487429" y="3306990"/>
+                  </a:lnTo>
+                  <a:lnTo>
+                    <a:pt x="6559052" y="3312712"/>
+                  </a:lnTo>
+                  <a:lnTo>
+                    <a:pt x="6630675" y="3318250"/>
+                  </a:lnTo>
+                  <a:lnTo>
+                    <a:pt x="6702297" y="3323608"/>
+                  </a:lnTo>
+                  <a:lnTo>
+                    <a:pt x="6773920" y="3328792"/>
+                  </a:lnTo>
+                  <a:lnTo>
+                    <a:pt x="6845542" y="3333809"/>
+                  </a:lnTo>
+                  <a:lnTo>
+                    <a:pt x="6917165" y="3338663"/>
                   </a:lnTo>
                 </a:path>
               </a:pathLst>
@@ -4482,7 +4460,7 @@
         </p:sp>
         <p:sp>
           <p:nvSpPr>
-            <p:cNvPr id="25" name="pl25"/>
+            <p:cNvPr id="24" name="pl24"/>
             <p:cNvSpPr/>
             <p:nvPr/>
           </p:nvSpPr>
@@ -4525,13 +4503,13 @@
         </p:sp>
         <p:sp>
           <p:nvSpPr>
-            <p:cNvPr id="26" name="pl26"/>
+            <p:cNvPr id="25" name="pl25"/>
             <p:cNvSpPr/>
             <p:nvPr/>
           </p:nvSpPr>
           <p:spPr>
             <a:xfrm>
-              <a:off x="4117484" y="2073503"/>
+              <a:off x="4468386" y="2073503"/>
               <a:ext cx="0" cy="3649639"/>
             </a:xfrm>
             <a:custGeom>
@@ -4568,7 +4546,7 @@
         </p:sp>
         <p:sp>
           <p:nvSpPr>
-            <p:cNvPr id="27" name="tx27"/>
+            <p:cNvPr id="26" name="tx26"/>
             <p:cNvSpPr/>
             <p:nvPr/>
           </p:nvSpPr>
@@ -4614,7 +4592,7 @@
         </p:sp>
         <p:sp>
           <p:nvSpPr>
-            <p:cNvPr id="28" name="tx28"/>
+            <p:cNvPr id="27" name="tx27"/>
             <p:cNvSpPr/>
             <p:nvPr/>
           </p:nvSpPr>
@@ -4660,7 +4638,7 @@
         </p:sp>
         <p:sp>
           <p:nvSpPr>
-            <p:cNvPr id="29" name="tx29"/>
+            <p:cNvPr id="28" name="tx28"/>
             <p:cNvSpPr/>
             <p:nvPr/>
           </p:nvSpPr>
@@ -4706,7 +4684,7 @@
         </p:sp>
         <p:sp>
           <p:nvSpPr>
-            <p:cNvPr id="30" name="tx30"/>
+            <p:cNvPr id="29" name="tx29"/>
             <p:cNvSpPr/>
             <p:nvPr/>
           </p:nvSpPr>
@@ -4752,7 +4730,7 @@
         </p:sp>
         <p:sp>
           <p:nvSpPr>
-            <p:cNvPr id="31" name="tx31"/>
+            <p:cNvPr id="30" name="tx30"/>
             <p:cNvSpPr/>
             <p:nvPr/>
           </p:nvSpPr>
@@ -4798,14 +4776,14 @@
         </p:sp>
         <p:sp>
           <p:nvSpPr>
-            <p:cNvPr id="32" name="tx32"/>
+            <p:cNvPr id="31" name="tx31"/>
             <p:cNvSpPr/>
             <p:nvPr/>
           </p:nvSpPr>
           <p:spPr>
             <a:xfrm>
-              <a:off x="2423864" y="5785772"/>
-              <a:ext cx="155356" cy="80101"/>
+              <a:off x="2478335" y="5785772"/>
+              <a:ext cx="161574" cy="80101"/>
             </a:xfrm>
             <a:prstGeom prst="rect">
               <a:avLst/>
@@ -4837,21 +4815,21 @@
                   <a:latin typeface="Helvetica"/>
                   <a:cs typeface="Helvetica"/>
                 </a:rPr>
-                <a:t>0.8</a:t>
+                <a:t>-25</a:t>
               </a:r>
             </a:p>
           </p:txBody>
         </p:sp>
         <p:sp>
           <p:nvSpPr>
-            <p:cNvPr id="33" name="tx33"/>
+            <p:cNvPr id="32" name="tx32"/>
             <p:cNvSpPr/>
             <p:nvPr/>
           </p:nvSpPr>
           <p:spPr>
             <a:xfrm>
-              <a:off x="4196521" y="5785772"/>
-              <a:ext cx="155356" cy="80101"/>
+              <a:off x="4582608" y="5785772"/>
+              <a:ext cx="62179" cy="80101"/>
             </a:xfrm>
             <a:prstGeom prst="rect">
               <a:avLst/>
@@ -4883,21 +4861,21 @@
                   <a:latin typeface="Helvetica"/>
                   <a:cs typeface="Helvetica"/>
                 </a:rPr>
-                <a:t>1.0</a:t>
+                <a:t>0</a:t>
               </a:r>
             </a:p>
           </p:txBody>
         </p:sp>
         <p:sp>
           <p:nvSpPr>
-            <p:cNvPr id="34" name="tx34"/>
+            <p:cNvPr id="33" name="tx33"/>
             <p:cNvSpPr/>
             <p:nvPr/>
           </p:nvSpPr>
           <p:spPr>
             <a:xfrm>
-              <a:off x="5969179" y="5785772"/>
-              <a:ext cx="155356" cy="80101"/>
+              <a:off x="6606094" y="5785772"/>
+              <a:ext cx="124358" cy="80101"/>
             </a:xfrm>
             <a:prstGeom prst="rect">
               <a:avLst/>
@@ -4929,67 +4907,21 @@
                   <a:latin typeface="Helvetica"/>
                   <a:cs typeface="Helvetica"/>
                 </a:rPr>
-                <a:t>1.2</a:t>
+                <a:t>25</a:t>
               </a:r>
             </a:p>
           </p:txBody>
         </p:sp>
         <p:sp>
           <p:nvSpPr>
-            <p:cNvPr id="35" name="tx35"/>
+            <p:cNvPr id="34" name="tx34"/>
             <p:cNvSpPr/>
             <p:nvPr/>
           </p:nvSpPr>
           <p:spPr>
             <a:xfrm>
-              <a:off x="7741836" y="5785772"/>
-              <a:ext cx="155356" cy="80101"/>
-            </a:xfrm>
-            <a:prstGeom prst="rect">
-              <a:avLst/>
-            </a:prstGeom>
-            <a:noFill/>
-          </p:spPr>
-          <p:txBody>
-            <a:bodyPr lIns="0" rIns="0" tIns="0" bIns="0" anchorCtr="1" anchor="ctr" wrap="none"/>
-            <a:lstStyle/>
-            <a:p>
-              <a:pPr algn="l" marL="0" marR="0" indent="0">
-                <a:lnSpc>
-                  <a:spcPts val="880"/>
-                </a:lnSpc>
-                <a:spcBef>
-                  <a:spcPts val="0"/>
-                </a:spcBef>
-                <a:spcAft>
-                  <a:spcPts val="0"/>
-                </a:spcAft>
-              </a:pPr>
-              <a:r>
-                <a:rPr sz="880">
-                  <a:solidFill>
-                    <a:srgbClr val="4D4D4D">
-                      <a:alpha val="100000"/>
-                    </a:srgbClr>
-                  </a:solidFill>
-                  <a:latin typeface="Helvetica"/>
-                  <a:cs typeface="Helvetica"/>
-                </a:rPr>
-                <a:t>1.4</a:t>
-              </a:r>
-            </a:p>
-          </p:txBody>
-        </p:sp>
-        <p:sp>
-          <p:nvSpPr>
-            <p:cNvPr id="36" name="tx36"/>
-            <p:cNvSpPr/>
-            <p:nvPr/>
-          </p:nvSpPr>
-          <p:spPr>
-            <a:xfrm>
-              <a:off x="3879271" y="5925448"/>
-              <a:ext cx="1676186" cy="100218"/>
+              <a:off x="2928340" y="5925448"/>
+              <a:ext cx="3578047" cy="100218"/>
             </a:xfrm>
             <a:prstGeom prst="rect">
               <a:avLst/>
@@ -5021,14 +4953,14 @@
                   <a:latin typeface="Helvetica"/>
                   <a:cs typeface="Helvetica"/>
                 </a:rPr>
-                <a:t>CKD-EPI Cr-Cys / CG ratio</a:t>
+                <a:t>eGFR difference (%): 100 × (CKD-EPI Cr-Cys − CG) / CG</a:t>
               </a:r>
             </a:p>
           </p:txBody>
         </p:sp>
         <p:sp>
           <p:nvSpPr>
-            <p:cNvPr id="37" name="tx37"/>
+            <p:cNvPr id="35" name="tx35"/>
             <p:cNvSpPr/>
             <p:nvPr/>
           </p:nvSpPr>
@@ -5074,14 +5006,14 @@
         </p:sp>
         <p:sp>
           <p:nvSpPr>
-            <p:cNvPr id="38" name="tx38"/>
+            <p:cNvPr id="36" name="tx36"/>
             <p:cNvSpPr/>
             <p:nvPr/>
           </p:nvSpPr>
           <p:spPr>
             <a:xfrm>
               <a:off x="817517" y="1896563"/>
-              <a:ext cx="6899879" cy="82021"/>
+              <a:ext cx="7052127" cy="82021"/>
             </a:xfrm>
             <a:prstGeom prst="rect">
               <a:avLst/>
@@ -5113,14 +5045,14 @@
                   <a:latin typeface="Helvetica"/>
                   <a:cs typeface="Helvetica"/>
                 </a:rPr>
-                <a:t>subHR per 0.1 ratio decline: 1.46 (1.20-1.77), p_Bonf = &lt;0.001 (n = 6)  |  per IQR decline (Δ = 0.30): 3.05 (1.73-5.37)  |  IQR: [0.84, 1.14]</a:t>
+                <a:t>subHR per 10 % decline: 1.46 (1.20-1.77), p_Bonf = &lt;0.001 (n = 6)  |  per IQR decline (Δ = 29.5 %): 3.05 (1.73-5.37)  |  IQR: [-15.6, 13.9] %</a:t>
               </a:r>
             </a:p>
           </p:txBody>
         </p:sp>
         <p:sp>
           <p:nvSpPr>
-            <p:cNvPr id="39" name="tx39"/>
+            <p:cNvPr id="37" name="tx37"/>
             <p:cNvSpPr/>
             <p:nvPr/>
           </p:nvSpPr>

--- a/docs/pptx/auc3/jx-auc3-linsubhr-ratio-sideeffect.pptx
+++ b/docs/pptx/auc3/jx-auc3-linsubhr-ratio-sideeffect.pptx
@@ -2265,34 +2265,26 @@
         </p:sp>
         <p:sp>
           <p:nvSpPr>
-            <p:cNvPr id="4" name="pl4"/>
+            <p:cNvPr id="4" name="rc4"/>
             <p:cNvSpPr/>
             <p:nvPr/>
           </p:nvSpPr>
           <p:spPr>
             <a:xfrm>
-              <a:off x="817517" y="5142518"/>
-              <a:ext cx="7799693" cy="0"/>
+              <a:off x="457200" y="1600200"/>
+              <a:ext cx="8229600" cy="4525962"/>
             </a:xfrm>
-            <a:custGeom>
+            <a:prstGeom prst="rect">
               <a:avLst/>
-              <a:pathLst>
-                <a:path w="7799693" h="0">
-                  <a:moveTo>
-                    <a:pt x="0" y="0"/>
-                  </a:moveTo>
-                  <a:lnTo>
-                    <a:pt x="7799693" y="0"/>
-                  </a:lnTo>
-                  <a:lnTo>
-                    <a:pt x="7799693" y="0"/>
-                  </a:lnTo>
-                </a:path>
-              </a:pathLst>
-            </a:custGeom>
-            <a:ln w="6775" cap="flat">
+            </a:prstGeom>
+            <a:solidFill>
+              <a:srgbClr val="FFFFFF">
+                <a:alpha val="100000"/>
+              </a:srgbClr>
+            </a:solidFill>
+            <a:ln w="13550" cap="rnd">
               <a:solidFill>
-                <a:srgbClr val="EBEBEB">
+                <a:srgbClr val="FFFFFF">
                   <a:alpha val="100000"/>
                 </a:srgbClr>
               </a:solidFill>
@@ -2314,21 +2306,21 @@
           </p:nvSpPr>
           <p:spPr>
             <a:xfrm>
-              <a:off x="817517" y="4313054"/>
-              <a:ext cx="7799693" cy="0"/>
+              <a:off x="887106" y="3250627"/>
+              <a:ext cx="7660515" cy="0"/>
             </a:xfrm>
             <a:custGeom>
               <a:avLst/>
               <a:pathLst>
-                <a:path w="7799693" h="0">
+                <a:path w="7660515" h="0">
                   <a:moveTo>
                     <a:pt x="0" y="0"/>
                   </a:moveTo>
                   <a:lnTo>
-                    <a:pt x="7799693" y="0"/>
-                  </a:lnTo>
-                  <a:lnTo>
-                    <a:pt x="7799693" y="0"/>
+                    <a:pt x="7660515" y="0"/>
+                  </a:lnTo>
+                  <a:lnTo>
+                    <a:pt x="7660515" y="0"/>
                   </a:lnTo>
                 </a:path>
               </a:pathLst>
@@ -2357,21 +2349,21 @@
           </p:nvSpPr>
           <p:spPr>
             <a:xfrm>
-              <a:off x="817517" y="3483591"/>
-              <a:ext cx="7799693" cy="0"/>
+              <a:off x="887106" y="2951293"/>
+              <a:ext cx="7660515" cy="0"/>
             </a:xfrm>
             <a:custGeom>
               <a:avLst/>
               <a:pathLst>
-                <a:path w="7799693" h="0">
+                <a:path w="7660515" h="0">
                   <a:moveTo>
                     <a:pt x="0" y="0"/>
                   </a:moveTo>
                   <a:lnTo>
-                    <a:pt x="7799693" y="0"/>
-                  </a:lnTo>
-                  <a:lnTo>
-                    <a:pt x="7799693" y="0"/>
+                    <a:pt x="7660515" y="0"/>
+                  </a:lnTo>
+                  <a:lnTo>
+                    <a:pt x="7660515" y="0"/>
                   </a:lnTo>
                 </a:path>
               </a:pathLst>
@@ -2400,21 +2392,21 @@
           </p:nvSpPr>
           <p:spPr>
             <a:xfrm>
-              <a:off x="817517" y="2654127"/>
-              <a:ext cx="7799693" cy="0"/>
+              <a:off x="887106" y="2651959"/>
+              <a:ext cx="7660515" cy="0"/>
             </a:xfrm>
             <a:custGeom>
               <a:avLst/>
               <a:pathLst>
-                <a:path w="7799693" h="0">
+                <a:path w="7660515" h="0">
                   <a:moveTo>
                     <a:pt x="0" y="0"/>
                   </a:moveTo>
                   <a:lnTo>
-                    <a:pt x="7799693" y="0"/>
-                  </a:lnTo>
-                  <a:lnTo>
-                    <a:pt x="7799693" y="0"/>
+                    <a:pt x="7660515" y="0"/>
+                  </a:lnTo>
+                  <a:lnTo>
+                    <a:pt x="7660515" y="0"/>
                   </a:lnTo>
                 </a:path>
               </a:pathLst>
@@ -2443,21 +2435,21 @@
           </p:nvSpPr>
           <p:spPr>
             <a:xfrm>
-              <a:off x="1531834" y="2073503"/>
-              <a:ext cx="0" cy="3649639"/>
+              <a:off x="887106" y="2352625"/>
+              <a:ext cx="7660515" cy="0"/>
             </a:xfrm>
             <a:custGeom>
               <a:avLst/>
               <a:pathLst>
-                <a:path w="0" h="3649639">
+                <a:path w="7660515" h="0">
                   <a:moveTo>
-                    <a:pt x="0" y="3649639"/>
+                    <a:pt x="0" y="0"/>
                   </a:moveTo>
                   <a:lnTo>
-                    <a:pt x="0" y="0"/>
-                  </a:lnTo>
-                  <a:lnTo>
-                    <a:pt x="0" y="0"/>
+                    <a:pt x="7660515" y="0"/>
+                  </a:lnTo>
+                  <a:lnTo>
+                    <a:pt x="7660515" y="0"/>
                   </a:lnTo>
                 </a:path>
               </a:pathLst>
@@ -2486,15 +2478,15 @@
           </p:nvSpPr>
           <p:spPr>
             <a:xfrm>
-              <a:off x="3586410" y="2073503"/>
-              <a:ext cx="0" cy="3649639"/>
+              <a:off x="1588677" y="2143092"/>
+              <a:ext cx="0" cy="1317069"/>
             </a:xfrm>
             <a:custGeom>
               <a:avLst/>
               <a:pathLst>
-                <a:path w="0" h="3649639">
+                <a:path w="0" h="1317069">
                   <a:moveTo>
-                    <a:pt x="0" y="3649639"/>
+                    <a:pt x="0" y="1317069"/>
                   </a:moveTo>
                   <a:lnTo>
                     <a:pt x="0" y="0"/>
@@ -2529,15 +2521,15 @@
           </p:nvSpPr>
           <p:spPr>
             <a:xfrm>
-              <a:off x="5640985" y="2073503"/>
-              <a:ext cx="0" cy="3649639"/>
+              <a:off x="3606590" y="2143092"/>
+              <a:ext cx="0" cy="1317069"/>
             </a:xfrm>
             <a:custGeom>
               <a:avLst/>
               <a:pathLst>
-                <a:path w="0" h="3649639">
+                <a:path w="0" h="1317069">
                   <a:moveTo>
-                    <a:pt x="0" y="3649639"/>
+                    <a:pt x="0" y="1317069"/>
                   </a:moveTo>
                   <a:lnTo>
                     <a:pt x="0" y="0"/>
@@ -2572,15 +2564,15 @@
           </p:nvSpPr>
           <p:spPr>
             <a:xfrm>
-              <a:off x="7695561" y="2073503"/>
-              <a:ext cx="0" cy="3649639"/>
+              <a:off x="5624504" y="2143092"/>
+              <a:ext cx="0" cy="1317069"/>
             </a:xfrm>
             <a:custGeom>
               <a:avLst/>
               <a:pathLst>
-                <a:path w="0" h="3649639">
+                <a:path w="0" h="1317069">
                   <a:moveTo>
-                    <a:pt x="0" y="3649639"/>
+                    <a:pt x="0" y="1317069"/>
                   </a:moveTo>
                   <a:lnTo>
                     <a:pt x="0" y="0"/>
@@ -2615,26 +2607,26 @@
           </p:nvSpPr>
           <p:spPr>
             <a:xfrm>
-              <a:off x="817517" y="5557249"/>
-              <a:ext cx="7799693" cy="0"/>
+              <a:off x="7642418" y="2143092"/>
+              <a:ext cx="0" cy="1317069"/>
             </a:xfrm>
             <a:custGeom>
               <a:avLst/>
               <a:pathLst>
-                <a:path w="7799693" h="0">
+                <a:path w="0" h="1317069">
                   <a:moveTo>
+                    <a:pt x="0" y="1317069"/>
+                  </a:moveTo>
+                  <a:lnTo>
                     <a:pt x="0" y="0"/>
-                  </a:moveTo>
-                  <a:lnTo>
-                    <a:pt x="7799693" y="0"/>
-                  </a:lnTo>
-                  <a:lnTo>
-                    <a:pt x="7799693" y="0"/>
+                  </a:lnTo>
+                  <a:lnTo>
+                    <a:pt x="0" y="0"/>
                   </a:lnTo>
                 </a:path>
               </a:pathLst>
             </a:custGeom>
-            <a:ln w="13550" cap="flat">
+            <a:ln w="6775" cap="flat">
               <a:solidFill>
                 <a:srgbClr val="EBEBEB">
                   <a:alpha val="100000"/>
@@ -2658,21 +2650,21 @@
           </p:nvSpPr>
           <p:spPr>
             <a:xfrm>
-              <a:off x="817517" y="4727786"/>
-              <a:ext cx="7799693" cy="0"/>
+              <a:off x="887106" y="3400294"/>
+              <a:ext cx="7660515" cy="0"/>
             </a:xfrm>
             <a:custGeom>
               <a:avLst/>
               <a:pathLst>
-                <a:path w="7799693" h="0">
+                <a:path w="7660515" h="0">
                   <a:moveTo>
                     <a:pt x="0" y="0"/>
                   </a:moveTo>
                   <a:lnTo>
-                    <a:pt x="7799693" y="0"/>
-                  </a:lnTo>
-                  <a:lnTo>
-                    <a:pt x="7799693" y="0"/>
+                    <a:pt x="7660515" y="0"/>
+                  </a:lnTo>
+                  <a:lnTo>
+                    <a:pt x="7660515" y="0"/>
                   </a:lnTo>
                 </a:path>
               </a:pathLst>
@@ -2701,21 +2693,21 @@
           </p:nvSpPr>
           <p:spPr>
             <a:xfrm>
-              <a:off x="817517" y="3898322"/>
-              <a:ext cx="7799693" cy="0"/>
+              <a:off x="887106" y="3100960"/>
+              <a:ext cx="7660515" cy="0"/>
             </a:xfrm>
             <a:custGeom>
               <a:avLst/>
               <a:pathLst>
-                <a:path w="7799693" h="0">
+                <a:path w="7660515" h="0">
                   <a:moveTo>
                     <a:pt x="0" y="0"/>
                   </a:moveTo>
                   <a:lnTo>
-                    <a:pt x="7799693" y="0"/>
-                  </a:lnTo>
-                  <a:lnTo>
-                    <a:pt x="7799693" y="0"/>
+                    <a:pt x="7660515" y="0"/>
+                  </a:lnTo>
+                  <a:lnTo>
+                    <a:pt x="7660515" y="0"/>
                   </a:lnTo>
                 </a:path>
               </a:pathLst>
@@ -2744,21 +2736,21 @@
           </p:nvSpPr>
           <p:spPr>
             <a:xfrm>
-              <a:off x="817517" y="3068859"/>
-              <a:ext cx="7799693" cy="0"/>
+              <a:off x="887106" y="2801626"/>
+              <a:ext cx="7660515" cy="0"/>
             </a:xfrm>
             <a:custGeom>
               <a:avLst/>
               <a:pathLst>
-                <a:path w="7799693" h="0">
+                <a:path w="7660515" h="0">
                   <a:moveTo>
                     <a:pt x="0" y="0"/>
                   </a:moveTo>
                   <a:lnTo>
-                    <a:pt x="7799693" y="0"/>
-                  </a:lnTo>
-                  <a:lnTo>
-                    <a:pt x="7799693" y="0"/>
+                    <a:pt x="7660515" y="0"/>
+                  </a:lnTo>
+                  <a:lnTo>
+                    <a:pt x="7660515" y="0"/>
                   </a:lnTo>
                 </a:path>
               </a:pathLst>
@@ -2787,21 +2779,21 @@
           </p:nvSpPr>
           <p:spPr>
             <a:xfrm>
-              <a:off x="817517" y="2239395"/>
-              <a:ext cx="7799693" cy="0"/>
+              <a:off x="887106" y="2502292"/>
+              <a:ext cx="7660515" cy="0"/>
             </a:xfrm>
             <a:custGeom>
               <a:avLst/>
               <a:pathLst>
-                <a:path w="7799693" h="0">
+                <a:path w="7660515" h="0">
                   <a:moveTo>
                     <a:pt x="0" y="0"/>
                   </a:moveTo>
                   <a:lnTo>
-                    <a:pt x="7799693" y="0"/>
-                  </a:lnTo>
-                  <a:lnTo>
-                    <a:pt x="7799693" y="0"/>
+                    <a:pt x="7660515" y="0"/>
+                  </a:lnTo>
+                  <a:lnTo>
+                    <a:pt x="7660515" y="0"/>
                   </a:lnTo>
                 </a:path>
               </a:pathLst>
@@ -2830,21 +2822,21 @@
           </p:nvSpPr>
           <p:spPr>
             <a:xfrm>
-              <a:off x="2559122" y="2073503"/>
-              <a:ext cx="0" cy="3649639"/>
+              <a:off x="887106" y="2202958"/>
+              <a:ext cx="7660515" cy="0"/>
             </a:xfrm>
             <a:custGeom>
               <a:avLst/>
               <a:pathLst>
-                <a:path w="0" h="3649639">
+                <a:path w="7660515" h="0">
                   <a:moveTo>
-                    <a:pt x="0" y="3649639"/>
+                    <a:pt x="0" y="0"/>
                   </a:moveTo>
                   <a:lnTo>
-                    <a:pt x="0" y="0"/>
-                  </a:lnTo>
-                  <a:lnTo>
-                    <a:pt x="0" y="0"/>
+                    <a:pt x="7660515" y="0"/>
+                  </a:lnTo>
+                  <a:lnTo>
+                    <a:pt x="7660515" y="0"/>
                   </a:lnTo>
                 </a:path>
               </a:pathLst>
@@ -2873,15 +2865,15 @@
           </p:nvSpPr>
           <p:spPr>
             <a:xfrm>
-              <a:off x="4613698" y="2073503"/>
-              <a:ext cx="0" cy="3649639"/>
+              <a:off x="2597634" y="2143092"/>
+              <a:ext cx="0" cy="1317069"/>
             </a:xfrm>
             <a:custGeom>
               <a:avLst/>
               <a:pathLst>
-                <a:path w="0" h="3649639">
+                <a:path w="0" h="1317069">
                   <a:moveTo>
-                    <a:pt x="0" y="3649639"/>
+                    <a:pt x="0" y="1317069"/>
                   </a:moveTo>
                   <a:lnTo>
                     <a:pt x="0" y="0"/>
@@ -2916,15 +2908,15 @@
           </p:nvSpPr>
           <p:spPr>
             <a:xfrm>
-              <a:off x="6668273" y="2073503"/>
-              <a:ext cx="0" cy="3649639"/>
+              <a:off x="4615547" y="2143092"/>
+              <a:ext cx="0" cy="1317069"/>
             </a:xfrm>
             <a:custGeom>
               <a:avLst/>
               <a:pathLst>
-                <a:path w="0" h="3649639">
+                <a:path w="0" h="1317069">
                   <a:moveTo>
-                    <a:pt x="0" y="3649639"/>
+                    <a:pt x="0" y="1317069"/>
                   </a:moveTo>
                   <a:lnTo>
                     <a:pt x="0" y="0"/>
@@ -2953,567 +2945,610 @@
         </p:sp>
         <p:sp>
           <p:nvSpPr>
-            <p:cNvPr id="20" name="pg20"/>
+            <p:cNvPr id="20" name="pl20"/>
             <p:cNvSpPr/>
             <p:nvPr/>
           </p:nvSpPr>
           <p:spPr>
             <a:xfrm>
-              <a:off x="1172049" y="2073503"/>
-              <a:ext cx="7090630" cy="3423835"/>
+              <a:off x="6633461" y="2143092"/>
+              <a:ext cx="0" cy="1317069"/>
             </a:xfrm>
             <a:custGeom>
               <a:avLst/>
               <a:pathLst>
-                <a:path w="7090630" h="3423835">
+                <a:path w="0" h="1317069">
                   <a:moveTo>
-                    <a:pt x="1224447" y="0"/>
+                    <a:pt x="0" y="1317069"/>
                   </a:moveTo>
                   <a:lnTo>
-                    <a:pt x="1289205" y="153147"/>
-                  </a:lnTo>
-                  <a:lnTo>
-                    <a:pt x="1360827" y="314331"/>
-                  </a:lnTo>
-                  <a:lnTo>
-                    <a:pt x="1432450" y="467716"/>
-                  </a:lnTo>
-                  <a:lnTo>
-                    <a:pt x="1504073" y="613677"/>
-                  </a:lnTo>
-                  <a:lnTo>
-                    <a:pt x="1575695" y="752574"/>
-                  </a:lnTo>
-                  <a:lnTo>
-                    <a:pt x="1647318" y="884750"/>
-                  </a:lnTo>
-                  <a:lnTo>
-                    <a:pt x="1718940" y="1010528"/>
-                  </a:lnTo>
-                  <a:lnTo>
-                    <a:pt x="1790563" y="1130220"/>
-                  </a:lnTo>
-                  <a:lnTo>
-                    <a:pt x="1862185" y="1244119"/>
-                  </a:lnTo>
-                  <a:lnTo>
-                    <a:pt x="1933808" y="1352506"/>
-                  </a:lnTo>
-                  <a:lnTo>
-                    <a:pt x="2005430" y="1455648"/>
-                  </a:lnTo>
-                  <a:lnTo>
-                    <a:pt x="2077053" y="1553798"/>
-                  </a:lnTo>
-                  <a:lnTo>
-                    <a:pt x="2148675" y="1647198"/>
-                  </a:lnTo>
-                  <a:lnTo>
-                    <a:pt x="2220298" y="1736078"/>
-                  </a:lnTo>
-                  <a:lnTo>
-                    <a:pt x="2291920" y="1820657"/>
-                  </a:lnTo>
-                  <a:lnTo>
-                    <a:pt x="2363543" y="1901142"/>
-                  </a:lnTo>
-                  <a:lnTo>
-                    <a:pt x="2435165" y="1977732"/>
-                  </a:lnTo>
-                  <a:lnTo>
-                    <a:pt x="2506788" y="2050616"/>
-                  </a:lnTo>
-                  <a:lnTo>
-                    <a:pt x="2578410" y="2119973"/>
-                  </a:lnTo>
-                  <a:lnTo>
-                    <a:pt x="2650033" y="2185972"/>
-                  </a:lnTo>
-                  <a:lnTo>
-                    <a:pt x="2721655" y="2248778"/>
-                  </a:lnTo>
-                  <a:lnTo>
-                    <a:pt x="2793278" y="2308545"/>
-                  </a:lnTo>
-                  <a:lnTo>
-                    <a:pt x="2864901" y="2365419"/>
-                  </a:lnTo>
-                  <a:lnTo>
-                    <a:pt x="2936523" y="2419540"/>
-                  </a:lnTo>
-                  <a:lnTo>
-                    <a:pt x="3008146" y="2471043"/>
-                  </a:lnTo>
-                  <a:lnTo>
-                    <a:pt x="3079768" y="2520053"/>
-                  </a:lnTo>
-                  <a:lnTo>
-                    <a:pt x="3151391" y="2566691"/>
-                  </a:lnTo>
-                  <a:lnTo>
-                    <a:pt x="3223013" y="2611072"/>
-                  </a:lnTo>
-                  <a:lnTo>
-                    <a:pt x="3294636" y="2653305"/>
-                  </a:lnTo>
-                  <a:lnTo>
-                    <a:pt x="3366258" y="2667310"/>
-                  </a:lnTo>
-                  <a:lnTo>
-                    <a:pt x="3437881" y="2680442"/>
-                  </a:lnTo>
-                  <a:lnTo>
-                    <a:pt x="3509503" y="2693363"/>
-                  </a:lnTo>
-                  <a:lnTo>
-                    <a:pt x="3581126" y="2706076"/>
-                  </a:lnTo>
-                  <a:lnTo>
-                    <a:pt x="3652748" y="2718585"/>
-                  </a:lnTo>
-                  <a:lnTo>
-                    <a:pt x="3724371" y="2730892"/>
-                  </a:lnTo>
-                  <a:lnTo>
-                    <a:pt x="3795993" y="2743001"/>
-                  </a:lnTo>
-                  <a:lnTo>
-                    <a:pt x="3867616" y="2754916"/>
-                  </a:lnTo>
-                  <a:lnTo>
-                    <a:pt x="3939238" y="2766639"/>
-                  </a:lnTo>
-                  <a:lnTo>
-                    <a:pt x="4010861" y="2778173"/>
-                  </a:lnTo>
-                  <a:lnTo>
-                    <a:pt x="4082483" y="2789522"/>
-                  </a:lnTo>
-                  <a:lnTo>
-                    <a:pt x="4154106" y="2800689"/>
-                  </a:lnTo>
-                  <a:lnTo>
-                    <a:pt x="4225729" y="2811675"/>
-                  </a:lnTo>
-                  <a:lnTo>
-                    <a:pt x="4297351" y="2822485"/>
-                  </a:lnTo>
-                  <a:lnTo>
-                    <a:pt x="4368974" y="2833122"/>
-                  </a:lnTo>
-                  <a:lnTo>
-                    <a:pt x="4440596" y="2843587"/>
-                  </a:lnTo>
-                  <a:lnTo>
-                    <a:pt x="4512219" y="2853883"/>
-                  </a:lnTo>
-                  <a:lnTo>
-                    <a:pt x="4583841" y="2864014"/>
-                  </a:lnTo>
-                  <a:lnTo>
-                    <a:pt x="4655464" y="2873983"/>
-                  </a:lnTo>
-                  <a:lnTo>
-                    <a:pt x="4727086" y="2883790"/>
-                  </a:lnTo>
-                  <a:lnTo>
-                    <a:pt x="4798709" y="2893441"/>
-                  </a:lnTo>
-                  <a:lnTo>
-                    <a:pt x="4870331" y="2902935"/>
-                  </a:lnTo>
-                  <a:lnTo>
-                    <a:pt x="4941954" y="2912278"/>
-                  </a:lnTo>
-                  <a:lnTo>
-                    <a:pt x="5013576" y="2921469"/>
-                  </a:lnTo>
-                  <a:lnTo>
-                    <a:pt x="5085199" y="2930513"/>
-                  </a:lnTo>
-                  <a:lnTo>
-                    <a:pt x="5156821" y="2939412"/>
-                  </a:lnTo>
-                  <a:lnTo>
-                    <a:pt x="5228444" y="2948167"/>
-                  </a:lnTo>
-                  <a:lnTo>
-                    <a:pt x="5300066" y="2956782"/>
-                  </a:lnTo>
-                  <a:lnTo>
-                    <a:pt x="5371689" y="2965258"/>
-                  </a:lnTo>
-                  <a:lnTo>
-                    <a:pt x="5443311" y="2973598"/>
-                  </a:lnTo>
-                  <a:lnTo>
-                    <a:pt x="5514934" y="2981803"/>
-                  </a:lnTo>
-                  <a:lnTo>
-                    <a:pt x="5586557" y="2989877"/>
-                  </a:lnTo>
-                  <a:lnTo>
-                    <a:pt x="5658179" y="2997821"/>
-                  </a:lnTo>
-                  <a:lnTo>
-                    <a:pt x="5729802" y="3005637"/>
-                  </a:lnTo>
-                  <a:lnTo>
-                    <a:pt x="5801424" y="3013327"/>
-                  </a:lnTo>
-                  <a:lnTo>
-                    <a:pt x="5873047" y="3020893"/>
-                  </a:lnTo>
-                  <a:lnTo>
-                    <a:pt x="5944669" y="3028338"/>
-                  </a:lnTo>
-                  <a:lnTo>
-                    <a:pt x="6016292" y="3035663"/>
-                  </a:lnTo>
-                  <a:lnTo>
-                    <a:pt x="6087914" y="3042870"/>
-                  </a:lnTo>
-                  <a:lnTo>
-                    <a:pt x="6159537" y="3049962"/>
-                  </a:lnTo>
-                  <a:lnTo>
-                    <a:pt x="6231159" y="3056939"/>
-                  </a:lnTo>
-                  <a:lnTo>
-                    <a:pt x="6302782" y="3063804"/>
-                  </a:lnTo>
-                  <a:lnTo>
-                    <a:pt x="6374404" y="3070559"/>
-                  </a:lnTo>
-                  <a:lnTo>
-                    <a:pt x="6446027" y="3077205"/>
-                  </a:lnTo>
-                  <a:lnTo>
-                    <a:pt x="6517649" y="3083744"/>
-                  </a:lnTo>
-                  <a:lnTo>
-                    <a:pt x="6589272" y="3090178"/>
-                  </a:lnTo>
-                  <a:lnTo>
-                    <a:pt x="6660894" y="3096508"/>
-                  </a:lnTo>
-                  <a:lnTo>
-                    <a:pt x="6732517" y="3102737"/>
-                  </a:lnTo>
-                  <a:lnTo>
-                    <a:pt x="6804139" y="3108865"/>
-                  </a:lnTo>
-                  <a:lnTo>
-                    <a:pt x="6875762" y="3114895"/>
-                  </a:lnTo>
-                  <a:lnTo>
-                    <a:pt x="6947385" y="3120828"/>
-                  </a:lnTo>
-                  <a:lnTo>
-                    <a:pt x="7019007" y="3126665"/>
-                  </a:lnTo>
-                  <a:lnTo>
-                    <a:pt x="7090630" y="3132409"/>
-                  </a:lnTo>
-                  <a:lnTo>
-                    <a:pt x="7090630" y="3423835"/>
-                  </a:lnTo>
-                  <a:lnTo>
-                    <a:pt x="7019007" y="3420788"/>
-                  </a:lnTo>
-                  <a:lnTo>
-                    <a:pt x="6947385" y="3417586"/>
-                  </a:lnTo>
-                  <a:lnTo>
-                    <a:pt x="6875762" y="3414221"/>
-                  </a:lnTo>
-                  <a:lnTo>
-                    <a:pt x="6804139" y="3410685"/>
-                  </a:lnTo>
-                  <a:lnTo>
-                    <a:pt x="6732517" y="3406970"/>
-                  </a:lnTo>
-                  <a:lnTo>
-                    <a:pt x="6660894" y="3403065"/>
-                  </a:lnTo>
-                  <a:lnTo>
-                    <a:pt x="6589272" y="3398962"/>
-                  </a:lnTo>
-                  <a:lnTo>
-                    <a:pt x="6517649" y="3394650"/>
-                  </a:lnTo>
-                  <a:lnTo>
-                    <a:pt x="6446027" y="3390119"/>
-                  </a:lnTo>
-                  <a:lnTo>
-                    <a:pt x="6374404" y="3385358"/>
-                  </a:lnTo>
-                  <a:lnTo>
-                    <a:pt x="6302782" y="3380354"/>
-                  </a:lnTo>
-                  <a:lnTo>
-                    <a:pt x="6231159" y="3375096"/>
-                  </a:lnTo>
-                  <a:lnTo>
-                    <a:pt x="6159537" y="3369570"/>
-                  </a:lnTo>
-                  <a:lnTo>
-                    <a:pt x="6087914" y="3363764"/>
-                  </a:lnTo>
-                  <a:lnTo>
-                    <a:pt x="6016292" y="3357662"/>
-                  </a:lnTo>
-                  <a:lnTo>
-                    <a:pt x="5944669" y="3351250"/>
-                  </a:lnTo>
-                  <a:lnTo>
-                    <a:pt x="5873047" y="3344511"/>
-                  </a:lnTo>
-                  <a:lnTo>
-                    <a:pt x="5801424" y="3337430"/>
-                  </a:lnTo>
-                  <a:lnTo>
-                    <a:pt x="5729802" y="3329989"/>
-                  </a:lnTo>
-                  <a:lnTo>
-                    <a:pt x="5658179" y="3322170"/>
-                  </a:lnTo>
-                  <a:lnTo>
-                    <a:pt x="5586557" y="3313952"/>
-                  </a:lnTo>
-                  <a:lnTo>
-                    <a:pt x="5514934" y="3305317"/>
-                  </a:lnTo>
-                  <a:lnTo>
-                    <a:pt x="5443311" y="3296243"/>
-                  </a:lnTo>
-                  <a:lnTo>
-                    <a:pt x="5371689" y="3286707"/>
-                  </a:lnTo>
-                  <a:lnTo>
-                    <a:pt x="5300066" y="3276687"/>
-                  </a:lnTo>
-                  <a:lnTo>
-                    <a:pt x="5228444" y="3266156"/>
-                  </a:lnTo>
-                  <a:lnTo>
-                    <a:pt x="5156821" y="3255091"/>
-                  </a:lnTo>
-                  <a:lnTo>
-                    <a:pt x="5085199" y="3243462"/>
-                  </a:lnTo>
-                  <a:lnTo>
-                    <a:pt x="5013576" y="3231242"/>
-                  </a:lnTo>
-                  <a:lnTo>
-                    <a:pt x="4941954" y="3218401"/>
-                  </a:lnTo>
-                  <a:lnTo>
-                    <a:pt x="4870331" y="3204906"/>
-                  </a:lnTo>
-                  <a:lnTo>
-                    <a:pt x="4798709" y="3190725"/>
-                  </a:lnTo>
-                  <a:lnTo>
-                    <a:pt x="4727086" y="3175823"/>
-                  </a:lnTo>
-                  <a:lnTo>
-                    <a:pt x="4655464" y="3160163"/>
-                  </a:lnTo>
-                  <a:lnTo>
-                    <a:pt x="4583841" y="3143707"/>
-                  </a:lnTo>
-                  <a:lnTo>
-                    <a:pt x="4512219" y="3126414"/>
-                  </a:lnTo>
-                  <a:lnTo>
-                    <a:pt x="4440596" y="3108242"/>
-                  </a:lnTo>
-                  <a:lnTo>
-                    <a:pt x="4368974" y="3089145"/>
-                  </a:lnTo>
-                  <a:lnTo>
-                    <a:pt x="4297351" y="3069077"/>
-                  </a:lnTo>
-                  <a:lnTo>
-                    <a:pt x="4225729" y="3047988"/>
-                  </a:lnTo>
-                  <a:lnTo>
-                    <a:pt x="4154106" y="3025827"/>
-                  </a:lnTo>
-                  <a:lnTo>
-                    <a:pt x="4082483" y="3002539"/>
-                  </a:lnTo>
-                  <a:lnTo>
-                    <a:pt x="4010861" y="2978067"/>
-                  </a:lnTo>
-                  <a:lnTo>
-                    <a:pt x="3939238" y="2952350"/>
-                  </a:lnTo>
-                  <a:lnTo>
-                    <a:pt x="3867616" y="2925325"/>
-                  </a:lnTo>
-                  <a:lnTo>
-                    <a:pt x="3795993" y="2896925"/>
-                  </a:lnTo>
-                  <a:lnTo>
-                    <a:pt x="3724371" y="2867082"/>
-                  </a:lnTo>
-                  <a:lnTo>
-                    <a:pt x="3652748" y="2835721"/>
-                  </a:lnTo>
-                  <a:lnTo>
-                    <a:pt x="3581126" y="2802764"/>
-                  </a:lnTo>
-                  <a:lnTo>
-                    <a:pt x="3509503" y="2768132"/>
-                  </a:lnTo>
-                  <a:lnTo>
-                    <a:pt x="3437881" y="2731739"/>
-                  </a:lnTo>
-                  <a:lnTo>
-                    <a:pt x="3366258" y="2693494"/>
-                  </a:lnTo>
-                  <a:lnTo>
-                    <a:pt x="3294636" y="2653963"/>
-                  </a:lnTo>
-                  <a:lnTo>
-                    <a:pt x="3223013" y="2640398"/>
-                  </a:lnTo>
-                  <a:lnTo>
-                    <a:pt x="3151391" y="2626612"/>
-                  </a:lnTo>
-                  <a:lnTo>
-                    <a:pt x="3079768" y="2612600"/>
-                  </a:lnTo>
-                  <a:lnTo>
-                    <a:pt x="3008146" y="2598358"/>
-                  </a:lnTo>
-                  <a:lnTo>
-                    <a:pt x="2936523" y="2583884"/>
-                  </a:lnTo>
-                  <a:lnTo>
-                    <a:pt x="2864901" y="2569174"/>
-                  </a:lnTo>
-                  <a:lnTo>
-                    <a:pt x="2793278" y="2554223"/>
-                  </a:lnTo>
-                  <a:lnTo>
-                    <a:pt x="2721655" y="2539027"/>
-                  </a:lnTo>
-                  <a:lnTo>
-                    <a:pt x="2650033" y="2523584"/>
-                  </a:lnTo>
-                  <a:lnTo>
-                    <a:pt x="2578410" y="2507887"/>
-                  </a:lnTo>
-                  <a:lnTo>
-                    <a:pt x="2506788" y="2491934"/>
-                  </a:lnTo>
-                  <a:lnTo>
-                    <a:pt x="2435165" y="2475720"/>
-                  </a:lnTo>
-                  <a:lnTo>
-                    <a:pt x="2363543" y="2459242"/>
-                  </a:lnTo>
-                  <a:lnTo>
-                    <a:pt x="2291920" y="2442494"/>
-                  </a:lnTo>
-                  <a:lnTo>
-                    <a:pt x="2220298" y="2425472"/>
-                  </a:lnTo>
-                  <a:lnTo>
-                    <a:pt x="2148675" y="2408171"/>
-                  </a:lnTo>
-                  <a:lnTo>
-                    <a:pt x="2077053" y="2390588"/>
-                  </a:lnTo>
-                  <a:lnTo>
-                    <a:pt x="2005430" y="2372718"/>
-                  </a:lnTo>
-                  <a:lnTo>
-                    <a:pt x="1933808" y="2354555"/>
-                  </a:lnTo>
-                  <a:lnTo>
-                    <a:pt x="1862185" y="2336096"/>
-                  </a:lnTo>
-                  <a:lnTo>
-                    <a:pt x="1790563" y="2317334"/>
-                  </a:lnTo>
-                  <a:lnTo>
-                    <a:pt x="1718940" y="2298266"/>
-                  </a:lnTo>
-                  <a:lnTo>
-                    <a:pt x="1647318" y="2278886"/>
-                  </a:lnTo>
-                  <a:lnTo>
-                    <a:pt x="1575695" y="2259190"/>
-                  </a:lnTo>
-                  <a:lnTo>
-                    <a:pt x="1504073" y="2239171"/>
-                  </a:lnTo>
-                  <a:lnTo>
-                    <a:pt x="1432450" y="2218826"/>
-                  </a:lnTo>
-                  <a:lnTo>
-                    <a:pt x="1360827" y="2198147"/>
-                  </a:lnTo>
-                  <a:lnTo>
-                    <a:pt x="1289205" y="2177131"/>
-                  </a:lnTo>
-                  <a:lnTo>
-                    <a:pt x="1217582" y="2155771"/>
-                  </a:lnTo>
-                  <a:lnTo>
-                    <a:pt x="1145960" y="2134062"/>
-                  </a:lnTo>
-                  <a:lnTo>
-                    <a:pt x="1074337" y="2111997"/>
-                  </a:lnTo>
-                  <a:lnTo>
-                    <a:pt x="1002715" y="2089573"/>
-                  </a:lnTo>
-                  <a:lnTo>
-                    <a:pt x="931092" y="2066781"/>
-                  </a:lnTo>
-                  <a:lnTo>
-                    <a:pt x="859470" y="2043617"/>
-                  </a:lnTo>
-                  <a:lnTo>
-                    <a:pt x="787847" y="2020075"/>
-                  </a:lnTo>
-                  <a:lnTo>
-                    <a:pt x="716225" y="1996147"/>
-                  </a:lnTo>
-                  <a:lnTo>
-                    <a:pt x="644602" y="1971829"/>
-                  </a:lnTo>
-                  <a:lnTo>
-                    <a:pt x="572980" y="1947112"/>
-                  </a:lnTo>
-                  <a:lnTo>
-                    <a:pt x="501357" y="1921992"/>
-                  </a:lnTo>
-                  <a:lnTo>
-                    <a:pt x="429735" y="1896461"/>
-                  </a:lnTo>
-                  <a:lnTo>
-                    <a:pt x="358112" y="1870513"/>
-                  </a:lnTo>
-                  <a:lnTo>
-                    <a:pt x="286490" y="1844140"/>
-                  </a:lnTo>
-                  <a:lnTo>
-                    <a:pt x="214867" y="1817337"/>
-                  </a:lnTo>
-                  <a:lnTo>
-                    <a:pt x="143245" y="1790095"/>
-                  </a:lnTo>
-                  <a:lnTo>
-                    <a:pt x="71622" y="1762408"/>
-                  </a:lnTo>
-                  <a:lnTo>
-                    <a:pt x="0" y="1734268"/>
+                    <a:pt x="0" y="0"/>
+                  </a:lnTo>
+                  <a:lnTo>
+                    <a:pt x="0" y="0"/>
+                  </a:lnTo>
+                </a:path>
+              </a:pathLst>
+            </a:custGeom>
+            <a:ln w="13550" cap="flat">
+              <a:solidFill>
+                <a:srgbClr val="EBEBEB">
+                  <a:alpha val="100000"/>
+                </a:srgbClr>
+              </a:solidFill>
+              <a:prstDash val="solid"/>
+              <a:round/>
+            </a:ln>
+          </p:spPr>
+          <p:txBody>
+            <a:bodyPr/>
+            <a:lstStyle/>
+            <a:p/>
+          </p:txBody>
+        </p:sp>
+        <p:sp>
+          <p:nvSpPr>
+            <p:cNvPr id="21" name="pg21"/>
+            <p:cNvSpPr/>
+            <p:nvPr/>
+          </p:nvSpPr>
+          <p:spPr>
+            <a:xfrm>
+              <a:off x="1235312" y="2143092"/>
+              <a:ext cx="6964104" cy="1235581"/>
+            </a:xfrm>
+            <a:custGeom>
+              <a:avLst/>
+              <a:pathLst>
+                <a:path w="6964104" h="1235581">
+                  <a:moveTo>
+                    <a:pt x="1202598" y="0"/>
+                  </a:moveTo>
+                  <a:lnTo>
+                    <a:pt x="1266200" y="55267"/>
+                  </a:lnTo>
+                  <a:lnTo>
+                    <a:pt x="1336545" y="113435"/>
+                  </a:lnTo>
+                  <a:lnTo>
+                    <a:pt x="1406889" y="168787"/>
+                  </a:lnTo>
+                  <a:lnTo>
+                    <a:pt x="1477234" y="221461"/>
+                  </a:lnTo>
+                  <a:lnTo>
+                    <a:pt x="1547578" y="271586"/>
+                  </a:lnTo>
+                  <a:lnTo>
+                    <a:pt x="1617923" y="319285"/>
+                  </a:lnTo>
+                  <a:lnTo>
+                    <a:pt x="1688267" y="364676"/>
+                  </a:lnTo>
+                  <a:lnTo>
+                    <a:pt x="1758612" y="407869"/>
+                  </a:lnTo>
+                  <a:lnTo>
+                    <a:pt x="1828956" y="448973"/>
+                  </a:lnTo>
+                  <a:lnTo>
+                    <a:pt x="1899301" y="488087"/>
+                  </a:lnTo>
+                  <a:lnTo>
+                    <a:pt x="1969645" y="525309"/>
+                  </a:lnTo>
+                  <a:lnTo>
+                    <a:pt x="2039990" y="560729"/>
+                  </a:lnTo>
+                  <a:lnTo>
+                    <a:pt x="2110334" y="594435"/>
+                  </a:lnTo>
+                  <a:lnTo>
+                    <a:pt x="2180679" y="626509"/>
+                  </a:lnTo>
+                  <a:lnTo>
+                    <a:pt x="2251023" y="657032"/>
+                  </a:lnTo>
+                  <a:lnTo>
+                    <a:pt x="2321368" y="686077"/>
+                  </a:lnTo>
+                  <a:lnTo>
+                    <a:pt x="2391712" y="713717"/>
+                  </a:lnTo>
+                  <a:lnTo>
+                    <a:pt x="2462057" y="740019"/>
+                  </a:lnTo>
+                  <a:lnTo>
+                    <a:pt x="2532401" y="765048"/>
+                  </a:lnTo>
+                  <a:lnTo>
+                    <a:pt x="2602746" y="788866"/>
+                  </a:lnTo>
+                  <a:lnTo>
+                    <a:pt x="2673090" y="811531"/>
+                  </a:lnTo>
+                  <a:lnTo>
+                    <a:pt x="2743435" y="833099"/>
+                  </a:lnTo>
+                  <a:lnTo>
+                    <a:pt x="2813779" y="853624"/>
+                  </a:lnTo>
+                  <a:lnTo>
+                    <a:pt x="2884124" y="873155"/>
+                  </a:lnTo>
+                  <a:lnTo>
+                    <a:pt x="2954468" y="891741"/>
+                  </a:lnTo>
+                  <a:lnTo>
+                    <a:pt x="3024813" y="909427"/>
+                  </a:lnTo>
+                  <a:lnTo>
+                    <a:pt x="3095157" y="926258"/>
+                  </a:lnTo>
+                  <a:lnTo>
+                    <a:pt x="3165502" y="942274"/>
+                  </a:lnTo>
+                  <a:lnTo>
+                    <a:pt x="3235846" y="957515"/>
+                  </a:lnTo>
+                  <a:lnTo>
+                    <a:pt x="3306191" y="962569"/>
+                  </a:lnTo>
+                  <a:lnTo>
+                    <a:pt x="3376535" y="967308"/>
+                  </a:lnTo>
+                  <a:lnTo>
+                    <a:pt x="3446880" y="971971"/>
+                  </a:lnTo>
+                  <a:lnTo>
+                    <a:pt x="3517224" y="976559"/>
+                  </a:lnTo>
+                  <a:lnTo>
+                    <a:pt x="3587569" y="981073"/>
+                  </a:lnTo>
+                  <a:lnTo>
+                    <a:pt x="3657913" y="985514"/>
+                  </a:lnTo>
+                  <a:lnTo>
+                    <a:pt x="3728257" y="989884"/>
+                  </a:lnTo>
+                  <a:lnTo>
+                    <a:pt x="3798602" y="994184"/>
+                  </a:lnTo>
+                  <a:lnTo>
+                    <a:pt x="3868946" y="998415"/>
+                  </a:lnTo>
+                  <a:lnTo>
+                    <a:pt x="3939291" y="1002577"/>
+                  </a:lnTo>
+                  <a:lnTo>
+                    <a:pt x="4009635" y="1006673"/>
+                  </a:lnTo>
+                  <a:lnTo>
+                    <a:pt x="4079980" y="1010702"/>
+                  </a:lnTo>
+                  <a:lnTo>
+                    <a:pt x="4150324" y="1014667"/>
+                  </a:lnTo>
+                  <a:lnTo>
+                    <a:pt x="4220669" y="1018568"/>
+                  </a:lnTo>
+                  <a:lnTo>
+                    <a:pt x="4291013" y="1022407"/>
+                  </a:lnTo>
+                  <a:lnTo>
+                    <a:pt x="4361358" y="1026183"/>
+                  </a:lnTo>
+                  <a:lnTo>
+                    <a:pt x="4431702" y="1029899"/>
+                  </a:lnTo>
+                  <a:lnTo>
+                    <a:pt x="4502047" y="1033555"/>
+                  </a:lnTo>
+                  <a:lnTo>
+                    <a:pt x="4572391" y="1037152"/>
+                  </a:lnTo>
+                  <a:lnTo>
+                    <a:pt x="4642736" y="1040692"/>
+                  </a:lnTo>
+                  <a:lnTo>
+                    <a:pt x="4713080" y="1044174"/>
+                  </a:lnTo>
+                  <a:lnTo>
+                    <a:pt x="4783425" y="1047601"/>
+                  </a:lnTo>
+                  <a:lnTo>
+                    <a:pt x="4853769" y="1050972"/>
+                  </a:lnTo>
+                  <a:lnTo>
+                    <a:pt x="4924114" y="1054289"/>
+                  </a:lnTo>
+                  <a:lnTo>
+                    <a:pt x="4994458" y="1057553"/>
+                  </a:lnTo>
+                  <a:lnTo>
+                    <a:pt x="5064803" y="1060764"/>
+                  </a:lnTo>
+                  <a:lnTo>
+                    <a:pt x="5135147" y="1063924"/>
+                  </a:lnTo>
+                  <a:lnTo>
+                    <a:pt x="5205492" y="1067033"/>
+                  </a:lnTo>
+                  <a:lnTo>
+                    <a:pt x="5275836" y="1070092"/>
+                  </a:lnTo>
+                  <a:lnTo>
+                    <a:pt x="5346181" y="1073101"/>
+                  </a:lnTo>
+                  <a:lnTo>
+                    <a:pt x="5416525" y="1076062"/>
+                  </a:lnTo>
+                  <a:lnTo>
+                    <a:pt x="5486870" y="1078976"/>
+                  </a:lnTo>
+                  <a:lnTo>
+                    <a:pt x="5557214" y="1081843"/>
+                  </a:lnTo>
+                  <a:lnTo>
+                    <a:pt x="5627559" y="1084663"/>
+                  </a:lnTo>
+                  <a:lnTo>
+                    <a:pt x="5697903" y="1087438"/>
+                  </a:lnTo>
+                  <a:lnTo>
+                    <a:pt x="5768248" y="1090169"/>
+                  </a:lnTo>
+                  <a:lnTo>
+                    <a:pt x="5838592" y="1092856"/>
+                  </a:lnTo>
+                  <a:lnTo>
+                    <a:pt x="5908937" y="1095499"/>
+                  </a:lnTo>
+                  <a:lnTo>
+                    <a:pt x="5979281" y="1098100"/>
+                  </a:lnTo>
+                  <a:lnTo>
+                    <a:pt x="6049626" y="1100659"/>
+                  </a:lnTo>
+                  <a:lnTo>
+                    <a:pt x="6119970" y="1103177"/>
+                  </a:lnTo>
+                  <a:lnTo>
+                    <a:pt x="6190315" y="1105654"/>
+                  </a:lnTo>
+                  <a:lnTo>
+                    <a:pt x="6260659" y="1108092"/>
+                  </a:lnTo>
+                  <a:lnTo>
+                    <a:pt x="6331004" y="1110490"/>
+                  </a:lnTo>
+                  <a:lnTo>
+                    <a:pt x="6401348" y="1112850"/>
+                  </a:lnTo>
+                  <a:lnTo>
+                    <a:pt x="6471693" y="1115172"/>
+                  </a:lnTo>
+                  <a:lnTo>
+                    <a:pt x="6542037" y="1117457"/>
+                  </a:lnTo>
+                  <a:lnTo>
+                    <a:pt x="6612382" y="1119704"/>
+                  </a:lnTo>
+                  <a:lnTo>
+                    <a:pt x="6682726" y="1121916"/>
+                  </a:lnTo>
+                  <a:lnTo>
+                    <a:pt x="6753071" y="1124092"/>
+                  </a:lnTo>
+                  <a:lnTo>
+                    <a:pt x="6823415" y="1126233"/>
+                  </a:lnTo>
+                  <a:lnTo>
+                    <a:pt x="6893760" y="1128340"/>
+                  </a:lnTo>
+                  <a:lnTo>
+                    <a:pt x="6964104" y="1130412"/>
+                  </a:lnTo>
+                  <a:lnTo>
+                    <a:pt x="6964104" y="1235581"/>
+                  </a:lnTo>
+                  <a:lnTo>
+                    <a:pt x="6893760" y="1234482"/>
+                  </a:lnTo>
+                  <a:lnTo>
+                    <a:pt x="6823415" y="1233326"/>
+                  </a:lnTo>
+                  <a:lnTo>
+                    <a:pt x="6753071" y="1232112"/>
+                  </a:lnTo>
+                  <a:lnTo>
+                    <a:pt x="6682726" y="1230836"/>
+                  </a:lnTo>
+                  <a:lnTo>
+                    <a:pt x="6612382" y="1229495"/>
+                  </a:lnTo>
+                  <a:lnTo>
+                    <a:pt x="6542037" y="1228086"/>
+                  </a:lnTo>
+                  <a:lnTo>
+                    <a:pt x="6471693" y="1226605"/>
+                  </a:lnTo>
+                  <a:lnTo>
+                    <a:pt x="6401348" y="1225049"/>
+                  </a:lnTo>
+                  <a:lnTo>
+                    <a:pt x="6331004" y="1223414"/>
+                  </a:lnTo>
+                  <a:lnTo>
+                    <a:pt x="6260659" y="1221696"/>
+                  </a:lnTo>
+                  <a:lnTo>
+                    <a:pt x="6190315" y="1219890"/>
+                  </a:lnTo>
+                  <a:lnTo>
+                    <a:pt x="6119970" y="1217992"/>
+                  </a:lnTo>
+                  <a:lnTo>
+                    <a:pt x="6049626" y="1215998"/>
+                  </a:lnTo>
+                  <a:lnTo>
+                    <a:pt x="5979281" y="1213903"/>
+                  </a:lnTo>
+                  <a:lnTo>
+                    <a:pt x="5908937" y="1211701"/>
+                  </a:lnTo>
+                  <a:lnTo>
+                    <a:pt x="5838592" y="1209387"/>
+                  </a:lnTo>
+                  <a:lnTo>
+                    <a:pt x="5768248" y="1206955"/>
+                  </a:lnTo>
+                  <a:lnTo>
+                    <a:pt x="5697903" y="1204400"/>
+                  </a:lnTo>
+                  <a:lnTo>
+                    <a:pt x="5627559" y="1201714"/>
+                  </a:lnTo>
+                  <a:lnTo>
+                    <a:pt x="5557214" y="1198893"/>
+                  </a:lnTo>
+                  <a:lnTo>
+                    <a:pt x="5486870" y="1195927"/>
+                  </a:lnTo>
+                  <a:lnTo>
+                    <a:pt x="5416525" y="1192811"/>
+                  </a:lnTo>
+                  <a:lnTo>
+                    <a:pt x="5346181" y="1189536"/>
+                  </a:lnTo>
+                  <a:lnTo>
+                    <a:pt x="5275836" y="1186095"/>
+                  </a:lnTo>
+                  <a:lnTo>
+                    <a:pt x="5205492" y="1182479"/>
+                  </a:lnTo>
+                  <a:lnTo>
+                    <a:pt x="5135147" y="1178679"/>
+                  </a:lnTo>
+                  <a:lnTo>
+                    <a:pt x="5064803" y="1174685"/>
+                  </a:lnTo>
+                  <a:lnTo>
+                    <a:pt x="4994458" y="1170489"/>
+                  </a:lnTo>
+                  <a:lnTo>
+                    <a:pt x="4924114" y="1166079"/>
+                  </a:lnTo>
+                  <a:lnTo>
+                    <a:pt x="4853769" y="1161445"/>
+                  </a:lnTo>
+                  <a:lnTo>
+                    <a:pt x="4783425" y="1156575"/>
+                  </a:lnTo>
+                  <a:lnTo>
+                    <a:pt x="4713080" y="1151457"/>
+                  </a:lnTo>
+                  <a:lnTo>
+                    <a:pt x="4642736" y="1146080"/>
+                  </a:lnTo>
+                  <a:lnTo>
+                    <a:pt x="4572391" y="1140428"/>
+                  </a:lnTo>
+                  <a:lnTo>
+                    <a:pt x="4502047" y="1134490"/>
+                  </a:lnTo>
+                  <a:lnTo>
+                    <a:pt x="4431702" y="1128249"/>
+                  </a:lnTo>
+                  <a:lnTo>
+                    <a:pt x="4361358" y="1121691"/>
+                  </a:lnTo>
+                  <a:lnTo>
+                    <a:pt x="4291013" y="1114799"/>
+                  </a:lnTo>
+                  <a:lnTo>
+                    <a:pt x="4220669" y="1107557"/>
+                  </a:lnTo>
+                  <a:lnTo>
+                    <a:pt x="4150324" y="1099947"/>
+                  </a:lnTo>
+                  <a:lnTo>
+                    <a:pt x="4079980" y="1091949"/>
+                  </a:lnTo>
+                  <a:lnTo>
+                    <a:pt x="4009635" y="1083545"/>
+                  </a:lnTo>
+                  <a:lnTo>
+                    <a:pt x="3939291" y="1074714"/>
+                  </a:lnTo>
+                  <a:lnTo>
+                    <a:pt x="3868946" y="1065433"/>
+                  </a:lnTo>
+                  <a:lnTo>
+                    <a:pt x="3798602" y="1055681"/>
+                  </a:lnTo>
+                  <a:lnTo>
+                    <a:pt x="3728257" y="1045432"/>
+                  </a:lnTo>
+                  <a:lnTo>
+                    <a:pt x="3657913" y="1034662"/>
+                  </a:lnTo>
+                  <a:lnTo>
+                    <a:pt x="3587569" y="1023345"/>
+                  </a:lnTo>
+                  <a:lnTo>
+                    <a:pt x="3517224" y="1011451"/>
+                  </a:lnTo>
+                  <a:lnTo>
+                    <a:pt x="3446880" y="998953"/>
+                  </a:lnTo>
+                  <a:lnTo>
+                    <a:pt x="3376535" y="985820"/>
+                  </a:lnTo>
+                  <a:lnTo>
+                    <a:pt x="3306191" y="972018"/>
+                  </a:lnTo>
+                  <a:lnTo>
+                    <a:pt x="3235846" y="957753"/>
+                  </a:lnTo>
+                  <a:lnTo>
+                    <a:pt x="3165502" y="952857"/>
+                  </a:lnTo>
+                  <a:lnTo>
+                    <a:pt x="3095157" y="947882"/>
+                  </a:lnTo>
+                  <a:lnTo>
+                    <a:pt x="3024813" y="942825"/>
+                  </a:lnTo>
+                  <a:lnTo>
+                    <a:pt x="2954468" y="937686"/>
+                  </a:lnTo>
+                  <a:lnTo>
+                    <a:pt x="2884124" y="932463"/>
+                  </a:lnTo>
+                  <a:lnTo>
+                    <a:pt x="2813779" y="927154"/>
+                  </a:lnTo>
+                  <a:lnTo>
+                    <a:pt x="2743435" y="921759"/>
+                  </a:lnTo>
+                  <a:lnTo>
+                    <a:pt x="2673090" y="916275"/>
+                  </a:lnTo>
+                  <a:lnTo>
+                    <a:pt x="2602746" y="910702"/>
+                  </a:lnTo>
+                  <a:lnTo>
+                    <a:pt x="2532401" y="905037"/>
+                  </a:lnTo>
+                  <a:lnTo>
+                    <a:pt x="2462057" y="899280"/>
+                  </a:lnTo>
+                  <a:lnTo>
+                    <a:pt x="2391712" y="893429"/>
+                  </a:lnTo>
+                  <a:lnTo>
+                    <a:pt x="2321368" y="887482"/>
+                  </a:lnTo>
+                  <a:lnTo>
+                    <a:pt x="2251023" y="881438"/>
+                  </a:lnTo>
+                  <a:lnTo>
+                    <a:pt x="2180679" y="875295"/>
+                  </a:lnTo>
+                  <a:lnTo>
+                    <a:pt x="2110334" y="869052"/>
+                  </a:lnTo>
+                  <a:lnTo>
+                    <a:pt x="2039990" y="862707"/>
+                  </a:lnTo>
+                  <a:lnTo>
+                    <a:pt x="1969645" y="856258"/>
+                  </a:lnTo>
+                  <a:lnTo>
+                    <a:pt x="1899301" y="849703"/>
+                  </a:lnTo>
+                  <a:lnTo>
+                    <a:pt x="1828956" y="843042"/>
+                  </a:lnTo>
+                  <a:lnTo>
+                    <a:pt x="1758612" y="836271"/>
+                  </a:lnTo>
+                  <a:lnTo>
+                    <a:pt x="1688267" y="829390"/>
+                  </a:lnTo>
+                  <a:lnTo>
+                    <a:pt x="1617923" y="822396"/>
+                  </a:lnTo>
+                  <a:lnTo>
+                    <a:pt x="1547578" y="815288"/>
+                  </a:lnTo>
+                  <a:lnTo>
+                    <a:pt x="1477234" y="808064"/>
+                  </a:lnTo>
+                  <a:lnTo>
+                    <a:pt x="1406889" y="800722"/>
+                  </a:lnTo>
+                  <a:lnTo>
+                    <a:pt x="1336545" y="793259"/>
+                  </a:lnTo>
+                  <a:lnTo>
+                    <a:pt x="1266200" y="785675"/>
+                  </a:lnTo>
+                  <a:lnTo>
+                    <a:pt x="1195856" y="777967"/>
+                  </a:lnTo>
+                  <a:lnTo>
+                    <a:pt x="1125511" y="770132"/>
+                  </a:lnTo>
+                  <a:lnTo>
+                    <a:pt x="1055167" y="762170"/>
+                  </a:lnTo>
+                  <a:lnTo>
+                    <a:pt x="984822" y="754077"/>
+                  </a:lnTo>
+                  <a:lnTo>
+                    <a:pt x="914478" y="745852"/>
+                  </a:lnTo>
+                  <a:lnTo>
+                    <a:pt x="844133" y="737493"/>
+                  </a:lnTo>
+                  <a:lnTo>
+                    <a:pt x="773789" y="728997"/>
+                  </a:lnTo>
+                  <a:lnTo>
+                    <a:pt x="703444" y="720362"/>
+                  </a:lnTo>
+                  <a:lnTo>
+                    <a:pt x="633100" y="711586"/>
+                  </a:lnTo>
+                  <a:lnTo>
+                    <a:pt x="562755" y="702667"/>
+                  </a:lnTo>
+                  <a:lnTo>
+                    <a:pt x="492411" y="693601"/>
+                  </a:lnTo>
+                  <a:lnTo>
+                    <a:pt x="422066" y="684388"/>
+                  </a:lnTo>
+                  <a:lnTo>
+                    <a:pt x="351722" y="675024"/>
+                  </a:lnTo>
+                  <a:lnTo>
+                    <a:pt x="281377" y="665507"/>
+                  </a:lnTo>
+                  <a:lnTo>
+                    <a:pt x="211033" y="655834"/>
+                  </a:lnTo>
+                  <a:lnTo>
+                    <a:pt x="140688" y="646003"/>
+                  </a:lnTo>
+                  <a:lnTo>
+                    <a:pt x="70344" y="636011"/>
+                  </a:lnTo>
+                  <a:lnTo>
+                    <a:pt x="0" y="625856"/>
                   </a:lnTo>
                   <a:close/>
                 </a:path>
@@ -3533,592 +3568,267 @@
         </p:sp>
         <p:sp>
           <p:nvSpPr>
-            <p:cNvPr id="21" name="pl21"/>
-            <p:cNvSpPr/>
-            <p:nvPr/>
-          </p:nvSpPr>
-          <p:spPr>
-            <a:xfrm>
-              <a:off x="2396497" y="2073503"/>
-              <a:ext cx="5866182" cy="3132409"/>
-            </a:xfrm>
-            <a:custGeom>
-              <a:avLst/>
-              <a:pathLst>
-                <a:path w="5866182" h="3132409">
-                  <a:moveTo>
-                    <a:pt x="0" y="0"/>
-                  </a:moveTo>
-                  <a:lnTo>
-                    <a:pt x="64757" y="153147"/>
-                  </a:lnTo>
-                  <a:lnTo>
-                    <a:pt x="136380" y="314331"/>
-                  </a:lnTo>
-                  <a:lnTo>
-                    <a:pt x="208002" y="467716"/>
-                  </a:lnTo>
-                  <a:lnTo>
-                    <a:pt x="279625" y="613677"/>
-                  </a:lnTo>
-                  <a:lnTo>
-                    <a:pt x="351247" y="752574"/>
-                  </a:lnTo>
-                  <a:lnTo>
-                    <a:pt x="422870" y="884750"/>
-                  </a:lnTo>
-                  <a:lnTo>
-                    <a:pt x="494492" y="1010528"/>
-                  </a:lnTo>
-                  <a:lnTo>
-                    <a:pt x="566115" y="1130220"/>
-                  </a:lnTo>
-                  <a:lnTo>
-                    <a:pt x="637737" y="1244119"/>
-                  </a:lnTo>
-                  <a:lnTo>
-                    <a:pt x="709360" y="1352506"/>
-                  </a:lnTo>
-                  <a:lnTo>
-                    <a:pt x="780982" y="1455648"/>
-                  </a:lnTo>
-                  <a:lnTo>
-                    <a:pt x="852605" y="1553798"/>
-                  </a:lnTo>
-                  <a:lnTo>
-                    <a:pt x="924228" y="1647198"/>
-                  </a:lnTo>
-                  <a:lnTo>
-                    <a:pt x="995850" y="1736078"/>
-                  </a:lnTo>
-                  <a:lnTo>
-                    <a:pt x="1067473" y="1820657"/>
-                  </a:lnTo>
-                  <a:lnTo>
-                    <a:pt x="1139095" y="1901142"/>
-                  </a:lnTo>
-                  <a:lnTo>
-                    <a:pt x="1210718" y="1977732"/>
-                  </a:lnTo>
-                  <a:lnTo>
-                    <a:pt x="1282340" y="2050616"/>
-                  </a:lnTo>
-                  <a:lnTo>
-                    <a:pt x="1353963" y="2119973"/>
-                  </a:lnTo>
-                  <a:lnTo>
-                    <a:pt x="1425585" y="2185972"/>
-                  </a:lnTo>
-                  <a:lnTo>
-                    <a:pt x="1497208" y="2248778"/>
-                  </a:lnTo>
-                  <a:lnTo>
-                    <a:pt x="1568830" y="2308545"/>
-                  </a:lnTo>
-                  <a:lnTo>
-                    <a:pt x="1640453" y="2365419"/>
-                  </a:lnTo>
-                  <a:lnTo>
-                    <a:pt x="1712075" y="2419540"/>
-                  </a:lnTo>
-                  <a:lnTo>
-                    <a:pt x="1783698" y="2471043"/>
-                  </a:lnTo>
-                  <a:lnTo>
-                    <a:pt x="1855320" y="2520053"/>
-                  </a:lnTo>
-                  <a:lnTo>
-                    <a:pt x="1926943" y="2566691"/>
-                  </a:lnTo>
-                  <a:lnTo>
-                    <a:pt x="1998565" y="2611072"/>
-                  </a:lnTo>
-                  <a:lnTo>
-                    <a:pt x="2070188" y="2653305"/>
-                  </a:lnTo>
-                  <a:lnTo>
-                    <a:pt x="2141810" y="2667310"/>
-                  </a:lnTo>
-                  <a:lnTo>
-                    <a:pt x="2213433" y="2680442"/>
-                  </a:lnTo>
-                  <a:lnTo>
-                    <a:pt x="2285055" y="2693363"/>
-                  </a:lnTo>
-                  <a:lnTo>
-                    <a:pt x="2356678" y="2706076"/>
-                  </a:lnTo>
-                  <a:lnTo>
-                    <a:pt x="2428301" y="2718585"/>
-                  </a:lnTo>
-                  <a:lnTo>
-                    <a:pt x="2499923" y="2730892"/>
-                  </a:lnTo>
-                  <a:lnTo>
-                    <a:pt x="2571546" y="2743001"/>
-                  </a:lnTo>
-                  <a:lnTo>
-                    <a:pt x="2643168" y="2754916"/>
-                  </a:lnTo>
-                  <a:lnTo>
-                    <a:pt x="2714791" y="2766639"/>
-                  </a:lnTo>
-                  <a:lnTo>
-                    <a:pt x="2786413" y="2778173"/>
-                  </a:lnTo>
-                  <a:lnTo>
-                    <a:pt x="2858036" y="2789522"/>
-                  </a:lnTo>
-                  <a:lnTo>
-                    <a:pt x="2929658" y="2800689"/>
-                  </a:lnTo>
-                  <a:lnTo>
-                    <a:pt x="3001281" y="2811675"/>
-                  </a:lnTo>
-                  <a:lnTo>
-                    <a:pt x="3072903" y="2822485"/>
-                  </a:lnTo>
-                  <a:lnTo>
-                    <a:pt x="3144526" y="2833122"/>
-                  </a:lnTo>
-                  <a:lnTo>
-                    <a:pt x="3216148" y="2843587"/>
-                  </a:lnTo>
-                  <a:lnTo>
-                    <a:pt x="3287771" y="2853883"/>
-                  </a:lnTo>
-                  <a:lnTo>
-                    <a:pt x="3359393" y="2864014"/>
-                  </a:lnTo>
-                  <a:lnTo>
-                    <a:pt x="3431016" y="2873983"/>
-                  </a:lnTo>
-                  <a:lnTo>
-                    <a:pt x="3502638" y="2883790"/>
-                  </a:lnTo>
-                  <a:lnTo>
-                    <a:pt x="3574261" y="2893441"/>
-                  </a:lnTo>
-                  <a:lnTo>
-                    <a:pt x="3645883" y="2902935"/>
-                  </a:lnTo>
-                  <a:lnTo>
-                    <a:pt x="3717506" y="2912278"/>
-                  </a:lnTo>
-                  <a:lnTo>
-                    <a:pt x="3789129" y="2921469"/>
-                  </a:lnTo>
-                  <a:lnTo>
-                    <a:pt x="3860751" y="2930513"/>
-                  </a:lnTo>
-                  <a:lnTo>
-                    <a:pt x="3932374" y="2939412"/>
-                  </a:lnTo>
-                  <a:lnTo>
-                    <a:pt x="4003996" y="2948167"/>
-                  </a:lnTo>
-                  <a:lnTo>
-                    <a:pt x="4075619" y="2956782"/>
-                  </a:lnTo>
-                  <a:lnTo>
-                    <a:pt x="4147241" y="2965258"/>
-                  </a:lnTo>
-                  <a:lnTo>
-                    <a:pt x="4218864" y="2973598"/>
-                  </a:lnTo>
-                  <a:lnTo>
-                    <a:pt x="4290486" y="2981803"/>
-                  </a:lnTo>
-                  <a:lnTo>
-                    <a:pt x="4362109" y="2989877"/>
-                  </a:lnTo>
-                  <a:lnTo>
-                    <a:pt x="4433731" y="2997821"/>
-                  </a:lnTo>
-                  <a:lnTo>
-                    <a:pt x="4505354" y="3005637"/>
-                  </a:lnTo>
-                  <a:lnTo>
-                    <a:pt x="4576976" y="3013327"/>
-                  </a:lnTo>
-                  <a:lnTo>
-                    <a:pt x="4648599" y="3020893"/>
-                  </a:lnTo>
-                  <a:lnTo>
-                    <a:pt x="4720221" y="3028338"/>
-                  </a:lnTo>
-                  <a:lnTo>
-                    <a:pt x="4791844" y="3035663"/>
-                  </a:lnTo>
-                  <a:lnTo>
-                    <a:pt x="4863466" y="3042870"/>
-                  </a:lnTo>
-                  <a:lnTo>
-                    <a:pt x="4935089" y="3049962"/>
-                  </a:lnTo>
-                  <a:lnTo>
-                    <a:pt x="5006711" y="3056939"/>
-                  </a:lnTo>
-                  <a:lnTo>
-                    <a:pt x="5078334" y="3063804"/>
-                  </a:lnTo>
-                  <a:lnTo>
-                    <a:pt x="5149957" y="3070559"/>
-                  </a:lnTo>
-                  <a:lnTo>
-                    <a:pt x="5221579" y="3077205"/>
-                  </a:lnTo>
-                  <a:lnTo>
-                    <a:pt x="5293202" y="3083744"/>
-                  </a:lnTo>
-                  <a:lnTo>
-                    <a:pt x="5364824" y="3090178"/>
-                  </a:lnTo>
-                  <a:lnTo>
-                    <a:pt x="5436447" y="3096508"/>
-                  </a:lnTo>
-                  <a:lnTo>
-                    <a:pt x="5508069" y="3102737"/>
-                  </a:lnTo>
-                  <a:lnTo>
-                    <a:pt x="5579692" y="3108865"/>
-                  </a:lnTo>
-                  <a:lnTo>
-                    <a:pt x="5651314" y="3114895"/>
-                  </a:lnTo>
-                  <a:lnTo>
-                    <a:pt x="5722937" y="3120828"/>
-                  </a:lnTo>
-                  <a:lnTo>
-                    <a:pt x="5794559" y="3126665"/>
-                  </a:lnTo>
-                  <a:lnTo>
-                    <a:pt x="5866182" y="3132409"/>
-                  </a:lnTo>
-                </a:path>
-              </a:pathLst>
-            </a:custGeom>
-          </p:spPr>
-          <p:txBody>
-            <a:bodyPr/>
-            <a:lstStyle/>
-            <a:p/>
-          </p:txBody>
-        </p:sp>
-        <p:sp>
-          <p:nvSpPr>
             <p:cNvPr id="22" name="pl22"/>
             <p:cNvSpPr/>
             <p:nvPr/>
           </p:nvSpPr>
           <p:spPr>
             <a:xfrm>
-              <a:off x="1172049" y="3807771"/>
-              <a:ext cx="7090630" cy="1689566"/>
+              <a:off x="2437910" y="2143092"/>
+              <a:ext cx="5761505" cy="1130412"/>
             </a:xfrm>
             <a:custGeom>
               <a:avLst/>
               <a:pathLst>
-                <a:path w="7090630" h="1689566">
+                <a:path w="5761505" h="1130412">
                   <a:moveTo>
-                    <a:pt x="7090630" y="1689566"/>
+                    <a:pt x="0" y="0"/>
                   </a:moveTo>
                   <a:lnTo>
-                    <a:pt x="7019007" y="1686519"/>
-                  </a:lnTo>
-                  <a:lnTo>
-                    <a:pt x="6947385" y="1683317"/>
-                  </a:lnTo>
-                  <a:lnTo>
-                    <a:pt x="6875762" y="1679953"/>
-                  </a:lnTo>
-                  <a:lnTo>
-                    <a:pt x="6804139" y="1676417"/>
-                  </a:lnTo>
-                  <a:lnTo>
-                    <a:pt x="6732517" y="1672701"/>
-                  </a:lnTo>
-                  <a:lnTo>
-                    <a:pt x="6660894" y="1668797"/>
-                  </a:lnTo>
-                  <a:lnTo>
-                    <a:pt x="6589272" y="1664693"/>
-                  </a:lnTo>
-                  <a:lnTo>
-                    <a:pt x="6517649" y="1660382"/>
-                  </a:lnTo>
-                  <a:lnTo>
-                    <a:pt x="6446027" y="1655851"/>
-                  </a:lnTo>
-                  <a:lnTo>
-                    <a:pt x="6374404" y="1651089"/>
-                  </a:lnTo>
-                  <a:lnTo>
-                    <a:pt x="6302782" y="1646085"/>
-                  </a:lnTo>
-                  <a:lnTo>
-                    <a:pt x="6231159" y="1640827"/>
-                  </a:lnTo>
-                  <a:lnTo>
-                    <a:pt x="6159537" y="1635302"/>
-                  </a:lnTo>
-                  <a:lnTo>
-                    <a:pt x="6087914" y="1629495"/>
-                  </a:lnTo>
-                  <a:lnTo>
-                    <a:pt x="6016292" y="1623393"/>
-                  </a:lnTo>
-                  <a:lnTo>
-                    <a:pt x="5944669" y="1616981"/>
-                  </a:lnTo>
-                  <a:lnTo>
-                    <a:pt x="5873047" y="1610243"/>
-                  </a:lnTo>
-                  <a:lnTo>
-                    <a:pt x="5801424" y="1603162"/>
-                  </a:lnTo>
-                  <a:lnTo>
-                    <a:pt x="5729802" y="1595721"/>
-                  </a:lnTo>
-                  <a:lnTo>
-                    <a:pt x="5658179" y="1587901"/>
-                  </a:lnTo>
-                  <a:lnTo>
-                    <a:pt x="5586557" y="1579684"/>
-                  </a:lnTo>
-                  <a:lnTo>
-                    <a:pt x="5514934" y="1571049"/>
-                  </a:lnTo>
-                  <a:lnTo>
-                    <a:pt x="5443311" y="1561974"/>
-                  </a:lnTo>
-                  <a:lnTo>
-                    <a:pt x="5371689" y="1552439"/>
-                  </a:lnTo>
-                  <a:lnTo>
-                    <a:pt x="5300066" y="1542418"/>
-                  </a:lnTo>
-                  <a:lnTo>
-                    <a:pt x="5228444" y="1531888"/>
-                  </a:lnTo>
-                  <a:lnTo>
-                    <a:pt x="5156821" y="1520822"/>
-                  </a:lnTo>
-                  <a:lnTo>
-                    <a:pt x="5085199" y="1509193"/>
-                  </a:lnTo>
-                  <a:lnTo>
-                    <a:pt x="5013576" y="1496973"/>
-                  </a:lnTo>
-                  <a:lnTo>
-                    <a:pt x="4941954" y="1484132"/>
-                  </a:lnTo>
-                  <a:lnTo>
-                    <a:pt x="4870331" y="1470637"/>
-                  </a:lnTo>
-                  <a:lnTo>
-                    <a:pt x="4798709" y="1456457"/>
-                  </a:lnTo>
-                  <a:lnTo>
-                    <a:pt x="4727086" y="1441555"/>
-                  </a:lnTo>
-                  <a:lnTo>
-                    <a:pt x="4655464" y="1425895"/>
-                  </a:lnTo>
-                  <a:lnTo>
-                    <a:pt x="4583841" y="1409439"/>
-                  </a:lnTo>
-                  <a:lnTo>
-                    <a:pt x="4512219" y="1392145"/>
-                  </a:lnTo>
-                  <a:lnTo>
-                    <a:pt x="4440596" y="1373973"/>
-                  </a:lnTo>
-                  <a:lnTo>
-                    <a:pt x="4368974" y="1354876"/>
-                  </a:lnTo>
-                  <a:lnTo>
-                    <a:pt x="4297351" y="1334808"/>
-                  </a:lnTo>
-                  <a:lnTo>
-                    <a:pt x="4225729" y="1313720"/>
-                  </a:lnTo>
-                  <a:lnTo>
-                    <a:pt x="4154106" y="1291558"/>
-                  </a:lnTo>
-                  <a:lnTo>
-                    <a:pt x="4082483" y="1268270"/>
-                  </a:lnTo>
-                  <a:lnTo>
-                    <a:pt x="4010861" y="1243798"/>
-                  </a:lnTo>
-                  <a:lnTo>
-                    <a:pt x="3939238" y="1218081"/>
-                  </a:lnTo>
-                  <a:lnTo>
-                    <a:pt x="3867616" y="1191056"/>
-                  </a:lnTo>
-                  <a:lnTo>
-                    <a:pt x="3795993" y="1162657"/>
-                  </a:lnTo>
-                  <a:lnTo>
-                    <a:pt x="3724371" y="1132813"/>
-                  </a:lnTo>
-                  <a:lnTo>
-                    <a:pt x="3652748" y="1101452"/>
-                  </a:lnTo>
-                  <a:lnTo>
-                    <a:pt x="3581126" y="1068496"/>
-                  </a:lnTo>
-                  <a:lnTo>
-                    <a:pt x="3509503" y="1033863"/>
-                  </a:lnTo>
-                  <a:lnTo>
-                    <a:pt x="3437881" y="997470"/>
-                  </a:lnTo>
-                  <a:lnTo>
-                    <a:pt x="3366258" y="959226"/>
-                  </a:lnTo>
-                  <a:lnTo>
-                    <a:pt x="3294636" y="919695"/>
-                  </a:lnTo>
-                  <a:lnTo>
-                    <a:pt x="3223013" y="906130"/>
-                  </a:lnTo>
-                  <a:lnTo>
-                    <a:pt x="3151391" y="892343"/>
-                  </a:lnTo>
-                  <a:lnTo>
-                    <a:pt x="3079768" y="878331"/>
-                  </a:lnTo>
-                  <a:lnTo>
-                    <a:pt x="3008146" y="864090"/>
-                  </a:lnTo>
-                  <a:lnTo>
-                    <a:pt x="2936523" y="849616"/>
-                  </a:lnTo>
-                  <a:lnTo>
-                    <a:pt x="2864901" y="834905"/>
-                  </a:lnTo>
-                  <a:lnTo>
-                    <a:pt x="2793278" y="819954"/>
-                  </a:lnTo>
-                  <a:lnTo>
-                    <a:pt x="2721655" y="804759"/>
-                  </a:lnTo>
-                  <a:lnTo>
-                    <a:pt x="2650033" y="789315"/>
-                  </a:lnTo>
-                  <a:lnTo>
-                    <a:pt x="2578410" y="773619"/>
-                  </a:lnTo>
-                  <a:lnTo>
-                    <a:pt x="2506788" y="757666"/>
-                  </a:lnTo>
-                  <a:lnTo>
-                    <a:pt x="2435165" y="741452"/>
-                  </a:lnTo>
-                  <a:lnTo>
-                    <a:pt x="2363543" y="724973"/>
-                  </a:lnTo>
-                  <a:lnTo>
-                    <a:pt x="2291920" y="708225"/>
-                  </a:lnTo>
-                  <a:lnTo>
-                    <a:pt x="2220298" y="691203"/>
-                  </a:lnTo>
-                  <a:lnTo>
-                    <a:pt x="2148675" y="673903"/>
-                  </a:lnTo>
-                  <a:lnTo>
-                    <a:pt x="2077053" y="656320"/>
-                  </a:lnTo>
-                  <a:lnTo>
-                    <a:pt x="2005430" y="638449"/>
-                  </a:lnTo>
-                  <a:lnTo>
-                    <a:pt x="1933808" y="620286"/>
-                  </a:lnTo>
-                  <a:lnTo>
-                    <a:pt x="1862185" y="601827"/>
-                  </a:lnTo>
-                  <a:lnTo>
-                    <a:pt x="1790563" y="583066"/>
-                  </a:lnTo>
-                  <a:lnTo>
-                    <a:pt x="1718940" y="563998"/>
-                  </a:lnTo>
-                  <a:lnTo>
-                    <a:pt x="1647318" y="544618"/>
-                  </a:lnTo>
-                  <a:lnTo>
-                    <a:pt x="1575695" y="524921"/>
-                  </a:lnTo>
-                  <a:lnTo>
-                    <a:pt x="1504073" y="504903"/>
-                  </a:lnTo>
-                  <a:lnTo>
-                    <a:pt x="1432450" y="484557"/>
-                  </a:lnTo>
-                  <a:lnTo>
-                    <a:pt x="1360827" y="463879"/>
-                  </a:lnTo>
-                  <a:lnTo>
-                    <a:pt x="1289205" y="442862"/>
-                  </a:lnTo>
-                  <a:lnTo>
-                    <a:pt x="1217582" y="421502"/>
-                  </a:lnTo>
-                  <a:lnTo>
-                    <a:pt x="1145960" y="399793"/>
-                  </a:lnTo>
-                  <a:lnTo>
-                    <a:pt x="1074337" y="377729"/>
-                  </a:lnTo>
-                  <a:lnTo>
-                    <a:pt x="1002715" y="355304"/>
-                  </a:lnTo>
-                  <a:lnTo>
-                    <a:pt x="931092" y="332513"/>
-                  </a:lnTo>
-                  <a:lnTo>
-                    <a:pt x="859470" y="309349"/>
-                  </a:lnTo>
-                  <a:lnTo>
-                    <a:pt x="787847" y="285806"/>
-                  </a:lnTo>
-                  <a:lnTo>
-                    <a:pt x="716225" y="261879"/>
-                  </a:lnTo>
-                  <a:lnTo>
-                    <a:pt x="644602" y="237560"/>
-                  </a:lnTo>
-                  <a:lnTo>
-                    <a:pt x="572980" y="212844"/>
-                  </a:lnTo>
-                  <a:lnTo>
-                    <a:pt x="501357" y="187723"/>
-                  </a:lnTo>
-                  <a:lnTo>
-                    <a:pt x="429735" y="162192"/>
-                  </a:lnTo>
-                  <a:lnTo>
-                    <a:pt x="358112" y="136244"/>
-                  </a:lnTo>
-                  <a:lnTo>
-                    <a:pt x="286490" y="109872"/>
-                  </a:lnTo>
-                  <a:lnTo>
-                    <a:pt x="214867" y="83068"/>
-                  </a:lnTo>
-                  <a:lnTo>
-                    <a:pt x="143245" y="55826"/>
-                  </a:lnTo>
-                  <a:lnTo>
-                    <a:pt x="71622" y="28139"/>
-                  </a:lnTo>
-                  <a:lnTo>
-                    <a:pt x="0" y="0"/>
+                    <a:pt x="63602" y="55267"/>
+                  </a:lnTo>
+                  <a:lnTo>
+                    <a:pt x="133946" y="113435"/>
+                  </a:lnTo>
+                  <a:lnTo>
+                    <a:pt x="204291" y="168787"/>
+                  </a:lnTo>
+                  <a:lnTo>
+                    <a:pt x="274635" y="221461"/>
+                  </a:lnTo>
+                  <a:lnTo>
+                    <a:pt x="344980" y="271586"/>
+                  </a:lnTo>
+                  <a:lnTo>
+                    <a:pt x="415324" y="319285"/>
+                  </a:lnTo>
+                  <a:lnTo>
+                    <a:pt x="485669" y="364676"/>
+                  </a:lnTo>
+                  <a:lnTo>
+                    <a:pt x="556013" y="407869"/>
+                  </a:lnTo>
+                  <a:lnTo>
+                    <a:pt x="626358" y="448973"/>
+                  </a:lnTo>
+                  <a:lnTo>
+                    <a:pt x="696702" y="488087"/>
+                  </a:lnTo>
+                  <a:lnTo>
+                    <a:pt x="767047" y="525309"/>
+                  </a:lnTo>
+                  <a:lnTo>
+                    <a:pt x="837391" y="560729"/>
+                  </a:lnTo>
+                  <a:lnTo>
+                    <a:pt x="907736" y="594435"/>
+                  </a:lnTo>
+                  <a:lnTo>
+                    <a:pt x="978080" y="626509"/>
+                  </a:lnTo>
+                  <a:lnTo>
+                    <a:pt x="1048425" y="657032"/>
+                  </a:lnTo>
+                  <a:lnTo>
+                    <a:pt x="1118769" y="686077"/>
+                  </a:lnTo>
+                  <a:lnTo>
+                    <a:pt x="1189113" y="713717"/>
+                  </a:lnTo>
+                  <a:lnTo>
+                    <a:pt x="1259458" y="740019"/>
+                  </a:lnTo>
+                  <a:lnTo>
+                    <a:pt x="1329802" y="765048"/>
+                  </a:lnTo>
+                  <a:lnTo>
+                    <a:pt x="1400147" y="788866"/>
+                  </a:lnTo>
+                  <a:lnTo>
+                    <a:pt x="1470491" y="811531"/>
+                  </a:lnTo>
+                  <a:lnTo>
+                    <a:pt x="1540836" y="833099"/>
+                  </a:lnTo>
+                  <a:lnTo>
+                    <a:pt x="1611180" y="853624"/>
+                  </a:lnTo>
+                  <a:lnTo>
+                    <a:pt x="1681525" y="873155"/>
+                  </a:lnTo>
+                  <a:lnTo>
+                    <a:pt x="1751869" y="891741"/>
+                  </a:lnTo>
+                  <a:lnTo>
+                    <a:pt x="1822214" y="909427"/>
+                  </a:lnTo>
+                  <a:lnTo>
+                    <a:pt x="1892558" y="926258"/>
+                  </a:lnTo>
+                  <a:lnTo>
+                    <a:pt x="1962903" y="942274"/>
+                  </a:lnTo>
+                  <a:lnTo>
+                    <a:pt x="2033247" y="957515"/>
+                  </a:lnTo>
+                  <a:lnTo>
+                    <a:pt x="2103592" y="962569"/>
+                  </a:lnTo>
+                  <a:lnTo>
+                    <a:pt x="2173936" y="967308"/>
+                  </a:lnTo>
+                  <a:lnTo>
+                    <a:pt x="2244281" y="971971"/>
+                  </a:lnTo>
+                  <a:lnTo>
+                    <a:pt x="2314625" y="976559"/>
+                  </a:lnTo>
+                  <a:lnTo>
+                    <a:pt x="2384970" y="981073"/>
+                  </a:lnTo>
+                  <a:lnTo>
+                    <a:pt x="2455314" y="985514"/>
+                  </a:lnTo>
+                  <a:lnTo>
+                    <a:pt x="2525659" y="989884"/>
+                  </a:lnTo>
+                  <a:lnTo>
+                    <a:pt x="2596003" y="994184"/>
+                  </a:lnTo>
+                  <a:lnTo>
+                    <a:pt x="2666348" y="998415"/>
+                  </a:lnTo>
+                  <a:lnTo>
+                    <a:pt x="2736692" y="1002577"/>
+                  </a:lnTo>
+                  <a:lnTo>
+                    <a:pt x="2807037" y="1006673"/>
+                  </a:lnTo>
+                  <a:lnTo>
+                    <a:pt x="2877381" y="1010702"/>
+                  </a:lnTo>
+                  <a:lnTo>
+                    <a:pt x="2947726" y="1014667"/>
+                  </a:lnTo>
+                  <a:lnTo>
+                    <a:pt x="3018070" y="1018568"/>
+                  </a:lnTo>
+                  <a:lnTo>
+                    <a:pt x="3088415" y="1022407"/>
+                  </a:lnTo>
+                  <a:lnTo>
+                    <a:pt x="3158759" y="1026183"/>
+                  </a:lnTo>
+                  <a:lnTo>
+                    <a:pt x="3229104" y="1029899"/>
+                  </a:lnTo>
+                  <a:lnTo>
+                    <a:pt x="3299448" y="1033555"/>
+                  </a:lnTo>
+                  <a:lnTo>
+                    <a:pt x="3369793" y="1037152"/>
+                  </a:lnTo>
+                  <a:lnTo>
+                    <a:pt x="3440137" y="1040692"/>
+                  </a:lnTo>
+                  <a:lnTo>
+                    <a:pt x="3510482" y="1044174"/>
+                  </a:lnTo>
+                  <a:lnTo>
+                    <a:pt x="3580826" y="1047601"/>
+                  </a:lnTo>
+                  <a:lnTo>
+                    <a:pt x="3651171" y="1050972"/>
+                  </a:lnTo>
+                  <a:lnTo>
+                    <a:pt x="3721515" y="1054289"/>
+                  </a:lnTo>
+                  <a:lnTo>
+                    <a:pt x="3791860" y="1057553"/>
+                  </a:lnTo>
+                  <a:lnTo>
+                    <a:pt x="3862204" y="1060764"/>
+                  </a:lnTo>
+                  <a:lnTo>
+                    <a:pt x="3932549" y="1063924"/>
+                  </a:lnTo>
+                  <a:lnTo>
+                    <a:pt x="4002893" y="1067033"/>
+                  </a:lnTo>
+                  <a:lnTo>
+                    <a:pt x="4073238" y="1070092"/>
+                  </a:lnTo>
+                  <a:lnTo>
+                    <a:pt x="4143582" y="1073101"/>
+                  </a:lnTo>
+                  <a:lnTo>
+                    <a:pt x="4213927" y="1076062"/>
+                  </a:lnTo>
+                  <a:lnTo>
+                    <a:pt x="4284271" y="1078976"/>
+                  </a:lnTo>
+                  <a:lnTo>
+                    <a:pt x="4354616" y="1081843"/>
+                  </a:lnTo>
+                  <a:lnTo>
+                    <a:pt x="4424960" y="1084663"/>
+                  </a:lnTo>
+                  <a:lnTo>
+                    <a:pt x="4495305" y="1087438"/>
+                  </a:lnTo>
+                  <a:lnTo>
+                    <a:pt x="4565649" y="1090169"/>
+                  </a:lnTo>
+                  <a:lnTo>
+                    <a:pt x="4635994" y="1092856"/>
+                  </a:lnTo>
+                  <a:lnTo>
+                    <a:pt x="4706338" y="1095499"/>
+                  </a:lnTo>
+                  <a:lnTo>
+                    <a:pt x="4776683" y="1098100"/>
+                  </a:lnTo>
+                  <a:lnTo>
+                    <a:pt x="4847027" y="1100659"/>
+                  </a:lnTo>
+                  <a:lnTo>
+                    <a:pt x="4917371" y="1103177"/>
+                  </a:lnTo>
+                  <a:lnTo>
+                    <a:pt x="4987716" y="1105654"/>
+                  </a:lnTo>
+                  <a:lnTo>
+                    <a:pt x="5058060" y="1108092"/>
+                  </a:lnTo>
+                  <a:lnTo>
+                    <a:pt x="5128405" y="1110490"/>
+                  </a:lnTo>
+                  <a:lnTo>
+                    <a:pt x="5198749" y="1112850"/>
+                  </a:lnTo>
+                  <a:lnTo>
+                    <a:pt x="5269094" y="1115172"/>
+                  </a:lnTo>
+                  <a:lnTo>
+                    <a:pt x="5339438" y="1117457"/>
+                  </a:lnTo>
+                  <a:lnTo>
+                    <a:pt x="5409783" y="1119704"/>
+                  </a:lnTo>
+                  <a:lnTo>
+                    <a:pt x="5480127" y="1121916"/>
+                  </a:lnTo>
+                  <a:lnTo>
+                    <a:pt x="5550472" y="1124092"/>
+                  </a:lnTo>
+                  <a:lnTo>
+                    <a:pt x="5620816" y="1126233"/>
+                  </a:lnTo>
+                  <a:lnTo>
+                    <a:pt x="5691161" y="1128340"/>
+                  </a:lnTo>
+                  <a:lnTo>
+                    <a:pt x="5761505" y="1130412"/>
                   </a:lnTo>
                 </a:path>
               </a:pathLst>
@@ -4138,306 +3848,631 @@
           </p:nvSpPr>
           <p:spPr>
             <a:xfrm>
-              <a:off x="1345514" y="2073503"/>
-              <a:ext cx="6917165" cy="3338663"/>
+              <a:off x="1235312" y="2768948"/>
+              <a:ext cx="6964104" cy="609724"/>
             </a:xfrm>
             <a:custGeom>
               <a:avLst/>
               <a:pathLst>
-                <a:path w="6917165" h="3338663">
+                <a:path w="6964104" h="609724">
+                  <a:moveTo>
+                    <a:pt x="6964104" y="609724"/>
+                  </a:moveTo>
+                  <a:lnTo>
+                    <a:pt x="6893760" y="608625"/>
+                  </a:lnTo>
+                  <a:lnTo>
+                    <a:pt x="6823415" y="607469"/>
+                  </a:lnTo>
+                  <a:lnTo>
+                    <a:pt x="6753071" y="606255"/>
+                  </a:lnTo>
+                  <a:lnTo>
+                    <a:pt x="6682726" y="604979"/>
+                  </a:lnTo>
+                  <a:lnTo>
+                    <a:pt x="6612382" y="603638"/>
+                  </a:lnTo>
+                  <a:lnTo>
+                    <a:pt x="6542037" y="602229"/>
+                  </a:lnTo>
+                  <a:lnTo>
+                    <a:pt x="6471693" y="600748"/>
+                  </a:lnTo>
+                  <a:lnTo>
+                    <a:pt x="6401348" y="599192"/>
+                  </a:lnTo>
+                  <a:lnTo>
+                    <a:pt x="6331004" y="597557"/>
+                  </a:lnTo>
+                  <a:lnTo>
+                    <a:pt x="6260659" y="595839"/>
+                  </a:lnTo>
+                  <a:lnTo>
+                    <a:pt x="6190315" y="594033"/>
+                  </a:lnTo>
+                  <a:lnTo>
+                    <a:pt x="6119970" y="592136"/>
+                  </a:lnTo>
+                  <a:lnTo>
+                    <a:pt x="6049626" y="590142"/>
+                  </a:lnTo>
+                  <a:lnTo>
+                    <a:pt x="5979281" y="588046"/>
+                  </a:lnTo>
+                  <a:lnTo>
+                    <a:pt x="5908937" y="585844"/>
+                  </a:lnTo>
+                  <a:lnTo>
+                    <a:pt x="5838592" y="583530"/>
+                  </a:lnTo>
+                  <a:lnTo>
+                    <a:pt x="5768248" y="581098"/>
+                  </a:lnTo>
+                  <a:lnTo>
+                    <a:pt x="5697903" y="578543"/>
+                  </a:lnTo>
+                  <a:lnTo>
+                    <a:pt x="5627559" y="575858"/>
+                  </a:lnTo>
+                  <a:lnTo>
+                    <a:pt x="5557214" y="573036"/>
+                  </a:lnTo>
+                  <a:lnTo>
+                    <a:pt x="5486870" y="570070"/>
+                  </a:lnTo>
+                  <a:lnTo>
+                    <a:pt x="5416525" y="566954"/>
+                  </a:lnTo>
+                  <a:lnTo>
+                    <a:pt x="5346181" y="563680"/>
+                  </a:lnTo>
+                  <a:lnTo>
+                    <a:pt x="5275836" y="560238"/>
+                  </a:lnTo>
+                  <a:lnTo>
+                    <a:pt x="5205492" y="556622"/>
+                  </a:lnTo>
+                  <a:lnTo>
+                    <a:pt x="5135147" y="552822"/>
+                  </a:lnTo>
+                  <a:lnTo>
+                    <a:pt x="5064803" y="548829"/>
+                  </a:lnTo>
+                  <a:lnTo>
+                    <a:pt x="4994458" y="544632"/>
+                  </a:lnTo>
+                  <a:lnTo>
+                    <a:pt x="4924114" y="540222"/>
+                  </a:lnTo>
+                  <a:lnTo>
+                    <a:pt x="4853769" y="535588"/>
+                  </a:lnTo>
+                  <a:lnTo>
+                    <a:pt x="4783425" y="530718"/>
+                  </a:lnTo>
+                  <a:lnTo>
+                    <a:pt x="4713080" y="525601"/>
+                  </a:lnTo>
+                  <a:lnTo>
+                    <a:pt x="4642736" y="520223"/>
+                  </a:lnTo>
+                  <a:lnTo>
+                    <a:pt x="4572391" y="514572"/>
+                  </a:lnTo>
+                  <a:lnTo>
+                    <a:pt x="4502047" y="508633"/>
+                  </a:lnTo>
+                  <a:lnTo>
+                    <a:pt x="4431702" y="502392"/>
+                  </a:lnTo>
+                  <a:lnTo>
+                    <a:pt x="4361358" y="495834"/>
+                  </a:lnTo>
+                  <a:lnTo>
+                    <a:pt x="4291013" y="488943"/>
+                  </a:lnTo>
+                  <a:lnTo>
+                    <a:pt x="4220669" y="481701"/>
+                  </a:lnTo>
+                  <a:lnTo>
+                    <a:pt x="4150324" y="474090"/>
+                  </a:lnTo>
+                  <a:lnTo>
+                    <a:pt x="4079980" y="466093"/>
+                  </a:lnTo>
+                  <a:lnTo>
+                    <a:pt x="4009635" y="457689"/>
+                  </a:lnTo>
+                  <a:lnTo>
+                    <a:pt x="3939291" y="448857"/>
+                  </a:lnTo>
+                  <a:lnTo>
+                    <a:pt x="3868946" y="439576"/>
+                  </a:lnTo>
+                  <a:lnTo>
+                    <a:pt x="3798602" y="429824"/>
+                  </a:lnTo>
+                  <a:lnTo>
+                    <a:pt x="3728257" y="419575"/>
+                  </a:lnTo>
+                  <a:lnTo>
+                    <a:pt x="3657913" y="408805"/>
+                  </a:lnTo>
+                  <a:lnTo>
+                    <a:pt x="3587569" y="397488"/>
+                  </a:lnTo>
+                  <a:lnTo>
+                    <a:pt x="3517224" y="385595"/>
+                  </a:lnTo>
+                  <a:lnTo>
+                    <a:pt x="3446880" y="373097"/>
+                  </a:lnTo>
+                  <a:lnTo>
+                    <a:pt x="3376535" y="359963"/>
+                  </a:lnTo>
+                  <a:lnTo>
+                    <a:pt x="3306191" y="346162"/>
+                  </a:lnTo>
+                  <a:lnTo>
+                    <a:pt x="3235846" y="331896"/>
+                  </a:lnTo>
+                  <a:lnTo>
+                    <a:pt x="3165502" y="327001"/>
+                  </a:lnTo>
+                  <a:lnTo>
+                    <a:pt x="3095157" y="322025"/>
+                  </a:lnTo>
+                  <a:lnTo>
+                    <a:pt x="3024813" y="316969"/>
+                  </a:lnTo>
+                  <a:lnTo>
+                    <a:pt x="2954468" y="311829"/>
+                  </a:lnTo>
+                  <a:lnTo>
+                    <a:pt x="2884124" y="306606"/>
+                  </a:lnTo>
+                  <a:lnTo>
+                    <a:pt x="2813779" y="301297"/>
+                  </a:lnTo>
+                  <a:lnTo>
+                    <a:pt x="2743435" y="295902"/>
+                  </a:lnTo>
+                  <a:lnTo>
+                    <a:pt x="2673090" y="290418"/>
+                  </a:lnTo>
+                  <a:lnTo>
+                    <a:pt x="2602746" y="284845"/>
+                  </a:lnTo>
+                  <a:lnTo>
+                    <a:pt x="2532401" y="279180"/>
+                  </a:lnTo>
+                  <a:lnTo>
+                    <a:pt x="2462057" y="273423"/>
+                  </a:lnTo>
+                  <a:lnTo>
+                    <a:pt x="2391712" y="267572"/>
+                  </a:lnTo>
+                  <a:lnTo>
+                    <a:pt x="2321368" y="261625"/>
+                  </a:lnTo>
+                  <a:lnTo>
+                    <a:pt x="2251023" y="255581"/>
+                  </a:lnTo>
+                  <a:lnTo>
+                    <a:pt x="2180679" y="249439"/>
+                  </a:lnTo>
+                  <a:lnTo>
+                    <a:pt x="2110334" y="243195"/>
+                  </a:lnTo>
+                  <a:lnTo>
+                    <a:pt x="2039990" y="236850"/>
+                  </a:lnTo>
+                  <a:lnTo>
+                    <a:pt x="1969645" y="230401"/>
+                  </a:lnTo>
+                  <a:lnTo>
+                    <a:pt x="1899301" y="223846"/>
+                  </a:lnTo>
+                  <a:lnTo>
+                    <a:pt x="1828956" y="217185"/>
+                  </a:lnTo>
+                  <a:lnTo>
+                    <a:pt x="1758612" y="210414"/>
+                  </a:lnTo>
+                  <a:lnTo>
+                    <a:pt x="1688267" y="203533"/>
+                  </a:lnTo>
+                  <a:lnTo>
+                    <a:pt x="1617923" y="196539"/>
+                  </a:lnTo>
+                  <a:lnTo>
+                    <a:pt x="1547578" y="189431"/>
+                  </a:lnTo>
+                  <a:lnTo>
+                    <a:pt x="1477234" y="182207"/>
+                  </a:lnTo>
+                  <a:lnTo>
+                    <a:pt x="1406889" y="174865"/>
+                  </a:lnTo>
+                  <a:lnTo>
+                    <a:pt x="1336545" y="167403"/>
+                  </a:lnTo>
+                  <a:lnTo>
+                    <a:pt x="1266200" y="159818"/>
+                  </a:lnTo>
+                  <a:lnTo>
+                    <a:pt x="1195856" y="152110"/>
+                  </a:lnTo>
+                  <a:lnTo>
+                    <a:pt x="1125511" y="144276"/>
+                  </a:lnTo>
+                  <a:lnTo>
+                    <a:pt x="1055167" y="136313"/>
+                  </a:lnTo>
+                  <a:lnTo>
+                    <a:pt x="984822" y="128221"/>
+                  </a:lnTo>
+                  <a:lnTo>
+                    <a:pt x="914478" y="119996"/>
+                  </a:lnTo>
+                  <a:lnTo>
+                    <a:pt x="844133" y="111636"/>
+                  </a:lnTo>
+                  <a:lnTo>
+                    <a:pt x="773789" y="103140"/>
+                  </a:lnTo>
+                  <a:lnTo>
+                    <a:pt x="703444" y="94505"/>
+                  </a:lnTo>
+                  <a:lnTo>
+                    <a:pt x="633100" y="85729"/>
+                  </a:lnTo>
+                  <a:lnTo>
+                    <a:pt x="562755" y="76810"/>
+                  </a:lnTo>
+                  <a:lnTo>
+                    <a:pt x="492411" y="67745"/>
+                  </a:lnTo>
+                  <a:lnTo>
+                    <a:pt x="422066" y="58531"/>
+                  </a:lnTo>
+                  <a:lnTo>
+                    <a:pt x="351722" y="49167"/>
+                  </a:lnTo>
+                  <a:lnTo>
+                    <a:pt x="281377" y="39650"/>
+                  </a:lnTo>
+                  <a:lnTo>
+                    <a:pt x="211033" y="29977"/>
+                  </a:lnTo>
+                  <a:lnTo>
+                    <a:pt x="140688" y="20146"/>
+                  </a:lnTo>
+                  <a:lnTo>
+                    <a:pt x="70344" y="10154"/>
+                  </a:lnTo>
+                  <a:lnTo>
+                    <a:pt x="0" y="0"/>
+                  </a:lnTo>
+                </a:path>
+              </a:pathLst>
+            </a:custGeom>
+          </p:spPr>
+          <p:txBody>
+            <a:bodyPr/>
+            <a:lstStyle/>
+            <a:p/>
+          </p:txBody>
+        </p:sp>
+        <p:sp>
+          <p:nvSpPr>
+            <p:cNvPr id="24" name="pl24"/>
+            <p:cNvSpPr/>
+            <p:nvPr/>
+          </p:nvSpPr>
+          <p:spPr>
+            <a:xfrm>
+              <a:off x="1405681" y="2143092"/>
+              <a:ext cx="6793734" cy="1204845"/>
+            </a:xfrm>
+            <a:custGeom>
+              <a:avLst/>
+              <a:pathLst>
+                <a:path w="6793734" h="1204845">
                   <a:moveTo>
                     <a:pt x="0" y="0"/>
                   </a:moveTo>
                   <a:lnTo>
-                    <a:pt x="41402" y="66100"/>
-                  </a:lnTo>
-                  <a:lnTo>
-                    <a:pt x="113025" y="176745"/>
-                  </a:lnTo>
-                  <a:lnTo>
-                    <a:pt x="184647" y="283809"/>
-                  </a:lnTo>
-                  <a:lnTo>
-                    <a:pt x="256270" y="387406"/>
-                  </a:lnTo>
-                  <a:lnTo>
-                    <a:pt x="327892" y="487649"/>
-                  </a:lnTo>
-                  <a:lnTo>
-                    <a:pt x="399515" y="584647"/>
-                  </a:lnTo>
-                  <a:lnTo>
-                    <a:pt x="471137" y="678504"/>
-                  </a:lnTo>
-                  <a:lnTo>
-                    <a:pt x="542760" y="769323"/>
-                  </a:lnTo>
-                  <a:lnTo>
-                    <a:pt x="614382" y="857202"/>
-                  </a:lnTo>
-                  <a:lnTo>
-                    <a:pt x="686005" y="942236"/>
-                  </a:lnTo>
-                  <a:lnTo>
-                    <a:pt x="757627" y="1024516"/>
-                  </a:lnTo>
-                  <a:lnTo>
-                    <a:pt x="829250" y="1104133"/>
-                  </a:lnTo>
-                  <a:lnTo>
-                    <a:pt x="900872" y="1181173"/>
-                  </a:lnTo>
-                  <a:lnTo>
-                    <a:pt x="972495" y="1255718"/>
-                  </a:lnTo>
-                  <a:lnTo>
-                    <a:pt x="1044118" y="1327850"/>
-                  </a:lnTo>
-                  <a:lnTo>
-                    <a:pt x="1115740" y="1397646"/>
-                  </a:lnTo>
-                  <a:lnTo>
-                    <a:pt x="1187363" y="1465183"/>
-                  </a:lnTo>
-                  <a:lnTo>
-                    <a:pt x="1258985" y="1530534"/>
-                  </a:lnTo>
-                  <a:lnTo>
-                    <a:pt x="1330608" y="1593768"/>
-                  </a:lnTo>
-                  <a:lnTo>
-                    <a:pt x="1402230" y="1654956"/>
-                  </a:lnTo>
-                  <a:lnTo>
-                    <a:pt x="1473853" y="1714162"/>
-                  </a:lnTo>
-                  <a:lnTo>
-                    <a:pt x="1545475" y="1771452"/>
-                  </a:lnTo>
-                  <a:lnTo>
-                    <a:pt x="1617098" y="1826887"/>
-                  </a:lnTo>
-                  <a:lnTo>
-                    <a:pt x="1688720" y="1880528"/>
-                  </a:lnTo>
-                  <a:lnTo>
-                    <a:pt x="1760343" y="1932432"/>
-                  </a:lnTo>
-                  <a:lnTo>
-                    <a:pt x="1831965" y="1982655"/>
-                  </a:lnTo>
-                  <a:lnTo>
-                    <a:pt x="1903588" y="2031252"/>
-                  </a:lnTo>
-                  <a:lnTo>
-                    <a:pt x="1975210" y="2078276"/>
-                  </a:lnTo>
-                  <a:lnTo>
-                    <a:pt x="2046833" y="2123778"/>
-                  </a:lnTo>
-                  <a:lnTo>
-                    <a:pt x="2118455" y="2167807"/>
-                  </a:lnTo>
-                  <a:lnTo>
-                    <a:pt x="2190078" y="2210410"/>
-                  </a:lnTo>
-                  <a:lnTo>
-                    <a:pt x="2261700" y="2251634"/>
-                  </a:lnTo>
-                  <a:lnTo>
-                    <a:pt x="2333323" y="2291523"/>
-                  </a:lnTo>
-                  <a:lnTo>
-                    <a:pt x="2404946" y="2330121"/>
-                  </a:lnTo>
-                  <a:lnTo>
-                    <a:pt x="2476568" y="2367469"/>
-                  </a:lnTo>
-                  <a:lnTo>
-                    <a:pt x="2548191" y="2403609"/>
-                  </a:lnTo>
-                  <a:lnTo>
-                    <a:pt x="2619813" y="2438578"/>
-                  </a:lnTo>
-                  <a:lnTo>
-                    <a:pt x="2691436" y="2472415"/>
-                  </a:lnTo>
-                  <a:lnTo>
-                    <a:pt x="2763058" y="2505156"/>
-                  </a:lnTo>
-                  <a:lnTo>
-                    <a:pt x="2834681" y="2536838"/>
-                  </a:lnTo>
-                  <a:lnTo>
-                    <a:pt x="2906303" y="2567494"/>
-                  </a:lnTo>
-                  <a:lnTo>
-                    <a:pt x="2977926" y="2597157"/>
-                  </a:lnTo>
-                  <a:lnTo>
-                    <a:pt x="3049548" y="2625860"/>
-                  </a:lnTo>
-                  <a:lnTo>
-                    <a:pt x="3121171" y="2653634"/>
-                  </a:lnTo>
-                  <a:lnTo>
-                    <a:pt x="3192793" y="2680509"/>
-                  </a:lnTo>
-                  <a:lnTo>
-                    <a:pt x="3264416" y="2706513"/>
-                  </a:lnTo>
-                  <a:lnTo>
-                    <a:pt x="3336038" y="2731676"/>
-                  </a:lnTo>
-                  <a:lnTo>
-                    <a:pt x="3407661" y="2756024"/>
-                  </a:lnTo>
-                  <a:lnTo>
-                    <a:pt x="3479283" y="2779584"/>
-                  </a:lnTo>
-                  <a:lnTo>
-                    <a:pt x="3550906" y="2802381"/>
-                  </a:lnTo>
-                  <a:lnTo>
-                    <a:pt x="3622528" y="2824440"/>
-                  </a:lnTo>
-                  <a:lnTo>
-                    <a:pt x="3694151" y="2845785"/>
-                  </a:lnTo>
-                  <a:lnTo>
-                    <a:pt x="3765773" y="2866439"/>
-                  </a:lnTo>
-                  <a:lnTo>
-                    <a:pt x="3837396" y="2886424"/>
-                  </a:lnTo>
-                  <a:lnTo>
-                    <a:pt x="3909019" y="2905762"/>
-                  </a:lnTo>
-                  <a:lnTo>
-                    <a:pt x="3980641" y="2924474"/>
-                  </a:lnTo>
-                  <a:lnTo>
-                    <a:pt x="4052264" y="2942581"/>
-                  </a:lnTo>
-                  <a:lnTo>
-                    <a:pt x="4123886" y="2960101"/>
-                  </a:lnTo>
-                  <a:lnTo>
-                    <a:pt x="4195509" y="2977054"/>
-                  </a:lnTo>
-                  <a:lnTo>
-                    <a:pt x="4267131" y="2993458"/>
-                  </a:lnTo>
-                  <a:lnTo>
-                    <a:pt x="4338754" y="3009331"/>
-                  </a:lnTo>
-                  <a:lnTo>
-                    <a:pt x="4410376" y="3024690"/>
-                  </a:lnTo>
-                  <a:lnTo>
-                    <a:pt x="4481999" y="3039551"/>
-                  </a:lnTo>
-                  <a:lnTo>
-                    <a:pt x="4553621" y="3053932"/>
-                  </a:lnTo>
-                  <a:lnTo>
-                    <a:pt x="4625244" y="3067847"/>
-                  </a:lnTo>
-                  <a:lnTo>
-                    <a:pt x="4696866" y="3081312"/>
-                  </a:lnTo>
-                  <a:lnTo>
-                    <a:pt x="4768489" y="3094341"/>
-                  </a:lnTo>
-                  <a:lnTo>
-                    <a:pt x="4840111" y="3106948"/>
-                  </a:lnTo>
-                  <a:lnTo>
-                    <a:pt x="4911734" y="3119146"/>
-                  </a:lnTo>
-                  <a:lnTo>
-                    <a:pt x="4983356" y="3130950"/>
-                  </a:lnTo>
-                  <a:lnTo>
-                    <a:pt x="5054979" y="3142372"/>
-                  </a:lnTo>
-                  <a:lnTo>
-                    <a:pt x="5126601" y="3153424"/>
-                  </a:lnTo>
-                  <a:lnTo>
-                    <a:pt x="5198224" y="3164118"/>
-                  </a:lnTo>
-                  <a:lnTo>
-                    <a:pt x="5269847" y="3174466"/>
-                  </a:lnTo>
-                  <a:lnTo>
-                    <a:pt x="5341469" y="3184479"/>
-                  </a:lnTo>
-                  <a:lnTo>
-                    <a:pt x="5413092" y="3194167"/>
-                  </a:lnTo>
-                  <a:lnTo>
-                    <a:pt x="5484714" y="3203542"/>
-                  </a:lnTo>
-                  <a:lnTo>
-                    <a:pt x="5556337" y="3212614"/>
-                  </a:lnTo>
-                  <a:lnTo>
-                    <a:pt x="5627959" y="3221392"/>
-                  </a:lnTo>
-                  <a:lnTo>
-                    <a:pt x="5699582" y="3229885"/>
-                  </a:lnTo>
-                  <a:lnTo>
-                    <a:pt x="5771204" y="3238104"/>
-                  </a:lnTo>
-                  <a:lnTo>
-                    <a:pt x="5842827" y="3246057"/>
-                  </a:lnTo>
-                  <a:lnTo>
-                    <a:pt x="5914449" y="3253752"/>
-                  </a:lnTo>
-                  <a:lnTo>
-                    <a:pt x="5986072" y="3261198"/>
-                  </a:lnTo>
-                  <a:lnTo>
-                    <a:pt x="6057694" y="3268403"/>
-                  </a:lnTo>
-                  <a:lnTo>
-                    <a:pt x="6129317" y="3275374"/>
-                  </a:lnTo>
-                  <a:lnTo>
-                    <a:pt x="6200939" y="3282120"/>
-                  </a:lnTo>
-                  <a:lnTo>
-                    <a:pt x="6272562" y="3288648"/>
-                  </a:lnTo>
-                  <a:lnTo>
-                    <a:pt x="6344184" y="3294964"/>
-                  </a:lnTo>
-                  <a:lnTo>
-                    <a:pt x="6415807" y="3301076"/>
-                  </a:lnTo>
-                  <a:lnTo>
-                    <a:pt x="6487429" y="3306990"/>
-                  </a:lnTo>
-                  <a:lnTo>
-                    <a:pt x="6559052" y="3312712"/>
-                  </a:lnTo>
-                  <a:lnTo>
-                    <a:pt x="6630675" y="3318250"/>
-                  </a:lnTo>
-                  <a:lnTo>
-                    <a:pt x="6702297" y="3323608"/>
-                  </a:lnTo>
-                  <a:lnTo>
-                    <a:pt x="6773920" y="3328792"/>
-                  </a:lnTo>
-                  <a:lnTo>
-                    <a:pt x="6845542" y="3333809"/>
-                  </a:lnTo>
-                  <a:lnTo>
-                    <a:pt x="6917165" y="3338663"/>
+                    <a:pt x="40663" y="23854"/>
+                  </a:lnTo>
+                  <a:lnTo>
+                    <a:pt x="111008" y="63783"/>
+                  </a:lnTo>
+                  <a:lnTo>
+                    <a:pt x="181352" y="102420"/>
+                  </a:lnTo>
+                  <a:lnTo>
+                    <a:pt x="251697" y="139805"/>
+                  </a:lnTo>
+                  <a:lnTo>
+                    <a:pt x="322041" y="175981"/>
+                  </a:lnTo>
+                  <a:lnTo>
+                    <a:pt x="392386" y="210985"/>
+                  </a:lnTo>
+                  <a:lnTo>
+                    <a:pt x="462730" y="244856"/>
+                  </a:lnTo>
+                  <a:lnTo>
+                    <a:pt x="533075" y="277630"/>
+                  </a:lnTo>
+                  <a:lnTo>
+                    <a:pt x="603419" y="309344"/>
+                  </a:lnTo>
+                  <a:lnTo>
+                    <a:pt x="673764" y="340030"/>
+                  </a:lnTo>
+                  <a:lnTo>
+                    <a:pt x="744108" y="369724"/>
+                  </a:lnTo>
+                  <a:lnTo>
+                    <a:pt x="814453" y="398455"/>
+                  </a:lnTo>
+                  <a:lnTo>
+                    <a:pt x="884797" y="426257"/>
+                  </a:lnTo>
+                  <a:lnTo>
+                    <a:pt x="955142" y="453159"/>
+                  </a:lnTo>
+                  <a:lnTo>
+                    <a:pt x="1025486" y="479189"/>
+                  </a:lnTo>
+                  <a:lnTo>
+                    <a:pt x="1095831" y="504377"/>
+                  </a:lnTo>
+                  <a:lnTo>
+                    <a:pt x="1166175" y="528750"/>
+                  </a:lnTo>
+                  <a:lnTo>
+                    <a:pt x="1236520" y="552333"/>
+                  </a:lnTo>
+                  <a:lnTo>
+                    <a:pt x="1306864" y="575153"/>
+                  </a:lnTo>
+                  <a:lnTo>
+                    <a:pt x="1377209" y="597234"/>
+                  </a:lnTo>
+                  <a:lnTo>
+                    <a:pt x="1447553" y="618601"/>
+                  </a:lnTo>
+                  <a:lnTo>
+                    <a:pt x="1517898" y="639275"/>
+                  </a:lnTo>
+                  <a:lnTo>
+                    <a:pt x="1588242" y="659280"/>
+                  </a:lnTo>
+                  <a:lnTo>
+                    <a:pt x="1658587" y="678638"/>
+                  </a:lnTo>
+                  <a:lnTo>
+                    <a:pt x="1728931" y="697369"/>
+                  </a:lnTo>
+                  <a:lnTo>
+                    <a:pt x="1799276" y="715493"/>
+                  </a:lnTo>
+                  <a:lnTo>
+                    <a:pt x="1869620" y="733031"/>
+                  </a:lnTo>
+                  <a:lnTo>
+                    <a:pt x="1939965" y="750001"/>
+                  </a:lnTo>
+                  <a:lnTo>
+                    <a:pt x="2010309" y="766421"/>
+                  </a:lnTo>
+                  <a:lnTo>
+                    <a:pt x="2080654" y="782310"/>
+                  </a:lnTo>
+                  <a:lnTo>
+                    <a:pt x="2150998" y="797685"/>
+                  </a:lnTo>
+                  <a:lnTo>
+                    <a:pt x="2221343" y="812561"/>
+                  </a:lnTo>
+                  <a:lnTo>
+                    <a:pt x="2291687" y="826956"/>
+                  </a:lnTo>
+                  <a:lnTo>
+                    <a:pt x="2362032" y="840886"/>
+                  </a:lnTo>
+                  <a:lnTo>
+                    <a:pt x="2432376" y="854364"/>
+                  </a:lnTo>
+                  <a:lnTo>
+                    <a:pt x="2502721" y="867405"/>
+                  </a:lnTo>
+                  <a:lnTo>
+                    <a:pt x="2573065" y="880025"/>
+                  </a:lnTo>
+                  <a:lnTo>
+                    <a:pt x="2643409" y="892236"/>
+                  </a:lnTo>
+                  <a:lnTo>
+                    <a:pt x="2713754" y="904052"/>
+                  </a:lnTo>
+                  <a:lnTo>
+                    <a:pt x="2784098" y="915485"/>
+                  </a:lnTo>
+                  <a:lnTo>
+                    <a:pt x="2854443" y="926548"/>
+                  </a:lnTo>
+                  <a:lnTo>
+                    <a:pt x="2924787" y="937253"/>
+                  </a:lnTo>
+                  <a:lnTo>
+                    <a:pt x="2995132" y="947611"/>
+                  </a:lnTo>
+                  <a:lnTo>
+                    <a:pt x="3065476" y="957634"/>
+                  </a:lnTo>
+                  <a:lnTo>
+                    <a:pt x="3135821" y="967332"/>
+                  </a:lnTo>
+                  <a:lnTo>
+                    <a:pt x="3206165" y="976717"/>
+                  </a:lnTo>
+                  <a:lnTo>
+                    <a:pt x="3276510" y="985797"/>
+                  </a:lnTo>
+                  <a:lnTo>
+                    <a:pt x="3346854" y="994584"/>
+                  </a:lnTo>
+                  <a:lnTo>
+                    <a:pt x="3417199" y="1003086"/>
+                  </a:lnTo>
+                  <a:lnTo>
+                    <a:pt x="3487543" y="1011313"/>
+                  </a:lnTo>
+                  <a:lnTo>
+                    <a:pt x="3557888" y="1019274"/>
+                  </a:lnTo>
+                  <a:lnTo>
+                    <a:pt x="3628232" y="1026977"/>
+                  </a:lnTo>
+                  <a:lnTo>
+                    <a:pt x="3698577" y="1034430"/>
+                  </a:lnTo>
+                  <a:lnTo>
+                    <a:pt x="3768921" y="1041642"/>
+                  </a:lnTo>
+                  <a:lnTo>
+                    <a:pt x="3839266" y="1048621"/>
+                  </a:lnTo>
+                  <a:lnTo>
+                    <a:pt x="3909610" y="1055374"/>
+                  </a:lnTo>
+                  <a:lnTo>
+                    <a:pt x="3979955" y="1061908"/>
+                  </a:lnTo>
+                  <a:lnTo>
+                    <a:pt x="4050299" y="1068230"/>
+                  </a:lnTo>
+                  <a:lnTo>
+                    <a:pt x="4120644" y="1074348"/>
+                  </a:lnTo>
+                  <a:lnTo>
+                    <a:pt x="4190988" y="1080268"/>
+                  </a:lnTo>
+                  <a:lnTo>
+                    <a:pt x="4261333" y="1085996"/>
+                  </a:lnTo>
+                  <a:lnTo>
+                    <a:pt x="4331677" y="1091539"/>
+                  </a:lnTo>
+                  <a:lnTo>
+                    <a:pt x="4402022" y="1096902"/>
+                  </a:lnTo>
+                  <a:lnTo>
+                    <a:pt x="4472366" y="1102092"/>
+                  </a:lnTo>
+                  <a:lnTo>
+                    <a:pt x="4542711" y="1107114"/>
+                  </a:lnTo>
+                  <a:lnTo>
+                    <a:pt x="4613055" y="1111973"/>
+                  </a:lnTo>
+                  <a:lnTo>
+                    <a:pt x="4683400" y="1116674"/>
+                  </a:lnTo>
+                  <a:lnTo>
+                    <a:pt x="4753744" y="1121224"/>
+                  </a:lnTo>
+                  <a:lnTo>
+                    <a:pt x="4824089" y="1125626"/>
+                  </a:lnTo>
+                  <a:lnTo>
+                    <a:pt x="4894433" y="1129886"/>
+                  </a:lnTo>
+                  <a:lnTo>
+                    <a:pt x="4964778" y="1134008"/>
+                  </a:lnTo>
+                  <a:lnTo>
+                    <a:pt x="5035122" y="1137996"/>
+                  </a:lnTo>
+                  <a:lnTo>
+                    <a:pt x="5105467" y="1141855"/>
+                  </a:lnTo>
+                  <a:lnTo>
+                    <a:pt x="5175811" y="1145590"/>
+                  </a:lnTo>
+                  <a:lnTo>
+                    <a:pt x="5246156" y="1149203"/>
+                  </a:lnTo>
+                  <a:lnTo>
+                    <a:pt x="5316500" y="1152700"/>
+                  </a:lnTo>
+                  <a:lnTo>
+                    <a:pt x="5386845" y="1156083"/>
+                  </a:lnTo>
+                  <a:lnTo>
+                    <a:pt x="5457189" y="1159356"/>
+                  </a:lnTo>
+                  <a:lnTo>
+                    <a:pt x="5527534" y="1162524"/>
+                  </a:lnTo>
+                  <a:lnTo>
+                    <a:pt x="5597878" y="1165589"/>
+                  </a:lnTo>
+                  <a:lnTo>
+                    <a:pt x="5668223" y="1168555"/>
+                  </a:lnTo>
+                  <a:lnTo>
+                    <a:pt x="5738567" y="1171425"/>
+                  </a:lnTo>
+                  <a:lnTo>
+                    <a:pt x="5808912" y="1174202"/>
+                  </a:lnTo>
+                  <a:lnTo>
+                    <a:pt x="5879256" y="1176889"/>
+                  </a:lnTo>
+                  <a:lnTo>
+                    <a:pt x="5949601" y="1179489"/>
+                  </a:lnTo>
+                  <a:lnTo>
+                    <a:pt x="6019945" y="1182005"/>
+                  </a:lnTo>
+                  <a:lnTo>
+                    <a:pt x="6090290" y="1184440"/>
+                  </a:lnTo>
+                  <a:lnTo>
+                    <a:pt x="6160634" y="1186795"/>
+                  </a:lnTo>
+                  <a:lnTo>
+                    <a:pt x="6230979" y="1189075"/>
+                  </a:lnTo>
+                  <a:lnTo>
+                    <a:pt x="6301323" y="1191280"/>
+                  </a:lnTo>
+                  <a:lnTo>
+                    <a:pt x="6371667" y="1193415"/>
+                  </a:lnTo>
+                  <a:lnTo>
+                    <a:pt x="6442012" y="1195480"/>
+                  </a:lnTo>
+                  <a:lnTo>
+                    <a:pt x="6512356" y="1197478"/>
+                  </a:lnTo>
+                  <a:lnTo>
+                    <a:pt x="6582701" y="1199411"/>
+                  </a:lnTo>
+                  <a:lnTo>
+                    <a:pt x="6653045" y="1201282"/>
+                  </a:lnTo>
+                  <a:lnTo>
+                    <a:pt x="6723390" y="1203093"/>
+                  </a:lnTo>
+                  <a:lnTo>
+                    <a:pt x="6793734" y="1204845"/>
                   </a:lnTo>
                 </a:path>
               </a:pathLst>
@@ -4460,27 +4495,27 @@
         </p:sp>
         <p:sp>
           <p:nvSpPr>
-            <p:cNvPr id="24" name="pl24"/>
+            <p:cNvPr id="25" name="pl25"/>
             <p:cNvSpPr/>
             <p:nvPr/>
           </p:nvSpPr>
           <p:spPr>
             <a:xfrm>
-              <a:off x="817517" y="4727786"/>
-              <a:ext cx="7799693" cy="0"/>
+              <a:off x="887106" y="3100960"/>
+              <a:ext cx="7660515" cy="0"/>
             </a:xfrm>
             <a:custGeom>
               <a:avLst/>
               <a:pathLst>
-                <a:path w="7799693" h="0">
+                <a:path w="7660515" h="0">
                   <a:moveTo>
                     <a:pt x="0" y="0"/>
                   </a:moveTo>
                   <a:lnTo>
-                    <a:pt x="7799693" y="0"/>
-                  </a:lnTo>
-                  <a:lnTo>
-                    <a:pt x="7799693" y="0"/>
+                    <a:pt x="7660515" y="0"/>
+                  </a:lnTo>
+                  <a:lnTo>
+                    <a:pt x="7660515" y="0"/>
                   </a:lnTo>
                 </a:path>
               </a:pathLst>
@@ -4503,21 +4538,21 @@
         </p:sp>
         <p:sp>
           <p:nvSpPr>
-            <p:cNvPr id="25" name="pl25"/>
+            <p:cNvPr id="26" name="pl26"/>
             <p:cNvSpPr/>
             <p:nvPr/>
           </p:nvSpPr>
           <p:spPr>
             <a:xfrm>
-              <a:off x="4468386" y="2073503"/>
-              <a:ext cx="0" cy="3649639"/>
+              <a:off x="4472829" y="2143092"/>
+              <a:ext cx="0" cy="1317069"/>
             </a:xfrm>
             <a:custGeom>
               <a:avLst/>
               <a:pathLst>
-                <a:path w="0" h="3649639">
+                <a:path w="0" h="1317069">
                   <a:moveTo>
-                    <a:pt x="0" y="3649639"/>
+                    <a:pt x="0" y="1317069"/>
                   </a:moveTo>
                   <a:lnTo>
                     <a:pt x="0" y="0"/>
@@ -4546,13 +4581,13 @@
         </p:sp>
         <p:sp>
           <p:nvSpPr>
-            <p:cNvPr id="26" name="tx26"/>
+            <p:cNvPr id="27" name="tx27"/>
             <p:cNvSpPr/>
             <p:nvPr/>
           </p:nvSpPr>
           <p:spPr>
             <a:xfrm>
-              <a:off x="692708" y="5517199"/>
+              <a:off x="762297" y="3360243"/>
               <a:ext cx="62179" cy="80101"/>
             </a:xfrm>
             <a:prstGeom prst="rect">
@@ -4592,13 +4627,13 @@
         </p:sp>
         <p:sp>
           <p:nvSpPr>
-            <p:cNvPr id="27" name="tx27"/>
+            <p:cNvPr id="28" name="tx28"/>
             <p:cNvSpPr/>
             <p:nvPr/>
           </p:nvSpPr>
           <p:spPr>
             <a:xfrm>
-              <a:off x="692708" y="4687735"/>
+              <a:off x="762297" y="3060909"/>
               <a:ext cx="62179" cy="80101"/>
             </a:xfrm>
             <a:prstGeom prst="rect">
@@ -4638,13 +4673,13 @@
         </p:sp>
         <p:sp>
           <p:nvSpPr>
-            <p:cNvPr id="28" name="tx28"/>
+            <p:cNvPr id="29" name="tx29"/>
             <p:cNvSpPr/>
             <p:nvPr/>
           </p:nvSpPr>
           <p:spPr>
             <a:xfrm>
-              <a:off x="692708" y="3858272"/>
+              <a:off x="762297" y="2761575"/>
               <a:ext cx="62179" cy="80101"/>
             </a:xfrm>
             <a:prstGeom prst="rect">
@@ -4684,13 +4719,13 @@
         </p:sp>
         <p:sp>
           <p:nvSpPr>
-            <p:cNvPr id="29" name="tx29"/>
+            <p:cNvPr id="30" name="tx30"/>
             <p:cNvSpPr/>
             <p:nvPr/>
           </p:nvSpPr>
           <p:spPr>
             <a:xfrm>
-              <a:off x="692708" y="3028808"/>
+              <a:off x="762297" y="2462242"/>
               <a:ext cx="62179" cy="80101"/>
             </a:xfrm>
             <a:prstGeom prst="rect">
@@ -4730,13 +4765,13 @@
         </p:sp>
         <p:sp>
           <p:nvSpPr>
-            <p:cNvPr id="30" name="tx30"/>
+            <p:cNvPr id="31" name="tx31"/>
             <p:cNvSpPr/>
             <p:nvPr/>
           </p:nvSpPr>
           <p:spPr>
             <a:xfrm>
-              <a:off x="692708" y="2199345"/>
+              <a:off x="762297" y="2162908"/>
               <a:ext cx="62179" cy="80101"/>
             </a:xfrm>
             <a:prstGeom prst="rect">
@@ -4776,13 +4811,13 @@
         </p:sp>
         <p:sp>
           <p:nvSpPr>
-            <p:cNvPr id="31" name="tx31"/>
+            <p:cNvPr id="32" name="tx32"/>
             <p:cNvSpPr/>
             <p:nvPr/>
           </p:nvSpPr>
           <p:spPr>
             <a:xfrm>
-              <a:off x="2478335" y="5785772"/>
+              <a:off x="2516846" y="3522791"/>
               <a:ext cx="161574" cy="80101"/>
             </a:xfrm>
             <a:prstGeom prst="rect">
@@ -4822,13 +4857,13 @@
         </p:sp>
         <p:sp>
           <p:nvSpPr>
-            <p:cNvPr id="32" name="tx32"/>
+            <p:cNvPr id="33" name="tx33"/>
             <p:cNvSpPr/>
             <p:nvPr/>
           </p:nvSpPr>
           <p:spPr>
             <a:xfrm>
-              <a:off x="4582608" y="5785772"/>
+              <a:off x="4584458" y="3522791"/>
               <a:ext cx="62179" cy="80101"/>
             </a:xfrm>
             <a:prstGeom prst="rect">
@@ -4868,13 +4903,13 @@
         </p:sp>
         <p:sp>
           <p:nvSpPr>
-            <p:cNvPr id="33" name="tx33"/>
+            <p:cNvPr id="34" name="tx34"/>
             <p:cNvSpPr/>
             <p:nvPr/>
           </p:nvSpPr>
           <p:spPr>
             <a:xfrm>
-              <a:off x="6606094" y="5785772"/>
+              <a:off x="6571282" y="3522791"/>
               <a:ext cx="124358" cy="80101"/>
             </a:xfrm>
             <a:prstGeom prst="rect">
@@ -4914,13 +4949,13 @@
         </p:sp>
         <p:sp>
           <p:nvSpPr>
-            <p:cNvPr id="34" name="tx34"/>
+            <p:cNvPr id="35" name="tx35"/>
             <p:cNvSpPr/>
             <p:nvPr/>
           </p:nvSpPr>
           <p:spPr>
             <a:xfrm>
-              <a:off x="2928340" y="5925448"/>
+              <a:off x="2928340" y="3662467"/>
               <a:ext cx="3578047" cy="100218"/>
             </a:xfrm>
             <a:prstGeom prst="rect">
@@ -4960,13 +4995,13 @@
         </p:sp>
         <p:sp>
           <p:nvSpPr>
-            <p:cNvPr id="35" name="tx35"/>
+            <p:cNvPr id="36" name="tx36"/>
             <p:cNvSpPr/>
             <p:nvPr/>
           </p:nvSpPr>
           <p:spPr>
             <a:xfrm rot="-5400000">
-              <a:off x="68446" y="3848213"/>
+              <a:off x="138035" y="2751517"/>
               <a:ext cx="1016904" cy="100218"/>
             </a:xfrm>
             <a:prstGeom prst="rect">
@@ -5006,13 +5041,13 @@
         </p:sp>
         <p:sp>
           <p:nvSpPr>
-            <p:cNvPr id="36" name="tx36"/>
+            <p:cNvPr id="37" name="tx37"/>
             <p:cNvSpPr/>
             <p:nvPr/>
           </p:nvSpPr>
           <p:spPr>
             <a:xfrm>
-              <a:off x="817517" y="1896563"/>
+              <a:off x="887106" y="1966152"/>
               <a:ext cx="7052127" cy="82021"/>
             </a:xfrm>
             <a:prstGeom prst="rect">
@@ -5052,13 +5087,3638 @@
         </p:sp>
         <p:sp>
           <p:nvSpPr>
-            <p:cNvPr id="37" name="tx37"/>
+            <p:cNvPr id="38" name="tx38"/>
             <p:cNvSpPr/>
             <p:nvPr/>
           </p:nvSpPr>
           <p:spPr>
             <a:xfrm>
-              <a:off x="817517" y="1669789"/>
+              <a:off x="887106" y="1739378"/>
+              <a:ext cx="4114342" cy="120152"/>
+            </a:xfrm>
+            <a:prstGeom prst="rect">
+              <a:avLst/>
+            </a:prstGeom>
+            <a:noFill/>
+          </p:spPr>
+          <p:txBody>
+            <a:bodyPr lIns="0" rIns="0" tIns="0" bIns="0" anchorCtr="1" anchor="ctr" wrap="none"/>
+            <a:lstStyle/>
+            <a:p>
+              <a:pPr algn="l" marL="0" marR="0" indent="0">
+                <a:lnSpc>
+                  <a:spcPts val="1320"/>
+                </a:lnSpc>
+                <a:spcBef>
+                  <a:spcPts val="0"/>
+                </a:spcBef>
+                <a:spcAft>
+                  <a:spcPts val="0"/>
+                </a:spcAft>
+              </a:pPr>
+              <a:r>
+                <a:rPr sz="1320">
+                  <a:solidFill>
+                    <a:srgbClr val="000000">
+                      <a:alpha val="100000"/>
+                    </a:srgbClr>
+                  </a:solidFill>
+                  <a:latin typeface="Helvetica"/>
+                  <a:cs typeface="Helvetica"/>
+                </a:rPr>
+                <a:t>Platinum-Related Hospitalization (Carboplatin AUC ≥ 3)</a:t>
+              </a:r>
+            </a:p>
+          </p:txBody>
+        </p:sp>
+        <p:sp>
+          <p:nvSpPr>
+            <p:cNvPr id="39" name="pl39"/>
+            <p:cNvSpPr/>
+            <p:nvPr/>
+          </p:nvSpPr>
+          <p:spPr>
+            <a:xfrm>
+              <a:off x="887106" y="5444019"/>
+              <a:ext cx="7660515" cy="0"/>
+            </a:xfrm>
+            <a:custGeom>
+              <a:avLst/>
+              <a:pathLst>
+                <a:path w="7660515" h="0">
+                  <a:moveTo>
+                    <a:pt x="0" y="0"/>
+                  </a:moveTo>
+                  <a:lnTo>
+                    <a:pt x="7660515" y="0"/>
+                  </a:lnTo>
+                  <a:lnTo>
+                    <a:pt x="7660515" y="0"/>
+                  </a:lnTo>
+                </a:path>
+              </a:pathLst>
+            </a:custGeom>
+            <a:ln w="6775" cap="flat">
+              <a:solidFill>
+                <a:srgbClr val="EBEBEB">
+                  <a:alpha val="100000"/>
+                </a:srgbClr>
+              </a:solidFill>
+              <a:prstDash val="solid"/>
+              <a:round/>
+            </a:ln>
+          </p:spPr>
+          <p:txBody>
+            <a:bodyPr/>
+            <a:lstStyle/>
+            <a:p/>
+          </p:txBody>
+        </p:sp>
+        <p:sp>
+          <p:nvSpPr>
+            <p:cNvPr id="40" name="pl40"/>
+            <p:cNvSpPr/>
+            <p:nvPr/>
+          </p:nvSpPr>
+          <p:spPr>
+            <a:xfrm>
+              <a:off x="887106" y="5144686"/>
+              <a:ext cx="7660515" cy="0"/>
+            </a:xfrm>
+            <a:custGeom>
+              <a:avLst/>
+              <a:pathLst>
+                <a:path w="7660515" h="0">
+                  <a:moveTo>
+                    <a:pt x="0" y="0"/>
+                  </a:moveTo>
+                  <a:lnTo>
+                    <a:pt x="7660515" y="0"/>
+                  </a:lnTo>
+                  <a:lnTo>
+                    <a:pt x="7660515" y="0"/>
+                  </a:lnTo>
+                </a:path>
+              </a:pathLst>
+            </a:custGeom>
+            <a:ln w="6775" cap="flat">
+              <a:solidFill>
+                <a:srgbClr val="EBEBEB">
+                  <a:alpha val="100000"/>
+                </a:srgbClr>
+              </a:solidFill>
+              <a:prstDash val="solid"/>
+              <a:round/>
+            </a:ln>
+          </p:spPr>
+          <p:txBody>
+            <a:bodyPr/>
+            <a:lstStyle/>
+            <a:p/>
+          </p:txBody>
+        </p:sp>
+        <p:sp>
+          <p:nvSpPr>
+            <p:cNvPr id="41" name="pl41"/>
+            <p:cNvSpPr/>
+            <p:nvPr/>
+          </p:nvSpPr>
+          <p:spPr>
+            <a:xfrm>
+              <a:off x="887106" y="4845352"/>
+              <a:ext cx="7660515" cy="0"/>
+            </a:xfrm>
+            <a:custGeom>
+              <a:avLst/>
+              <a:pathLst>
+                <a:path w="7660515" h="0">
+                  <a:moveTo>
+                    <a:pt x="0" y="0"/>
+                  </a:moveTo>
+                  <a:lnTo>
+                    <a:pt x="7660515" y="0"/>
+                  </a:lnTo>
+                  <a:lnTo>
+                    <a:pt x="7660515" y="0"/>
+                  </a:lnTo>
+                </a:path>
+              </a:pathLst>
+            </a:custGeom>
+            <a:ln w="6775" cap="flat">
+              <a:solidFill>
+                <a:srgbClr val="EBEBEB">
+                  <a:alpha val="100000"/>
+                </a:srgbClr>
+              </a:solidFill>
+              <a:prstDash val="solid"/>
+              <a:round/>
+            </a:ln>
+          </p:spPr>
+          <p:txBody>
+            <a:bodyPr/>
+            <a:lstStyle/>
+            <a:p/>
+          </p:txBody>
+        </p:sp>
+        <p:sp>
+          <p:nvSpPr>
+            <p:cNvPr id="42" name="pl42"/>
+            <p:cNvSpPr/>
+            <p:nvPr/>
+          </p:nvSpPr>
+          <p:spPr>
+            <a:xfrm>
+              <a:off x="887106" y="4546018"/>
+              <a:ext cx="7660515" cy="0"/>
+            </a:xfrm>
+            <a:custGeom>
+              <a:avLst/>
+              <a:pathLst>
+                <a:path w="7660515" h="0">
+                  <a:moveTo>
+                    <a:pt x="0" y="0"/>
+                  </a:moveTo>
+                  <a:lnTo>
+                    <a:pt x="7660515" y="0"/>
+                  </a:lnTo>
+                  <a:lnTo>
+                    <a:pt x="7660515" y="0"/>
+                  </a:lnTo>
+                </a:path>
+              </a:pathLst>
+            </a:custGeom>
+            <a:ln w="6775" cap="flat">
+              <a:solidFill>
+                <a:srgbClr val="EBEBEB">
+                  <a:alpha val="100000"/>
+                </a:srgbClr>
+              </a:solidFill>
+              <a:prstDash val="solid"/>
+              <a:round/>
+            </a:ln>
+          </p:spPr>
+          <p:txBody>
+            <a:bodyPr/>
+            <a:lstStyle/>
+            <a:p/>
+          </p:txBody>
+        </p:sp>
+        <p:sp>
+          <p:nvSpPr>
+            <p:cNvPr id="43" name="pl43"/>
+            <p:cNvSpPr/>
+            <p:nvPr/>
+          </p:nvSpPr>
+          <p:spPr>
+            <a:xfrm>
+              <a:off x="983303" y="4336484"/>
+              <a:ext cx="0" cy="1317069"/>
+            </a:xfrm>
+            <a:custGeom>
+              <a:avLst/>
+              <a:pathLst>
+                <a:path w="0" h="1317069">
+                  <a:moveTo>
+                    <a:pt x="0" y="1317069"/>
+                  </a:moveTo>
+                  <a:lnTo>
+                    <a:pt x="0" y="0"/>
+                  </a:lnTo>
+                  <a:lnTo>
+                    <a:pt x="0" y="0"/>
+                  </a:lnTo>
+                </a:path>
+              </a:pathLst>
+            </a:custGeom>
+            <a:ln w="6775" cap="flat">
+              <a:solidFill>
+                <a:srgbClr val="EBEBEB">
+                  <a:alpha val="100000"/>
+                </a:srgbClr>
+              </a:solidFill>
+              <a:prstDash val="solid"/>
+              <a:round/>
+            </a:ln>
+          </p:spPr>
+          <p:txBody>
+            <a:bodyPr/>
+            <a:lstStyle/>
+            <a:p/>
+          </p:txBody>
+        </p:sp>
+        <p:sp>
+          <p:nvSpPr>
+            <p:cNvPr id="44" name="pl44"/>
+            <p:cNvSpPr/>
+            <p:nvPr/>
+          </p:nvSpPr>
+          <p:spPr>
+            <a:xfrm>
+              <a:off x="1790468" y="4336484"/>
+              <a:ext cx="0" cy="1317069"/>
+            </a:xfrm>
+            <a:custGeom>
+              <a:avLst/>
+              <a:pathLst>
+                <a:path w="0" h="1317069">
+                  <a:moveTo>
+                    <a:pt x="0" y="1317069"/>
+                  </a:moveTo>
+                  <a:lnTo>
+                    <a:pt x="0" y="0"/>
+                  </a:lnTo>
+                  <a:lnTo>
+                    <a:pt x="0" y="0"/>
+                  </a:lnTo>
+                </a:path>
+              </a:pathLst>
+            </a:custGeom>
+            <a:ln w="6775" cap="flat">
+              <a:solidFill>
+                <a:srgbClr val="EBEBEB">
+                  <a:alpha val="100000"/>
+                </a:srgbClr>
+              </a:solidFill>
+              <a:prstDash val="solid"/>
+              <a:round/>
+            </a:ln>
+          </p:spPr>
+          <p:txBody>
+            <a:bodyPr/>
+            <a:lstStyle/>
+            <a:p/>
+          </p:txBody>
+        </p:sp>
+        <p:sp>
+          <p:nvSpPr>
+            <p:cNvPr id="45" name="pl45"/>
+            <p:cNvSpPr/>
+            <p:nvPr/>
+          </p:nvSpPr>
+          <p:spPr>
+            <a:xfrm>
+              <a:off x="2597634" y="4336484"/>
+              <a:ext cx="0" cy="1317069"/>
+            </a:xfrm>
+            <a:custGeom>
+              <a:avLst/>
+              <a:pathLst>
+                <a:path w="0" h="1317069">
+                  <a:moveTo>
+                    <a:pt x="0" y="1317069"/>
+                  </a:moveTo>
+                  <a:lnTo>
+                    <a:pt x="0" y="0"/>
+                  </a:lnTo>
+                  <a:lnTo>
+                    <a:pt x="0" y="0"/>
+                  </a:lnTo>
+                </a:path>
+              </a:pathLst>
+            </a:custGeom>
+            <a:ln w="6775" cap="flat">
+              <a:solidFill>
+                <a:srgbClr val="EBEBEB">
+                  <a:alpha val="100000"/>
+                </a:srgbClr>
+              </a:solidFill>
+              <a:prstDash val="solid"/>
+              <a:round/>
+            </a:ln>
+          </p:spPr>
+          <p:txBody>
+            <a:bodyPr/>
+            <a:lstStyle/>
+            <a:p/>
+          </p:txBody>
+        </p:sp>
+        <p:sp>
+          <p:nvSpPr>
+            <p:cNvPr id="46" name="pl46"/>
+            <p:cNvSpPr/>
+            <p:nvPr/>
+          </p:nvSpPr>
+          <p:spPr>
+            <a:xfrm>
+              <a:off x="3404799" y="4336484"/>
+              <a:ext cx="0" cy="1317069"/>
+            </a:xfrm>
+            <a:custGeom>
+              <a:avLst/>
+              <a:pathLst>
+                <a:path w="0" h="1317069">
+                  <a:moveTo>
+                    <a:pt x="0" y="1317069"/>
+                  </a:moveTo>
+                  <a:lnTo>
+                    <a:pt x="0" y="0"/>
+                  </a:lnTo>
+                  <a:lnTo>
+                    <a:pt x="0" y="0"/>
+                  </a:lnTo>
+                </a:path>
+              </a:pathLst>
+            </a:custGeom>
+            <a:ln w="6775" cap="flat">
+              <a:solidFill>
+                <a:srgbClr val="EBEBEB">
+                  <a:alpha val="100000"/>
+                </a:srgbClr>
+              </a:solidFill>
+              <a:prstDash val="solid"/>
+              <a:round/>
+            </a:ln>
+          </p:spPr>
+          <p:txBody>
+            <a:bodyPr/>
+            <a:lstStyle/>
+            <a:p/>
+          </p:txBody>
+        </p:sp>
+        <p:sp>
+          <p:nvSpPr>
+            <p:cNvPr id="47" name="pl47"/>
+            <p:cNvSpPr/>
+            <p:nvPr/>
+          </p:nvSpPr>
+          <p:spPr>
+            <a:xfrm>
+              <a:off x="4211965" y="4336484"/>
+              <a:ext cx="0" cy="1317069"/>
+            </a:xfrm>
+            <a:custGeom>
+              <a:avLst/>
+              <a:pathLst>
+                <a:path w="0" h="1317069">
+                  <a:moveTo>
+                    <a:pt x="0" y="1317069"/>
+                  </a:moveTo>
+                  <a:lnTo>
+                    <a:pt x="0" y="0"/>
+                  </a:lnTo>
+                  <a:lnTo>
+                    <a:pt x="0" y="0"/>
+                  </a:lnTo>
+                </a:path>
+              </a:pathLst>
+            </a:custGeom>
+            <a:ln w="6775" cap="flat">
+              <a:solidFill>
+                <a:srgbClr val="EBEBEB">
+                  <a:alpha val="100000"/>
+                </a:srgbClr>
+              </a:solidFill>
+              <a:prstDash val="solid"/>
+              <a:round/>
+            </a:ln>
+          </p:spPr>
+          <p:txBody>
+            <a:bodyPr/>
+            <a:lstStyle/>
+            <a:p/>
+          </p:txBody>
+        </p:sp>
+        <p:sp>
+          <p:nvSpPr>
+            <p:cNvPr id="48" name="pl48"/>
+            <p:cNvSpPr/>
+            <p:nvPr/>
+          </p:nvSpPr>
+          <p:spPr>
+            <a:xfrm>
+              <a:off x="5019130" y="4336484"/>
+              <a:ext cx="0" cy="1317069"/>
+            </a:xfrm>
+            <a:custGeom>
+              <a:avLst/>
+              <a:pathLst>
+                <a:path w="0" h="1317069">
+                  <a:moveTo>
+                    <a:pt x="0" y="1317069"/>
+                  </a:moveTo>
+                  <a:lnTo>
+                    <a:pt x="0" y="0"/>
+                  </a:lnTo>
+                  <a:lnTo>
+                    <a:pt x="0" y="0"/>
+                  </a:lnTo>
+                </a:path>
+              </a:pathLst>
+            </a:custGeom>
+            <a:ln w="6775" cap="flat">
+              <a:solidFill>
+                <a:srgbClr val="EBEBEB">
+                  <a:alpha val="100000"/>
+                </a:srgbClr>
+              </a:solidFill>
+              <a:prstDash val="solid"/>
+              <a:round/>
+            </a:ln>
+          </p:spPr>
+          <p:txBody>
+            <a:bodyPr/>
+            <a:lstStyle/>
+            <a:p/>
+          </p:txBody>
+        </p:sp>
+        <p:sp>
+          <p:nvSpPr>
+            <p:cNvPr id="49" name="pl49"/>
+            <p:cNvSpPr/>
+            <p:nvPr/>
+          </p:nvSpPr>
+          <p:spPr>
+            <a:xfrm>
+              <a:off x="5826296" y="4336484"/>
+              <a:ext cx="0" cy="1317069"/>
+            </a:xfrm>
+            <a:custGeom>
+              <a:avLst/>
+              <a:pathLst>
+                <a:path w="0" h="1317069">
+                  <a:moveTo>
+                    <a:pt x="0" y="1317069"/>
+                  </a:moveTo>
+                  <a:lnTo>
+                    <a:pt x="0" y="0"/>
+                  </a:lnTo>
+                  <a:lnTo>
+                    <a:pt x="0" y="0"/>
+                  </a:lnTo>
+                </a:path>
+              </a:pathLst>
+            </a:custGeom>
+            <a:ln w="6775" cap="flat">
+              <a:solidFill>
+                <a:srgbClr val="EBEBEB">
+                  <a:alpha val="100000"/>
+                </a:srgbClr>
+              </a:solidFill>
+              <a:prstDash val="solid"/>
+              <a:round/>
+            </a:ln>
+          </p:spPr>
+          <p:txBody>
+            <a:bodyPr/>
+            <a:lstStyle/>
+            <a:p/>
+          </p:txBody>
+        </p:sp>
+        <p:sp>
+          <p:nvSpPr>
+            <p:cNvPr id="50" name="pl50"/>
+            <p:cNvSpPr/>
+            <p:nvPr/>
+          </p:nvSpPr>
+          <p:spPr>
+            <a:xfrm>
+              <a:off x="6633461" y="4336484"/>
+              <a:ext cx="0" cy="1317069"/>
+            </a:xfrm>
+            <a:custGeom>
+              <a:avLst/>
+              <a:pathLst>
+                <a:path w="0" h="1317069">
+                  <a:moveTo>
+                    <a:pt x="0" y="1317069"/>
+                  </a:moveTo>
+                  <a:lnTo>
+                    <a:pt x="0" y="0"/>
+                  </a:lnTo>
+                  <a:lnTo>
+                    <a:pt x="0" y="0"/>
+                  </a:lnTo>
+                </a:path>
+              </a:pathLst>
+            </a:custGeom>
+            <a:ln w="6775" cap="flat">
+              <a:solidFill>
+                <a:srgbClr val="EBEBEB">
+                  <a:alpha val="100000"/>
+                </a:srgbClr>
+              </a:solidFill>
+              <a:prstDash val="solid"/>
+              <a:round/>
+            </a:ln>
+          </p:spPr>
+          <p:txBody>
+            <a:bodyPr/>
+            <a:lstStyle/>
+            <a:p/>
+          </p:txBody>
+        </p:sp>
+        <p:sp>
+          <p:nvSpPr>
+            <p:cNvPr id="51" name="pl51"/>
+            <p:cNvSpPr/>
+            <p:nvPr/>
+          </p:nvSpPr>
+          <p:spPr>
+            <a:xfrm>
+              <a:off x="7440627" y="4336484"/>
+              <a:ext cx="0" cy="1317069"/>
+            </a:xfrm>
+            <a:custGeom>
+              <a:avLst/>
+              <a:pathLst>
+                <a:path w="0" h="1317069">
+                  <a:moveTo>
+                    <a:pt x="0" y="1317069"/>
+                  </a:moveTo>
+                  <a:lnTo>
+                    <a:pt x="0" y="0"/>
+                  </a:lnTo>
+                  <a:lnTo>
+                    <a:pt x="0" y="0"/>
+                  </a:lnTo>
+                </a:path>
+              </a:pathLst>
+            </a:custGeom>
+            <a:ln w="6775" cap="flat">
+              <a:solidFill>
+                <a:srgbClr val="EBEBEB">
+                  <a:alpha val="100000"/>
+                </a:srgbClr>
+              </a:solidFill>
+              <a:prstDash val="solid"/>
+              <a:round/>
+            </a:ln>
+          </p:spPr>
+          <p:txBody>
+            <a:bodyPr/>
+            <a:lstStyle/>
+            <a:p/>
+          </p:txBody>
+        </p:sp>
+        <p:sp>
+          <p:nvSpPr>
+            <p:cNvPr id="52" name="pl52"/>
+            <p:cNvSpPr/>
+            <p:nvPr/>
+          </p:nvSpPr>
+          <p:spPr>
+            <a:xfrm>
+              <a:off x="8247792" y="4336484"/>
+              <a:ext cx="0" cy="1317069"/>
+            </a:xfrm>
+            <a:custGeom>
+              <a:avLst/>
+              <a:pathLst>
+                <a:path w="0" h="1317069">
+                  <a:moveTo>
+                    <a:pt x="0" y="1317069"/>
+                  </a:moveTo>
+                  <a:lnTo>
+                    <a:pt x="0" y="0"/>
+                  </a:lnTo>
+                  <a:lnTo>
+                    <a:pt x="0" y="0"/>
+                  </a:lnTo>
+                </a:path>
+              </a:pathLst>
+            </a:custGeom>
+            <a:ln w="6775" cap="flat">
+              <a:solidFill>
+                <a:srgbClr val="EBEBEB">
+                  <a:alpha val="100000"/>
+                </a:srgbClr>
+              </a:solidFill>
+              <a:prstDash val="solid"/>
+              <a:round/>
+            </a:ln>
+          </p:spPr>
+          <p:txBody>
+            <a:bodyPr/>
+            <a:lstStyle/>
+            <a:p/>
+          </p:txBody>
+        </p:sp>
+        <p:sp>
+          <p:nvSpPr>
+            <p:cNvPr id="53" name="pl53"/>
+            <p:cNvSpPr/>
+            <p:nvPr/>
+          </p:nvSpPr>
+          <p:spPr>
+            <a:xfrm>
+              <a:off x="887106" y="5593686"/>
+              <a:ext cx="7660515" cy="0"/>
+            </a:xfrm>
+            <a:custGeom>
+              <a:avLst/>
+              <a:pathLst>
+                <a:path w="7660515" h="0">
+                  <a:moveTo>
+                    <a:pt x="0" y="0"/>
+                  </a:moveTo>
+                  <a:lnTo>
+                    <a:pt x="7660515" y="0"/>
+                  </a:lnTo>
+                  <a:lnTo>
+                    <a:pt x="7660515" y="0"/>
+                  </a:lnTo>
+                </a:path>
+              </a:pathLst>
+            </a:custGeom>
+            <a:ln w="13550" cap="flat">
+              <a:solidFill>
+                <a:srgbClr val="EBEBEB">
+                  <a:alpha val="100000"/>
+                </a:srgbClr>
+              </a:solidFill>
+              <a:prstDash val="solid"/>
+              <a:round/>
+            </a:ln>
+          </p:spPr>
+          <p:txBody>
+            <a:bodyPr/>
+            <a:lstStyle/>
+            <a:p/>
+          </p:txBody>
+        </p:sp>
+        <p:sp>
+          <p:nvSpPr>
+            <p:cNvPr id="54" name="pl54"/>
+            <p:cNvSpPr/>
+            <p:nvPr/>
+          </p:nvSpPr>
+          <p:spPr>
+            <a:xfrm>
+              <a:off x="887106" y="5294352"/>
+              <a:ext cx="7660515" cy="0"/>
+            </a:xfrm>
+            <a:custGeom>
+              <a:avLst/>
+              <a:pathLst>
+                <a:path w="7660515" h="0">
+                  <a:moveTo>
+                    <a:pt x="0" y="0"/>
+                  </a:moveTo>
+                  <a:lnTo>
+                    <a:pt x="7660515" y="0"/>
+                  </a:lnTo>
+                  <a:lnTo>
+                    <a:pt x="7660515" y="0"/>
+                  </a:lnTo>
+                </a:path>
+              </a:pathLst>
+            </a:custGeom>
+            <a:ln w="13550" cap="flat">
+              <a:solidFill>
+                <a:srgbClr val="EBEBEB">
+                  <a:alpha val="100000"/>
+                </a:srgbClr>
+              </a:solidFill>
+              <a:prstDash val="solid"/>
+              <a:round/>
+            </a:ln>
+          </p:spPr>
+          <p:txBody>
+            <a:bodyPr/>
+            <a:lstStyle/>
+            <a:p/>
+          </p:txBody>
+        </p:sp>
+        <p:sp>
+          <p:nvSpPr>
+            <p:cNvPr id="55" name="pl55"/>
+            <p:cNvSpPr/>
+            <p:nvPr/>
+          </p:nvSpPr>
+          <p:spPr>
+            <a:xfrm>
+              <a:off x="887106" y="4995019"/>
+              <a:ext cx="7660515" cy="0"/>
+            </a:xfrm>
+            <a:custGeom>
+              <a:avLst/>
+              <a:pathLst>
+                <a:path w="7660515" h="0">
+                  <a:moveTo>
+                    <a:pt x="0" y="0"/>
+                  </a:moveTo>
+                  <a:lnTo>
+                    <a:pt x="7660515" y="0"/>
+                  </a:lnTo>
+                  <a:lnTo>
+                    <a:pt x="7660515" y="0"/>
+                  </a:lnTo>
+                </a:path>
+              </a:pathLst>
+            </a:custGeom>
+            <a:ln w="13550" cap="flat">
+              <a:solidFill>
+                <a:srgbClr val="EBEBEB">
+                  <a:alpha val="100000"/>
+                </a:srgbClr>
+              </a:solidFill>
+              <a:prstDash val="solid"/>
+              <a:round/>
+            </a:ln>
+          </p:spPr>
+          <p:txBody>
+            <a:bodyPr/>
+            <a:lstStyle/>
+            <a:p/>
+          </p:txBody>
+        </p:sp>
+        <p:sp>
+          <p:nvSpPr>
+            <p:cNvPr id="56" name="pl56"/>
+            <p:cNvSpPr/>
+            <p:nvPr/>
+          </p:nvSpPr>
+          <p:spPr>
+            <a:xfrm>
+              <a:off x="887106" y="4695685"/>
+              <a:ext cx="7660515" cy="0"/>
+            </a:xfrm>
+            <a:custGeom>
+              <a:avLst/>
+              <a:pathLst>
+                <a:path w="7660515" h="0">
+                  <a:moveTo>
+                    <a:pt x="0" y="0"/>
+                  </a:moveTo>
+                  <a:lnTo>
+                    <a:pt x="7660515" y="0"/>
+                  </a:lnTo>
+                  <a:lnTo>
+                    <a:pt x="7660515" y="0"/>
+                  </a:lnTo>
+                </a:path>
+              </a:pathLst>
+            </a:custGeom>
+            <a:ln w="13550" cap="flat">
+              <a:solidFill>
+                <a:srgbClr val="EBEBEB">
+                  <a:alpha val="100000"/>
+                </a:srgbClr>
+              </a:solidFill>
+              <a:prstDash val="solid"/>
+              <a:round/>
+            </a:ln>
+          </p:spPr>
+          <p:txBody>
+            <a:bodyPr/>
+            <a:lstStyle/>
+            <a:p/>
+          </p:txBody>
+        </p:sp>
+        <p:sp>
+          <p:nvSpPr>
+            <p:cNvPr id="57" name="pl57"/>
+            <p:cNvSpPr/>
+            <p:nvPr/>
+          </p:nvSpPr>
+          <p:spPr>
+            <a:xfrm>
+              <a:off x="887106" y="4396351"/>
+              <a:ext cx="7660515" cy="0"/>
+            </a:xfrm>
+            <a:custGeom>
+              <a:avLst/>
+              <a:pathLst>
+                <a:path w="7660515" h="0">
+                  <a:moveTo>
+                    <a:pt x="0" y="0"/>
+                  </a:moveTo>
+                  <a:lnTo>
+                    <a:pt x="7660515" y="0"/>
+                  </a:lnTo>
+                  <a:lnTo>
+                    <a:pt x="7660515" y="0"/>
+                  </a:lnTo>
+                </a:path>
+              </a:pathLst>
+            </a:custGeom>
+            <a:ln w="13550" cap="flat">
+              <a:solidFill>
+                <a:srgbClr val="EBEBEB">
+                  <a:alpha val="100000"/>
+                </a:srgbClr>
+              </a:solidFill>
+              <a:prstDash val="solid"/>
+              <a:round/>
+            </a:ln>
+          </p:spPr>
+          <p:txBody>
+            <a:bodyPr/>
+            <a:lstStyle/>
+            <a:p/>
+          </p:txBody>
+        </p:sp>
+        <p:sp>
+          <p:nvSpPr>
+            <p:cNvPr id="58" name="pl58"/>
+            <p:cNvSpPr/>
+            <p:nvPr/>
+          </p:nvSpPr>
+          <p:spPr>
+            <a:xfrm>
+              <a:off x="1386885" y="4336484"/>
+              <a:ext cx="0" cy="1317069"/>
+            </a:xfrm>
+            <a:custGeom>
+              <a:avLst/>
+              <a:pathLst>
+                <a:path w="0" h="1317069">
+                  <a:moveTo>
+                    <a:pt x="0" y="1317069"/>
+                  </a:moveTo>
+                  <a:lnTo>
+                    <a:pt x="0" y="0"/>
+                  </a:lnTo>
+                  <a:lnTo>
+                    <a:pt x="0" y="0"/>
+                  </a:lnTo>
+                </a:path>
+              </a:pathLst>
+            </a:custGeom>
+            <a:ln w="13550" cap="flat">
+              <a:solidFill>
+                <a:srgbClr val="EBEBEB">
+                  <a:alpha val="100000"/>
+                </a:srgbClr>
+              </a:solidFill>
+              <a:prstDash val="solid"/>
+              <a:round/>
+            </a:ln>
+          </p:spPr>
+          <p:txBody>
+            <a:bodyPr/>
+            <a:lstStyle/>
+            <a:p/>
+          </p:txBody>
+        </p:sp>
+        <p:sp>
+          <p:nvSpPr>
+            <p:cNvPr id="59" name="pl59"/>
+            <p:cNvSpPr/>
+            <p:nvPr/>
+          </p:nvSpPr>
+          <p:spPr>
+            <a:xfrm>
+              <a:off x="2194051" y="4336484"/>
+              <a:ext cx="0" cy="1317069"/>
+            </a:xfrm>
+            <a:custGeom>
+              <a:avLst/>
+              <a:pathLst>
+                <a:path w="0" h="1317069">
+                  <a:moveTo>
+                    <a:pt x="0" y="1317069"/>
+                  </a:moveTo>
+                  <a:lnTo>
+                    <a:pt x="0" y="0"/>
+                  </a:lnTo>
+                  <a:lnTo>
+                    <a:pt x="0" y="0"/>
+                  </a:lnTo>
+                </a:path>
+              </a:pathLst>
+            </a:custGeom>
+            <a:ln w="13550" cap="flat">
+              <a:solidFill>
+                <a:srgbClr val="EBEBEB">
+                  <a:alpha val="100000"/>
+                </a:srgbClr>
+              </a:solidFill>
+              <a:prstDash val="solid"/>
+              <a:round/>
+            </a:ln>
+          </p:spPr>
+          <p:txBody>
+            <a:bodyPr/>
+            <a:lstStyle/>
+            <a:p/>
+          </p:txBody>
+        </p:sp>
+        <p:sp>
+          <p:nvSpPr>
+            <p:cNvPr id="60" name="pl60"/>
+            <p:cNvSpPr/>
+            <p:nvPr/>
+          </p:nvSpPr>
+          <p:spPr>
+            <a:xfrm>
+              <a:off x="3001216" y="4336484"/>
+              <a:ext cx="0" cy="1317069"/>
+            </a:xfrm>
+            <a:custGeom>
+              <a:avLst/>
+              <a:pathLst>
+                <a:path w="0" h="1317069">
+                  <a:moveTo>
+                    <a:pt x="0" y="1317069"/>
+                  </a:moveTo>
+                  <a:lnTo>
+                    <a:pt x="0" y="0"/>
+                  </a:lnTo>
+                  <a:lnTo>
+                    <a:pt x="0" y="0"/>
+                  </a:lnTo>
+                </a:path>
+              </a:pathLst>
+            </a:custGeom>
+            <a:ln w="13550" cap="flat">
+              <a:solidFill>
+                <a:srgbClr val="EBEBEB">
+                  <a:alpha val="100000"/>
+                </a:srgbClr>
+              </a:solidFill>
+              <a:prstDash val="solid"/>
+              <a:round/>
+            </a:ln>
+          </p:spPr>
+          <p:txBody>
+            <a:bodyPr/>
+            <a:lstStyle/>
+            <a:p/>
+          </p:txBody>
+        </p:sp>
+        <p:sp>
+          <p:nvSpPr>
+            <p:cNvPr id="61" name="pl61"/>
+            <p:cNvSpPr/>
+            <p:nvPr/>
+          </p:nvSpPr>
+          <p:spPr>
+            <a:xfrm>
+              <a:off x="3808382" y="4336484"/>
+              <a:ext cx="0" cy="1317069"/>
+            </a:xfrm>
+            <a:custGeom>
+              <a:avLst/>
+              <a:pathLst>
+                <a:path w="0" h="1317069">
+                  <a:moveTo>
+                    <a:pt x="0" y="1317069"/>
+                  </a:moveTo>
+                  <a:lnTo>
+                    <a:pt x="0" y="0"/>
+                  </a:lnTo>
+                  <a:lnTo>
+                    <a:pt x="0" y="0"/>
+                  </a:lnTo>
+                </a:path>
+              </a:pathLst>
+            </a:custGeom>
+            <a:ln w="13550" cap="flat">
+              <a:solidFill>
+                <a:srgbClr val="EBEBEB">
+                  <a:alpha val="100000"/>
+                </a:srgbClr>
+              </a:solidFill>
+              <a:prstDash val="solid"/>
+              <a:round/>
+            </a:ln>
+          </p:spPr>
+          <p:txBody>
+            <a:bodyPr/>
+            <a:lstStyle/>
+            <a:p/>
+          </p:txBody>
+        </p:sp>
+        <p:sp>
+          <p:nvSpPr>
+            <p:cNvPr id="62" name="pl62"/>
+            <p:cNvSpPr/>
+            <p:nvPr/>
+          </p:nvSpPr>
+          <p:spPr>
+            <a:xfrm>
+              <a:off x="4615547" y="4336484"/>
+              <a:ext cx="0" cy="1317069"/>
+            </a:xfrm>
+            <a:custGeom>
+              <a:avLst/>
+              <a:pathLst>
+                <a:path w="0" h="1317069">
+                  <a:moveTo>
+                    <a:pt x="0" y="1317069"/>
+                  </a:moveTo>
+                  <a:lnTo>
+                    <a:pt x="0" y="0"/>
+                  </a:lnTo>
+                  <a:lnTo>
+                    <a:pt x="0" y="0"/>
+                  </a:lnTo>
+                </a:path>
+              </a:pathLst>
+            </a:custGeom>
+            <a:ln w="13550" cap="flat">
+              <a:solidFill>
+                <a:srgbClr val="EBEBEB">
+                  <a:alpha val="100000"/>
+                </a:srgbClr>
+              </a:solidFill>
+              <a:prstDash val="solid"/>
+              <a:round/>
+            </a:ln>
+          </p:spPr>
+          <p:txBody>
+            <a:bodyPr/>
+            <a:lstStyle/>
+            <a:p/>
+          </p:txBody>
+        </p:sp>
+        <p:sp>
+          <p:nvSpPr>
+            <p:cNvPr id="63" name="pl63"/>
+            <p:cNvSpPr/>
+            <p:nvPr/>
+          </p:nvSpPr>
+          <p:spPr>
+            <a:xfrm>
+              <a:off x="5422713" y="4336484"/>
+              <a:ext cx="0" cy="1317069"/>
+            </a:xfrm>
+            <a:custGeom>
+              <a:avLst/>
+              <a:pathLst>
+                <a:path w="0" h="1317069">
+                  <a:moveTo>
+                    <a:pt x="0" y="1317069"/>
+                  </a:moveTo>
+                  <a:lnTo>
+                    <a:pt x="0" y="0"/>
+                  </a:lnTo>
+                  <a:lnTo>
+                    <a:pt x="0" y="0"/>
+                  </a:lnTo>
+                </a:path>
+              </a:pathLst>
+            </a:custGeom>
+            <a:ln w="13550" cap="flat">
+              <a:solidFill>
+                <a:srgbClr val="EBEBEB">
+                  <a:alpha val="100000"/>
+                </a:srgbClr>
+              </a:solidFill>
+              <a:prstDash val="solid"/>
+              <a:round/>
+            </a:ln>
+          </p:spPr>
+          <p:txBody>
+            <a:bodyPr/>
+            <a:lstStyle/>
+            <a:p/>
+          </p:txBody>
+        </p:sp>
+        <p:sp>
+          <p:nvSpPr>
+            <p:cNvPr id="64" name="pl64"/>
+            <p:cNvSpPr/>
+            <p:nvPr/>
+          </p:nvSpPr>
+          <p:spPr>
+            <a:xfrm>
+              <a:off x="6229878" y="4336484"/>
+              <a:ext cx="0" cy="1317069"/>
+            </a:xfrm>
+            <a:custGeom>
+              <a:avLst/>
+              <a:pathLst>
+                <a:path w="0" h="1317069">
+                  <a:moveTo>
+                    <a:pt x="0" y="1317069"/>
+                  </a:moveTo>
+                  <a:lnTo>
+                    <a:pt x="0" y="0"/>
+                  </a:lnTo>
+                  <a:lnTo>
+                    <a:pt x="0" y="0"/>
+                  </a:lnTo>
+                </a:path>
+              </a:pathLst>
+            </a:custGeom>
+            <a:ln w="13550" cap="flat">
+              <a:solidFill>
+                <a:srgbClr val="EBEBEB">
+                  <a:alpha val="100000"/>
+                </a:srgbClr>
+              </a:solidFill>
+              <a:prstDash val="solid"/>
+              <a:round/>
+            </a:ln>
+          </p:spPr>
+          <p:txBody>
+            <a:bodyPr/>
+            <a:lstStyle/>
+            <a:p/>
+          </p:txBody>
+        </p:sp>
+        <p:sp>
+          <p:nvSpPr>
+            <p:cNvPr id="65" name="pl65"/>
+            <p:cNvSpPr/>
+            <p:nvPr/>
+          </p:nvSpPr>
+          <p:spPr>
+            <a:xfrm>
+              <a:off x="7037044" y="4336484"/>
+              <a:ext cx="0" cy="1317069"/>
+            </a:xfrm>
+            <a:custGeom>
+              <a:avLst/>
+              <a:pathLst>
+                <a:path w="0" h="1317069">
+                  <a:moveTo>
+                    <a:pt x="0" y="1317069"/>
+                  </a:moveTo>
+                  <a:lnTo>
+                    <a:pt x="0" y="0"/>
+                  </a:lnTo>
+                  <a:lnTo>
+                    <a:pt x="0" y="0"/>
+                  </a:lnTo>
+                </a:path>
+              </a:pathLst>
+            </a:custGeom>
+            <a:ln w="13550" cap="flat">
+              <a:solidFill>
+                <a:srgbClr val="EBEBEB">
+                  <a:alpha val="100000"/>
+                </a:srgbClr>
+              </a:solidFill>
+              <a:prstDash val="solid"/>
+              <a:round/>
+            </a:ln>
+          </p:spPr>
+          <p:txBody>
+            <a:bodyPr/>
+            <a:lstStyle/>
+            <a:p/>
+          </p:txBody>
+        </p:sp>
+        <p:sp>
+          <p:nvSpPr>
+            <p:cNvPr id="66" name="pl66"/>
+            <p:cNvSpPr/>
+            <p:nvPr/>
+          </p:nvSpPr>
+          <p:spPr>
+            <a:xfrm>
+              <a:off x="7844209" y="4336484"/>
+              <a:ext cx="0" cy="1317069"/>
+            </a:xfrm>
+            <a:custGeom>
+              <a:avLst/>
+              <a:pathLst>
+                <a:path w="0" h="1317069">
+                  <a:moveTo>
+                    <a:pt x="0" y="1317069"/>
+                  </a:moveTo>
+                  <a:lnTo>
+                    <a:pt x="0" y="0"/>
+                  </a:lnTo>
+                  <a:lnTo>
+                    <a:pt x="0" y="0"/>
+                  </a:lnTo>
+                </a:path>
+              </a:pathLst>
+            </a:custGeom>
+            <a:ln w="13550" cap="flat">
+              <a:solidFill>
+                <a:srgbClr val="EBEBEB">
+                  <a:alpha val="100000"/>
+                </a:srgbClr>
+              </a:solidFill>
+              <a:prstDash val="solid"/>
+              <a:round/>
+            </a:ln>
+          </p:spPr>
+          <p:txBody>
+            <a:bodyPr/>
+            <a:lstStyle/>
+            <a:p/>
+          </p:txBody>
+        </p:sp>
+        <p:sp>
+          <p:nvSpPr>
+            <p:cNvPr id="67" name="pg67"/>
+            <p:cNvSpPr/>
+            <p:nvPr/>
+          </p:nvSpPr>
+          <p:spPr>
+            <a:xfrm>
+              <a:off x="1235312" y="4336484"/>
+              <a:ext cx="6964104" cy="1235581"/>
+            </a:xfrm>
+            <a:custGeom>
+              <a:avLst/>
+              <a:pathLst>
+                <a:path w="6964104" h="1235581">
+                  <a:moveTo>
+                    <a:pt x="1202598" y="0"/>
+                  </a:moveTo>
+                  <a:lnTo>
+                    <a:pt x="1266200" y="55267"/>
+                  </a:lnTo>
+                  <a:lnTo>
+                    <a:pt x="1336545" y="113435"/>
+                  </a:lnTo>
+                  <a:lnTo>
+                    <a:pt x="1406889" y="168787"/>
+                  </a:lnTo>
+                  <a:lnTo>
+                    <a:pt x="1477234" y="221461"/>
+                  </a:lnTo>
+                  <a:lnTo>
+                    <a:pt x="1547578" y="271586"/>
+                  </a:lnTo>
+                  <a:lnTo>
+                    <a:pt x="1617923" y="319285"/>
+                  </a:lnTo>
+                  <a:lnTo>
+                    <a:pt x="1688267" y="364676"/>
+                  </a:lnTo>
+                  <a:lnTo>
+                    <a:pt x="1758612" y="407869"/>
+                  </a:lnTo>
+                  <a:lnTo>
+                    <a:pt x="1828956" y="448973"/>
+                  </a:lnTo>
+                  <a:lnTo>
+                    <a:pt x="1899301" y="488087"/>
+                  </a:lnTo>
+                  <a:lnTo>
+                    <a:pt x="1969645" y="525309"/>
+                  </a:lnTo>
+                  <a:lnTo>
+                    <a:pt x="2039990" y="560729"/>
+                  </a:lnTo>
+                  <a:lnTo>
+                    <a:pt x="2110334" y="594435"/>
+                  </a:lnTo>
+                  <a:lnTo>
+                    <a:pt x="2180679" y="626509"/>
+                  </a:lnTo>
+                  <a:lnTo>
+                    <a:pt x="2251023" y="657032"/>
+                  </a:lnTo>
+                  <a:lnTo>
+                    <a:pt x="2321368" y="686077"/>
+                  </a:lnTo>
+                  <a:lnTo>
+                    <a:pt x="2391712" y="713717"/>
+                  </a:lnTo>
+                  <a:lnTo>
+                    <a:pt x="2462057" y="740019"/>
+                  </a:lnTo>
+                  <a:lnTo>
+                    <a:pt x="2532401" y="765048"/>
+                  </a:lnTo>
+                  <a:lnTo>
+                    <a:pt x="2602746" y="788866"/>
+                  </a:lnTo>
+                  <a:lnTo>
+                    <a:pt x="2673090" y="811531"/>
+                  </a:lnTo>
+                  <a:lnTo>
+                    <a:pt x="2743435" y="833099"/>
+                  </a:lnTo>
+                  <a:lnTo>
+                    <a:pt x="2813779" y="853624"/>
+                  </a:lnTo>
+                  <a:lnTo>
+                    <a:pt x="2884124" y="873155"/>
+                  </a:lnTo>
+                  <a:lnTo>
+                    <a:pt x="2954468" y="891741"/>
+                  </a:lnTo>
+                  <a:lnTo>
+                    <a:pt x="3024813" y="909427"/>
+                  </a:lnTo>
+                  <a:lnTo>
+                    <a:pt x="3095157" y="926258"/>
+                  </a:lnTo>
+                  <a:lnTo>
+                    <a:pt x="3165502" y="942274"/>
+                  </a:lnTo>
+                  <a:lnTo>
+                    <a:pt x="3235846" y="957515"/>
+                  </a:lnTo>
+                  <a:lnTo>
+                    <a:pt x="3306191" y="962569"/>
+                  </a:lnTo>
+                  <a:lnTo>
+                    <a:pt x="3376535" y="967308"/>
+                  </a:lnTo>
+                  <a:lnTo>
+                    <a:pt x="3446880" y="971971"/>
+                  </a:lnTo>
+                  <a:lnTo>
+                    <a:pt x="3517224" y="976559"/>
+                  </a:lnTo>
+                  <a:lnTo>
+                    <a:pt x="3587569" y="981073"/>
+                  </a:lnTo>
+                  <a:lnTo>
+                    <a:pt x="3657913" y="985514"/>
+                  </a:lnTo>
+                  <a:lnTo>
+                    <a:pt x="3728257" y="989884"/>
+                  </a:lnTo>
+                  <a:lnTo>
+                    <a:pt x="3798602" y="994184"/>
+                  </a:lnTo>
+                  <a:lnTo>
+                    <a:pt x="3868946" y="998415"/>
+                  </a:lnTo>
+                  <a:lnTo>
+                    <a:pt x="3939291" y="1002577"/>
+                  </a:lnTo>
+                  <a:lnTo>
+                    <a:pt x="4009635" y="1006673"/>
+                  </a:lnTo>
+                  <a:lnTo>
+                    <a:pt x="4079980" y="1010702"/>
+                  </a:lnTo>
+                  <a:lnTo>
+                    <a:pt x="4150324" y="1014667"/>
+                  </a:lnTo>
+                  <a:lnTo>
+                    <a:pt x="4220669" y="1018568"/>
+                  </a:lnTo>
+                  <a:lnTo>
+                    <a:pt x="4291013" y="1022407"/>
+                  </a:lnTo>
+                  <a:lnTo>
+                    <a:pt x="4361358" y="1026183"/>
+                  </a:lnTo>
+                  <a:lnTo>
+                    <a:pt x="4431702" y="1029899"/>
+                  </a:lnTo>
+                  <a:lnTo>
+                    <a:pt x="4502047" y="1033555"/>
+                  </a:lnTo>
+                  <a:lnTo>
+                    <a:pt x="4572391" y="1037152"/>
+                  </a:lnTo>
+                  <a:lnTo>
+                    <a:pt x="4642736" y="1040692"/>
+                  </a:lnTo>
+                  <a:lnTo>
+                    <a:pt x="4713080" y="1044174"/>
+                  </a:lnTo>
+                  <a:lnTo>
+                    <a:pt x="4783425" y="1047601"/>
+                  </a:lnTo>
+                  <a:lnTo>
+                    <a:pt x="4853769" y="1050972"/>
+                  </a:lnTo>
+                  <a:lnTo>
+                    <a:pt x="4924114" y="1054289"/>
+                  </a:lnTo>
+                  <a:lnTo>
+                    <a:pt x="4994458" y="1057553"/>
+                  </a:lnTo>
+                  <a:lnTo>
+                    <a:pt x="5064803" y="1060764"/>
+                  </a:lnTo>
+                  <a:lnTo>
+                    <a:pt x="5135147" y="1063924"/>
+                  </a:lnTo>
+                  <a:lnTo>
+                    <a:pt x="5205492" y="1067033"/>
+                  </a:lnTo>
+                  <a:lnTo>
+                    <a:pt x="5275836" y="1070092"/>
+                  </a:lnTo>
+                  <a:lnTo>
+                    <a:pt x="5346181" y="1073101"/>
+                  </a:lnTo>
+                  <a:lnTo>
+                    <a:pt x="5416525" y="1076062"/>
+                  </a:lnTo>
+                  <a:lnTo>
+                    <a:pt x="5486870" y="1078976"/>
+                  </a:lnTo>
+                  <a:lnTo>
+                    <a:pt x="5557214" y="1081843"/>
+                  </a:lnTo>
+                  <a:lnTo>
+                    <a:pt x="5627559" y="1084663"/>
+                  </a:lnTo>
+                  <a:lnTo>
+                    <a:pt x="5697903" y="1087438"/>
+                  </a:lnTo>
+                  <a:lnTo>
+                    <a:pt x="5768248" y="1090169"/>
+                  </a:lnTo>
+                  <a:lnTo>
+                    <a:pt x="5838592" y="1092856"/>
+                  </a:lnTo>
+                  <a:lnTo>
+                    <a:pt x="5908937" y="1095499"/>
+                  </a:lnTo>
+                  <a:lnTo>
+                    <a:pt x="5979281" y="1098100"/>
+                  </a:lnTo>
+                  <a:lnTo>
+                    <a:pt x="6049626" y="1100659"/>
+                  </a:lnTo>
+                  <a:lnTo>
+                    <a:pt x="6119970" y="1103177"/>
+                  </a:lnTo>
+                  <a:lnTo>
+                    <a:pt x="6190315" y="1105654"/>
+                  </a:lnTo>
+                  <a:lnTo>
+                    <a:pt x="6260659" y="1108092"/>
+                  </a:lnTo>
+                  <a:lnTo>
+                    <a:pt x="6331004" y="1110490"/>
+                  </a:lnTo>
+                  <a:lnTo>
+                    <a:pt x="6401348" y="1112850"/>
+                  </a:lnTo>
+                  <a:lnTo>
+                    <a:pt x="6471693" y="1115172"/>
+                  </a:lnTo>
+                  <a:lnTo>
+                    <a:pt x="6542037" y="1117457"/>
+                  </a:lnTo>
+                  <a:lnTo>
+                    <a:pt x="6612382" y="1119704"/>
+                  </a:lnTo>
+                  <a:lnTo>
+                    <a:pt x="6682726" y="1121916"/>
+                  </a:lnTo>
+                  <a:lnTo>
+                    <a:pt x="6753071" y="1124092"/>
+                  </a:lnTo>
+                  <a:lnTo>
+                    <a:pt x="6823415" y="1126233"/>
+                  </a:lnTo>
+                  <a:lnTo>
+                    <a:pt x="6893760" y="1128340"/>
+                  </a:lnTo>
+                  <a:lnTo>
+                    <a:pt x="6964104" y="1130412"/>
+                  </a:lnTo>
+                  <a:lnTo>
+                    <a:pt x="6964104" y="1235581"/>
+                  </a:lnTo>
+                  <a:lnTo>
+                    <a:pt x="6893760" y="1234482"/>
+                  </a:lnTo>
+                  <a:lnTo>
+                    <a:pt x="6823415" y="1233326"/>
+                  </a:lnTo>
+                  <a:lnTo>
+                    <a:pt x="6753071" y="1232112"/>
+                  </a:lnTo>
+                  <a:lnTo>
+                    <a:pt x="6682726" y="1230836"/>
+                  </a:lnTo>
+                  <a:lnTo>
+                    <a:pt x="6612382" y="1229495"/>
+                  </a:lnTo>
+                  <a:lnTo>
+                    <a:pt x="6542037" y="1228086"/>
+                  </a:lnTo>
+                  <a:lnTo>
+                    <a:pt x="6471693" y="1226605"/>
+                  </a:lnTo>
+                  <a:lnTo>
+                    <a:pt x="6401348" y="1225049"/>
+                  </a:lnTo>
+                  <a:lnTo>
+                    <a:pt x="6331004" y="1223414"/>
+                  </a:lnTo>
+                  <a:lnTo>
+                    <a:pt x="6260659" y="1221696"/>
+                  </a:lnTo>
+                  <a:lnTo>
+                    <a:pt x="6190315" y="1219890"/>
+                  </a:lnTo>
+                  <a:lnTo>
+                    <a:pt x="6119970" y="1217992"/>
+                  </a:lnTo>
+                  <a:lnTo>
+                    <a:pt x="6049626" y="1215998"/>
+                  </a:lnTo>
+                  <a:lnTo>
+                    <a:pt x="5979281" y="1213903"/>
+                  </a:lnTo>
+                  <a:lnTo>
+                    <a:pt x="5908937" y="1211701"/>
+                  </a:lnTo>
+                  <a:lnTo>
+                    <a:pt x="5838592" y="1209387"/>
+                  </a:lnTo>
+                  <a:lnTo>
+                    <a:pt x="5768248" y="1206955"/>
+                  </a:lnTo>
+                  <a:lnTo>
+                    <a:pt x="5697903" y="1204400"/>
+                  </a:lnTo>
+                  <a:lnTo>
+                    <a:pt x="5627559" y="1201714"/>
+                  </a:lnTo>
+                  <a:lnTo>
+                    <a:pt x="5557214" y="1198893"/>
+                  </a:lnTo>
+                  <a:lnTo>
+                    <a:pt x="5486870" y="1195927"/>
+                  </a:lnTo>
+                  <a:lnTo>
+                    <a:pt x="5416525" y="1192811"/>
+                  </a:lnTo>
+                  <a:lnTo>
+                    <a:pt x="5346181" y="1189536"/>
+                  </a:lnTo>
+                  <a:lnTo>
+                    <a:pt x="5275836" y="1186095"/>
+                  </a:lnTo>
+                  <a:lnTo>
+                    <a:pt x="5205492" y="1182479"/>
+                  </a:lnTo>
+                  <a:lnTo>
+                    <a:pt x="5135147" y="1178679"/>
+                  </a:lnTo>
+                  <a:lnTo>
+                    <a:pt x="5064803" y="1174685"/>
+                  </a:lnTo>
+                  <a:lnTo>
+                    <a:pt x="4994458" y="1170489"/>
+                  </a:lnTo>
+                  <a:lnTo>
+                    <a:pt x="4924114" y="1166079"/>
+                  </a:lnTo>
+                  <a:lnTo>
+                    <a:pt x="4853769" y="1161445"/>
+                  </a:lnTo>
+                  <a:lnTo>
+                    <a:pt x="4783425" y="1156575"/>
+                  </a:lnTo>
+                  <a:lnTo>
+                    <a:pt x="4713080" y="1151457"/>
+                  </a:lnTo>
+                  <a:lnTo>
+                    <a:pt x="4642736" y="1146080"/>
+                  </a:lnTo>
+                  <a:lnTo>
+                    <a:pt x="4572391" y="1140428"/>
+                  </a:lnTo>
+                  <a:lnTo>
+                    <a:pt x="4502047" y="1134490"/>
+                  </a:lnTo>
+                  <a:lnTo>
+                    <a:pt x="4431702" y="1128249"/>
+                  </a:lnTo>
+                  <a:lnTo>
+                    <a:pt x="4361358" y="1121691"/>
+                  </a:lnTo>
+                  <a:lnTo>
+                    <a:pt x="4291013" y="1114799"/>
+                  </a:lnTo>
+                  <a:lnTo>
+                    <a:pt x="4220669" y="1107557"/>
+                  </a:lnTo>
+                  <a:lnTo>
+                    <a:pt x="4150324" y="1099947"/>
+                  </a:lnTo>
+                  <a:lnTo>
+                    <a:pt x="4079980" y="1091949"/>
+                  </a:lnTo>
+                  <a:lnTo>
+                    <a:pt x="4009635" y="1083545"/>
+                  </a:lnTo>
+                  <a:lnTo>
+                    <a:pt x="3939291" y="1074714"/>
+                  </a:lnTo>
+                  <a:lnTo>
+                    <a:pt x="3868946" y="1065433"/>
+                  </a:lnTo>
+                  <a:lnTo>
+                    <a:pt x="3798602" y="1055681"/>
+                  </a:lnTo>
+                  <a:lnTo>
+                    <a:pt x="3728257" y="1045432"/>
+                  </a:lnTo>
+                  <a:lnTo>
+                    <a:pt x="3657913" y="1034662"/>
+                  </a:lnTo>
+                  <a:lnTo>
+                    <a:pt x="3587569" y="1023345"/>
+                  </a:lnTo>
+                  <a:lnTo>
+                    <a:pt x="3517224" y="1011451"/>
+                  </a:lnTo>
+                  <a:lnTo>
+                    <a:pt x="3446880" y="998953"/>
+                  </a:lnTo>
+                  <a:lnTo>
+                    <a:pt x="3376535" y="985820"/>
+                  </a:lnTo>
+                  <a:lnTo>
+                    <a:pt x="3306191" y="972018"/>
+                  </a:lnTo>
+                  <a:lnTo>
+                    <a:pt x="3235846" y="957753"/>
+                  </a:lnTo>
+                  <a:lnTo>
+                    <a:pt x="3165502" y="952857"/>
+                  </a:lnTo>
+                  <a:lnTo>
+                    <a:pt x="3095157" y="947882"/>
+                  </a:lnTo>
+                  <a:lnTo>
+                    <a:pt x="3024813" y="942825"/>
+                  </a:lnTo>
+                  <a:lnTo>
+                    <a:pt x="2954468" y="937686"/>
+                  </a:lnTo>
+                  <a:lnTo>
+                    <a:pt x="2884124" y="932463"/>
+                  </a:lnTo>
+                  <a:lnTo>
+                    <a:pt x="2813779" y="927154"/>
+                  </a:lnTo>
+                  <a:lnTo>
+                    <a:pt x="2743435" y="921759"/>
+                  </a:lnTo>
+                  <a:lnTo>
+                    <a:pt x="2673090" y="916275"/>
+                  </a:lnTo>
+                  <a:lnTo>
+                    <a:pt x="2602746" y="910702"/>
+                  </a:lnTo>
+                  <a:lnTo>
+                    <a:pt x="2532401" y="905037"/>
+                  </a:lnTo>
+                  <a:lnTo>
+                    <a:pt x="2462057" y="899280"/>
+                  </a:lnTo>
+                  <a:lnTo>
+                    <a:pt x="2391712" y="893429"/>
+                  </a:lnTo>
+                  <a:lnTo>
+                    <a:pt x="2321368" y="887482"/>
+                  </a:lnTo>
+                  <a:lnTo>
+                    <a:pt x="2251023" y="881438"/>
+                  </a:lnTo>
+                  <a:lnTo>
+                    <a:pt x="2180679" y="875295"/>
+                  </a:lnTo>
+                  <a:lnTo>
+                    <a:pt x="2110334" y="869052"/>
+                  </a:lnTo>
+                  <a:lnTo>
+                    <a:pt x="2039990" y="862707"/>
+                  </a:lnTo>
+                  <a:lnTo>
+                    <a:pt x="1969645" y="856258"/>
+                  </a:lnTo>
+                  <a:lnTo>
+                    <a:pt x="1899301" y="849703"/>
+                  </a:lnTo>
+                  <a:lnTo>
+                    <a:pt x="1828956" y="843042"/>
+                  </a:lnTo>
+                  <a:lnTo>
+                    <a:pt x="1758612" y="836271"/>
+                  </a:lnTo>
+                  <a:lnTo>
+                    <a:pt x="1688267" y="829390"/>
+                  </a:lnTo>
+                  <a:lnTo>
+                    <a:pt x="1617923" y="822396"/>
+                  </a:lnTo>
+                  <a:lnTo>
+                    <a:pt x="1547578" y="815288"/>
+                  </a:lnTo>
+                  <a:lnTo>
+                    <a:pt x="1477234" y="808064"/>
+                  </a:lnTo>
+                  <a:lnTo>
+                    <a:pt x="1406889" y="800722"/>
+                  </a:lnTo>
+                  <a:lnTo>
+                    <a:pt x="1336545" y="793259"/>
+                  </a:lnTo>
+                  <a:lnTo>
+                    <a:pt x="1266200" y="785675"/>
+                  </a:lnTo>
+                  <a:lnTo>
+                    <a:pt x="1195856" y="777967"/>
+                  </a:lnTo>
+                  <a:lnTo>
+                    <a:pt x="1125511" y="770132"/>
+                  </a:lnTo>
+                  <a:lnTo>
+                    <a:pt x="1055167" y="762170"/>
+                  </a:lnTo>
+                  <a:lnTo>
+                    <a:pt x="984822" y="754077"/>
+                  </a:lnTo>
+                  <a:lnTo>
+                    <a:pt x="914478" y="745852"/>
+                  </a:lnTo>
+                  <a:lnTo>
+                    <a:pt x="844133" y="737493"/>
+                  </a:lnTo>
+                  <a:lnTo>
+                    <a:pt x="773789" y="728997"/>
+                  </a:lnTo>
+                  <a:lnTo>
+                    <a:pt x="703444" y="720362"/>
+                  </a:lnTo>
+                  <a:lnTo>
+                    <a:pt x="633100" y="711586"/>
+                  </a:lnTo>
+                  <a:lnTo>
+                    <a:pt x="562755" y="702667"/>
+                  </a:lnTo>
+                  <a:lnTo>
+                    <a:pt x="492411" y="693601"/>
+                  </a:lnTo>
+                  <a:lnTo>
+                    <a:pt x="422066" y="684388"/>
+                  </a:lnTo>
+                  <a:lnTo>
+                    <a:pt x="351722" y="675024"/>
+                  </a:lnTo>
+                  <a:lnTo>
+                    <a:pt x="281377" y="665507"/>
+                  </a:lnTo>
+                  <a:lnTo>
+                    <a:pt x="211033" y="655834"/>
+                  </a:lnTo>
+                  <a:lnTo>
+                    <a:pt x="140688" y="646003"/>
+                  </a:lnTo>
+                  <a:lnTo>
+                    <a:pt x="70344" y="636011"/>
+                  </a:lnTo>
+                  <a:lnTo>
+                    <a:pt x="0" y="625856"/>
+                  </a:lnTo>
+                  <a:close/>
+                </a:path>
+              </a:pathLst>
+            </a:custGeom>
+            <a:solidFill>
+              <a:srgbClr val="FF8C00">
+                <a:alpha val="20000"/>
+              </a:srgbClr>
+            </a:solidFill>
+          </p:spPr>
+          <p:txBody>
+            <a:bodyPr/>
+            <a:lstStyle/>
+            <a:p/>
+          </p:txBody>
+        </p:sp>
+        <p:sp>
+          <p:nvSpPr>
+            <p:cNvPr id="68" name="pl68"/>
+            <p:cNvSpPr/>
+            <p:nvPr/>
+          </p:nvSpPr>
+          <p:spPr>
+            <a:xfrm>
+              <a:off x="2437910" y="4336484"/>
+              <a:ext cx="5761505" cy="1130412"/>
+            </a:xfrm>
+            <a:custGeom>
+              <a:avLst/>
+              <a:pathLst>
+                <a:path w="5761505" h="1130412">
+                  <a:moveTo>
+                    <a:pt x="0" y="0"/>
+                  </a:moveTo>
+                  <a:lnTo>
+                    <a:pt x="63602" y="55267"/>
+                  </a:lnTo>
+                  <a:lnTo>
+                    <a:pt x="133946" y="113435"/>
+                  </a:lnTo>
+                  <a:lnTo>
+                    <a:pt x="204291" y="168787"/>
+                  </a:lnTo>
+                  <a:lnTo>
+                    <a:pt x="274635" y="221461"/>
+                  </a:lnTo>
+                  <a:lnTo>
+                    <a:pt x="344980" y="271586"/>
+                  </a:lnTo>
+                  <a:lnTo>
+                    <a:pt x="415324" y="319285"/>
+                  </a:lnTo>
+                  <a:lnTo>
+                    <a:pt x="485669" y="364676"/>
+                  </a:lnTo>
+                  <a:lnTo>
+                    <a:pt x="556013" y="407869"/>
+                  </a:lnTo>
+                  <a:lnTo>
+                    <a:pt x="626358" y="448973"/>
+                  </a:lnTo>
+                  <a:lnTo>
+                    <a:pt x="696702" y="488087"/>
+                  </a:lnTo>
+                  <a:lnTo>
+                    <a:pt x="767047" y="525309"/>
+                  </a:lnTo>
+                  <a:lnTo>
+                    <a:pt x="837391" y="560729"/>
+                  </a:lnTo>
+                  <a:lnTo>
+                    <a:pt x="907736" y="594435"/>
+                  </a:lnTo>
+                  <a:lnTo>
+                    <a:pt x="978080" y="626509"/>
+                  </a:lnTo>
+                  <a:lnTo>
+                    <a:pt x="1048425" y="657032"/>
+                  </a:lnTo>
+                  <a:lnTo>
+                    <a:pt x="1118769" y="686077"/>
+                  </a:lnTo>
+                  <a:lnTo>
+                    <a:pt x="1189113" y="713717"/>
+                  </a:lnTo>
+                  <a:lnTo>
+                    <a:pt x="1259458" y="740019"/>
+                  </a:lnTo>
+                  <a:lnTo>
+                    <a:pt x="1329802" y="765048"/>
+                  </a:lnTo>
+                  <a:lnTo>
+                    <a:pt x="1400147" y="788866"/>
+                  </a:lnTo>
+                  <a:lnTo>
+                    <a:pt x="1470491" y="811531"/>
+                  </a:lnTo>
+                  <a:lnTo>
+                    <a:pt x="1540836" y="833099"/>
+                  </a:lnTo>
+                  <a:lnTo>
+                    <a:pt x="1611180" y="853624"/>
+                  </a:lnTo>
+                  <a:lnTo>
+                    <a:pt x="1681525" y="873155"/>
+                  </a:lnTo>
+                  <a:lnTo>
+                    <a:pt x="1751869" y="891741"/>
+                  </a:lnTo>
+                  <a:lnTo>
+                    <a:pt x="1822214" y="909427"/>
+                  </a:lnTo>
+                  <a:lnTo>
+                    <a:pt x="1892558" y="926258"/>
+                  </a:lnTo>
+                  <a:lnTo>
+                    <a:pt x="1962903" y="942274"/>
+                  </a:lnTo>
+                  <a:lnTo>
+                    <a:pt x="2033247" y="957515"/>
+                  </a:lnTo>
+                  <a:lnTo>
+                    <a:pt x="2103592" y="962569"/>
+                  </a:lnTo>
+                  <a:lnTo>
+                    <a:pt x="2173936" y="967308"/>
+                  </a:lnTo>
+                  <a:lnTo>
+                    <a:pt x="2244281" y="971971"/>
+                  </a:lnTo>
+                  <a:lnTo>
+                    <a:pt x="2314625" y="976559"/>
+                  </a:lnTo>
+                  <a:lnTo>
+                    <a:pt x="2384970" y="981073"/>
+                  </a:lnTo>
+                  <a:lnTo>
+                    <a:pt x="2455314" y="985514"/>
+                  </a:lnTo>
+                  <a:lnTo>
+                    <a:pt x="2525659" y="989884"/>
+                  </a:lnTo>
+                  <a:lnTo>
+                    <a:pt x="2596003" y="994184"/>
+                  </a:lnTo>
+                  <a:lnTo>
+                    <a:pt x="2666348" y="998415"/>
+                  </a:lnTo>
+                  <a:lnTo>
+                    <a:pt x="2736692" y="1002577"/>
+                  </a:lnTo>
+                  <a:lnTo>
+                    <a:pt x="2807037" y="1006673"/>
+                  </a:lnTo>
+                  <a:lnTo>
+                    <a:pt x="2877381" y="1010702"/>
+                  </a:lnTo>
+                  <a:lnTo>
+                    <a:pt x="2947726" y="1014667"/>
+                  </a:lnTo>
+                  <a:lnTo>
+                    <a:pt x="3018070" y="1018568"/>
+                  </a:lnTo>
+                  <a:lnTo>
+                    <a:pt x="3088415" y="1022407"/>
+                  </a:lnTo>
+                  <a:lnTo>
+                    <a:pt x="3158759" y="1026183"/>
+                  </a:lnTo>
+                  <a:lnTo>
+                    <a:pt x="3229104" y="1029899"/>
+                  </a:lnTo>
+                  <a:lnTo>
+                    <a:pt x="3299448" y="1033555"/>
+                  </a:lnTo>
+                  <a:lnTo>
+                    <a:pt x="3369793" y="1037152"/>
+                  </a:lnTo>
+                  <a:lnTo>
+                    <a:pt x="3440137" y="1040692"/>
+                  </a:lnTo>
+                  <a:lnTo>
+                    <a:pt x="3510482" y="1044174"/>
+                  </a:lnTo>
+                  <a:lnTo>
+                    <a:pt x="3580826" y="1047601"/>
+                  </a:lnTo>
+                  <a:lnTo>
+                    <a:pt x="3651171" y="1050972"/>
+                  </a:lnTo>
+                  <a:lnTo>
+                    <a:pt x="3721515" y="1054289"/>
+                  </a:lnTo>
+                  <a:lnTo>
+                    <a:pt x="3791860" y="1057553"/>
+                  </a:lnTo>
+                  <a:lnTo>
+                    <a:pt x="3862204" y="1060764"/>
+                  </a:lnTo>
+                  <a:lnTo>
+                    <a:pt x="3932549" y="1063924"/>
+                  </a:lnTo>
+                  <a:lnTo>
+                    <a:pt x="4002893" y="1067033"/>
+                  </a:lnTo>
+                  <a:lnTo>
+                    <a:pt x="4073238" y="1070092"/>
+                  </a:lnTo>
+                  <a:lnTo>
+                    <a:pt x="4143582" y="1073101"/>
+                  </a:lnTo>
+                  <a:lnTo>
+                    <a:pt x="4213927" y="1076062"/>
+                  </a:lnTo>
+                  <a:lnTo>
+                    <a:pt x="4284271" y="1078976"/>
+                  </a:lnTo>
+                  <a:lnTo>
+                    <a:pt x="4354616" y="1081843"/>
+                  </a:lnTo>
+                  <a:lnTo>
+                    <a:pt x="4424960" y="1084663"/>
+                  </a:lnTo>
+                  <a:lnTo>
+                    <a:pt x="4495305" y="1087438"/>
+                  </a:lnTo>
+                  <a:lnTo>
+                    <a:pt x="4565649" y="1090169"/>
+                  </a:lnTo>
+                  <a:lnTo>
+                    <a:pt x="4635994" y="1092856"/>
+                  </a:lnTo>
+                  <a:lnTo>
+                    <a:pt x="4706338" y="1095499"/>
+                  </a:lnTo>
+                  <a:lnTo>
+                    <a:pt x="4776683" y="1098100"/>
+                  </a:lnTo>
+                  <a:lnTo>
+                    <a:pt x="4847027" y="1100659"/>
+                  </a:lnTo>
+                  <a:lnTo>
+                    <a:pt x="4917371" y="1103177"/>
+                  </a:lnTo>
+                  <a:lnTo>
+                    <a:pt x="4987716" y="1105654"/>
+                  </a:lnTo>
+                  <a:lnTo>
+                    <a:pt x="5058060" y="1108092"/>
+                  </a:lnTo>
+                  <a:lnTo>
+                    <a:pt x="5128405" y="1110490"/>
+                  </a:lnTo>
+                  <a:lnTo>
+                    <a:pt x="5198749" y="1112850"/>
+                  </a:lnTo>
+                  <a:lnTo>
+                    <a:pt x="5269094" y="1115172"/>
+                  </a:lnTo>
+                  <a:lnTo>
+                    <a:pt x="5339438" y="1117457"/>
+                  </a:lnTo>
+                  <a:lnTo>
+                    <a:pt x="5409783" y="1119704"/>
+                  </a:lnTo>
+                  <a:lnTo>
+                    <a:pt x="5480127" y="1121916"/>
+                  </a:lnTo>
+                  <a:lnTo>
+                    <a:pt x="5550472" y="1124092"/>
+                  </a:lnTo>
+                  <a:lnTo>
+                    <a:pt x="5620816" y="1126233"/>
+                  </a:lnTo>
+                  <a:lnTo>
+                    <a:pt x="5691161" y="1128340"/>
+                  </a:lnTo>
+                  <a:lnTo>
+                    <a:pt x="5761505" y="1130412"/>
+                  </a:lnTo>
+                </a:path>
+              </a:pathLst>
+            </a:custGeom>
+          </p:spPr>
+          <p:txBody>
+            <a:bodyPr/>
+            <a:lstStyle/>
+            <a:p/>
+          </p:txBody>
+        </p:sp>
+        <p:sp>
+          <p:nvSpPr>
+            <p:cNvPr id="69" name="pl69"/>
+            <p:cNvSpPr/>
+            <p:nvPr/>
+          </p:nvSpPr>
+          <p:spPr>
+            <a:xfrm>
+              <a:off x="1235312" y="4962341"/>
+              <a:ext cx="6964104" cy="609724"/>
+            </a:xfrm>
+            <a:custGeom>
+              <a:avLst/>
+              <a:pathLst>
+                <a:path w="6964104" h="609724">
+                  <a:moveTo>
+                    <a:pt x="6964104" y="609724"/>
+                  </a:moveTo>
+                  <a:lnTo>
+                    <a:pt x="6893760" y="608625"/>
+                  </a:lnTo>
+                  <a:lnTo>
+                    <a:pt x="6823415" y="607469"/>
+                  </a:lnTo>
+                  <a:lnTo>
+                    <a:pt x="6753071" y="606255"/>
+                  </a:lnTo>
+                  <a:lnTo>
+                    <a:pt x="6682726" y="604979"/>
+                  </a:lnTo>
+                  <a:lnTo>
+                    <a:pt x="6612382" y="603638"/>
+                  </a:lnTo>
+                  <a:lnTo>
+                    <a:pt x="6542037" y="602229"/>
+                  </a:lnTo>
+                  <a:lnTo>
+                    <a:pt x="6471693" y="600748"/>
+                  </a:lnTo>
+                  <a:lnTo>
+                    <a:pt x="6401348" y="599192"/>
+                  </a:lnTo>
+                  <a:lnTo>
+                    <a:pt x="6331004" y="597557"/>
+                  </a:lnTo>
+                  <a:lnTo>
+                    <a:pt x="6260659" y="595839"/>
+                  </a:lnTo>
+                  <a:lnTo>
+                    <a:pt x="6190315" y="594033"/>
+                  </a:lnTo>
+                  <a:lnTo>
+                    <a:pt x="6119970" y="592136"/>
+                  </a:lnTo>
+                  <a:lnTo>
+                    <a:pt x="6049626" y="590142"/>
+                  </a:lnTo>
+                  <a:lnTo>
+                    <a:pt x="5979281" y="588046"/>
+                  </a:lnTo>
+                  <a:lnTo>
+                    <a:pt x="5908937" y="585844"/>
+                  </a:lnTo>
+                  <a:lnTo>
+                    <a:pt x="5838592" y="583530"/>
+                  </a:lnTo>
+                  <a:lnTo>
+                    <a:pt x="5768248" y="581098"/>
+                  </a:lnTo>
+                  <a:lnTo>
+                    <a:pt x="5697903" y="578543"/>
+                  </a:lnTo>
+                  <a:lnTo>
+                    <a:pt x="5627559" y="575858"/>
+                  </a:lnTo>
+                  <a:lnTo>
+                    <a:pt x="5557214" y="573036"/>
+                  </a:lnTo>
+                  <a:lnTo>
+                    <a:pt x="5486870" y="570070"/>
+                  </a:lnTo>
+                  <a:lnTo>
+                    <a:pt x="5416525" y="566954"/>
+                  </a:lnTo>
+                  <a:lnTo>
+                    <a:pt x="5346181" y="563680"/>
+                  </a:lnTo>
+                  <a:lnTo>
+                    <a:pt x="5275836" y="560238"/>
+                  </a:lnTo>
+                  <a:lnTo>
+                    <a:pt x="5205492" y="556622"/>
+                  </a:lnTo>
+                  <a:lnTo>
+                    <a:pt x="5135147" y="552822"/>
+                  </a:lnTo>
+                  <a:lnTo>
+                    <a:pt x="5064803" y="548829"/>
+                  </a:lnTo>
+                  <a:lnTo>
+                    <a:pt x="4994458" y="544632"/>
+                  </a:lnTo>
+                  <a:lnTo>
+                    <a:pt x="4924114" y="540222"/>
+                  </a:lnTo>
+                  <a:lnTo>
+                    <a:pt x="4853769" y="535588"/>
+                  </a:lnTo>
+                  <a:lnTo>
+                    <a:pt x="4783425" y="530718"/>
+                  </a:lnTo>
+                  <a:lnTo>
+                    <a:pt x="4713080" y="525601"/>
+                  </a:lnTo>
+                  <a:lnTo>
+                    <a:pt x="4642736" y="520223"/>
+                  </a:lnTo>
+                  <a:lnTo>
+                    <a:pt x="4572391" y="514572"/>
+                  </a:lnTo>
+                  <a:lnTo>
+                    <a:pt x="4502047" y="508633"/>
+                  </a:lnTo>
+                  <a:lnTo>
+                    <a:pt x="4431702" y="502392"/>
+                  </a:lnTo>
+                  <a:lnTo>
+                    <a:pt x="4361358" y="495834"/>
+                  </a:lnTo>
+                  <a:lnTo>
+                    <a:pt x="4291013" y="488943"/>
+                  </a:lnTo>
+                  <a:lnTo>
+                    <a:pt x="4220669" y="481701"/>
+                  </a:lnTo>
+                  <a:lnTo>
+                    <a:pt x="4150324" y="474090"/>
+                  </a:lnTo>
+                  <a:lnTo>
+                    <a:pt x="4079980" y="466093"/>
+                  </a:lnTo>
+                  <a:lnTo>
+                    <a:pt x="4009635" y="457689"/>
+                  </a:lnTo>
+                  <a:lnTo>
+                    <a:pt x="3939291" y="448857"/>
+                  </a:lnTo>
+                  <a:lnTo>
+                    <a:pt x="3868946" y="439576"/>
+                  </a:lnTo>
+                  <a:lnTo>
+                    <a:pt x="3798602" y="429824"/>
+                  </a:lnTo>
+                  <a:lnTo>
+                    <a:pt x="3728257" y="419575"/>
+                  </a:lnTo>
+                  <a:lnTo>
+                    <a:pt x="3657913" y="408805"/>
+                  </a:lnTo>
+                  <a:lnTo>
+                    <a:pt x="3587569" y="397488"/>
+                  </a:lnTo>
+                  <a:lnTo>
+                    <a:pt x="3517224" y="385595"/>
+                  </a:lnTo>
+                  <a:lnTo>
+                    <a:pt x="3446880" y="373097"/>
+                  </a:lnTo>
+                  <a:lnTo>
+                    <a:pt x="3376535" y="359963"/>
+                  </a:lnTo>
+                  <a:lnTo>
+                    <a:pt x="3306191" y="346162"/>
+                  </a:lnTo>
+                  <a:lnTo>
+                    <a:pt x="3235846" y="331896"/>
+                  </a:lnTo>
+                  <a:lnTo>
+                    <a:pt x="3165502" y="327001"/>
+                  </a:lnTo>
+                  <a:lnTo>
+                    <a:pt x="3095157" y="322025"/>
+                  </a:lnTo>
+                  <a:lnTo>
+                    <a:pt x="3024813" y="316969"/>
+                  </a:lnTo>
+                  <a:lnTo>
+                    <a:pt x="2954468" y="311829"/>
+                  </a:lnTo>
+                  <a:lnTo>
+                    <a:pt x="2884124" y="306606"/>
+                  </a:lnTo>
+                  <a:lnTo>
+                    <a:pt x="2813779" y="301297"/>
+                  </a:lnTo>
+                  <a:lnTo>
+                    <a:pt x="2743435" y="295902"/>
+                  </a:lnTo>
+                  <a:lnTo>
+                    <a:pt x="2673090" y="290418"/>
+                  </a:lnTo>
+                  <a:lnTo>
+                    <a:pt x="2602746" y="284845"/>
+                  </a:lnTo>
+                  <a:lnTo>
+                    <a:pt x="2532401" y="279180"/>
+                  </a:lnTo>
+                  <a:lnTo>
+                    <a:pt x="2462057" y="273423"/>
+                  </a:lnTo>
+                  <a:lnTo>
+                    <a:pt x="2391712" y="267572"/>
+                  </a:lnTo>
+                  <a:lnTo>
+                    <a:pt x="2321368" y="261625"/>
+                  </a:lnTo>
+                  <a:lnTo>
+                    <a:pt x="2251023" y="255581"/>
+                  </a:lnTo>
+                  <a:lnTo>
+                    <a:pt x="2180679" y="249439"/>
+                  </a:lnTo>
+                  <a:lnTo>
+                    <a:pt x="2110334" y="243195"/>
+                  </a:lnTo>
+                  <a:lnTo>
+                    <a:pt x="2039990" y="236850"/>
+                  </a:lnTo>
+                  <a:lnTo>
+                    <a:pt x="1969645" y="230401"/>
+                  </a:lnTo>
+                  <a:lnTo>
+                    <a:pt x="1899301" y="223846"/>
+                  </a:lnTo>
+                  <a:lnTo>
+                    <a:pt x="1828956" y="217185"/>
+                  </a:lnTo>
+                  <a:lnTo>
+                    <a:pt x="1758612" y="210414"/>
+                  </a:lnTo>
+                  <a:lnTo>
+                    <a:pt x="1688267" y="203533"/>
+                  </a:lnTo>
+                  <a:lnTo>
+                    <a:pt x="1617923" y="196539"/>
+                  </a:lnTo>
+                  <a:lnTo>
+                    <a:pt x="1547578" y="189431"/>
+                  </a:lnTo>
+                  <a:lnTo>
+                    <a:pt x="1477234" y="182207"/>
+                  </a:lnTo>
+                  <a:lnTo>
+                    <a:pt x="1406889" y="174865"/>
+                  </a:lnTo>
+                  <a:lnTo>
+                    <a:pt x="1336545" y="167403"/>
+                  </a:lnTo>
+                  <a:lnTo>
+                    <a:pt x="1266200" y="159818"/>
+                  </a:lnTo>
+                  <a:lnTo>
+                    <a:pt x="1195856" y="152110"/>
+                  </a:lnTo>
+                  <a:lnTo>
+                    <a:pt x="1125511" y="144276"/>
+                  </a:lnTo>
+                  <a:lnTo>
+                    <a:pt x="1055167" y="136313"/>
+                  </a:lnTo>
+                  <a:lnTo>
+                    <a:pt x="984822" y="128221"/>
+                  </a:lnTo>
+                  <a:lnTo>
+                    <a:pt x="914478" y="119996"/>
+                  </a:lnTo>
+                  <a:lnTo>
+                    <a:pt x="844133" y="111636"/>
+                  </a:lnTo>
+                  <a:lnTo>
+                    <a:pt x="773789" y="103140"/>
+                  </a:lnTo>
+                  <a:lnTo>
+                    <a:pt x="703444" y="94505"/>
+                  </a:lnTo>
+                  <a:lnTo>
+                    <a:pt x="633100" y="85729"/>
+                  </a:lnTo>
+                  <a:lnTo>
+                    <a:pt x="562755" y="76810"/>
+                  </a:lnTo>
+                  <a:lnTo>
+                    <a:pt x="492411" y="67745"/>
+                  </a:lnTo>
+                  <a:lnTo>
+                    <a:pt x="422066" y="58531"/>
+                  </a:lnTo>
+                  <a:lnTo>
+                    <a:pt x="351722" y="49167"/>
+                  </a:lnTo>
+                  <a:lnTo>
+                    <a:pt x="281377" y="39650"/>
+                  </a:lnTo>
+                  <a:lnTo>
+                    <a:pt x="211033" y="29977"/>
+                  </a:lnTo>
+                  <a:lnTo>
+                    <a:pt x="140688" y="20146"/>
+                  </a:lnTo>
+                  <a:lnTo>
+                    <a:pt x="70344" y="10154"/>
+                  </a:lnTo>
+                  <a:lnTo>
+                    <a:pt x="0" y="0"/>
+                  </a:lnTo>
+                </a:path>
+              </a:pathLst>
+            </a:custGeom>
+          </p:spPr>
+          <p:txBody>
+            <a:bodyPr/>
+            <a:lstStyle/>
+            <a:p/>
+          </p:txBody>
+        </p:sp>
+        <p:sp>
+          <p:nvSpPr>
+            <p:cNvPr id="70" name="pl70"/>
+            <p:cNvSpPr/>
+            <p:nvPr/>
+          </p:nvSpPr>
+          <p:spPr>
+            <a:xfrm>
+              <a:off x="1405681" y="4336484"/>
+              <a:ext cx="6793734" cy="1204845"/>
+            </a:xfrm>
+            <a:custGeom>
+              <a:avLst/>
+              <a:pathLst>
+                <a:path w="6793734" h="1204845">
+                  <a:moveTo>
+                    <a:pt x="0" y="0"/>
+                  </a:moveTo>
+                  <a:lnTo>
+                    <a:pt x="40663" y="23854"/>
+                  </a:lnTo>
+                  <a:lnTo>
+                    <a:pt x="111008" y="63783"/>
+                  </a:lnTo>
+                  <a:lnTo>
+                    <a:pt x="181352" y="102420"/>
+                  </a:lnTo>
+                  <a:lnTo>
+                    <a:pt x="251697" y="139805"/>
+                  </a:lnTo>
+                  <a:lnTo>
+                    <a:pt x="322041" y="175981"/>
+                  </a:lnTo>
+                  <a:lnTo>
+                    <a:pt x="392386" y="210985"/>
+                  </a:lnTo>
+                  <a:lnTo>
+                    <a:pt x="462730" y="244856"/>
+                  </a:lnTo>
+                  <a:lnTo>
+                    <a:pt x="533075" y="277630"/>
+                  </a:lnTo>
+                  <a:lnTo>
+                    <a:pt x="603419" y="309344"/>
+                  </a:lnTo>
+                  <a:lnTo>
+                    <a:pt x="673764" y="340030"/>
+                  </a:lnTo>
+                  <a:lnTo>
+                    <a:pt x="744108" y="369724"/>
+                  </a:lnTo>
+                  <a:lnTo>
+                    <a:pt x="814453" y="398455"/>
+                  </a:lnTo>
+                  <a:lnTo>
+                    <a:pt x="884797" y="426257"/>
+                  </a:lnTo>
+                  <a:lnTo>
+                    <a:pt x="955142" y="453159"/>
+                  </a:lnTo>
+                  <a:lnTo>
+                    <a:pt x="1025486" y="479189"/>
+                  </a:lnTo>
+                  <a:lnTo>
+                    <a:pt x="1095831" y="504377"/>
+                  </a:lnTo>
+                  <a:lnTo>
+                    <a:pt x="1166175" y="528750"/>
+                  </a:lnTo>
+                  <a:lnTo>
+                    <a:pt x="1236520" y="552333"/>
+                  </a:lnTo>
+                  <a:lnTo>
+                    <a:pt x="1306864" y="575153"/>
+                  </a:lnTo>
+                  <a:lnTo>
+                    <a:pt x="1377209" y="597234"/>
+                  </a:lnTo>
+                  <a:lnTo>
+                    <a:pt x="1447553" y="618601"/>
+                  </a:lnTo>
+                  <a:lnTo>
+                    <a:pt x="1517898" y="639275"/>
+                  </a:lnTo>
+                  <a:lnTo>
+                    <a:pt x="1588242" y="659280"/>
+                  </a:lnTo>
+                  <a:lnTo>
+                    <a:pt x="1658587" y="678638"/>
+                  </a:lnTo>
+                  <a:lnTo>
+                    <a:pt x="1728931" y="697369"/>
+                  </a:lnTo>
+                  <a:lnTo>
+                    <a:pt x="1799276" y="715493"/>
+                  </a:lnTo>
+                  <a:lnTo>
+                    <a:pt x="1869620" y="733031"/>
+                  </a:lnTo>
+                  <a:lnTo>
+                    <a:pt x="1939965" y="750001"/>
+                  </a:lnTo>
+                  <a:lnTo>
+                    <a:pt x="2010309" y="766421"/>
+                  </a:lnTo>
+                  <a:lnTo>
+                    <a:pt x="2080654" y="782310"/>
+                  </a:lnTo>
+                  <a:lnTo>
+                    <a:pt x="2150998" y="797685"/>
+                  </a:lnTo>
+                  <a:lnTo>
+                    <a:pt x="2221343" y="812561"/>
+                  </a:lnTo>
+                  <a:lnTo>
+                    <a:pt x="2291687" y="826956"/>
+                  </a:lnTo>
+                  <a:lnTo>
+                    <a:pt x="2362032" y="840886"/>
+                  </a:lnTo>
+                  <a:lnTo>
+                    <a:pt x="2432376" y="854364"/>
+                  </a:lnTo>
+                  <a:lnTo>
+                    <a:pt x="2502721" y="867405"/>
+                  </a:lnTo>
+                  <a:lnTo>
+                    <a:pt x="2573065" y="880025"/>
+                  </a:lnTo>
+                  <a:lnTo>
+                    <a:pt x="2643409" y="892236"/>
+                  </a:lnTo>
+                  <a:lnTo>
+                    <a:pt x="2713754" y="904052"/>
+                  </a:lnTo>
+                  <a:lnTo>
+                    <a:pt x="2784098" y="915485"/>
+                  </a:lnTo>
+                  <a:lnTo>
+                    <a:pt x="2854443" y="926548"/>
+                  </a:lnTo>
+                  <a:lnTo>
+                    <a:pt x="2924787" y="937253"/>
+                  </a:lnTo>
+                  <a:lnTo>
+                    <a:pt x="2995132" y="947611"/>
+                  </a:lnTo>
+                  <a:lnTo>
+                    <a:pt x="3065476" y="957634"/>
+                  </a:lnTo>
+                  <a:lnTo>
+                    <a:pt x="3135821" y="967332"/>
+                  </a:lnTo>
+                  <a:lnTo>
+                    <a:pt x="3206165" y="976717"/>
+                  </a:lnTo>
+                  <a:lnTo>
+                    <a:pt x="3276510" y="985797"/>
+                  </a:lnTo>
+                  <a:lnTo>
+                    <a:pt x="3346854" y="994584"/>
+                  </a:lnTo>
+                  <a:lnTo>
+                    <a:pt x="3417199" y="1003086"/>
+                  </a:lnTo>
+                  <a:lnTo>
+                    <a:pt x="3487543" y="1011313"/>
+                  </a:lnTo>
+                  <a:lnTo>
+                    <a:pt x="3557888" y="1019274"/>
+                  </a:lnTo>
+                  <a:lnTo>
+                    <a:pt x="3628232" y="1026977"/>
+                  </a:lnTo>
+                  <a:lnTo>
+                    <a:pt x="3698577" y="1034430"/>
+                  </a:lnTo>
+                  <a:lnTo>
+                    <a:pt x="3768921" y="1041642"/>
+                  </a:lnTo>
+                  <a:lnTo>
+                    <a:pt x="3839266" y="1048621"/>
+                  </a:lnTo>
+                  <a:lnTo>
+                    <a:pt x="3909610" y="1055374"/>
+                  </a:lnTo>
+                  <a:lnTo>
+                    <a:pt x="3979955" y="1061908"/>
+                  </a:lnTo>
+                  <a:lnTo>
+                    <a:pt x="4050299" y="1068230"/>
+                  </a:lnTo>
+                  <a:lnTo>
+                    <a:pt x="4120644" y="1074348"/>
+                  </a:lnTo>
+                  <a:lnTo>
+                    <a:pt x="4190988" y="1080268"/>
+                  </a:lnTo>
+                  <a:lnTo>
+                    <a:pt x="4261333" y="1085996"/>
+                  </a:lnTo>
+                  <a:lnTo>
+                    <a:pt x="4331677" y="1091539"/>
+                  </a:lnTo>
+                  <a:lnTo>
+                    <a:pt x="4402022" y="1096902"/>
+                  </a:lnTo>
+                  <a:lnTo>
+                    <a:pt x="4472366" y="1102092"/>
+                  </a:lnTo>
+                  <a:lnTo>
+                    <a:pt x="4542711" y="1107114"/>
+                  </a:lnTo>
+                  <a:lnTo>
+                    <a:pt x="4613055" y="1111973"/>
+                  </a:lnTo>
+                  <a:lnTo>
+                    <a:pt x="4683400" y="1116674"/>
+                  </a:lnTo>
+                  <a:lnTo>
+                    <a:pt x="4753744" y="1121224"/>
+                  </a:lnTo>
+                  <a:lnTo>
+                    <a:pt x="4824089" y="1125626"/>
+                  </a:lnTo>
+                  <a:lnTo>
+                    <a:pt x="4894433" y="1129886"/>
+                  </a:lnTo>
+                  <a:lnTo>
+                    <a:pt x="4964778" y="1134008"/>
+                  </a:lnTo>
+                  <a:lnTo>
+                    <a:pt x="5035122" y="1137996"/>
+                  </a:lnTo>
+                  <a:lnTo>
+                    <a:pt x="5105467" y="1141855"/>
+                  </a:lnTo>
+                  <a:lnTo>
+                    <a:pt x="5175811" y="1145590"/>
+                  </a:lnTo>
+                  <a:lnTo>
+                    <a:pt x="5246156" y="1149203"/>
+                  </a:lnTo>
+                  <a:lnTo>
+                    <a:pt x="5316500" y="1152700"/>
+                  </a:lnTo>
+                  <a:lnTo>
+                    <a:pt x="5386845" y="1156083"/>
+                  </a:lnTo>
+                  <a:lnTo>
+                    <a:pt x="5457189" y="1159356"/>
+                  </a:lnTo>
+                  <a:lnTo>
+                    <a:pt x="5527534" y="1162524"/>
+                  </a:lnTo>
+                  <a:lnTo>
+                    <a:pt x="5597878" y="1165589"/>
+                  </a:lnTo>
+                  <a:lnTo>
+                    <a:pt x="5668223" y="1168555"/>
+                  </a:lnTo>
+                  <a:lnTo>
+                    <a:pt x="5738567" y="1171425"/>
+                  </a:lnTo>
+                  <a:lnTo>
+                    <a:pt x="5808912" y="1174202"/>
+                  </a:lnTo>
+                  <a:lnTo>
+                    <a:pt x="5879256" y="1176889"/>
+                  </a:lnTo>
+                  <a:lnTo>
+                    <a:pt x="5949601" y="1179489"/>
+                  </a:lnTo>
+                  <a:lnTo>
+                    <a:pt x="6019945" y="1182005"/>
+                  </a:lnTo>
+                  <a:lnTo>
+                    <a:pt x="6090290" y="1184440"/>
+                  </a:lnTo>
+                  <a:lnTo>
+                    <a:pt x="6160634" y="1186795"/>
+                  </a:lnTo>
+                  <a:lnTo>
+                    <a:pt x="6230979" y="1189075"/>
+                  </a:lnTo>
+                  <a:lnTo>
+                    <a:pt x="6301323" y="1191280"/>
+                  </a:lnTo>
+                  <a:lnTo>
+                    <a:pt x="6371667" y="1193415"/>
+                  </a:lnTo>
+                  <a:lnTo>
+                    <a:pt x="6442012" y="1195480"/>
+                  </a:lnTo>
+                  <a:lnTo>
+                    <a:pt x="6512356" y="1197478"/>
+                  </a:lnTo>
+                  <a:lnTo>
+                    <a:pt x="6582701" y="1199411"/>
+                  </a:lnTo>
+                  <a:lnTo>
+                    <a:pt x="6653045" y="1201282"/>
+                  </a:lnTo>
+                  <a:lnTo>
+                    <a:pt x="6723390" y="1203093"/>
+                  </a:lnTo>
+                  <a:lnTo>
+                    <a:pt x="6793734" y="1204845"/>
+                  </a:lnTo>
+                </a:path>
+              </a:pathLst>
+            </a:custGeom>
+            <a:ln w="27101" cap="flat">
+              <a:solidFill>
+                <a:srgbClr val="FF8C00">
+                  <a:alpha val="100000"/>
+                </a:srgbClr>
+              </a:solidFill>
+              <a:prstDash val="solid"/>
+              <a:round/>
+            </a:ln>
+          </p:spPr>
+          <p:txBody>
+            <a:bodyPr/>
+            <a:lstStyle/>
+            <a:p/>
+          </p:txBody>
+        </p:sp>
+        <p:sp>
+          <p:nvSpPr>
+            <p:cNvPr id="71" name="pl71"/>
+            <p:cNvSpPr/>
+            <p:nvPr/>
+          </p:nvSpPr>
+          <p:spPr>
+            <a:xfrm>
+              <a:off x="887106" y="5294352"/>
+              <a:ext cx="7660515" cy="0"/>
+            </a:xfrm>
+            <a:custGeom>
+              <a:avLst/>
+              <a:pathLst>
+                <a:path w="7660515" h="0">
+                  <a:moveTo>
+                    <a:pt x="0" y="0"/>
+                  </a:moveTo>
+                  <a:lnTo>
+                    <a:pt x="7660515" y="0"/>
+                  </a:lnTo>
+                  <a:lnTo>
+                    <a:pt x="7660515" y="0"/>
+                  </a:lnTo>
+                </a:path>
+              </a:pathLst>
+            </a:custGeom>
+            <a:ln w="13550" cap="flat">
+              <a:solidFill>
+                <a:srgbClr val="7F7F7F">
+                  <a:alpha val="100000"/>
+                </a:srgbClr>
+              </a:solidFill>
+              <a:prstDash val="dash"/>
+              <a:round/>
+            </a:ln>
+          </p:spPr>
+          <p:txBody>
+            <a:bodyPr/>
+            <a:lstStyle/>
+            <a:p/>
+          </p:txBody>
+        </p:sp>
+        <p:sp>
+          <p:nvSpPr>
+            <p:cNvPr id="72" name="pl72"/>
+            <p:cNvSpPr/>
+            <p:nvPr/>
+          </p:nvSpPr>
+          <p:spPr>
+            <a:xfrm>
+              <a:off x="4472829" y="4336484"/>
+              <a:ext cx="0" cy="1317069"/>
+            </a:xfrm>
+            <a:custGeom>
+              <a:avLst/>
+              <a:pathLst>
+                <a:path w="0" h="1317069">
+                  <a:moveTo>
+                    <a:pt x="0" y="1317069"/>
+                  </a:moveTo>
+                  <a:lnTo>
+                    <a:pt x="0" y="0"/>
+                  </a:lnTo>
+                  <a:lnTo>
+                    <a:pt x="0" y="0"/>
+                  </a:lnTo>
+                </a:path>
+              </a:pathLst>
+            </a:custGeom>
+            <a:ln w="13550" cap="flat">
+              <a:solidFill>
+                <a:srgbClr val="666666">
+                  <a:alpha val="100000"/>
+                </a:srgbClr>
+              </a:solidFill>
+              <a:prstDash val="dot"/>
+              <a:round/>
+            </a:ln>
+          </p:spPr>
+          <p:txBody>
+            <a:bodyPr/>
+            <a:lstStyle/>
+            <a:p/>
+          </p:txBody>
+        </p:sp>
+        <p:sp>
+          <p:nvSpPr>
+            <p:cNvPr id="73" name="tx73"/>
+            <p:cNvSpPr/>
+            <p:nvPr/>
+          </p:nvSpPr>
+          <p:spPr>
+            <a:xfrm>
+              <a:off x="762297" y="5553636"/>
+              <a:ext cx="62179" cy="80101"/>
+            </a:xfrm>
+            <a:prstGeom prst="rect">
+              <a:avLst/>
+            </a:prstGeom>
+            <a:noFill/>
+          </p:spPr>
+          <p:txBody>
+            <a:bodyPr lIns="0" rIns="0" tIns="0" bIns="0" anchorCtr="1" anchor="ctr" wrap="none"/>
+            <a:lstStyle/>
+            <a:p>
+              <a:pPr algn="l" marL="0" marR="0" indent="0">
+                <a:lnSpc>
+                  <a:spcPts val="880"/>
+                </a:lnSpc>
+                <a:spcBef>
+                  <a:spcPts val="0"/>
+                </a:spcBef>
+                <a:spcAft>
+                  <a:spcPts val="0"/>
+                </a:spcAft>
+              </a:pPr>
+              <a:r>
+                <a:rPr sz="880">
+                  <a:solidFill>
+                    <a:srgbClr val="4D4D4D">
+                      <a:alpha val="100000"/>
+                    </a:srgbClr>
+                  </a:solidFill>
+                  <a:latin typeface="Helvetica"/>
+                  <a:cs typeface="Helvetica"/>
+                </a:rPr>
+                <a:t>0</a:t>
+              </a:r>
+            </a:p>
+          </p:txBody>
+        </p:sp>
+        <p:sp>
+          <p:nvSpPr>
+            <p:cNvPr id="74" name="tx74"/>
+            <p:cNvSpPr/>
+            <p:nvPr/>
+          </p:nvSpPr>
+          <p:spPr>
+            <a:xfrm>
+              <a:off x="762297" y="5254302"/>
+              <a:ext cx="62179" cy="80101"/>
+            </a:xfrm>
+            <a:prstGeom prst="rect">
+              <a:avLst/>
+            </a:prstGeom>
+            <a:noFill/>
+          </p:spPr>
+          <p:txBody>
+            <a:bodyPr lIns="0" rIns="0" tIns="0" bIns="0" anchorCtr="1" anchor="ctr" wrap="none"/>
+            <a:lstStyle/>
+            <a:p>
+              <a:pPr algn="l" marL="0" marR="0" indent="0">
+                <a:lnSpc>
+                  <a:spcPts val="880"/>
+                </a:lnSpc>
+                <a:spcBef>
+                  <a:spcPts val="0"/>
+                </a:spcBef>
+                <a:spcAft>
+                  <a:spcPts val="0"/>
+                </a:spcAft>
+              </a:pPr>
+              <a:r>
+                <a:rPr sz="880">
+                  <a:solidFill>
+                    <a:srgbClr val="4D4D4D">
+                      <a:alpha val="100000"/>
+                    </a:srgbClr>
+                  </a:solidFill>
+                  <a:latin typeface="Helvetica"/>
+                  <a:cs typeface="Helvetica"/>
+                </a:rPr>
+                <a:t>1</a:t>
+              </a:r>
+            </a:p>
+          </p:txBody>
+        </p:sp>
+        <p:sp>
+          <p:nvSpPr>
+            <p:cNvPr id="75" name="tx75"/>
+            <p:cNvSpPr/>
+            <p:nvPr/>
+          </p:nvSpPr>
+          <p:spPr>
+            <a:xfrm>
+              <a:off x="762297" y="4954968"/>
+              <a:ext cx="62179" cy="80101"/>
+            </a:xfrm>
+            <a:prstGeom prst="rect">
+              <a:avLst/>
+            </a:prstGeom>
+            <a:noFill/>
+          </p:spPr>
+          <p:txBody>
+            <a:bodyPr lIns="0" rIns="0" tIns="0" bIns="0" anchorCtr="1" anchor="ctr" wrap="none"/>
+            <a:lstStyle/>
+            <a:p>
+              <a:pPr algn="l" marL="0" marR="0" indent="0">
+                <a:lnSpc>
+                  <a:spcPts val="880"/>
+                </a:lnSpc>
+                <a:spcBef>
+                  <a:spcPts val="0"/>
+                </a:spcBef>
+                <a:spcAft>
+                  <a:spcPts val="0"/>
+                </a:spcAft>
+              </a:pPr>
+              <a:r>
+                <a:rPr sz="880">
+                  <a:solidFill>
+                    <a:srgbClr val="4D4D4D">
+                      <a:alpha val="100000"/>
+                    </a:srgbClr>
+                  </a:solidFill>
+                  <a:latin typeface="Helvetica"/>
+                  <a:cs typeface="Helvetica"/>
+                </a:rPr>
+                <a:t>2</a:t>
+              </a:r>
+            </a:p>
+          </p:txBody>
+        </p:sp>
+        <p:sp>
+          <p:nvSpPr>
+            <p:cNvPr id="76" name="tx76"/>
+            <p:cNvSpPr/>
+            <p:nvPr/>
+          </p:nvSpPr>
+          <p:spPr>
+            <a:xfrm>
+              <a:off x="762297" y="4655634"/>
+              <a:ext cx="62179" cy="80101"/>
+            </a:xfrm>
+            <a:prstGeom prst="rect">
+              <a:avLst/>
+            </a:prstGeom>
+            <a:noFill/>
+          </p:spPr>
+          <p:txBody>
+            <a:bodyPr lIns="0" rIns="0" tIns="0" bIns="0" anchorCtr="1" anchor="ctr" wrap="none"/>
+            <a:lstStyle/>
+            <a:p>
+              <a:pPr algn="l" marL="0" marR="0" indent="0">
+                <a:lnSpc>
+                  <a:spcPts val="880"/>
+                </a:lnSpc>
+                <a:spcBef>
+                  <a:spcPts val="0"/>
+                </a:spcBef>
+                <a:spcAft>
+                  <a:spcPts val="0"/>
+                </a:spcAft>
+              </a:pPr>
+              <a:r>
+                <a:rPr sz="880">
+                  <a:solidFill>
+                    <a:srgbClr val="4D4D4D">
+                      <a:alpha val="100000"/>
+                    </a:srgbClr>
+                  </a:solidFill>
+                  <a:latin typeface="Helvetica"/>
+                  <a:cs typeface="Helvetica"/>
+                </a:rPr>
+                <a:t>3</a:t>
+              </a:r>
+            </a:p>
+          </p:txBody>
+        </p:sp>
+        <p:sp>
+          <p:nvSpPr>
+            <p:cNvPr id="77" name="tx77"/>
+            <p:cNvSpPr/>
+            <p:nvPr/>
+          </p:nvSpPr>
+          <p:spPr>
+            <a:xfrm>
+              <a:off x="762297" y="4356300"/>
+              <a:ext cx="62179" cy="80101"/>
+            </a:xfrm>
+            <a:prstGeom prst="rect">
+              <a:avLst/>
+            </a:prstGeom>
+            <a:noFill/>
+          </p:spPr>
+          <p:txBody>
+            <a:bodyPr lIns="0" rIns="0" tIns="0" bIns="0" anchorCtr="1" anchor="ctr" wrap="none"/>
+            <a:lstStyle/>
+            <a:p>
+              <a:pPr algn="l" marL="0" marR="0" indent="0">
+                <a:lnSpc>
+                  <a:spcPts val="880"/>
+                </a:lnSpc>
+                <a:spcBef>
+                  <a:spcPts val="0"/>
+                </a:spcBef>
+                <a:spcAft>
+                  <a:spcPts val="0"/>
+                </a:spcAft>
+              </a:pPr>
+              <a:r>
+                <a:rPr sz="880">
+                  <a:solidFill>
+                    <a:srgbClr val="4D4D4D">
+                      <a:alpha val="100000"/>
+                    </a:srgbClr>
+                  </a:solidFill>
+                  <a:latin typeface="Helvetica"/>
+                  <a:cs typeface="Helvetica"/>
+                </a:rPr>
+                <a:t>4</a:t>
+              </a:r>
+            </a:p>
+          </p:txBody>
+        </p:sp>
+        <p:sp>
+          <p:nvSpPr>
+            <p:cNvPr id="78" name="tx78"/>
+            <p:cNvSpPr/>
+            <p:nvPr/>
+          </p:nvSpPr>
+          <p:spPr>
+            <a:xfrm>
+              <a:off x="1306098" y="5716183"/>
+              <a:ext cx="161574" cy="80101"/>
+            </a:xfrm>
+            <a:prstGeom prst="rect">
+              <a:avLst/>
+            </a:prstGeom>
+            <a:noFill/>
+          </p:spPr>
+          <p:txBody>
+            <a:bodyPr lIns="0" rIns="0" tIns="0" bIns="0" anchorCtr="1" anchor="ctr" wrap="none"/>
+            <a:lstStyle/>
+            <a:p>
+              <a:pPr algn="l" marL="0" marR="0" indent="0">
+                <a:lnSpc>
+                  <a:spcPts val="880"/>
+                </a:lnSpc>
+                <a:spcBef>
+                  <a:spcPts val="0"/>
+                </a:spcBef>
+                <a:spcAft>
+                  <a:spcPts val="0"/>
+                </a:spcAft>
+              </a:pPr>
+              <a:r>
+                <a:rPr sz="880">
+                  <a:solidFill>
+                    <a:srgbClr val="4D4D4D">
+                      <a:alpha val="100000"/>
+                    </a:srgbClr>
+                  </a:solidFill>
+                  <a:latin typeface="Helvetica"/>
+                  <a:cs typeface="Helvetica"/>
+                </a:rPr>
+                <a:t>-40</a:t>
+              </a:r>
+            </a:p>
+          </p:txBody>
+        </p:sp>
+        <p:sp>
+          <p:nvSpPr>
+            <p:cNvPr id="79" name="tx79"/>
+            <p:cNvSpPr/>
+            <p:nvPr/>
+          </p:nvSpPr>
+          <p:spPr>
+            <a:xfrm>
+              <a:off x="2113264" y="5716183"/>
+              <a:ext cx="161574" cy="80101"/>
+            </a:xfrm>
+            <a:prstGeom prst="rect">
+              <a:avLst/>
+            </a:prstGeom>
+            <a:noFill/>
+          </p:spPr>
+          <p:txBody>
+            <a:bodyPr lIns="0" rIns="0" tIns="0" bIns="0" anchorCtr="1" anchor="ctr" wrap="none"/>
+            <a:lstStyle/>
+            <a:p>
+              <a:pPr algn="l" marL="0" marR="0" indent="0">
+                <a:lnSpc>
+                  <a:spcPts val="880"/>
+                </a:lnSpc>
+                <a:spcBef>
+                  <a:spcPts val="0"/>
+                </a:spcBef>
+                <a:spcAft>
+                  <a:spcPts val="0"/>
+                </a:spcAft>
+              </a:pPr>
+              <a:r>
+                <a:rPr sz="880">
+                  <a:solidFill>
+                    <a:srgbClr val="4D4D4D">
+                      <a:alpha val="100000"/>
+                    </a:srgbClr>
+                  </a:solidFill>
+                  <a:latin typeface="Helvetica"/>
+                  <a:cs typeface="Helvetica"/>
+                </a:rPr>
+                <a:t>-30</a:t>
+              </a:r>
+            </a:p>
+          </p:txBody>
+        </p:sp>
+        <p:sp>
+          <p:nvSpPr>
+            <p:cNvPr id="80" name="tx80"/>
+            <p:cNvSpPr/>
+            <p:nvPr/>
+          </p:nvSpPr>
+          <p:spPr>
+            <a:xfrm>
+              <a:off x="2920429" y="5716183"/>
+              <a:ext cx="161574" cy="80101"/>
+            </a:xfrm>
+            <a:prstGeom prst="rect">
+              <a:avLst/>
+            </a:prstGeom>
+            <a:noFill/>
+          </p:spPr>
+          <p:txBody>
+            <a:bodyPr lIns="0" rIns="0" tIns="0" bIns="0" anchorCtr="1" anchor="ctr" wrap="none"/>
+            <a:lstStyle/>
+            <a:p>
+              <a:pPr algn="l" marL="0" marR="0" indent="0">
+                <a:lnSpc>
+                  <a:spcPts val="880"/>
+                </a:lnSpc>
+                <a:spcBef>
+                  <a:spcPts val="0"/>
+                </a:spcBef>
+                <a:spcAft>
+                  <a:spcPts val="0"/>
+                </a:spcAft>
+              </a:pPr>
+              <a:r>
+                <a:rPr sz="880">
+                  <a:solidFill>
+                    <a:srgbClr val="4D4D4D">
+                      <a:alpha val="100000"/>
+                    </a:srgbClr>
+                  </a:solidFill>
+                  <a:latin typeface="Helvetica"/>
+                  <a:cs typeface="Helvetica"/>
+                </a:rPr>
+                <a:t>-20</a:t>
+              </a:r>
+            </a:p>
+          </p:txBody>
+        </p:sp>
+        <p:sp>
+          <p:nvSpPr>
+            <p:cNvPr id="81" name="tx81"/>
+            <p:cNvSpPr/>
+            <p:nvPr/>
+          </p:nvSpPr>
+          <p:spPr>
+            <a:xfrm>
+              <a:off x="3727595" y="5716183"/>
+              <a:ext cx="161574" cy="80101"/>
+            </a:xfrm>
+            <a:prstGeom prst="rect">
+              <a:avLst/>
+            </a:prstGeom>
+            <a:noFill/>
+          </p:spPr>
+          <p:txBody>
+            <a:bodyPr lIns="0" rIns="0" tIns="0" bIns="0" anchorCtr="1" anchor="ctr" wrap="none"/>
+            <a:lstStyle/>
+            <a:p>
+              <a:pPr algn="l" marL="0" marR="0" indent="0">
+                <a:lnSpc>
+                  <a:spcPts val="880"/>
+                </a:lnSpc>
+                <a:spcBef>
+                  <a:spcPts val="0"/>
+                </a:spcBef>
+                <a:spcAft>
+                  <a:spcPts val="0"/>
+                </a:spcAft>
+              </a:pPr>
+              <a:r>
+                <a:rPr sz="880">
+                  <a:solidFill>
+                    <a:srgbClr val="4D4D4D">
+                      <a:alpha val="100000"/>
+                    </a:srgbClr>
+                  </a:solidFill>
+                  <a:latin typeface="Helvetica"/>
+                  <a:cs typeface="Helvetica"/>
+                </a:rPr>
+                <a:t>-10</a:t>
+              </a:r>
+            </a:p>
+          </p:txBody>
+        </p:sp>
+        <p:sp>
+          <p:nvSpPr>
+            <p:cNvPr id="82" name="tx82"/>
+            <p:cNvSpPr/>
+            <p:nvPr/>
+          </p:nvSpPr>
+          <p:spPr>
+            <a:xfrm>
+              <a:off x="4584458" y="5716183"/>
+              <a:ext cx="62179" cy="80101"/>
+            </a:xfrm>
+            <a:prstGeom prst="rect">
+              <a:avLst/>
+            </a:prstGeom>
+            <a:noFill/>
+          </p:spPr>
+          <p:txBody>
+            <a:bodyPr lIns="0" rIns="0" tIns="0" bIns="0" anchorCtr="1" anchor="ctr" wrap="none"/>
+            <a:lstStyle/>
+            <a:p>
+              <a:pPr algn="l" marL="0" marR="0" indent="0">
+                <a:lnSpc>
+                  <a:spcPts val="880"/>
+                </a:lnSpc>
+                <a:spcBef>
+                  <a:spcPts val="0"/>
+                </a:spcBef>
+                <a:spcAft>
+                  <a:spcPts val="0"/>
+                </a:spcAft>
+              </a:pPr>
+              <a:r>
+                <a:rPr sz="880">
+                  <a:solidFill>
+                    <a:srgbClr val="4D4D4D">
+                      <a:alpha val="100000"/>
+                    </a:srgbClr>
+                  </a:solidFill>
+                  <a:latin typeface="Helvetica"/>
+                  <a:cs typeface="Helvetica"/>
+                </a:rPr>
+                <a:t>0</a:t>
+              </a:r>
+            </a:p>
+          </p:txBody>
+        </p:sp>
+        <p:sp>
+          <p:nvSpPr>
+            <p:cNvPr id="83" name="tx83"/>
+            <p:cNvSpPr/>
+            <p:nvPr/>
+          </p:nvSpPr>
+          <p:spPr>
+            <a:xfrm>
+              <a:off x="5360534" y="5716183"/>
+              <a:ext cx="124358" cy="80101"/>
+            </a:xfrm>
+            <a:prstGeom prst="rect">
+              <a:avLst/>
+            </a:prstGeom>
+            <a:noFill/>
+          </p:spPr>
+          <p:txBody>
+            <a:bodyPr lIns="0" rIns="0" tIns="0" bIns="0" anchorCtr="1" anchor="ctr" wrap="none"/>
+            <a:lstStyle/>
+            <a:p>
+              <a:pPr algn="l" marL="0" marR="0" indent="0">
+                <a:lnSpc>
+                  <a:spcPts val="880"/>
+                </a:lnSpc>
+                <a:spcBef>
+                  <a:spcPts val="0"/>
+                </a:spcBef>
+                <a:spcAft>
+                  <a:spcPts val="0"/>
+                </a:spcAft>
+              </a:pPr>
+              <a:r>
+                <a:rPr sz="880">
+                  <a:solidFill>
+                    <a:srgbClr val="4D4D4D">
+                      <a:alpha val="100000"/>
+                    </a:srgbClr>
+                  </a:solidFill>
+                  <a:latin typeface="Helvetica"/>
+                  <a:cs typeface="Helvetica"/>
+                </a:rPr>
+                <a:t>10</a:t>
+              </a:r>
+            </a:p>
+          </p:txBody>
+        </p:sp>
+        <p:sp>
+          <p:nvSpPr>
+            <p:cNvPr id="84" name="tx84"/>
+            <p:cNvSpPr/>
+            <p:nvPr/>
+          </p:nvSpPr>
+          <p:spPr>
+            <a:xfrm>
+              <a:off x="6167699" y="5716183"/>
+              <a:ext cx="124358" cy="80101"/>
+            </a:xfrm>
+            <a:prstGeom prst="rect">
+              <a:avLst/>
+            </a:prstGeom>
+            <a:noFill/>
+          </p:spPr>
+          <p:txBody>
+            <a:bodyPr lIns="0" rIns="0" tIns="0" bIns="0" anchorCtr="1" anchor="ctr" wrap="none"/>
+            <a:lstStyle/>
+            <a:p>
+              <a:pPr algn="l" marL="0" marR="0" indent="0">
+                <a:lnSpc>
+                  <a:spcPts val="880"/>
+                </a:lnSpc>
+                <a:spcBef>
+                  <a:spcPts val="0"/>
+                </a:spcBef>
+                <a:spcAft>
+                  <a:spcPts val="0"/>
+                </a:spcAft>
+              </a:pPr>
+              <a:r>
+                <a:rPr sz="880">
+                  <a:solidFill>
+                    <a:srgbClr val="4D4D4D">
+                      <a:alpha val="100000"/>
+                    </a:srgbClr>
+                  </a:solidFill>
+                  <a:latin typeface="Helvetica"/>
+                  <a:cs typeface="Helvetica"/>
+                </a:rPr>
+                <a:t>20</a:t>
+              </a:r>
+            </a:p>
+          </p:txBody>
+        </p:sp>
+        <p:sp>
+          <p:nvSpPr>
+            <p:cNvPr id="85" name="tx85"/>
+            <p:cNvSpPr/>
+            <p:nvPr/>
+          </p:nvSpPr>
+          <p:spPr>
+            <a:xfrm>
+              <a:off x="6974865" y="5716183"/>
+              <a:ext cx="124358" cy="80101"/>
+            </a:xfrm>
+            <a:prstGeom prst="rect">
+              <a:avLst/>
+            </a:prstGeom>
+            <a:noFill/>
+          </p:spPr>
+          <p:txBody>
+            <a:bodyPr lIns="0" rIns="0" tIns="0" bIns="0" anchorCtr="1" anchor="ctr" wrap="none"/>
+            <a:lstStyle/>
+            <a:p>
+              <a:pPr algn="l" marL="0" marR="0" indent="0">
+                <a:lnSpc>
+                  <a:spcPts val="880"/>
+                </a:lnSpc>
+                <a:spcBef>
+                  <a:spcPts val="0"/>
+                </a:spcBef>
+                <a:spcAft>
+                  <a:spcPts val="0"/>
+                </a:spcAft>
+              </a:pPr>
+              <a:r>
+                <a:rPr sz="880">
+                  <a:solidFill>
+                    <a:srgbClr val="4D4D4D">
+                      <a:alpha val="100000"/>
+                    </a:srgbClr>
+                  </a:solidFill>
+                  <a:latin typeface="Helvetica"/>
+                  <a:cs typeface="Helvetica"/>
+                </a:rPr>
+                <a:t>30</a:t>
+              </a:r>
+            </a:p>
+          </p:txBody>
+        </p:sp>
+        <p:sp>
+          <p:nvSpPr>
+            <p:cNvPr id="86" name="tx86"/>
+            <p:cNvSpPr/>
+            <p:nvPr/>
+          </p:nvSpPr>
+          <p:spPr>
+            <a:xfrm>
+              <a:off x="7782030" y="5716183"/>
+              <a:ext cx="124358" cy="80101"/>
+            </a:xfrm>
+            <a:prstGeom prst="rect">
+              <a:avLst/>
+            </a:prstGeom>
+            <a:noFill/>
+          </p:spPr>
+          <p:txBody>
+            <a:bodyPr lIns="0" rIns="0" tIns="0" bIns="0" anchorCtr="1" anchor="ctr" wrap="none"/>
+            <a:lstStyle/>
+            <a:p>
+              <a:pPr algn="l" marL="0" marR="0" indent="0">
+                <a:lnSpc>
+                  <a:spcPts val="880"/>
+                </a:lnSpc>
+                <a:spcBef>
+                  <a:spcPts val="0"/>
+                </a:spcBef>
+                <a:spcAft>
+                  <a:spcPts val="0"/>
+                </a:spcAft>
+              </a:pPr>
+              <a:r>
+                <a:rPr sz="880">
+                  <a:solidFill>
+                    <a:srgbClr val="4D4D4D">
+                      <a:alpha val="100000"/>
+                    </a:srgbClr>
+                  </a:solidFill>
+                  <a:latin typeface="Helvetica"/>
+                  <a:cs typeface="Helvetica"/>
+                </a:rPr>
+                <a:t>40</a:t>
+              </a:r>
+            </a:p>
+          </p:txBody>
+        </p:sp>
+        <p:sp>
+          <p:nvSpPr>
+            <p:cNvPr id="87" name="tx87"/>
+            <p:cNvSpPr/>
+            <p:nvPr/>
+          </p:nvSpPr>
+          <p:spPr>
+            <a:xfrm>
+              <a:off x="2928340" y="5855859"/>
+              <a:ext cx="3578047" cy="100218"/>
+            </a:xfrm>
+            <a:prstGeom prst="rect">
+              <a:avLst/>
+            </a:prstGeom>
+            <a:noFill/>
+          </p:spPr>
+          <p:txBody>
+            <a:bodyPr lIns="0" rIns="0" tIns="0" bIns="0" anchorCtr="1" anchor="ctr" wrap="none"/>
+            <a:lstStyle/>
+            <a:p>
+              <a:pPr algn="l" marL="0" marR="0" indent="0">
+                <a:lnSpc>
+                  <a:spcPts val="1100"/>
+                </a:lnSpc>
+                <a:spcBef>
+                  <a:spcPts val="0"/>
+                </a:spcBef>
+                <a:spcAft>
+                  <a:spcPts val="0"/>
+                </a:spcAft>
+              </a:pPr>
+              <a:r>
+                <a:rPr sz="1100">
+                  <a:solidFill>
+                    <a:srgbClr val="000000">
+                      <a:alpha val="100000"/>
+                    </a:srgbClr>
+                  </a:solidFill>
+                  <a:latin typeface="Helvetica"/>
+                  <a:cs typeface="Helvetica"/>
+                </a:rPr>
+                <a:t>eGFR difference (%): 100 × (CKD-EPI Cr-Cys − CG) / CG</a:t>
+              </a:r>
+            </a:p>
+          </p:txBody>
+        </p:sp>
+        <p:sp>
+          <p:nvSpPr>
+            <p:cNvPr id="88" name="tx88"/>
+            <p:cNvSpPr/>
+            <p:nvPr/>
+          </p:nvSpPr>
+          <p:spPr>
+            <a:xfrm rot="-5400000">
+              <a:off x="138035" y="4944909"/>
+              <a:ext cx="1016904" cy="100218"/>
+            </a:xfrm>
+            <a:prstGeom prst="rect">
+              <a:avLst/>
+            </a:prstGeom>
+            <a:noFill/>
+          </p:spPr>
+          <p:txBody>
+            <a:bodyPr lIns="0" rIns="0" tIns="0" bIns="0" anchorCtr="1" anchor="ctr" wrap="none"/>
+            <a:lstStyle/>
+            <a:p>
+              <a:pPr algn="l" marL="0" marR="0" indent="0">
+                <a:lnSpc>
+                  <a:spcPts val="1100"/>
+                </a:lnSpc>
+                <a:spcBef>
+                  <a:spcPts val="0"/>
+                </a:spcBef>
+                <a:spcAft>
+                  <a:spcPts val="0"/>
+                </a:spcAft>
+              </a:pPr>
+              <a:r>
+                <a:rPr sz="1100">
+                  <a:solidFill>
+                    <a:srgbClr val="000000">
+                      <a:alpha val="100000"/>
+                    </a:srgbClr>
+                  </a:solidFill>
+                  <a:latin typeface="Helvetica"/>
+                  <a:cs typeface="Helvetica"/>
+                </a:rPr>
+                <a:t>subHR (95% CI)</a:t>
+              </a:r>
+            </a:p>
+          </p:txBody>
+        </p:sp>
+        <p:sp>
+          <p:nvSpPr>
+            <p:cNvPr id="89" name="tx89"/>
+            <p:cNvSpPr/>
+            <p:nvPr/>
+          </p:nvSpPr>
+          <p:spPr>
+            <a:xfrm>
+              <a:off x="887106" y="4159544"/>
+              <a:ext cx="7052127" cy="82021"/>
+            </a:xfrm>
+            <a:prstGeom prst="rect">
+              <a:avLst/>
+            </a:prstGeom>
+            <a:noFill/>
+          </p:spPr>
+          <p:txBody>
+            <a:bodyPr lIns="0" rIns="0" tIns="0" bIns="0" anchorCtr="1" anchor="ctr" wrap="none"/>
+            <a:lstStyle/>
+            <a:p>
+              <a:pPr algn="l" marL="0" marR="0" indent="0">
+                <a:lnSpc>
+                  <a:spcPts val="900"/>
+                </a:lnSpc>
+                <a:spcBef>
+                  <a:spcPts val="0"/>
+                </a:spcBef>
+                <a:spcAft>
+                  <a:spcPts val="0"/>
+                </a:spcAft>
+              </a:pPr>
+              <a:r>
+                <a:rPr sz="900">
+                  <a:solidFill>
+                    <a:srgbClr val="404040">
+                      <a:alpha val="100000"/>
+                    </a:srgbClr>
+                  </a:solidFill>
+                  <a:latin typeface="Helvetica"/>
+                  <a:cs typeface="Helvetica"/>
+                </a:rPr>
+                <a:t>subHR per 10 % decline: 1.46 (1.20-1.77), p_Bonf = &lt;0.001 (n = 6)  |  per IQR decline (Δ = 29.5 %): 3.05 (1.73-5.37)  |  IQR: [-15.6, 13.9] %</a:t>
+              </a:r>
+            </a:p>
+          </p:txBody>
+        </p:sp>
+        <p:sp>
+          <p:nvSpPr>
+            <p:cNvPr id="90" name="tx90"/>
+            <p:cNvSpPr/>
+            <p:nvPr/>
+          </p:nvSpPr>
+          <p:spPr>
+            <a:xfrm>
+              <a:off x="887106" y="3932770"/>
               <a:ext cx="4114342" cy="120152"/>
             </a:xfrm>
             <a:prstGeom prst="rect">
